--- a/docs/manual/2026_KOHOM뉴스룸_사용자매뉴얼_설명자료.pptx
+++ b/docs/manual/2026_KOHOM뉴스룸_사용자매뉴얼_설명자료.pptx
@@ -128,20 +128,20 @@
   <p:extLst>
     <p:ext uri="{521415D9-36F7-43E2-AB2F-B90AF26B5E84}">
       <p14:sectionLst xmlns:p14="http://schemas.microsoft.com/office/powerpoint/2010/main">
-        <p14:section name="표지·목차" id="{8f9f07ce-d4cb-f01a-1ba2-525a2ad9854b}">
+        <p14:section name="표지·목차" id="{a27a1a7e-2f09-283f-f802-bbc314ff0517}">
           <p14:sldIdLst>
             <p14:sldId id="256"/>
             <p14:sldId id="257"/>
           </p14:sldIdLst>
         </p14:section>
-        <p14:section name="01 시작하기" id="{0c072b8c-4215-3093-c6d6-fd88fab1c224}">
+        <p14:section name="01 시작하기" id="{3e470b56-2459-3300-645c-08d7203aa1e0}">
           <p14:sldIdLst>
             <p14:sldId id="258"/>
             <p14:sldId id="259"/>
             <p14:sldId id="260"/>
           </p14:sldIdLst>
         </p14:section>
-        <p14:section name="02 베이직" id="{a0a4e2db-b7ba-a40d-8cf6-9f915092bba0}">
+        <p14:section name="02 베이직" id="{bc84fb11-ddb1-369e-0cc2-c619af820f82}">
           <p14:sldIdLst>
             <p14:sldId id="261"/>
             <p14:sldId id="262"/>
@@ -150,7 +150,7 @@
             <p14:sldId id="265"/>
           </p14:sldIdLst>
         </p14:section>
-        <p14:section name="03 프로" id="{80fc6db6-ee92-f3d0-92cd-91d4b1312434}">
+        <p14:section name="03 프로" id="{c63a8642-14ab-0701-47af-63caf5e6980e}">
           <p14:sldIdLst>
             <p14:sldId id="266"/>
             <p14:sldId id="267"/>
@@ -159,20 +159,20 @@
             <p14:sldId id="270"/>
           </p14:sldIdLst>
         </p14:section>
-        <p14:section name="04 선정 규칙" id="{2b996317-7cc0-4469-9751-edce23e40b72}">
+        <p14:section name="04 선정 규칙" id="{8e9cc227-0659-c91f-23f1-340a0a6b8d75}">
           <p14:sldIdLst>
             <p14:sldId id="271"/>
             <p14:sldId id="272"/>
             <p14:sldId id="273"/>
           </p14:sldIdLst>
         </p14:section>
-        <p14:section name="05 설정" id="{73e9904b-eb59-6011-7c7e-1d95392b6236}">
+        <p14:section name="05 설정" id="{fb2d560a-ed30-7fad-0067-9d35fe651573}">
           <p14:sldIdLst>
             <p14:sldId id="274"/>
             <p14:sldId id="275"/>
           </p14:sldIdLst>
         </p14:section>
-        <p14:section name="06 문제 해결" id="{312c2dc7-5bf1-0056-620f-07d0b846d520}">
+        <p14:section name="06 문제 해결" id="{34732ea0-56a5-f511-6d11-b307466aadcc}">
           <p14:sldIdLst>
             <p14:sldId id="276"/>
             <p14:sldId id="277"/>
@@ -2857,9 +2857,9 @@
                 <a:solidFill>
                   <a:srgbClr val="C9D6E3"/>
                 </a:solidFill>
-                <a:latin typeface="S-Core Dream 5 Medium" pitchFamily="34" charset="0"/>
-                <a:ea typeface="S-Core Dream 5 Medium" pitchFamily="34" charset="-127"/>
-                <a:cs typeface="S-Core Dream 5 Medium" pitchFamily="34" charset="-120"/>
+                <a:latin typeface="Pretendard SemiBold" pitchFamily="34" charset="0"/>
+                <a:ea typeface="Pretendard SemiBold" pitchFamily="34" charset="-127"/>
+                <a:cs typeface="Pretendard SemiBold" pitchFamily="34" charset="-120"/>
               </a:rPr>
               <a:t>언론보도 모니터링 앱</a:t>
             </a:r>
@@ -2892,13 +2892,13 @@
               <a:buNone/>
             </a:pPr>
             <a:r>
-              <a:rPr lang="ko-KR" altLang="en-US" sz="4400" dirty="0">
+              <a:rPr lang="ko-KR" altLang="en-US" sz="4400" b="1" dirty="0">
                 <a:solidFill>
                   <a:srgbClr val="FFFFFF"/>
                 </a:solidFill>
-                <a:latin typeface="S-Core Dream 7 ExtraBold" pitchFamily="34" charset="0"/>
-                <a:ea typeface="S-Core Dream 7 ExtraBold" pitchFamily="34" charset="-127"/>
-                <a:cs typeface="S-Core Dream 7 ExtraBold" pitchFamily="34" charset="-120"/>
+                <a:latin typeface="Pretendard" pitchFamily="34" charset="0"/>
+                <a:ea typeface="Pretendard" pitchFamily="34" charset="-127"/>
+                <a:cs typeface="Pretendard" pitchFamily="34" charset="-120"/>
               </a:rPr>
               <a:t>KOHOM 뉴스룸 사용자 매뉴얼</a:t>
             </a:r>
@@ -2935,9 +2935,9 @@
                 <a:solidFill>
                   <a:srgbClr val="DCE5EE"/>
                 </a:solidFill>
-                <a:latin typeface="S-Core Dream 4 Regular" pitchFamily="34" charset="0"/>
-                <a:ea typeface="S-Core Dream 4 Regular" pitchFamily="34" charset="-127"/>
-                <a:cs typeface="S-Core Dream 4 Regular" pitchFamily="34" charset="-120"/>
+                <a:latin typeface="Pretendard" pitchFamily="34" charset="0"/>
+                <a:ea typeface="Pretendard" pitchFamily="34" charset="-127"/>
+                <a:cs typeface="Pretendard" pitchFamily="34" charset="-120"/>
               </a:rPr>
               <a:t>설치부터 매일 보고, AI 선별, 선정 규칙 환류까지</a:t>
             </a:r>
@@ -2974,9 +2974,9 @@
                 <a:solidFill>
                   <a:srgbClr val="C9D6E3"/>
                 </a:solidFill>
-                <a:latin typeface="S-Core Dream 4 Regular" pitchFamily="34" charset="0"/>
-                <a:ea typeface="S-Core Dream 4 Regular" pitchFamily="34" charset="-127"/>
-                <a:cs typeface="S-Core Dream 4 Regular" pitchFamily="34" charset="-120"/>
+                <a:latin typeface="Pretendard" pitchFamily="34" charset="0"/>
+                <a:ea typeface="Pretendard" pitchFamily="34" charset="-127"/>
+                <a:cs typeface="Pretendard" pitchFamily="34" charset="-120"/>
               </a:rPr>
               <a:t>2026. 10. 26. · 앱 v1.0.8 기준 · 주택관리공단 전략과</a:t>
             </a:r>
@@ -3013,9 +3013,9 @@
                 <a:solidFill>
                   <a:srgbClr val="AFC0D1"/>
                 </a:solidFill>
-                <a:latin typeface="S-Core Dream 4 Regular" pitchFamily="34" charset="0"/>
-                <a:ea typeface="S-Core Dream 4 Regular" pitchFamily="34" charset="-127"/>
-                <a:cs typeface="S-Core Dream 4 Regular" pitchFamily="34" charset="-120"/>
+                <a:latin typeface="Pretendard" pitchFamily="34" charset="0"/>
+                <a:ea typeface="Pretendard" pitchFamily="34" charset="-127"/>
+                <a:cs typeface="Pretendard" pitchFamily="34" charset="-120"/>
               </a:rPr>
               <a:t>※ 화면은 설명을 위한 시연 기사로 촬영했습니다. 실제 화면의 기사·건수는 다를 수 있으며, 수치·문구는 앱 화면이 우선합니다</a:t>
             </a:r>
@@ -3100,13 +3100,13 @@
               <a:buNone/>
             </a:pPr>
             <a:r>
-              <a:rPr lang="ko-KR" altLang="en-US" sz="2000" dirty="0">
+              <a:rPr lang="ko-KR" altLang="en-US" sz="2000" b="1" dirty="0">
                 <a:solidFill>
                   <a:srgbClr val="FFFFFF"/>
                 </a:solidFill>
-                <a:latin typeface="S-Core Dream 7 ExtraBold" pitchFamily="34" charset="0"/>
-                <a:ea typeface="S-Core Dream 7 ExtraBold" pitchFamily="34" charset="-127"/>
-                <a:cs typeface="S-Core Dream 7 ExtraBold" pitchFamily="34" charset="-120"/>
+                <a:latin typeface="Pretendard" pitchFamily="34" charset="0"/>
+                <a:ea typeface="Pretendard" pitchFamily="34" charset="-127"/>
+                <a:cs typeface="Pretendard" pitchFamily="34" charset="-120"/>
               </a:rPr>
               <a:t>02</a:t>
             </a:r>
@@ -3143,9 +3143,9 @@
                 <a:solidFill>
                   <a:srgbClr val="2E7D8C"/>
                 </a:solidFill>
-                <a:latin typeface="S-Core Dream 5 Medium" pitchFamily="34" charset="0"/>
-                <a:ea typeface="S-Core Dream 5 Medium" pitchFamily="34" charset="-127"/>
-                <a:cs typeface="S-Core Dream 5 Medium" pitchFamily="34" charset="-120"/>
+                <a:latin typeface="Pretendard SemiBold" pitchFamily="34" charset="0"/>
+                <a:ea typeface="Pretendard SemiBold" pitchFamily="34" charset="-127"/>
+                <a:cs typeface="Pretendard SemiBold" pitchFamily="34" charset="-120"/>
               </a:rPr>
               <a:t>베이직 · ④ 기록</a:t>
             </a:r>
@@ -3178,13 +3178,13 @@
               <a:buNone/>
             </a:pPr>
             <a:r>
-              <a:rPr lang="ko-KR" altLang="en-US" sz="2600" dirty="0">
+              <a:rPr lang="ko-KR" altLang="en-US" sz="2600" b="1" dirty="0">
                 <a:solidFill>
                   <a:srgbClr val="1F3B5C"/>
                 </a:solidFill>
-                <a:latin typeface="S-Core Dream 7 ExtraBold" pitchFamily="34" charset="0"/>
-                <a:ea typeface="S-Core Dream 7 ExtraBold" pitchFamily="34" charset="-127"/>
-                <a:cs typeface="S-Core Dream 7 ExtraBold" pitchFamily="34" charset="-120"/>
+                <a:latin typeface="Pretendard" pitchFamily="34" charset="0"/>
+                <a:ea typeface="Pretendard" pitchFamily="34" charset="-127"/>
+                <a:cs typeface="Pretendard" pitchFamily="34" charset="-120"/>
               </a:rPr>
               <a:t>④ 보고 완료로 기록 · 보고 기록 탭</a:t>
             </a:r>
@@ -3221,9 +3221,9 @@
                 <a:solidFill>
                   <a:srgbClr val="667385"/>
                 </a:solidFill>
-                <a:latin typeface="S-Core Dream 4 Regular" pitchFamily="34" charset="0"/>
-                <a:ea typeface="S-Core Dream 4 Regular" pitchFamily="34" charset="-127"/>
-                <a:cs typeface="S-Core Dream 4 Regular" pitchFamily="34" charset="-120"/>
+                <a:latin typeface="Pretendard" pitchFamily="34" charset="0"/>
+                <a:ea typeface="Pretendard" pitchFamily="34" charset="-127"/>
+                <a:cs typeface="Pretendard" pitchFamily="34" charset="-120"/>
               </a:rPr>
               <a:t>보낸 기사는 날짜별로 3년 보관되고, 다음 조회에서 자동으로 빠집니다</a:t>
             </a:r>
@@ -3324,13 +3324,13 @@
               <a:buNone/>
             </a:pPr>
             <a:r>
-              <a:rPr lang="ko-KR" altLang="en-US" sz="1700" dirty="0">
+              <a:rPr lang="ko-KR" altLang="en-US" sz="1700" b="1" dirty="0">
                 <a:solidFill>
                   <a:srgbClr val="E8A33D"/>
                 </a:solidFill>
-                <a:latin typeface="S-Core Dream 7 ExtraBold" pitchFamily="34" charset="0"/>
-                <a:ea typeface="S-Core Dream 7 ExtraBold" pitchFamily="34" charset="-127"/>
-                <a:cs typeface="S-Core Dream 7 ExtraBold" pitchFamily="34" charset="-120"/>
+                <a:latin typeface="Pretendard" pitchFamily="34" charset="0"/>
+                <a:ea typeface="Pretendard" pitchFamily="34" charset="-127"/>
+                <a:cs typeface="Pretendard" pitchFamily="34" charset="-120"/>
               </a:rPr>
               <a:t>①</a:t>
             </a:r>
@@ -3385,13 +3385,13 @@
               <a:buNone/>
             </a:pPr>
             <a:r>
-              <a:rPr lang="ko-KR" altLang="en-US" sz="1700" dirty="0">
+              <a:rPr lang="ko-KR" altLang="en-US" sz="1700" b="1" dirty="0">
                 <a:solidFill>
                   <a:srgbClr val="E8A33D"/>
                 </a:solidFill>
-                <a:latin typeface="S-Core Dream 7 ExtraBold" pitchFamily="34" charset="0"/>
-                <a:ea typeface="S-Core Dream 7 ExtraBold" pitchFamily="34" charset="-127"/>
-                <a:cs typeface="S-Core Dream 7 ExtraBold" pitchFamily="34" charset="-120"/>
+                <a:latin typeface="Pretendard" pitchFamily="34" charset="0"/>
+                <a:ea typeface="Pretendard" pitchFamily="34" charset="-127"/>
+                <a:cs typeface="Pretendard" pitchFamily="34" charset="-120"/>
               </a:rPr>
               <a:t>②</a:t>
             </a:r>
@@ -3446,13 +3446,13 @@
               <a:buNone/>
             </a:pPr>
             <a:r>
-              <a:rPr lang="ko-KR" altLang="en-US" sz="1700" dirty="0">
+              <a:rPr lang="ko-KR" altLang="en-US" sz="1700" b="1" dirty="0">
                 <a:solidFill>
                   <a:srgbClr val="E8A33D"/>
                 </a:solidFill>
-                <a:latin typeface="S-Core Dream 7 ExtraBold" pitchFamily="34" charset="0"/>
-                <a:ea typeface="S-Core Dream 7 ExtraBold" pitchFamily="34" charset="-127"/>
-                <a:cs typeface="S-Core Dream 7 ExtraBold" pitchFamily="34" charset="-120"/>
+                <a:latin typeface="Pretendard" pitchFamily="34" charset="0"/>
+                <a:ea typeface="Pretendard" pitchFamily="34" charset="-127"/>
+                <a:cs typeface="Pretendard" pitchFamily="34" charset="-120"/>
               </a:rPr>
               <a:t>③</a:t>
             </a:r>
@@ -3507,13 +3507,13 @@
               <a:buNone/>
             </a:pPr>
             <a:r>
-              <a:rPr lang="ko-KR" altLang="en-US" sz="1700" dirty="0">
+              <a:rPr lang="ko-KR" altLang="en-US" sz="1700" b="1" dirty="0">
                 <a:solidFill>
                   <a:srgbClr val="E8A33D"/>
                 </a:solidFill>
-                <a:latin typeface="S-Core Dream 7 ExtraBold" pitchFamily="34" charset="0"/>
-                <a:ea typeface="S-Core Dream 7 ExtraBold" pitchFamily="34" charset="-127"/>
-                <a:cs typeface="S-Core Dream 7 ExtraBold" pitchFamily="34" charset="-120"/>
+                <a:latin typeface="Pretendard" pitchFamily="34" charset="0"/>
+                <a:ea typeface="Pretendard" pitchFamily="34" charset="-127"/>
+                <a:cs typeface="Pretendard" pitchFamily="34" charset="-120"/>
               </a:rPr>
               <a:t>④</a:t>
             </a:r>
@@ -3568,13 +3568,13 @@
               <a:buNone/>
             </a:pPr>
             <a:r>
-              <a:rPr lang="ko-KR" altLang="en-US" sz="1700" dirty="0">
+              <a:rPr lang="ko-KR" altLang="en-US" sz="1700" b="1" dirty="0">
                 <a:solidFill>
                   <a:srgbClr val="E8A33D"/>
                 </a:solidFill>
-                <a:latin typeface="S-Core Dream 7 ExtraBold" pitchFamily="34" charset="0"/>
-                <a:ea typeface="S-Core Dream 7 ExtraBold" pitchFamily="34" charset="-127"/>
-                <a:cs typeface="S-Core Dream 7 ExtraBold" pitchFamily="34" charset="-120"/>
+                <a:latin typeface="Pretendard" pitchFamily="34" charset="0"/>
+                <a:ea typeface="Pretendard" pitchFamily="34" charset="-127"/>
+                <a:cs typeface="Pretendard" pitchFamily="34" charset="-120"/>
               </a:rPr>
               <a:t>⑤</a:t>
             </a:r>
@@ -3611,9 +3611,9 @@
                 <a:solidFill>
                   <a:srgbClr val="1F3B5C"/>
                 </a:solidFill>
-                <a:latin typeface="S-Core Dream 5 Medium" pitchFamily="34" charset="0"/>
-                <a:ea typeface="S-Core Dream 5 Medium" pitchFamily="34" charset="-127"/>
-                <a:cs typeface="S-Core Dream 5 Medium" pitchFamily="34" charset="-120"/>
+                <a:latin typeface="Pretendard SemiBold" pitchFamily="34" charset="0"/>
+                <a:ea typeface="Pretendard SemiBold" pitchFamily="34" charset="-127"/>
+                <a:cs typeface="Pretendard SemiBold" pitchFamily="34" charset="-120"/>
               </a:rPr>
               <a:t>① 보고일 목록</a:t>
             </a:r>
@@ -3631,9 +3631,9 @@
                 <a:solidFill>
                   <a:srgbClr val="1E2A36"/>
                 </a:solidFill>
-                <a:latin typeface="S-Core Dream 4 Regular" pitchFamily="34" charset="0"/>
-                <a:ea typeface="S-Core Dream 4 Regular" pitchFamily="34" charset="-127"/>
-                <a:cs typeface="S-Core Dream 4 Regular" pitchFamily="34" charset="-120"/>
+                <a:latin typeface="Pretendard" pitchFamily="34" charset="0"/>
+                <a:ea typeface="Pretendard" pitchFamily="34" charset="-127"/>
+                <a:cs typeface="Pretendard" pitchFamily="34" charset="-120"/>
               </a:rPr>
               <a:t>날짜를 누르면 그날 보낸 기사</a:t>
             </a:r>
@@ -3651,9 +3651,9 @@
                 <a:solidFill>
                   <a:srgbClr val="1F3B5C"/>
                 </a:solidFill>
-                <a:latin typeface="S-Core Dream 5 Medium" pitchFamily="34" charset="0"/>
-                <a:ea typeface="S-Core Dream 5 Medium" pitchFamily="34" charset="-127"/>
-                <a:cs typeface="S-Core Dream 5 Medium" pitchFamily="34" charset="-120"/>
+                <a:latin typeface="Pretendard SemiBold" pitchFamily="34" charset="0"/>
+                <a:ea typeface="Pretendard SemiBold" pitchFamily="34" charset="-127"/>
+                <a:cs typeface="Pretendard SemiBold" pitchFamily="34" charset="-120"/>
               </a:rPr>
               <a:t>② 기사 목록</a:t>
             </a:r>
@@ -3671,9 +3671,9 @@
                 <a:solidFill>
                   <a:srgbClr val="1E2A36"/>
                 </a:solidFill>
-                <a:latin typeface="S-Core Dream 4 Regular" pitchFamily="34" charset="0"/>
-                <a:ea typeface="S-Core Dream 4 Regular" pitchFamily="34" charset="-127"/>
-                <a:cs typeface="S-Core Dream 4 Regular" pitchFamily="34" charset="-120"/>
+                <a:latin typeface="Pretendard" pitchFamily="34" charset="0"/>
+                <a:ea typeface="Pretendard" pitchFamily="34" charset="-127"/>
+                <a:cs typeface="Pretendard" pitchFamily="34" charset="-120"/>
               </a:rPr>
               <a:t>더블클릭하면 원문이 열립니다</a:t>
             </a:r>
@@ -3691,9 +3691,9 @@
                 <a:solidFill>
                   <a:srgbClr val="1F3B5C"/>
                 </a:solidFill>
-                <a:latin typeface="S-Core Dream 5 Medium" pitchFamily="34" charset="0"/>
-                <a:ea typeface="S-Core Dream 5 Medium" pitchFamily="34" charset="-127"/>
-                <a:cs typeface="S-Core Dream 5 Medium" pitchFamily="34" charset="-120"/>
+                <a:latin typeface="Pretendard SemiBold" pitchFamily="34" charset="0"/>
+                <a:ea typeface="Pretendard SemiBold" pitchFamily="34" charset="-127"/>
+                <a:cs typeface="Pretendard SemiBold" pitchFamily="34" charset="-120"/>
               </a:rPr>
               <a:t>③ 보고서 다시 열기</a:t>
             </a:r>
@@ -3711,9 +3711,9 @@
                 <a:solidFill>
                   <a:srgbClr val="1E2A36"/>
                 </a:solidFill>
-                <a:latin typeface="S-Core Dream 4 Regular" pitchFamily="34" charset="0"/>
-                <a:ea typeface="S-Core Dream 4 Regular" pitchFamily="34" charset="-127"/>
-                <a:cs typeface="S-Core Dream 4 Regular" pitchFamily="34" charset="-120"/>
+                <a:latin typeface="Pretendard" pitchFamily="34" charset="0"/>
+                <a:ea typeface="Pretendard" pitchFamily="34" charset="-127"/>
+                <a:cs typeface="Pretendard" pitchFamily="34" charset="-120"/>
               </a:rPr>
               <a:t>그날 메일 본문을 다시 복사</a:t>
             </a:r>
@@ -3731,9 +3731,9 @@
                 <a:solidFill>
                   <a:srgbClr val="1F3B5C"/>
                 </a:solidFill>
-                <a:latin typeface="S-Core Dream 5 Medium" pitchFamily="34" charset="0"/>
-                <a:ea typeface="S-Core Dream 5 Medium" pitchFamily="34" charset="-127"/>
-                <a:cs typeface="S-Core Dream 5 Medium" pitchFamily="34" charset="-120"/>
+                <a:latin typeface="Pretendard SemiBold" pitchFamily="34" charset="0"/>
+                <a:ea typeface="Pretendard SemiBold" pitchFamily="34" charset="-127"/>
+                <a:cs typeface="Pretendard SemiBold" pitchFamily="34" charset="-120"/>
               </a:rPr>
               <a:t>④ 기록 취소</a:t>
             </a:r>
@@ -3751,9 +3751,9 @@
                 <a:solidFill>
                   <a:srgbClr val="1E2A36"/>
                 </a:solidFill>
-                <a:latin typeface="S-Core Dream 4 Regular" pitchFamily="34" charset="0"/>
-                <a:ea typeface="S-Core Dream 4 Regular" pitchFamily="34" charset="-127"/>
-                <a:cs typeface="S-Core Dream 4 Regular" pitchFamily="34" charset="-120"/>
+                <a:latin typeface="Pretendard" pitchFamily="34" charset="0"/>
+                <a:ea typeface="Pretendard" pitchFamily="34" charset="-127"/>
+                <a:cs typeface="Pretendard" pitchFamily="34" charset="-120"/>
               </a:rPr>
               <a:t>잘못 기록한 기사 → 다음 조회에 다시 나옴</a:t>
             </a:r>
@@ -3771,9 +3771,9 @@
                 <a:solidFill>
                   <a:srgbClr val="1F3B5C"/>
                 </a:solidFill>
-                <a:latin typeface="S-Core Dream 5 Medium" pitchFamily="34" charset="0"/>
-                <a:ea typeface="S-Core Dream 5 Medium" pitchFamily="34" charset="-127"/>
-                <a:cs typeface="S-Core Dream 5 Medium" pitchFamily="34" charset="-120"/>
+                <a:latin typeface="Pretendard SemiBold" pitchFamily="34" charset="0"/>
+                <a:ea typeface="Pretendard SemiBold" pitchFamily="34" charset="-127"/>
+                <a:cs typeface="Pretendard SemiBold" pitchFamily="34" charset="-120"/>
               </a:rPr>
               <a:t>⑤ 지난 보고 메일 불러오기</a:t>
             </a:r>
@@ -3791,9 +3791,9 @@
                 <a:solidFill>
                   <a:srgbClr val="1E2A36"/>
                 </a:solidFill>
-                <a:latin typeface="S-Core Dream 4 Regular" pitchFamily="34" charset="0"/>
-                <a:ea typeface="S-Core Dream 4 Regular" pitchFamily="34" charset="-127"/>
-                <a:cs typeface="S-Core Dream 4 Regular" pitchFamily="34" charset="-120"/>
+                <a:latin typeface="Pretendard" pitchFamily="34" charset="0"/>
+                <a:ea typeface="Pretendard" pitchFamily="34" charset="-127"/>
+                <a:cs typeface="Pretendard" pitchFamily="34" charset="-120"/>
               </a:rPr>
               <a:t>그룹웨어에서 저장한 메일(HTML·EML)을 기록으로</a:t>
             </a:r>
@@ -3878,13 +3878,13 @@
               <a:buNone/>
             </a:pPr>
             <a:r>
-              <a:rPr lang="ko-KR" altLang="en-US" sz="2000" dirty="0">
+              <a:rPr lang="ko-KR" altLang="en-US" sz="2000" b="1" dirty="0">
                 <a:solidFill>
                   <a:srgbClr val="FFFFFF"/>
                 </a:solidFill>
-                <a:latin typeface="S-Core Dream 7 ExtraBold" pitchFamily="34" charset="0"/>
-                <a:ea typeface="S-Core Dream 7 ExtraBold" pitchFamily="34" charset="-127"/>
-                <a:cs typeface="S-Core Dream 7 ExtraBold" pitchFamily="34" charset="-120"/>
+                <a:latin typeface="Pretendard" pitchFamily="34" charset="0"/>
+                <a:ea typeface="Pretendard" pitchFamily="34" charset="-127"/>
+                <a:cs typeface="Pretendard" pitchFamily="34" charset="-120"/>
               </a:rPr>
               <a:t>03</a:t>
             </a:r>
@@ -3921,9 +3921,9 @@
                 <a:solidFill>
                   <a:srgbClr val="2E7D8C"/>
                 </a:solidFill>
-                <a:latin typeface="S-Core Dream 5 Medium" pitchFamily="34" charset="0"/>
-                <a:ea typeface="S-Core Dream 5 Medium" pitchFamily="34" charset="-127"/>
-                <a:cs typeface="S-Core Dream 5 Medium" pitchFamily="34" charset="-120"/>
+                <a:latin typeface="Pretendard SemiBold" pitchFamily="34" charset="0"/>
+                <a:ea typeface="Pretendard SemiBold" pitchFamily="34" charset="-127"/>
+                <a:cs typeface="Pretendard SemiBold" pitchFamily="34" charset="-120"/>
               </a:rPr>
               <a:t>프로 · 화면</a:t>
             </a:r>
@@ -3956,13 +3956,13 @@
               <a:buNone/>
             </a:pPr>
             <a:r>
-              <a:rPr lang="ko-KR" altLang="en-US" sz="2600" dirty="0">
+              <a:rPr lang="ko-KR" altLang="en-US" sz="2600" b="1" dirty="0">
                 <a:solidFill>
                   <a:srgbClr val="1F3B5C"/>
                 </a:solidFill>
-                <a:latin typeface="S-Core Dream 7 ExtraBold" pitchFamily="34" charset="0"/>
-                <a:ea typeface="S-Core Dream 7 ExtraBold" pitchFamily="34" charset="-127"/>
-                <a:cs typeface="S-Core Dream 7 ExtraBold" pitchFamily="34" charset="-120"/>
+                <a:latin typeface="Pretendard" pitchFamily="34" charset="0"/>
+                <a:ea typeface="Pretendard" pitchFamily="34" charset="-127"/>
+                <a:cs typeface="Pretendard" pitchFamily="34" charset="-120"/>
               </a:rPr>
               <a:t>프로 탭: 후보 전체를 보고 직접 고르기</a:t>
             </a:r>
@@ -3999,9 +3999,9 @@
                 <a:solidFill>
                   <a:srgbClr val="667385"/>
                 </a:solidFill>
-                <a:latin typeface="S-Core Dream 4 Regular" pitchFamily="34" charset="0"/>
-                <a:ea typeface="S-Core Dream 4 Regular" pitchFamily="34" charset="-127"/>
-                <a:cs typeface="S-Core Dream 4 Regular" pitchFamily="34" charset="-120"/>
+                <a:latin typeface="Pretendard" pitchFamily="34" charset="0"/>
+                <a:ea typeface="Pretendard" pitchFamily="34" charset="-127"/>
+                <a:cs typeface="Pretendard" pitchFamily="34" charset="-120"/>
               </a:rPr>
               <a:t>언론보도 담당자용. 등급·점수·분류를 보고 고르며, AI 선별을 함께 쓸 수 있습니다</a:t>
             </a:r>
@@ -4102,13 +4102,13 @@
               <a:buNone/>
             </a:pPr>
             <a:r>
-              <a:rPr lang="ko-KR" altLang="en-US" sz="1700" dirty="0">
+              <a:rPr lang="ko-KR" altLang="en-US" sz="1700" b="1" dirty="0">
                 <a:solidFill>
                   <a:srgbClr val="E8A33D"/>
                 </a:solidFill>
-                <a:latin typeface="S-Core Dream 7 ExtraBold" pitchFamily="34" charset="0"/>
-                <a:ea typeface="S-Core Dream 7 ExtraBold" pitchFamily="34" charset="-127"/>
-                <a:cs typeface="S-Core Dream 7 ExtraBold" pitchFamily="34" charset="-120"/>
+                <a:latin typeface="Pretendard" pitchFamily="34" charset="0"/>
+                <a:ea typeface="Pretendard" pitchFamily="34" charset="-127"/>
+                <a:cs typeface="Pretendard" pitchFamily="34" charset="-120"/>
               </a:rPr>
               <a:t>①</a:t>
             </a:r>
@@ -4163,13 +4163,13 @@
               <a:buNone/>
             </a:pPr>
             <a:r>
-              <a:rPr lang="ko-KR" altLang="en-US" sz="1700" dirty="0">
+              <a:rPr lang="ko-KR" altLang="en-US" sz="1700" b="1" dirty="0">
                 <a:solidFill>
                   <a:srgbClr val="E8A33D"/>
                 </a:solidFill>
-                <a:latin typeface="S-Core Dream 7 ExtraBold" pitchFamily="34" charset="0"/>
-                <a:ea typeface="S-Core Dream 7 ExtraBold" pitchFamily="34" charset="-127"/>
-                <a:cs typeface="S-Core Dream 7 ExtraBold" pitchFamily="34" charset="-120"/>
+                <a:latin typeface="Pretendard" pitchFamily="34" charset="0"/>
+                <a:ea typeface="Pretendard" pitchFamily="34" charset="-127"/>
+                <a:cs typeface="Pretendard" pitchFamily="34" charset="-120"/>
               </a:rPr>
               <a:t>②</a:t>
             </a:r>
@@ -4224,13 +4224,13 @@
               <a:buNone/>
             </a:pPr>
             <a:r>
-              <a:rPr lang="ko-KR" altLang="en-US" sz="1700" dirty="0">
+              <a:rPr lang="ko-KR" altLang="en-US" sz="1700" b="1" dirty="0">
                 <a:solidFill>
                   <a:srgbClr val="E8A33D"/>
                 </a:solidFill>
-                <a:latin typeface="S-Core Dream 7 ExtraBold" pitchFamily="34" charset="0"/>
-                <a:ea typeface="S-Core Dream 7 ExtraBold" pitchFamily="34" charset="-127"/>
-                <a:cs typeface="S-Core Dream 7 ExtraBold" pitchFamily="34" charset="-120"/>
+                <a:latin typeface="Pretendard" pitchFamily="34" charset="0"/>
+                <a:ea typeface="Pretendard" pitchFamily="34" charset="-127"/>
+                <a:cs typeface="Pretendard" pitchFamily="34" charset="-120"/>
               </a:rPr>
               <a:t>③</a:t>
             </a:r>
@@ -4285,13 +4285,13 @@
               <a:buNone/>
             </a:pPr>
             <a:r>
-              <a:rPr lang="ko-KR" altLang="en-US" sz="1700" dirty="0">
+              <a:rPr lang="ko-KR" altLang="en-US" sz="1700" b="1" dirty="0">
                 <a:solidFill>
                   <a:srgbClr val="E8A33D"/>
                 </a:solidFill>
-                <a:latin typeface="S-Core Dream 7 ExtraBold" pitchFamily="34" charset="0"/>
-                <a:ea typeface="S-Core Dream 7 ExtraBold" pitchFamily="34" charset="-127"/>
-                <a:cs typeface="S-Core Dream 7 ExtraBold" pitchFamily="34" charset="-120"/>
+                <a:latin typeface="Pretendard" pitchFamily="34" charset="0"/>
+                <a:ea typeface="Pretendard" pitchFamily="34" charset="-127"/>
+                <a:cs typeface="Pretendard" pitchFamily="34" charset="-120"/>
               </a:rPr>
               <a:t>④</a:t>
             </a:r>
@@ -4346,13 +4346,13 @@
               <a:buNone/>
             </a:pPr>
             <a:r>
-              <a:rPr lang="ko-KR" altLang="en-US" sz="1700" dirty="0">
+              <a:rPr lang="ko-KR" altLang="en-US" sz="1700" b="1" dirty="0">
                 <a:solidFill>
                   <a:srgbClr val="E8A33D"/>
                 </a:solidFill>
-                <a:latin typeface="S-Core Dream 7 ExtraBold" pitchFamily="34" charset="0"/>
-                <a:ea typeface="S-Core Dream 7 ExtraBold" pitchFamily="34" charset="-127"/>
-                <a:cs typeface="S-Core Dream 7 ExtraBold" pitchFamily="34" charset="-120"/>
+                <a:latin typeface="Pretendard" pitchFamily="34" charset="0"/>
+                <a:ea typeface="Pretendard" pitchFamily="34" charset="-127"/>
+                <a:cs typeface="Pretendard" pitchFamily="34" charset="-120"/>
               </a:rPr>
               <a:t>⑤</a:t>
             </a:r>
@@ -4407,13 +4407,13 @@
               <a:buNone/>
             </a:pPr>
             <a:r>
-              <a:rPr lang="ko-KR" altLang="en-US" sz="1700" dirty="0">
+              <a:rPr lang="ko-KR" altLang="en-US" sz="1700" b="1" dirty="0">
                 <a:solidFill>
                   <a:srgbClr val="E8A33D"/>
                 </a:solidFill>
-                <a:latin typeface="S-Core Dream 7 ExtraBold" pitchFamily="34" charset="0"/>
-                <a:ea typeface="S-Core Dream 7 ExtraBold" pitchFamily="34" charset="-127"/>
-                <a:cs typeface="S-Core Dream 7 ExtraBold" pitchFamily="34" charset="-120"/>
+                <a:latin typeface="Pretendard" pitchFamily="34" charset="0"/>
+                <a:ea typeface="Pretendard" pitchFamily="34" charset="-127"/>
+                <a:cs typeface="Pretendard" pitchFamily="34" charset="-120"/>
               </a:rPr>
               <a:t>⑥</a:t>
             </a:r>
@@ -4450,9 +4450,9 @@
                 <a:solidFill>
                   <a:srgbClr val="1F3B5C"/>
                 </a:solidFill>
-                <a:latin typeface="S-Core Dream 5 Medium" pitchFamily="34" charset="0"/>
-                <a:ea typeface="S-Core Dream 5 Medium" pitchFamily="34" charset="-127"/>
-                <a:cs typeface="S-Core Dream 5 Medium" pitchFamily="34" charset="-120"/>
+                <a:latin typeface="Pretendard SemiBold" pitchFamily="34" charset="0"/>
+                <a:ea typeface="Pretendard SemiBold" pitchFamily="34" charset="-127"/>
+                <a:cs typeface="Pretendard SemiBold" pitchFamily="34" charset="-120"/>
               </a:rPr>
               <a:t>① 조회 조건</a:t>
             </a:r>
@@ -4470,9 +4470,9 @@
                 <a:solidFill>
                   <a:srgbClr val="1E2A36"/>
                 </a:solidFill>
-                <a:latin typeface="S-Core Dream 4 Regular" pitchFamily="34" charset="0"/>
-                <a:ea typeface="S-Core Dream 4 Regular" pitchFamily="34" charset="-127"/>
-                <a:cs typeface="S-Core Dream 4 Regular" pitchFamily="34" charset="-120"/>
+                <a:latin typeface="Pretendard" pitchFamily="34" charset="0"/>
+                <a:ea typeface="Pretendard" pitchFamily="34" charset="-127"/>
+                <a:cs typeface="Pretendard" pitchFamily="34" charset="-120"/>
               </a:rPr>
               <a:t>이미 보고한 기사 제외·같은 사안 묶기·단순 행사 제외</a:t>
             </a:r>
@@ -4490,9 +4490,9 @@
                 <a:solidFill>
                   <a:srgbClr val="1F3B5C"/>
                 </a:solidFill>
-                <a:latin typeface="S-Core Dream 5 Medium" pitchFamily="34" charset="0"/>
-                <a:ea typeface="S-Core Dream 5 Medium" pitchFamily="34" charset="-127"/>
-                <a:cs typeface="S-Core Dream 5 Medium" pitchFamily="34" charset="-120"/>
+                <a:latin typeface="Pretendard SemiBold" pitchFamily="34" charset="0"/>
+                <a:ea typeface="Pretendard SemiBold" pitchFamily="34" charset="-127"/>
+                <a:cs typeface="Pretendard SemiBold" pitchFamily="34" charset="-120"/>
               </a:rPr>
               <a:t>② 키워드 요약</a:t>
             </a:r>
@@ -4510,9 +4510,9 @@
                 <a:solidFill>
                   <a:srgbClr val="1E2A36"/>
                 </a:solidFill>
-                <a:latin typeface="S-Core Dream 4 Regular" pitchFamily="34" charset="0"/>
-                <a:ea typeface="S-Core Dream 4 Regular" pitchFamily="34" charset="-127"/>
-                <a:cs typeface="S-Core Dream 4 Regular" pitchFamily="34" charset="-120"/>
+                <a:latin typeface="Pretendard" pitchFamily="34" charset="0"/>
+                <a:ea typeface="Pretendard" pitchFamily="34" charset="-127"/>
+                <a:cs typeface="Pretendard" pitchFamily="34" charset="-120"/>
               </a:rPr>
               <a:t>고치려면 [선정 규칙에서 고치기 ›]</a:t>
             </a:r>
@@ -4530,9 +4530,9 @@
                 <a:solidFill>
                   <a:srgbClr val="1F3B5C"/>
                 </a:solidFill>
-                <a:latin typeface="S-Core Dream 5 Medium" pitchFamily="34" charset="0"/>
-                <a:ea typeface="S-Core Dream 5 Medium" pitchFamily="34" charset="-127"/>
-                <a:cs typeface="S-Core Dream 5 Medium" pitchFamily="34" charset="-120"/>
+                <a:latin typeface="Pretendard SemiBold" pitchFamily="34" charset="0"/>
+                <a:ea typeface="Pretendard SemiBold" pitchFamily="34" charset="-127"/>
+                <a:cs typeface="Pretendard SemiBold" pitchFamily="34" charset="-120"/>
               </a:rPr>
               <a:t>③ 선택 도구</a:t>
             </a:r>
@@ -4550,9 +4550,9 @@
                 <a:solidFill>
                   <a:srgbClr val="1E2A36"/>
                 </a:solidFill>
-                <a:latin typeface="S-Core Dream 4 Regular" pitchFamily="34" charset="0"/>
-                <a:ea typeface="S-Core Dream 4 Regular" pitchFamily="34" charset="-127"/>
-                <a:cs typeface="S-Core Dream 4 Regular" pitchFamily="34" charset="-120"/>
+                <a:latin typeface="Pretendard" pitchFamily="34" charset="0"/>
+                <a:ea typeface="Pretendard" pitchFamily="34" charset="-127"/>
+                <a:cs typeface="Pretendard" pitchFamily="34" charset="-120"/>
               </a:rPr>
               <a:t>전체·★추천만·키워드별로 선택</a:t>
             </a:r>
@@ -4570,9 +4570,9 @@
                 <a:solidFill>
                   <a:srgbClr val="1F3B5C"/>
                 </a:solidFill>
-                <a:latin typeface="S-Core Dream 5 Medium" pitchFamily="34" charset="0"/>
-                <a:ea typeface="S-Core Dream 5 Medium" pitchFamily="34" charset="-127"/>
-                <a:cs typeface="S-Core Dream 5 Medium" pitchFamily="34" charset="-120"/>
+                <a:latin typeface="Pretendard SemiBold" pitchFamily="34" charset="0"/>
+                <a:ea typeface="Pretendard SemiBold" pitchFamily="34" charset="-127"/>
+                <a:cs typeface="Pretendard SemiBold" pitchFamily="34" charset="-120"/>
               </a:rPr>
               <a:t>④ 순서</a:t>
             </a:r>
@@ -4590,9 +4590,9 @@
                 <a:solidFill>
                   <a:srgbClr val="1E2A36"/>
                 </a:solidFill>
-                <a:latin typeface="S-Core Dream 4 Regular" pitchFamily="34" charset="0"/>
-                <a:ea typeface="S-Core Dream 4 Regular" pitchFamily="34" charset="-127"/>
-                <a:cs typeface="S-Core Dream 4 Regular" pitchFamily="34" charset="-120"/>
+                <a:latin typeface="Pretendard" pitchFamily="34" charset="0"/>
+                <a:ea typeface="Pretendard" pitchFamily="34" charset="-127"/>
+                <a:cs typeface="Pretendard" pitchFamily="34" charset="-120"/>
               </a:rPr>
               <a:t>선택 항목 맨 위로, ▲▼, 끌어 놓기</a:t>
             </a:r>
@@ -4610,9 +4610,9 @@
                 <a:solidFill>
                   <a:srgbClr val="1F3B5C"/>
                 </a:solidFill>
-                <a:latin typeface="S-Core Dream 5 Medium" pitchFamily="34" charset="0"/>
-                <a:ea typeface="S-Core Dream 5 Medium" pitchFamily="34" charset="-127"/>
-                <a:cs typeface="S-Core Dream 5 Medium" pitchFamily="34" charset="-120"/>
+                <a:latin typeface="Pretendard SemiBold" pitchFamily="34" charset="0"/>
+                <a:ea typeface="Pretendard SemiBold" pitchFamily="34" charset="-127"/>
+                <a:cs typeface="Pretendard SemiBold" pitchFamily="34" charset="-120"/>
               </a:rPr>
               <a:t>⑤ 등급·점수·분류</a:t>
             </a:r>
@@ -4630,9 +4630,9 @@
                 <a:solidFill>
                   <a:srgbClr val="1E2A36"/>
                 </a:solidFill>
-                <a:latin typeface="S-Core Dream 4 Regular" pitchFamily="34" charset="0"/>
-                <a:ea typeface="S-Core Dream 4 Regular" pitchFamily="34" charset="-127"/>
-                <a:cs typeface="S-Core Dream 4 Regular" pitchFamily="34" charset="-120"/>
+                <a:latin typeface="Pretendard" pitchFamily="34" charset="0"/>
+                <a:ea typeface="Pretendard" pitchFamily="34" charset="-127"/>
+                <a:cs typeface="Pretendard" pitchFamily="34" charset="-120"/>
               </a:rPr>
               <a:t>머리글을 누르면 그 열로 정렬</a:t>
             </a:r>
@@ -4650,9 +4650,9 @@
                 <a:solidFill>
                   <a:srgbClr val="1F3B5C"/>
                 </a:solidFill>
-                <a:latin typeface="S-Core Dream 5 Medium" pitchFamily="34" charset="0"/>
-                <a:ea typeface="S-Core Dream 5 Medium" pitchFamily="34" charset="-127"/>
-                <a:cs typeface="S-Core Dream 5 Medium" pitchFamily="34" charset="-120"/>
+                <a:latin typeface="Pretendard SemiBold" pitchFamily="34" charset="0"/>
+                <a:ea typeface="Pretendard SemiBold" pitchFamily="34" charset="-127"/>
+                <a:cs typeface="Pretendard SemiBold" pitchFamily="34" charset="-120"/>
               </a:rPr>
               <a:t>⑥ 단계 버튼</a:t>
             </a:r>
@@ -4670,9 +4670,9 @@
                 <a:solidFill>
                   <a:srgbClr val="1E2A36"/>
                 </a:solidFill>
-                <a:latin typeface="S-Core Dream 4 Regular" pitchFamily="34" charset="0"/>
-                <a:ea typeface="S-Core Dream 4 Regular" pitchFamily="34" charset="-127"/>
-                <a:cs typeface="S-Core Dream 4 Regular" pitchFamily="34" charset="-120"/>
+                <a:latin typeface="Pretendard" pitchFamily="34" charset="0"/>
+                <a:ea typeface="Pretendard" pitchFamily="34" charset="-127"/>
+                <a:cs typeface="Pretendard" pitchFamily="34" charset="-120"/>
               </a:rPr>
               <a:t>AI 선별 요청 → 결과 붙여넣기 → 보고서 → 기록</a:t>
             </a:r>
@@ -4757,13 +4757,13 @@
               <a:buNone/>
             </a:pPr>
             <a:r>
-              <a:rPr lang="ko-KR" altLang="en-US" sz="2000" dirty="0">
+              <a:rPr lang="ko-KR" altLang="en-US" sz="2000" b="1" dirty="0">
                 <a:solidFill>
                   <a:srgbClr val="FFFFFF"/>
                 </a:solidFill>
-                <a:latin typeface="S-Core Dream 7 ExtraBold" pitchFamily="34" charset="0"/>
-                <a:ea typeface="S-Core Dream 7 ExtraBold" pitchFamily="34" charset="-127"/>
-                <a:cs typeface="S-Core Dream 7 ExtraBold" pitchFamily="34" charset="-120"/>
+                <a:latin typeface="Pretendard" pitchFamily="34" charset="0"/>
+                <a:ea typeface="Pretendard" pitchFamily="34" charset="-127"/>
+                <a:cs typeface="Pretendard" pitchFamily="34" charset="-120"/>
               </a:rPr>
               <a:t>03</a:t>
             </a:r>
@@ -4800,9 +4800,9 @@
                 <a:solidFill>
                   <a:srgbClr val="2E7D8C"/>
                 </a:solidFill>
-                <a:latin typeface="S-Core Dream 5 Medium" pitchFamily="34" charset="0"/>
-                <a:ea typeface="S-Core Dream 5 Medium" pitchFamily="34" charset="-127"/>
-                <a:cs typeface="S-Core Dream 5 Medium" pitchFamily="34" charset="-120"/>
+                <a:latin typeface="Pretendard SemiBold" pitchFamily="34" charset="0"/>
+                <a:ea typeface="Pretendard SemiBold" pitchFamily="34" charset="-127"/>
+                <a:cs typeface="Pretendard SemiBold" pitchFamily="34" charset="-120"/>
               </a:rPr>
               <a:t>프로 · 읽는 법</a:t>
             </a:r>
@@ -4835,13 +4835,13 @@
               <a:buNone/>
             </a:pPr>
             <a:r>
-              <a:rPr lang="ko-KR" altLang="en-US" sz="2600" dirty="0">
+              <a:rPr lang="ko-KR" altLang="en-US" sz="2600" b="1" dirty="0">
                 <a:solidFill>
                   <a:srgbClr val="1F3B5C"/>
                 </a:solidFill>
-                <a:latin typeface="S-Core Dream 7 ExtraBold" pitchFamily="34" charset="0"/>
-                <a:ea typeface="S-Core Dream 7 ExtraBold" pitchFamily="34" charset="-127"/>
-                <a:cs typeface="S-Core Dream 7 ExtraBold" pitchFamily="34" charset="-120"/>
+                <a:latin typeface="Pretendard" pitchFamily="34" charset="0"/>
+                <a:ea typeface="Pretendard" pitchFamily="34" charset="-127"/>
+                <a:cs typeface="Pretendard" pitchFamily="34" charset="-120"/>
               </a:rPr>
               <a:t>등급·분류 읽는 법</a:t>
             </a:r>
@@ -4878,9 +4878,9 @@
                 <a:solidFill>
                   <a:srgbClr val="667385"/>
                 </a:solidFill>
-                <a:latin typeface="S-Core Dream 4 Regular" pitchFamily="34" charset="0"/>
-                <a:ea typeface="S-Core Dream 4 Regular" pitchFamily="34" charset="-127"/>
-                <a:cs typeface="S-Core Dream 4 Regular" pitchFamily="34" charset="-120"/>
+                <a:latin typeface="Pretendard" pitchFamily="34" charset="0"/>
+                <a:ea typeface="Pretendard" pitchFamily="34" charset="-127"/>
+                <a:cs typeface="Pretendard" pitchFamily="34" charset="-120"/>
               </a:rPr>
               <a:t>등급은 '왜 후보가 됐는지', 분류는 '무엇에 관한 기사인지'입니다</a:t>
             </a:r>
@@ -4929,16 +4929,16 @@
                           <a:solidFill>
                             <a:srgbClr val="FFFFFF"/>
                           </a:solidFill>
-                          <a:latin typeface="S-Core Dream 5 Medium" pitchFamily="34" charset="0"/>
-                          <a:ea typeface="S-Core Dream 5 Medium" pitchFamily="34" charset="-127"/>
-                          <a:cs typeface="S-Core Dream 5 Medium" pitchFamily="34" charset="-120"/>
+                          <a:latin typeface="Pretendard SemiBold" pitchFamily="34" charset="0"/>
+                          <a:ea typeface="Pretendard SemiBold" pitchFamily="34" charset="-127"/>
+                          <a:cs typeface="Pretendard SemiBold" pitchFamily="34" charset="-120"/>
                         </a:rPr>
                         <a:t>등급</a:t>
                       </a:r>
                       <a:endParaRPr lang="ko-KR" altLang="en-US" sz="1200" dirty="0">
-                        <a:latin typeface="S-Core Dream 5 Medium" charset="0"/>
-                        <a:ea typeface="S-Core Dream 5 Medium" charset="0"/>
-                        <a:cs typeface="S-Core Dream 5 Medium" charset="0"/>
+                        <a:latin typeface="Pretendard SemiBold" charset="0"/>
+                        <a:ea typeface="Pretendard SemiBold" charset="0"/>
+                        <a:cs typeface="Pretendard SemiBold" charset="0"/>
                       </a:endParaRPr>
                     </a:p>
                   </a:txBody>
@@ -4997,16 +4997,16 @@
                           <a:solidFill>
                             <a:srgbClr val="FFFFFF"/>
                           </a:solidFill>
-                          <a:latin typeface="S-Core Dream 5 Medium" pitchFamily="34" charset="0"/>
-                          <a:ea typeface="S-Core Dream 5 Medium" pitchFamily="34" charset="-127"/>
-                          <a:cs typeface="S-Core Dream 5 Medium" pitchFamily="34" charset="-120"/>
+                          <a:latin typeface="Pretendard SemiBold" pitchFamily="34" charset="0"/>
+                          <a:ea typeface="Pretendard SemiBold" pitchFamily="34" charset="-127"/>
+                          <a:cs typeface="Pretendard SemiBold" pitchFamily="34" charset="-120"/>
                         </a:rPr>
                         <a:t>뜻</a:t>
                       </a:r>
                       <a:endParaRPr lang="ko-KR" altLang="en-US" sz="1200" dirty="0">
-                        <a:latin typeface="S-Core Dream 5 Medium" charset="0"/>
-                        <a:ea typeface="S-Core Dream 5 Medium" charset="0"/>
-                        <a:cs typeface="S-Core Dream 5 Medium" charset="0"/>
+                        <a:latin typeface="Pretendard SemiBold" charset="0"/>
+                        <a:ea typeface="Pretendard SemiBold" charset="0"/>
+                        <a:cs typeface="Pretendard SemiBold" charset="0"/>
                       </a:endParaRPr>
                     </a:p>
                   </a:txBody>
@@ -5065,16 +5065,16 @@
                           <a:solidFill>
                             <a:srgbClr val="FFFFFF"/>
                           </a:solidFill>
-                          <a:latin typeface="S-Core Dream 5 Medium" pitchFamily="34" charset="0"/>
-                          <a:ea typeface="S-Core Dream 5 Medium" pitchFamily="34" charset="-127"/>
-                          <a:cs typeface="S-Core Dream 5 Medium" pitchFamily="34" charset="-120"/>
+                          <a:latin typeface="Pretendard SemiBold" pitchFamily="34" charset="0"/>
+                          <a:ea typeface="Pretendard SemiBold" pitchFamily="34" charset="-127"/>
+                          <a:cs typeface="Pretendard SemiBold" pitchFamily="34" charset="-120"/>
                         </a:rPr>
                         <a:t>기본 점수</a:t>
                       </a:r>
                       <a:endParaRPr lang="ko-KR" altLang="en-US" sz="1200" dirty="0">
-                        <a:latin typeface="S-Core Dream 5 Medium" charset="0"/>
-                        <a:ea typeface="S-Core Dream 5 Medium" charset="0"/>
-                        <a:cs typeface="S-Core Dream 5 Medium" charset="0"/>
+                        <a:latin typeface="Pretendard SemiBold" charset="0"/>
+                        <a:ea typeface="Pretendard SemiBold" charset="0"/>
+                        <a:cs typeface="Pretendard SemiBold" charset="0"/>
                       </a:endParaRPr>
                     </a:p>
                   </a:txBody>
@@ -5135,16 +5135,16 @@
                           <a:solidFill>
                             <a:srgbClr val="1E2A36"/>
                           </a:solidFill>
-                          <a:latin typeface="S-Core Dream 4 Regular" pitchFamily="34" charset="0"/>
-                          <a:ea typeface="S-Core Dream 4 Regular" pitchFamily="34" charset="-127"/>
-                          <a:cs typeface="S-Core Dream 4 Regular" pitchFamily="34" charset="-120"/>
+                          <a:latin typeface="Pretendard" pitchFamily="34" charset="0"/>
+                          <a:ea typeface="Pretendard" pitchFamily="34" charset="-127"/>
+                          <a:cs typeface="Pretendard" pitchFamily="34" charset="-120"/>
                         </a:rPr>
                         <a:t>A</a:t>
                       </a:r>
                       <a:endParaRPr lang="ko-KR" altLang="en-US" sz="1200" dirty="0">
-                        <a:latin typeface="S-Core Dream 4 Regular" charset="0"/>
-                        <a:ea typeface="S-Core Dream 4 Regular" charset="0"/>
-                        <a:cs typeface="S-Core Dream 4 Regular" charset="0"/>
+                        <a:latin typeface="Pretendard" charset="0"/>
+                        <a:ea typeface="Pretendard" charset="0"/>
+                        <a:cs typeface="Pretendard" charset="0"/>
                       </a:endParaRPr>
                     </a:p>
                   </a:txBody>
@@ -5203,16 +5203,16 @@
                           <a:solidFill>
                             <a:srgbClr val="1E2A36"/>
                           </a:solidFill>
-                          <a:latin typeface="S-Core Dream 4 Regular" pitchFamily="34" charset="0"/>
-                          <a:ea typeface="S-Core Dream 4 Regular" pitchFamily="34" charset="-127"/>
-                          <a:cs typeface="S-Core Dream 4 Regular" pitchFamily="34" charset="-120"/>
+                          <a:latin typeface="Pretendard" pitchFamily="34" charset="0"/>
+                          <a:ea typeface="Pretendard" pitchFamily="34" charset="-127"/>
+                          <a:cs typeface="Pretendard" pitchFamily="34" charset="-120"/>
                         </a:rPr>
                         <a:t>제목에 '주택관리공단'(또는 KOHOM)</a:t>
                       </a:r>
                       <a:endParaRPr lang="ko-KR" altLang="en-US" sz="1200" dirty="0">
-                        <a:latin typeface="S-Core Dream 4 Regular" charset="0"/>
-                        <a:ea typeface="S-Core Dream 4 Regular" charset="0"/>
-                        <a:cs typeface="S-Core Dream 4 Regular" charset="0"/>
+                        <a:latin typeface="Pretendard" charset="0"/>
+                        <a:ea typeface="Pretendard" charset="0"/>
+                        <a:cs typeface="Pretendard" charset="0"/>
                       </a:endParaRPr>
                     </a:p>
                   </a:txBody>
@@ -5271,16 +5271,16 @@
                           <a:solidFill>
                             <a:srgbClr val="1E2A36"/>
                           </a:solidFill>
-                          <a:latin typeface="S-Core Dream 4 Regular" pitchFamily="34" charset="0"/>
-                          <a:ea typeface="S-Core Dream 4 Regular" pitchFamily="34" charset="-127"/>
-                          <a:cs typeface="S-Core Dream 4 Regular" pitchFamily="34" charset="-120"/>
+                          <a:latin typeface="Pretendard" pitchFamily="34" charset="0"/>
+                          <a:ea typeface="Pretendard" pitchFamily="34" charset="-127"/>
+                          <a:cs typeface="Pretendard" pitchFamily="34" charset="-120"/>
                         </a:rPr>
                         <a:t>+50</a:t>
                       </a:r>
                       <a:endParaRPr lang="ko-KR" altLang="en-US" sz="1200" dirty="0">
-                        <a:latin typeface="S-Core Dream 4 Regular" charset="0"/>
-                        <a:ea typeface="S-Core Dream 4 Regular" charset="0"/>
-                        <a:cs typeface="S-Core Dream 4 Regular" charset="0"/>
+                        <a:latin typeface="Pretendard" charset="0"/>
+                        <a:ea typeface="Pretendard" charset="0"/>
+                        <a:cs typeface="Pretendard" charset="0"/>
                       </a:endParaRPr>
                     </a:p>
                   </a:txBody>
@@ -5341,16 +5341,16 @@
                           <a:solidFill>
                             <a:srgbClr val="1E2A36"/>
                           </a:solidFill>
-                          <a:latin typeface="S-Core Dream 4 Regular" pitchFamily="34" charset="0"/>
-                          <a:ea typeface="S-Core Dream 4 Regular" pitchFamily="34" charset="-127"/>
-                          <a:cs typeface="S-Core Dream 4 Regular" pitchFamily="34" charset="-120"/>
+                          <a:latin typeface="Pretendard" pitchFamily="34" charset="0"/>
+                          <a:ea typeface="Pretendard" pitchFamily="34" charset="-127"/>
+                          <a:cs typeface="Pretendard" pitchFamily="34" charset="-120"/>
                         </a:rPr>
                         <a:t>A?</a:t>
                       </a:r>
                       <a:endParaRPr lang="ko-KR" altLang="en-US" sz="1200" dirty="0">
-                        <a:latin typeface="S-Core Dream 4 Regular" charset="0"/>
-                        <a:ea typeface="S-Core Dream 4 Regular" charset="0"/>
-                        <a:cs typeface="S-Core Dream 4 Regular" charset="0"/>
+                        <a:latin typeface="Pretendard" charset="0"/>
+                        <a:ea typeface="Pretendard" charset="0"/>
+                        <a:cs typeface="Pretendard" charset="0"/>
                       </a:endParaRPr>
                     </a:p>
                   </a:txBody>
@@ -5409,16 +5409,16 @@
                           <a:solidFill>
                             <a:srgbClr val="1E2A36"/>
                           </a:solidFill>
-                          <a:latin typeface="S-Core Dream 4 Regular" pitchFamily="34" charset="0"/>
-                          <a:ea typeface="S-Core Dream 4 Regular" pitchFamily="34" charset="-127"/>
-                          <a:cs typeface="S-Core Dream 4 Regular" pitchFamily="34" charset="-120"/>
+                          <a:latin typeface="Pretendard" pitchFamily="34" charset="0"/>
+                          <a:ea typeface="Pretendard" pitchFamily="34" charset="-127"/>
+                          <a:cs typeface="Pretendard" pitchFamily="34" charset="-120"/>
                         </a:rPr>
                         <a:t>지사명만 있고 공단 이름은 없음 — 공단 기사인지 확인(추천 안 함)</a:t>
                       </a:r>
                       <a:endParaRPr lang="ko-KR" altLang="en-US" sz="1200" dirty="0">
-                        <a:latin typeface="S-Core Dream 4 Regular" charset="0"/>
-                        <a:ea typeface="S-Core Dream 4 Regular" charset="0"/>
-                        <a:cs typeface="S-Core Dream 4 Regular" charset="0"/>
+                        <a:latin typeface="Pretendard" charset="0"/>
+                        <a:ea typeface="Pretendard" charset="0"/>
+                        <a:cs typeface="Pretendard" charset="0"/>
                       </a:endParaRPr>
                     </a:p>
                   </a:txBody>
@@ -5477,16 +5477,16 @@
                           <a:solidFill>
                             <a:srgbClr val="1E2A36"/>
                           </a:solidFill>
-                          <a:latin typeface="S-Core Dream 4 Regular" pitchFamily="34" charset="0"/>
-                          <a:ea typeface="S-Core Dream 4 Regular" pitchFamily="34" charset="-127"/>
-                          <a:cs typeface="S-Core Dream 4 Regular" pitchFamily="34" charset="-120"/>
+                          <a:latin typeface="Pretendard" pitchFamily="34" charset="0"/>
+                          <a:ea typeface="Pretendard" pitchFamily="34" charset="-127"/>
+                          <a:cs typeface="Pretendard" pitchFamily="34" charset="-120"/>
                         </a:rPr>
                         <a:t>+20</a:t>
                       </a:r>
                       <a:endParaRPr lang="ko-KR" altLang="en-US" sz="1200" dirty="0">
-                        <a:latin typeface="S-Core Dream 4 Regular" charset="0"/>
-                        <a:ea typeface="S-Core Dream 4 Regular" charset="0"/>
-                        <a:cs typeface="S-Core Dream 4 Regular" charset="0"/>
+                        <a:latin typeface="Pretendard" charset="0"/>
+                        <a:ea typeface="Pretendard" charset="0"/>
+                        <a:cs typeface="Pretendard" charset="0"/>
                       </a:endParaRPr>
                     </a:p>
                   </a:txBody>
@@ -5547,16 +5547,16 @@
                           <a:solidFill>
                             <a:srgbClr val="1E2A36"/>
                           </a:solidFill>
-                          <a:latin typeface="S-Core Dream 4 Regular" pitchFamily="34" charset="0"/>
-                          <a:ea typeface="S-Core Dream 4 Regular" pitchFamily="34" charset="-127"/>
-                          <a:cs typeface="S-Core Dream 4 Regular" pitchFamily="34" charset="-120"/>
+                          <a:latin typeface="Pretendard" pitchFamily="34" charset="0"/>
+                          <a:ea typeface="Pretendard" pitchFamily="34" charset="-127"/>
+                          <a:cs typeface="Pretendard" pitchFamily="34" charset="-120"/>
                         </a:rPr>
                         <a:t>S</a:t>
                       </a:r>
                       <a:endParaRPr lang="ko-KR" altLang="en-US" sz="1200" dirty="0">
-                        <a:latin typeface="S-Core Dream 4 Regular" charset="0"/>
-                        <a:ea typeface="S-Core Dream 4 Regular" charset="0"/>
-                        <a:cs typeface="S-Core Dream 4 Regular" charset="0"/>
+                        <a:latin typeface="Pretendard" charset="0"/>
+                        <a:ea typeface="Pretendard" charset="0"/>
+                        <a:cs typeface="Pretendard" charset="0"/>
                       </a:endParaRPr>
                     </a:p>
                   </a:txBody>
@@ -5615,16 +5615,16 @@
                           <a:solidFill>
                             <a:srgbClr val="1E2A36"/>
                           </a:solidFill>
-                          <a:latin typeface="S-Core Dream 4 Regular" pitchFamily="34" charset="0"/>
-                          <a:ea typeface="S-Core Dream 4 Regular" pitchFamily="34" charset="-127"/>
-                          <a:cs typeface="S-Core Dream 4 Regular" pitchFamily="34" charset="-120"/>
+                          <a:latin typeface="Pretendard" pitchFamily="34" charset="0"/>
+                          <a:ea typeface="Pretendard" pitchFamily="34" charset="-127"/>
+                          <a:cs typeface="Pretendard" pitchFamily="34" charset="-120"/>
                         </a:rPr>
                         <a:t>공단 업무를 가리키는 말(영구임대·공공임대·주거급여 등)</a:t>
                       </a:r>
                       <a:endParaRPr lang="ko-KR" altLang="en-US" sz="1200" dirty="0">
-                        <a:latin typeface="S-Core Dream 4 Regular" charset="0"/>
-                        <a:ea typeface="S-Core Dream 4 Regular" charset="0"/>
-                        <a:cs typeface="S-Core Dream 4 Regular" charset="0"/>
+                        <a:latin typeface="Pretendard" charset="0"/>
+                        <a:ea typeface="Pretendard" charset="0"/>
+                        <a:cs typeface="Pretendard" charset="0"/>
                       </a:endParaRPr>
                     </a:p>
                   </a:txBody>
@@ -5683,16 +5683,16 @@
                           <a:solidFill>
                             <a:srgbClr val="1E2A36"/>
                           </a:solidFill>
-                          <a:latin typeface="S-Core Dream 4 Regular" pitchFamily="34" charset="0"/>
-                          <a:ea typeface="S-Core Dream 4 Regular" pitchFamily="34" charset="-127"/>
-                          <a:cs typeface="S-Core Dream 4 Regular" pitchFamily="34" charset="-120"/>
+                          <a:latin typeface="Pretendard" pitchFamily="34" charset="0"/>
+                          <a:ea typeface="Pretendard" pitchFamily="34" charset="-127"/>
+                          <a:cs typeface="Pretendard" pitchFamily="34" charset="-120"/>
                         </a:rPr>
                         <a:t>+30 (2개 +40)</a:t>
                       </a:r>
                       <a:endParaRPr lang="ko-KR" altLang="en-US" sz="1200" dirty="0">
-                        <a:latin typeface="S-Core Dream 4 Regular" charset="0"/>
-                        <a:ea typeface="S-Core Dream 4 Regular" charset="0"/>
-                        <a:cs typeface="S-Core Dream 4 Regular" charset="0"/>
+                        <a:latin typeface="Pretendard" charset="0"/>
+                        <a:ea typeface="Pretendard" charset="0"/>
+                        <a:cs typeface="Pretendard" charset="0"/>
                       </a:endParaRPr>
                     </a:p>
                   </a:txBody>
@@ -5753,16 +5753,16 @@
                           <a:solidFill>
                             <a:srgbClr val="1E2A36"/>
                           </a:solidFill>
-                          <a:latin typeface="S-Core Dream 4 Regular" pitchFamily="34" charset="0"/>
-                          <a:ea typeface="S-Core Dream 4 Regular" pitchFamily="34" charset="-127"/>
-                          <a:cs typeface="S-Core Dream 4 Regular" pitchFamily="34" charset="-120"/>
+                          <a:latin typeface="Pretendard" pitchFamily="34" charset="0"/>
+                          <a:ea typeface="Pretendard" pitchFamily="34" charset="-127"/>
+                          <a:cs typeface="Pretendard" pitchFamily="34" charset="-120"/>
                         </a:rPr>
                         <a:t>B</a:t>
                       </a:r>
                       <a:endParaRPr lang="ko-KR" altLang="en-US" sz="1200" dirty="0">
-                        <a:latin typeface="S-Core Dream 4 Regular" charset="0"/>
-                        <a:ea typeface="S-Core Dream 4 Regular" charset="0"/>
-                        <a:cs typeface="S-Core Dream 4 Regular" charset="0"/>
+                        <a:latin typeface="Pretendard" charset="0"/>
+                        <a:ea typeface="Pretendard" charset="0"/>
+                        <a:cs typeface="Pretendard" charset="0"/>
                       </a:endParaRPr>
                     </a:p>
                   </a:txBody>
@@ -5821,16 +5821,16 @@
                           <a:solidFill>
                             <a:srgbClr val="1E2A36"/>
                           </a:solidFill>
-                          <a:latin typeface="S-Core Dream 4 Regular" pitchFamily="34" charset="0"/>
-                          <a:ea typeface="S-Core Dream 4 Regular" pitchFamily="34" charset="-127"/>
-                          <a:cs typeface="S-Core Dream 4 Regular" pitchFamily="34" charset="-120"/>
+                          <a:latin typeface="Pretendard" pitchFamily="34" charset="0"/>
+                          <a:ea typeface="Pretendard" pitchFamily="34" charset="-127"/>
+                          <a:cs typeface="Pretendard" pitchFamily="34" charset="-120"/>
                         </a:rPr>
                         <a:t>주거·공동주택 정책 환경(LH·층간소음·경영평가 등)</a:t>
                       </a:r>
                       <a:endParaRPr lang="ko-KR" altLang="en-US" sz="1200" dirty="0">
-                        <a:latin typeface="S-Core Dream 4 Regular" charset="0"/>
-                        <a:ea typeface="S-Core Dream 4 Regular" charset="0"/>
-                        <a:cs typeface="S-Core Dream 4 Regular" charset="0"/>
+                        <a:latin typeface="Pretendard" charset="0"/>
+                        <a:ea typeface="Pretendard" charset="0"/>
+                        <a:cs typeface="Pretendard" charset="0"/>
                       </a:endParaRPr>
                     </a:p>
                   </a:txBody>
@@ -5889,16 +5889,16 @@
                           <a:solidFill>
                             <a:srgbClr val="1E2A36"/>
                           </a:solidFill>
-                          <a:latin typeface="S-Core Dream 4 Regular" pitchFamily="34" charset="0"/>
-                          <a:ea typeface="S-Core Dream 4 Regular" pitchFamily="34" charset="-127"/>
-                          <a:cs typeface="S-Core Dream 4 Regular" pitchFamily="34" charset="-120"/>
+                          <a:latin typeface="Pretendard" pitchFamily="34" charset="0"/>
+                          <a:ea typeface="Pretendard" pitchFamily="34" charset="-127"/>
+                          <a:cs typeface="Pretendard" pitchFamily="34" charset="-120"/>
                         </a:rPr>
                         <a:t>+10</a:t>
                       </a:r>
                       <a:endParaRPr lang="ko-KR" altLang="en-US" sz="1200" dirty="0">
-                        <a:latin typeface="S-Core Dream 4 Regular" charset="0"/>
-                        <a:ea typeface="S-Core Dream 4 Regular" charset="0"/>
-                        <a:cs typeface="S-Core Dream 4 Regular" charset="0"/>
+                        <a:latin typeface="Pretendard" charset="0"/>
+                        <a:ea typeface="Pretendard" charset="0"/>
+                        <a:cs typeface="Pretendard" charset="0"/>
                       </a:endParaRPr>
                     </a:p>
                   </a:txBody>
@@ -5959,16 +5959,16 @@
                           <a:solidFill>
                             <a:srgbClr val="1E2A36"/>
                           </a:solidFill>
-                          <a:latin typeface="S-Core Dream 4 Regular" pitchFamily="34" charset="0"/>
-                          <a:ea typeface="S-Core Dream 4 Regular" pitchFamily="34" charset="-127"/>
-                          <a:cs typeface="S-Core Dream 4 Regular" pitchFamily="34" charset="-120"/>
+                          <a:latin typeface="Pretendard" pitchFamily="34" charset="0"/>
+                          <a:ea typeface="Pretendard" pitchFamily="34" charset="-127"/>
+                          <a:cs typeface="Pretendard" pitchFamily="34" charset="-120"/>
                         </a:rPr>
                         <a:t>전문지</a:t>
                       </a:r>
                       <a:endParaRPr lang="ko-KR" altLang="en-US" sz="1200" dirty="0">
-                        <a:latin typeface="S-Core Dream 4 Regular" charset="0"/>
-                        <a:ea typeface="S-Core Dream 4 Regular" charset="0"/>
-                        <a:cs typeface="S-Core Dream 4 Regular" charset="0"/>
+                        <a:latin typeface="Pretendard" charset="0"/>
+                        <a:ea typeface="Pretendard" charset="0"/>
+                        <a:cs typeface="Pretendard" charset="0"/>
                       </a:endParaRPr>
                     </a:p>
                   </a:txBody>
@@ -6027,16 +6027,16 @@
                           <a:solidFill>
                             <a:srgbClr val="1E2A36"/>
                           </a:solidFill>
-                          <a:latin typeface="S-Core Dream 4 Regular" pitchFamily="34" charset="0"/>
-                          <a:ea typeface="S-Core Dream 4 Regular" pitchFamily="34" charset="-127"/>
-                          <a:cs typeface="S-Core Dream 4 Regular" pitchFamily="34" charset="-120"/>
+                          <a:latin typeface="Pretendard" pitchFamily="34" charset="0"/>
+                          <a:ea typeface="Pretendard" pitchFamily="34" charset="-127"/>
+                          <a:cs typeface="Pretendard" pitchFamily="34" charset="-120"/>
                         </a:rPr>
                         <a:t>아파트관리신문·한국아파트신문 — 키워드 없이도 후보</a:t>
                       </a:r>
                       <a:endParaRPr lang="ko-KR" altLang="en-US" sz="1200" dirty="0">
-                        <a:latin typeface="S-Core Dream 4 Regular" charset="0"/>
-                        <a:ea typeface="S-Core Dream 4 Regular" charset="0"/>
-                        <a:cs typeface="S-Core Dream 4 Regular" charset="0"/>
+                        <a:latin typeface="Pretendard" charset="0"/>
+                        <a:ea typeface="Pretendard" charset="0"/>
+                        <a:cs typeface="Pretendard" charset="0"/>
                       </a:endParaRPr>
                     </a:p>
                   </a:txBody>
@@ -6095,16 +6095,16 @@
                           <a:solidFill>
                             <a:srgbClr val="1E2A36"/>
                           </a:solidFill>
-                          <a:latin typeface="S-Core Dream 4 Regular" pitchFamily="34" charset="0"/>
-                          <a:ea typeface="S-Core Dream 4 Regular" pitchFamily="34" charset="-127"/>
-                          <a:cs typeface="S-Core Dream 4 Regular" pitchFamily="34" charset="-120"/>
+                          <a:latin typeface="Pretendard" pitchFamily="34" charset="0"/>
+                          <a:ea typeface="Pretendard" pitchFamily="34" charset="-127"/>
+                          <a:cs typeface="Pretendard" pitchFamily="34" charset="-120"/>
                         </a:rPr>
                         <a:t>+15</a:t>
                       </a:r>
                       <a:endParaRPr lang="ko-KR" altLang="en-US" sz="1200" dirty="0">
-                        <a:latin typeface="S-Core Dream 4 Regular" charset="0"/>
-                        <a:ea typeface="S-Core Dream 4 Regular" charset="0"/>
-                        <a:cs typeface="S-Core Dream 4 Regular" charset="0"/>
+                        <a:latin typeface="Pretendard" charset="0"/>
+                        <a:ea typeface="Pretendard" charset="0"/>
+                        <a:cs typeface="Pretendard" charset="0"/>
                       </a:endParaRPr>
                     </a:p>
                   </a:txBody>
@@ -6165,16 +6165,16 @@
                           <a:solidFill>
                             <a:srgbClr val="1E2A36"/>
                           </a:solidFill>
-                          <a:latin typeface="S-Core Dream 4 Regular" pitchFamily="34" charset="0"/>
-                          <a:ea typeface="S-Core Dream 4 Regular" pitchFamily="34" charset="-127"/>
-                          <a:cs typeface="S-Core Dream 4 Regular" pitchFamily="34" charset="-120"/>
+                          <a:latin typeface="Pretendard" pitchFamily="34" charset="0"/>
+                          <a:ea typeface="Pretendard" pitchFamily="34" charset="-127"/>
+                          <a:cs typeface="Pretendard" pitchFamily="34" charset="-120"/>
                         </a:rPr>
                         <a:t>직접</a:t>
                       </a:r>
                       <a:endParaRPr lang="ko-KR" altLang="en-US" sz="1200" dirty="0">
-                        <a:latin typeface="S-Core Dream 4 Regular" charset="0"/>
-                        <a:ea typeface="S-Core Dream 4 Regular" charset="0"/>
-                        <a:cs typeface="S-Core Dream 4 Regular" charset="0"/>
+                        <a:latin typeface="Pretendard" charset="0"/>
+                        <a:ea typeface="Pretendard" charset="0"/>
+                        <a:cs typeface="Pretendard" charset="0"/>
                       </a:endParaRPr>
                     </a:p>
                   </a:txBody>
@@ -6233,16 +6233,16 @@
                           <a:solidFill>
                             <a:srgbClr val="1E2A36"/>
                           </a:solidFill>
-                          <a:latin typeface="S-Core Dream 4 Regular" pitchFamily="34" charset="0"/>
-                          <a:ea typeface="S-Core Dream 4 Regular" pitchFamily="34" charset="-127"/>
-                          <a:cs typeface="S-Core Dream 4 Regular" pitchFamily="34" charset="-120"/>
+                          <a:latin typeface="Pretendard" pitchFamily="34" charset="0"/>
+                          <a:ea typeface="Pretendard" pitchFamily="34" charset="-127"/>
+                          <a:cs typeface="Pretendard" pitchFamily="34" charset="-120"/>
                         </a:rPr>
                         <a:t>[기사 링크로 추가]로 넣은 기사 — 항상 포함</a:t>
                       </a:r>
                       <a:endParaRPr lang="ko-KR" altLang="en-US" sz="1200" dirty="0">
-                        <a:latin typeface="S-Core Dream 4 Regular" charset="0"/>
-                        <a:ea typeface="S-Core Dream 4 Regular" charset="0"/>
-                        <a:cs typeface="S-Core Dream 4 Regular" charset="0"/>
+                        <a:latin typeface="Pretendard" charset="0"/>
+                        <a:ea typeface="Pretendard" charset="0"/>
+                        <a:cs typeface="Pretendard" charset="0"/>
                       </a:endParaRPr>
                     </a:p>
                   </a:txBody>
@@ -6301,16 +6301,16 @@
                           <a:solidFill>
                             <a:srgbClr val="1E2A36"/>
                           </a:solidFill>
-                          <a:latin typeface="S-Core Dream 4 Regular" pitchFamily="34" charset="0"/>
-                          <a:ea typeface="S-Core Dream 4 Regular" pitchFamily="34" charset="-127"/>
-                          <a:cs typeface="S-Core Dream 4 Regular" pitchFamily="34" charset="-120"/>
+                          <a:latin typeface="Pretendard" pitchFamily="34" charset="0"/>
+                          <a:ea typeface="Pretendard" pitchFamily="34" charset="-127"/>
+                          <a:cs typeface="Pretendard" pitchFamily="34" charset="-120"/>
                         </a:rPr>
                         <a:t>—</a:t>
                       </a:r>
                       <a:endParaRPr lang="ko-KR" altLang="en-US" sz="1200" dirty="0">
-                        <a:latin typeface="S-Core Dream 4 Regular" charset="0"/>
-                        <a:ea typeface="S-Core Dream 4 Regular" charset="0"/>
-                        <a:cs typeface="S-Core Dream 4 Regular" charset="0"/>
+                        <a:latin typeface="Pretendard" charset="0"/>
+                        <a:ea typeface="Pretendard" charset="0"/>
+                        <a:cs typeface="Pretendard" charset="0"/>
                       </a:endParaRPr>
                     </a:p>
                   </a:txBody>
@@ -6401,16 +6401,16 @@
                           <a:solidFill>
                             <a:srgbClr val="FFFFFF"/>
                           </a:solidFill>
-                          <a:latin typeface="S-Core Dream 5 Medium" pitchFamily="34" charset="0"/>
-                          <a:ea typeface="S-Core Dream 5 Medium" pitchFamily="34" charset="-127"/>
-                          <a:cs typeface="S-Core Dream 5 Medium" pitchFamily="34" charset="-120"/>
+                          <a:latin typeface="Pretendard SemiBold" pitchFamily="34" charset="0"/>
+                          <a:ea typeface="Pretendard SemiBold" pitchFamily="34" charset="-127"/>
+                          <a:cs typeface="Pretendard SemiBold" pitchFamily="34" charset="-120"/>
                         </a:rPr>
                         <a:t>분류(위부터)</a:t>
                       </a:r>
                       <a:endParaRPr lang="ko-KR" altLang="en-US" sz="1200" dirty="0">
-                        <a:latin typeface="S-Core Dream 5 Medium" charset="0"/>
-                        <a:ea typeface="S-Core Dream 5 Medium" charset="0"/>
-                        <a:cs typeface="S-Core Dream 5 Medium" charset="0"/>
+                        <a:latin typeface="Pretendard SemiBold" charset="0"/>
+                        <a:ea typeface="Pretendard SemiBold" charset="0"/>
+                        <a:cs typeface="Pretendard SemiBold" charset="0"/>
                       </a:endParaRPr>
                     </a:p>
                   </a:txBody>
@@ -6469,16 +6469,16 @@
                           <a:solidFill>
                             <a:srgbClr val="FFFFFF"/>
                           </a:solidFill>
-                          <a:latin typeface="S-Core Dream 5 Medium" pitchFamily="34" charset="0"/>
-                          <a:ea typeface="S-Core Dream 5 Medium" pitchFamily="34" charset="-127"/>
-                          <a:cs typeface="S-Core Dream 5 Medium" pitchFamily="34" charset="-120"/>
+                          <a:latin typeface="Pretendard SemiBold" pitchFamily="34" charset="0"/>
+                          <a:ea typeface="Pretendard SemiBold" pitchFamily="34" charset="-127"/>
+                          <a:cs typeface="Pretendard SemiBold" pitchFamily="34" charset="-120"/>
                         </a:rPr>
                         <a:t>조건</a:t>
                       </a:r>
                       <a:endParaRPr lang="ko-KR" altLang="en-US" sz="1200" dirty="0">
-                        <a:latin typeface="S-Core Dream 5 Medium" charset="0"/>
-                        <a:ea typeface="S-Core Dream 5 Medium" charset="0"/>
-                        <a:cs typeface="S-Core Dream 5 Medium" charset="0"/>
+                        <a:latin typeface="Pretendard SemiBold" charset="0"/>
+                        <a:ea typeface="Pretendard SemiBold" charset="0"/>
+                        <a:cs typeface="Pretendard SemiBold" charset="0"/>
                       </a:endParaRPr>
                     </a:p>
                   </a:txBody>
@@ -6539,16 +6539,16 @@
                           <a:solidFill>
                             <a:srgbClr val="1E2A36"/>
                           </a:solidFill>
-                          <a:latin typeface="S-Core Dream 4 Regular" pitchFamily="34" charset="0"/>
-                          <a:ea typeface="S-Core Dream 4 Regular" pitchFamily="34" charset="-127"/>
-                          <a:cs typeface="S-Core Dream 4 Regular" pitchFamily="34" charset="-120"/>
+                          <a:latin typeface="Pretendard" pitchFamily="34" charset="0"/>
+                          <a:ea typeface="Pretendard" pitchFamily="34" charset="-127"/>
+                          <a:cs typeface="Pretendard" pitchFamily="34" charset="-120"/>
                         </a:rPr>
                         <a:t>리스크</a:t>
                       </a:r>
                       <a:endParaRPr lang="ko-KR" altLang="en-US" sz="1200" dirty="0">
-                        <a:latin typeface="S-Core Dream 4 Regular" charset="0"/>
-                        <a:ea typeface="S-Core Dream 4 Regular" charset="0"/>
-                        <a:cs typeface="S-Core Dream 4 Regular" charset="0"/>
+                        <a:latin typeface="Pretendard" charset="0"/>
+                        <a:ea typeface="Pretendard" charset="0"/>
+                        <a:cs typeface="Pretendard" charset="0"/>
                       </a:endParaRPr>
                     </a:p>
                   </a:txBody>
@@ -6607,16 +6607,16 @@
                           <a:solidFill>
                             <a:srgbClr val="1E2A36"/>
                           </a:solidFill>
-                          <a:latin typeface="S-Core Dream 4 Regular" pitchFamily="34" charset="0"/>
-                          <a:ea typeface="S-Core Dream 4 Regular" pitchFamily="34" charset="-127"/>
-                          <a:cs typeface="S-Core Dream 4 Regular" pitchFamily="34" charset="-120"/>
+                          <a:latin typeface="Pretendard" pitchFamily="34" charset="0"/>
+                          <a:ea typeface="Pretendard" pitchFamily="34" charset="-127"/>
+                          <a:cs typeface="Pretendard" pitchFamily="34" charset="-120"/>
                         </a:rPr>
                         <a:t>리스크어(사고·체납·징계 등) + 공단 관련 주제</a:t>
                       </a:r>
                       <a:endParaRPr lang="ko-KR" altLang="en-US" sz="1200" dirty="0">
-                        <a:latin typeface="S-Core Dream 4 Regular" charset="0"/>
-                        <a:ea typeface="S-Core Dream 4 Regular" charset="0"/>
-                        <a:cs typeface="S-Core Dream 4 Regular" charset="0"/>
+                        <a:latin typeface="Pretendard" charset="0"/>
+                        <a:ea typeface="Pretendard" charset="0"/>
+                        <a:cs typeface="Pretendard" charset="0"/>
                       </a:endParaRPr>
                     </a:p>
                   </a:txBody>
@@ -6677,16 +6677,16 @@
                           <a:solidFill>
                             <a:srgbClr val="1E2A36"/>
                           </a:solidFill>
-                          <a:latin typeface="S-Core Dream 4 Regular" pitchFamily="34" charset="0"/>
-                          <a:ea typeface="S-Core Dream 4 Regular" pitchFamily="34" charset="-127"/>
-                          <a:cs typeface="S-Core Dream 4 Regular" pitchFamily="34" charset="-120"/>
+                          <a:latin typeface="Pretendard" pitchFamily="34" charset="0"/>
+                          <a:ea typeface="Pretendard" pitchFamily="34" charset="-127"/>
+                          <a:cs typeface="Pretendard" pitchFamily="34" charset="-120"/>
                         </a:rPr>
                         <a:t>기관 직접</a:t>
                       </a:r>
                       <a:endParaRPr lang="ko-KR" altLang="en-US" sz="1200" dirty="0">
-                        <a:latin typeface="S-Core Dream 4 Regular" charset="0"/>
-                        <a:ea typeface="S-Core Dream 4 Regular" charset="0"/>
-                        <a:cs typeface="S-Core Dream 4 Regular" charset="0"/>
+                        <a:latin typeface="Pretendard" charset="0"/>
+                        <a:ea typeface="Pretendard" charset="0"/>
+                        <a:cs typeface="Pretendard" charset="0"/>
                       </a:endParaRPr>
                     </a:p>
                   </a:txBody>
@@ -6745,16 +6745,16 @@
                           <a:solidFill>
                             <a:srgbClr val="1E2A36"/>
                           </a:solidFill>
-                          <a:latin typeface="S-Core Dream 4 Regular" pitchFamily="34" charset="0"/>
-                          <a:ea typeface="S-Core Dream 4 Regular" pitchFamily="34" charset="-127"/>
-                          <a:cs typeface="S-Core Dream 4 Regular" pitchFamily="34" charset="-120"/>
+                          <a:latin typeface="Pretendard" pitchFamily="34" charset="0"/>
+                          <a:ea typeface="Pretendard" pitchFamily="34" charset="-127"/>
+                          <a:cs typeface="Pretendard" pitchFamily="34" charset="-120"/>
                         </a:rPr>
                         <a:t>공단(A) 기사</a:t>
                       </a:r>
                       <a:endParaRPr lang="ko-KR" altLang="en-US" sz="1200" dirty="0">
-                        <a:latin typeface="S-Core Dream 4 Regular" charset="0"/>
-                        <a:ea typeface="S-Core Dream 4 Regular" charset="0"/>
-                        <a:cs typeface="S-Core Dream 4 Regular" charset="0"/>
+                        <a:latin typeface="Pretendard" charset="0"/>
+                        <a:ea typeface="Pretendard" charset="0"/>
+                        <a:cs typeface="Pretendard" charset="0"/>
                       </a:endParaRPr>
                     </a:p>
                   </a:txBody>
@@ -6815,16 +6815,16 @@
                           <a:solidFill>
                             <a:srgbClr val="1E2A36"/>
                           </a:solidFill>
-                          <a:latin typeface="S-Core Dream 4 Regular" pitchFamily="34" charset="0"/>
-                          <a:ea typeface="S-Core Dream 4 Regular" pitchFamily="34" charset="-127"/>
-                          <a:cs typeface="S-Core Dream 4 Regular" pitchFamily="34" charset="-120"/>
+                          <a:latin typeface="Pretendard" pitchFamily="34" charset="0"/>
+                          <a:ea typeface="Pretendard" pitchFamily="34" charset="-127"/>
+                          <a:cs typeface="Pretendard" pitchFamily="34" charset="-120"/>
                         </a:rPr>
                         <a:t>정책·제도</a:t>
                       </a:r>
                       <a:endParaRPr lang="ko-KR" altLang="en-US" sz="1200" dirty="0">
-                        <a:latin typeface="S-Core Dream 4 Regular" charset="0"/>
-                        <a:ea typeface="S-Core Dream 4 Regular" charset="0"/>
-                        <a:cs typeface="S-Core Dream 4 Regular" charset="0"/>
+                        <a:latin typeface="Pretendard" charset="0"/>
+                        <a:ea typeface="Pretendard" charset="0"/>
+                        <a:cs typeface="Pretendard" charset="0"/>
                       </a:endParaRPr>
                     </a:p>
                   </a:txBody>
@@ -6883,16 +6883,16 @@
                           <a:solidFill>
                             <a:srgbClr val="1E2A36"/>
                           </a:solidFill>
-                          <a:latin typeface="S-Core Dream 4 Regular" pitchFamily="34" charset="0"/>
-                          <a:ea typeface="S-Core Dream 4 Regular" pitchFamily="34" charset="-127"/>
-                          <a:cs typeface="S-Core Dream 4 Regular" pitchFamily="34" charset="-120"/>
+                          <a:latin typeface="Pretendard" pitchFamily="34" charset="0"/>
+                          <a:ea typeface="Pretendard" pitchFamily="34" charset="-127"/>
+                          <a:cs typeface="Pretendard" pitchFamily="34" charset="-120"/>
                         </a:rPr>
                         <a:t>개정·시행령 등 정책어, 주거급여 등</a:t>
                       </a:r>
                       <a:endParaRPr lang="ko-KR" altLang="en-US" sz="1200" dirty="0">
-                        <a:latin typeface="S-Core Dream 4 Regular" charset="0"/>
-                        <a:ea typeface="S-Core Dream 4 Regular" charset="0"/>
-                        <a:cs typeface="S-Core Dream 4 Regular" charset="0"/>
+                        <a:latin typeface="Pretendard" charset="0"/>
+                        <a:ea typeface="Pretendard" charset="0"/>
+                        <a:cs typeface="Pretendard" charset="0"/>
                       </a:endParaRPr>
                     </a:p>
                   </a:txBody>
@@ -6953,16 +6953,16 @@
                           <a:solidFill>
                             <a:srgbClr val="1E2A36"/>
                           </a:solidFill>
-                          <a:latin typeface="S-Core Dream 4 Regular" pitchFamily="34" charset="0"/>
-                          <a:ea typeface="S-Core Dream 4 Regular" pitchFamily="34" charset="-127"/>
-                          <a:cs typeface="S-Core Dream 4 Regular" pitchFamily="34" charset="-120"/>
+                          <a:latin typeface="Pretendard" pitchFamily="34" charset="0"/>
+                          <a:ea typeface="Pretendard" pitchFamily="34" charset="-127"/>
+                          <a:cs typeface="Pretendard" pitchFamily="34" charset="-120"/>
                         </a:rPr>
                         <a:t>모회사·부처</a:t>
                       </a:r>
                       <a:endParaRPr lang="ko-KR" altLang="en-US" sz="1200" dirty="0">
-                        <a:latin typeface="S-Core Dream 4 Regular" charset="0"/>
-                        <a:ea typeface="S-Core Dream 4 Regular" charset="0"/>
-                        <a:cs typeface="S-Core Dream 4 Regular" charset="0"/>
+                        <a:latin typeface="Pretendard" charset="0"/>
+                        <a:ea typeface="Pretendard" charset="0"/>
+                        <a:cs typeface="Pretendard" charset="0"/>
                       </a:endParaRPr>
                     </a:p>
                   </a:txBody>
@@ -7021,16 +7021,16 @@
                           <a:solidFill>
                             <a:srgbClr val="1E2A36"/>
                           </a:solidFill>
-                          <a:latin typeface="S-Core Dream 4 Regular" pitchFamily="34" charset="0"/>
-                          <a:ea typeface="S-Core Dream 4 Regular" pitchFamily="34" charset="-127"/>
-                          <a:cs typeface="S-Core Dream 4 Regular" pitchFamily="34" charset="-120"/>
+                          <a:latin typeface="Pretendard" pitchFamily="34" charset="0"/>
+                          <a:ea typeface="Pretendard" pitchFamily="34" charset="-127"/>
+                          <a:cs typeface="Pretendard" pitchFamily="34" charset="-120"/>
                         </a:rPr>
                         <a:t>LH·국토부 관련</a:t>
                       </a:r>
                       <a:endParaRPr lang="ko-KR" altLang="en-US" sz="1200" dirty="0">
-                        <a:latin typeface="S-Core Dream 4 Regular" charset="0"/>
-                        <a:ea typeface="S-Core Dream 4 Regular" charset="0"/>
-                        <a:cs typeface="S-Core Dream 4 Regular" charset="0"/>
+                        <a:latin typeface="Pretendard" charset="0"/>
+                        <a:ea typeface="Pretendard" charset="0"/>
+                        <a:cs typeface="Pretendard" charset="0"/>
                       </a:endParaRPr>
                     </a:p>
                   </a:txBody>
@@ -7091,16 +7091,16 @@
                           <a:solidFill>
                             <a:srgbClr val="1E2A36"/>
                           </a:solidFill>
-                          <a:latin typeface="S-Core Dream 4 Regular" pitchFamily="34" charset="0"/>
-                          <a:ea typeface="S-Core Dream 4 Regular" pitchFamily="34" charset="-127"/>
-                          <a:cs typeface="S-Core Dream 4 Regular" pitchFamily="34" charset="-120"/>
+                          <a:latin typeface="Pretendard" pitchFamily="34" charset="0"/>
+                          <a:ea typeface="Pretendard" pitchFamily="34" charset="-127"/>
+                          <a:cs typeface="Pretendard" pitchFamily="34" charset="-120"/>
                         </a:rPr>
                         <a:t>공공기관 공통</a:t>
                       </a:r>
                       <a:endParaRPr lang="ko-KR" altLang="en-US" sz="1200" dirty="0">
-                        <a:latin typeface="S-Core Dream 4 Regular" charset="0"/>
-                        <a:ea typeface="S-Core Dream 4 Regular" charset="0"/>
-                        <a:cs typeface="S-Core Dream 4 Regular" charset="0"/>
+                        <a:latin typeface="Pretendard" charset="0"/>
+                        <a:ea typeface="Pretendard" charset="0"/>
+                        <a:cs typeface="Pretendard" charset="0"/>
                       </a:endParaRPr>
                     </a:p>
                   </a:txBody>
@@ -7159,16 +7159,16 @@
                           <a:solidFill>
                             <a:srgbClr val="1E2A36"/>
                           </a:solidFill>
-                          <a:latin typeface="S-Core Dream 4 Regular" pitchFamily="34" charset="0"/>
-                          <a:ea typeface="S-Core Dream 4 Regular" pitchFamily="34" charset="-127"/>
-                          <a:cs typeface="S-Core Dream 4 Regular" pitchFamily="34" charset="-120"/>
+                          <a:latin typeface="Pretendard" pitchFamily="34" charset="0"/>
+                          <a:ea typeface="Pretendard" pitchFamily="34" charset="-127"/>
+                          <a:cs typeface="Pretendard" pitchFamily="34" charset="-120"/>
                         </a:rPr>
                         <a:t>경영평가·청렴도·산하기관</a:t>
                       </a:r>
                       <a:endParaRPr lang="ko-KR" altLang="en-US" sz="1200" dirty="0">
-                        <a:latin typeface="S-Core Dream 4 Regular" charset="0"/>
-                        <a:ea typeface="S-Core Dream 4 Regular" charset="0"/>
-                        <a:cs typeface="S-Core Dream 4 Regular" charset="0"/>
+                        <a:latin typeface="Pretendard" charset="0"/>
+                        <a:ea typeface="Pretendard" charset="0"/>
+                        <a:cs typeface="Pretendard" charset="0"/>
                       </a:endParaRPr>
                     </a:p>
                   </a:txBody>
@@ -7229,16 +7229,16 @@
                           <a:solidFill>
                             <a:srgbClr val="1E2A36"/>
                           </a:solidFill>
-                          <a:latin typeface="S-Core Dream 4 Regular" pitchFamily="34" charset="0"/>
-                          <a:ea typeface="S-Core Dream 4 Regular" pitchFamily="34" charset="-127"/>
-                          <a:cs typeface="S-Core Dream 4 Regular" pitchFamily="34" charset="-120"/>
+                          <a:latin typeface="Pretendard" pitchFamily="34" charset="0"/>
+                          <a:ea typeface="Pretendard" pitchFamily="34" charset="-127"/>
+                          <a:cs typeface="Pretendard" pitchFamily="34" charset="-120"/>
                         </a:rPr>
                         <a:t>업계·환경</a:t>
                       </a:r>
                       <a:endParaRPr lang="ko-KR" altLang="en-US" sz="1200" dirty="0">
-                        <a:latin typeface="S-Core Dream 4 Regular" charset="0"/>
-                        <a:ea typeface="S-Core Dream 4 Regular" charset="0"/>
-                        <a:cs typeface="S-Core Dream 4 Regular" charset="0"/>
+                        <a:latin typeface="Pretendard" charset="0"/>
+                        <a:ea typeface="Pretendard" charset="0"/>
+                        <a:cs typeface="Pretendard" charset="0"/>
                       </a:endParaRPr>
                     </a:p>
                   </a:txBody>
@@ -7297,16 +7297,16 @@
                           <a:solidFill>
                             <a:srgbClr val="1E2A36"/>
                           </a:solidFill>
-                          <a:latin typeface="S-Core Dream 4 Regular" pitchFamily="34" charset="0"/>
-                          <a:ea typeface="S-Core Dream 4 Regular" pitchFamily="34" charset="-127"/>
-                          <a:cs typeface="S-Core Dream 4 Regular" pitchFamily="34" charset="-120"/>
+                          <a:latin typeface="Pretendard" pitchFamily="34" charset="0"/>
+                          <a:ea typeface="Pretendard" pitchFamily="34" charset="-127"/>
+                          <a:cs typeface="Pretendard" pitchFamily="34" charset="-120"/>
                         </a:rPr>
                         <a:t>그 밖(공고 기사 포함)</a:t>
                       </a:r>
                       <a:endParaRPr lang="ko-KR" altLang="en-US" sz="1200" dirty="0">
-                        <a:latin typeface="S-Core Dream 4 Regular" charset="0"/>
-                        <a:ea typeface="S-Core Dream 4 Regular" charset="0"/>
-                        <a:cs typeface="S-Core Dream 4 Regular" charset="0"/>
+                        <a:latin typeface="Pretendard" charset="0"/>
+                        <a:ea typeface="Pretendard" charset="0"/>
+                        <a:cs typeface="Pretendard" charset="0"/>
                       </a:endParaRPr>
                     </a:p>
                   </a:txBody>
@@ -7434,13 +7434,13 @@
               <a:buNone/>
             </a:pPr>
             <a:r>
-              <a:rPr lang="ko-KR" altLang="en-US" sz="2000" dirty="0">
+              <a:rPr lang="ko-KR" altLang="en-US" sz="2000" b="1" dirty="0">
                 <a:solidFill>
                   <a:srgbClr val="FFFFFF"/>
                 </a:solidFill>
-                <a:latin typeface="S-Core Dream 7 ExtraBold" pitchFamily="34" charset="0"/>
-                <a:ea typeface="S-Core Dream 7 ExtraBold" pitchFamily="34" charset="-127"/>
-                <a:cs typeface="S-Core Dream 7 ExtraBold" pitchFamily="34" charset="-120"/>
+                <a:latin typeface="Pretendard" pitchFamily="34" charset="0"/>
+                <a:ea typeface="Pretendard" pitchFamily="34" charset="-127"/>
+                <a:cs typeface="Pretendard" pitchFamily="34" charset="-120"/>
               </a:rPr>
               <a:t>03</a:t>
             </a:r>
@@ -7477,9 +7477,9 @@
                 <a:solidFill>
                   <a:srgbClr val="2E7D8C"/>
                 </a:solidFill>
-                <a:latin typeface="S-Core Dream 5 Medium" pitchFamily="34" charset="0"/>
-                <a:ea typeface="S-Core Dream 5 Medium" pitchFamily="34" charset="-127"/>
-                <a:cs typeface="S-Core Dream 5 Medium" pitchFamily="34" charset="-120"/>
+                <a:latin typeface="Pretendard SemiBold" pitchFamily="34" charset="0"/>
+                <a:ea typeface="Pretendard SemiBold" pitchFamily="34" charset="-127"/>
+                <a:cs typeface="Pretendard SemiBold" pitchFamily="34" charset="-120"/>
               </a:rPr>
               <a:t>프로 · AI 선별</a:t>
             </a:r>
@@ -7512,13 +7512,13 @@
               <a:buNone/>
             </a:pPr>
             <a:r>
-              <a:rPr lang="ko-KR" altLang="en-US" sz="2600" dirty="0">
+              <a:rPr lang="ko-KR" altLang="en-US" sz="2600" b="1" dirty="0">
                 <a:solidFill>
                   <a:srgbClr val="1F3B5C"/>
                 </a:solidFill>
-                <a:latin typeface="S-Core Dream 7 ExtraBold" pitchFamily="34" charset="0"/>
-                <a:ea typeface="S-Core Dream 7 ExtraBold" pitchFamily="34" charset="-127"/>
-                <a:cs typeface="S-Core Dream 7 ExtraBold" pitchFamily="34" charset="-120"/>
+                <a:latin typeface="Pretendard" pitchFamily="34" charset="0"/>
+                <a:ea typeface="Pretendard" pitchFamily="34" charset="-127"/>
+                <a:cs typeface="Pretendard" pitchFamily="34" charset="-120"/>
               </a:rPr>
               <a:t>AI 선별: 요청문 복사 → Claude → 결과 붙여넣기</a:t>
             </a:r>
@@ -7555,9 +7555,9 @@
                 <a:solidFill>
                   <a:srgbClr val="667385"/>
                 </a:solidFill>
-                <a:latin typeface="S-Core Dream 4 Regular" pitchFamily="34" charset="0"/>
-                <a:ea typeface="S-Core Dream 4 Regular" pitchFamily="34" charset="-127"/>
-                <a:cs typeface="S-Core Dream 4 Regular" pitchFamily="34" charset="-120"/>
+                <a:latin typeface="Pretendard" pitchFamily="34" charset="0"/>
+                <a:ea typeface="Pretendard" pitchFamily="34" charset="-127"/>
+                <a:cs typeface="Pretendard" pitchFamily="34" charset="-120"/>
               </a:rPr>
               <a:t>앱이 AI를 직접 부르지 않습니다. 담당자가 복사·붙여넣기로 이어 줍니다</a:t>
             </a:r>
@@ -7658,13 +7658,13 @@
               <a:buNone/>
             </a:pPr>
             <a:r>
-              <a:rPr lang="ko-KR" altLang="en-US" sz="1700" dirty="0">
+              <a:rPr lang="ko-KR" altLang="en-US" sz="1700" b="1" dirty="0">
                 <a:solidFill>
                   <a:srgbClr val="E8A33D"/>
                 </a:solidFill>
-                <a:latin typeface="S-Core Dream 7 ExtraBold" pitchFamily="34" charset="0"/>
-                <a:ea typeface="S-Core Dream 7 ExtraBold" pitchFamily="34" charset="-127"/>
-                <a:cs typeface="S-Core Dream 7 ExtraBold" pitchFamily="34" charset="-120"/>
+                <a:latin typeface="Pretendard" pitchFamily="34" charset="0"/>
+                <a:ea typeface="Pretendard" pitchFamily="34" charset="-127"/>
+                <a:cs typeface="Pretendard" pitchFamily="34" charset="-120"/>
               </a:rPr>
               <a:t>③</a:t>
             </a:r>
@@ -7719,13 +7719,13 @@
               <a:buNone/>
             </a:pPr>
             <a:r>
-              <a:rPr lang="ko-KR" altLang="en-US" sz="1700" dirty="0">
+              <a:rPr lang="ko-KR" altLang="en-US" sz="1700" b="1" dirty="0">
                 <a:solidFill>
                   <a:srgbClr val="E8A33D"/>
                 </a:solidFill>
-                <a:latin typeface="S-Core Dream 7 ExtraBold" pitchFamily="34" charset="0"/>
-                <a:ea typeface="S-Core Dream 7 ExtraBold" pitchFamily="34" charset="-127"/>
-                <a:cs typeface="S-Core Dream 7 ExtraBold" pitchFamily="34" charset="-120"/>
+                <a:latin typeface="Pretendard" pitchFamily="34" charset="0"/>
+                <a:ea typeface="Pretendard" pitchFamily="34" charset="-127"/>
+                <a:cs typeface="Pretendard" pitchFamily="34" charset="-120"/>
               </a:rPr>
               <a:t>④</a:t>
             </a:r>
@@ -7762,9 +7762,9 @@
                 <a:solidFill>
                   <a:srgbClr val="1F3B5C"/>
                 </a:solidFill>
-                <a:latin typeface="S-Core Dream 5 Medium" pitchFamily="34" charset="0"/>
-                <a:ea typeface="S-Core Dream 5 Medium" pitchFamily="34" charset="-127"/>
-                <a:cs typeface="S-Core Dream 5 Medium" pitchFamily="34" charset="-120"/>
+                <a:latin typeface="Pretendard SemiBold" pitchFamily="34" charset="0"/>
+                <a:ea typeface="Pretendard SemiBold" pitchFamily="34" charset="-127"/>
+                <a:cs typeface="Pretendard SemiBold" pitchFamily="34" charset="-120"/>
               </a:rPr>
               <a:t>① [AI 선별 요청문 복사]</a:t>
             </a:r>
@@ -7782,9 +7782,9 @@
                 <a:solidFill>
                   <a:srgbClr val="1E2A36"/>
                 </a:solidFill>
-                <a:latin typeface="S-Core Dream 4 Regular" pitchFamily="34" charset="0"/>
-                <a:ea typeface="S-Core Dream 4 Regular" pitchFamily="34" charset="-127"/>
-                <a:cs typeface="S-Core Dream 4 Regular" pitchFamily="34" charset="-120"/>
+                <a:latin typeface="Pretendard" pitchFamily="34" charset="0"/>
+                <a:ea typeface="Pretendard" pitchFamily="34" charset="-127"/>
+                <a:cs typeface="Pretendard" pitchFamily="34" charset="-120"/>
               </a:rPr>
               <a:t>선택된 기사들이 순번과 함께 복사됩니다</a:t>
             </a:r>
@@ -7802,9 +7802,9 @@
                 <a:solidFill>
                   <a:srgbClr val="1F3B5C"/>
                 </a:solidFill>
-                <a:latin typeface="S-Core Dream 5 Medium" pitchFamily="34" charset="0"/>
-                <a:ea typeface="S-Core Dream 5 Medium" pitchFamily="34" charset="-127"/>
-                <a:cs typeface="S-Core Dream 5 Medium" pitchFamily="34" charset="-120"/>
+                <a:latin typeface="Pretendard SemiBold" pitchFamily="34" charset="0"/>
+                <a:ea typeface="Pretendard SemiBold" pitchFamily="34" charset="-127"/>
+                <a:cs typeface="Pretendard SemiBold" pitchFamily="34" charset="-120"/>
               </a:rPr>
               <a:t>② Claude 프로젝트에 붙여넣기</a:t>
             </a:r>
@@ -7822,9 +7822,9 @@
                 <a:solidFill>
                   <a:srgbClr val="1E2A36"/>
                 </a:solidFill>
-                <a:latin typeface="S-Core Dream 4 Regular" pitchFamily="34" charset="0"/>
-                <a:ea typeface="S-Core Dream 4 Regular" pitchFamily="34" charset="-127"/>
-                <a:cs typeface="S-Core Dream 4 Regular" pitchFamily="34" charset="-120"/>
+                <a:latin typeface="Pretendard" pitchFamily="34" charset="0"/>
+                <a:ea typeface="Pretendard" pitchFamily="34" charset="-127"/>
+                <a:cs typeface="Pretendard" pitchFamily="34" charset="-120"/>
               </a:rPr>
               <a:t>판단 기준서가 들어 있는 프로젝트 채팅에 Ctrl+V → 보내기</a:t>
             </a:r>
@@ -7842,9 +7842,9 @@
                 <a:solidFill>
                   <a:srgbClr val="1F3B5C"/>
                 </a:solidFill>
-                <a:latin typeface="S-Core Dream 5 Medium" pitchFamily="34" charset="0"/>
-                <a:ea typeface="S-Core Dream 5 Medium" pitchFamily="34" charset="-127"/>
-                <a:cs typeface="S-Core Dream 5 Medium" pitchFamily="34" charset="-120"/>
+                <a:latin typeface="Pretendard SemiBold" pitchFamily="34" charset="0"/>
+                <a:ea typeface="Pretendard SemiBold" pitchFamily="34" charset="-127"/>
+                <a:cs typeface="Pretendard SemiBold" pitchFamily="34" charset="-120"/>
               </a:rPr>
               <a:t>③ [선정 결과 붙여넣기]</a:t>
             </a:r>
@@ -7862,9 +7862,9 @@
                 <a:solidFill>
                   <a:srgbClr val="1E2A36"/>
                 </a:solidFill>
-                <a:latin typeface="S-Core Dream 4 Regular" pitchFamily="34" charset="0"/>
-                <a:ea typeface="S-Core Dream 4 Regular" pitchFamily="34" charset="-127"/>
-                <a:cs typeface="S-Core Dream 4 Regular" pitchFamily="34" charset="-120"/>
+                <a:latin typeface="Pretendard" pitchFamily="34" charset="0"/>
+                <a:ea typeface="Pretendard" pitchFamily="34" charset="-127"/>
+                <a:cs typeface="Pretendard" pitchFamily="34" charset="-120"/>
               </a:rPr>
               <a:t>답변의 '#선정' 아래 줄(번호|분류|인사이트)을 붙여 넣기</a:t>
             </a:r>
@@ -7882,9 +7882,9 @@
                 <a:solidFill>
                   <a:srgbClr val="1F3B5C"/>
                 </a:solidFill>
-                <a:latin typeface="S-Core Dream 5 Medium" pitchFamily="34" charset="0"/>
-                <a:ea typeface="S-Core Dream 5 Medium" pitchFamily="34" charset="-127"/>
-                <a:cs typeface="S-Core Dream 5 Medium" pitchFamily="34" charset="-120"/>
+                <a:latin typeface="Pretendard SemiBold" pitchFamily="34" charset="0"/>
+                <a:ea typeface="Pretendard SemiBold" pitchFamily="34" charset="-127"/>
+                <a:cs typeface="Pretendard SemiBold" pitchFamily="34" charset="-120"/>
               </a:rPr>
               <a:t>④ [적용]</a:t>
             </a:r>
@@ -7902,9 +7902,9 @@
                 <a:solidFill>
                   <a:srgbClr val="1E2A36"/>
                 </a:solidFill>
-                <a:latin typeface="S-Core Dream 4 Regular" pitchFamily="34" charset="0"/>
-                <a:ea typeface="S-Core Dream 4 Regular" pitchFamily="34" charset="-127"/>
-                <a:cs typeface="S-Core Dream 4 Regular" pitchFamily="34" charset="-120"/>
+                <a:latin typeface="Pretendard" pitchFamily="34" charset="0"/>
+                <a:ea typeface="Pretendard" pitchFamily="34" charset="-127"/>
+                <a:cs typeface="Pretendard" pitchFamily="34" charset="-120"/>
               </a:rPr>
               <a:t>고른 기사만 선택되고 분류·인사이트가 붙어 맨 위로</a:t>
             </a:r>
@@ -7989,13 +7989,13 @@
               <a:buNone/>
             </a:pPr>
             <a:r>
-              <a:rPr lang="ko-KR" altLang="en-US" sz="2000" dirty="0">
+              <a:rPr lang="ko-KR" altLang="en-US" sz="2000" b="1" dirty="0">
                 <a:solidFill>
                   <a:srgbClr val="FFFFFF"/>
                 </a:solidFill>
-                <a:latin typeface="S-Core Dream 7 ExtraBold" pitchFamily="34" charset="0"/>
-                <a:ea typeface="S-Core Dream 7 ExtraBold" pitchFamily="34" charset="-127"/>
-                <a:cs typeface="S-Core Dream 7 ExtraBold" pitchFamily="34" charset="-120"/>
+                <a:latin typeface="Pretendard" pitchFamily="34" charset="0"/>
+                <a:ea typeface="Pretendard" pitchFamily="34" charset="-127"/>
+                <a:cs typeface="Pretendard" pitchFamily="34" charset="-120"/>
               </a:rPr>
               <a:t>03</a:t>
             </a:r>
@@ -8032,9 +8032,9 @@
                 <a:solidFill>
                   <a:srgbClr val="2E7D8C"/>
                 </a:solidFill>
-                <a:latin typeface="S-Core Dream 5 Medium" pitchFamily="34" charset="0"/>
-                <a:ea typeface="S-Core Dream 5 Medium" pitchFamily="34" charset="-127"/>
-                <a:cs typeface="S-Core Dream 5 Medium" pitchFamily="34" charset="-120"/>
+                <a:latin typeface="Pretendard SemiBold" pitchFamily="34" charset="0"/>
+                <a:ea typeface="Pretendard SemiBold" pitchFamily="34" charset="-127"/>
+                <a:cs typeface="Pretendard SemiBold" pitchFamily="34" charset="-120"/>
               </a:rPr>
               <a:t>프로 · 순서와 보고서</a:t>
             </a:r>
@@ -8067,13 +8067,13 @@
               <a:buNone/>
             </a:pPr>
             <a:r>
-              <a:rPr lang="ko-KR" altLang="en-US" sz="2600" dirty="0">
+              <a:rPr lang="ko-KR" altLang="en-US" sz="2600" b="1" dirty="0">
                 <a:solidFill>
                   <a:srgbClr val="1F3B5C"/>
                 </a:solidFill>
-                <a:latin typeface="S-Core Dream 7 ExtraBold" pitchFamily="34" charset="0"/>
-                <a:ea typeface="S-Core Dream 7 ExtraBold" pitchFamily="34" charset="-127"/>
-                <a:cs typeface="S-Core Dream 7 ExtraBold" pitchFamily="34" charset="-120"/>
+                <a:latin typeface="Pretendard" pitchFamily="34" charset="0"/>
+                <a:ea typeface="Pretendard" pitchFamily="34" charset="-127"/>
+                <a:cs typeface="Pretendard" pitchFamily="34" charset="-120"/>
               </a:rPr>
               <a:t>순서를 정하면 그대로 보고서에</a:t>
             </a:r>
@@ -8110,9 +8110,9 @@
                 <a:solidFill>
                   <a:srgbClr val="667385"/>
                 </a:solidFill>
-                <a:latin typeface="S-Core Dream 4 Regular" pitchFamily="34" charset="0"/>
-                <a:ea typeface="S-Core Dream 4 Regular" pitchFamily="34" charset="-127"/>
-                <a:cs typeface="S-Core Dream 4 Regular" pitchFamily="34" charset="-120"/>
+                <a:latin typeface="Pretendard" pitchFamily="34" charset="0"/>
+                <a:ea typeface="Pretendard" pitchFamily="34" charset="-127"/>
+                <a:cs typeface="Pretendard" pitchFamily="34" charset="-120"/>
               </a:rPr>
               <a:t>선택한 기사를 맨 위로 모은 뒤 중요한 순서로 끌어 놓습니다</a:t>
             </a:r>
@@ -8213,13 +8213,13 @@
               <a:buNone/>
             </a:pPr>
             <a:r>
-              <a:rPr lang="ko-KR" altLang="en-US" sz="1700" dirty="0">
+              <a:rPr lang="ko-KR" altLang="en-US" sz="1700" b="1" dirty="0">
                 <a:solidFill>
                   <a:srgbClr val="E8A33D"/>
                 </a:solidFill>
-                <a:latin typeface="S-Core Dream 7 ExtraBold" pitchFamily="34" charset="0"/>
-                <a:ea typeface="S-Core Dream 7 ExtraBold" pitchFamily="34" charset="-127"/>
-                <a:cs typeface="S-Core Dream 7 ExtraBold" pitchFamily="34" charset="-120"/>
+                <a:latin typeface="Pretendard" pitchFamily="34" charset="0"/>
+                <a:ea typeface="Pretendard" pitchFamily="34" charset="-127"/>
+                <a:cs typeface="Pretendard" pitchFamily="34" charset="-120"/>
               </a:rPr>
               <a:t>①</a:t>
             </a:r>
@@ -8274,13 +8274,13 @@
               <a:buNone/>
             </a:pPr>
             <a:r>
-              <a:rPr lang="ko-KR" altLang="en-US" sz="1700" dirty="0">
+              <a:rPr lang="ko-KR" altLang="en-US" sz="1700" b="1" dirty="0">
                 <a:solidFill>
                   <a:srgbClr val="E8A33D"/>
                 </a:solidFill>
-                <a:latin typeface="S-Core Dream 7 ExtraBold" pitchFamily="34" charset="0"/>
-                <a:ea typeface="S-Core Dream 7 ExtraBold" pitchFamily="34" charset="-127"/>
-                <a:cs typeface="S-Core Dream 7 ExtraBold" pitchFamily="34" charset="-120"/>
+                <a:latin typeface="Pretendard" pitchFamily="34" charset="0"/>
+                <a:ea typeface="Pretendard" pitchFamily="34" charset="-127"/>
+                <a:cs typeface="Pretendard" pitchFamily="34" charset="-120"/>
               </a:rPr>
               <a:t>②</a:t>
             </a:r>
@@ -8335,13 +8335,13 @@
               <a:buNone/>
             </a:pPr>
             <a:r>
-              <a:rPr lang="ko-KR" altLang="en-US" sz="1700" dirty="0">
+              <a:rPr lang="ko-KR" altLang="en-US" sz="1700" b="1" dirty="0">
                 <a:solidFill>
                   <a:srgbClr val="E8A33D"/>
                 </a:solidFill>
-                <a:latin typeface="S-Core Dream 7 ExtraBold" pitchFamily="34" charset="0"/>
-                <a:ea typeface="S-Core Dream 7 ExtraBold" pitchFamily="34" charset="-127"/>
-                <a:cs typeface="S-Core Dream 7 ExtraBold" pitchFamily="34" charset="-120"/>
+                <a:latin typeface="Pretendard" pitchFamily="34" charset="0"/>
+                <a:ea typeface="Pretendard" pitchFamily="34" charset="-127"/>
+                <a:cs typeface="Pretendard" pitchFamily="34" charset="-120"/>
               </a:rPr>
               <a:t>③</a:t>
             </a:r>
@@ -8396,13 +8396,13 @@
               <a:buNone/>
             </a:pPr>
             <a:r>
-              <a:rPr lang="ko-KR" altLang="en-US" sz="1700" dirty="0">
+              <a:rPr lang="ko-KR" altLang="en-US" sz="1700" b="1" dirty="0">
                 <a:solidFill>
                   <a:srgbClr val="E8A33D"/>
                 </a:solidFill>
-                <a:latin typeface="S-Core Dream 7 ExtraBold" pitchFamily="34" charset="0"/>
-                <a:ea typeface="S-Core Dream 7 ExtraBold" pitchFamily="34" charset="-127"/>
-                <a:cs typeface="S-Core Dream 7 ExtraBold" pitchFamily="34" charset="-120"/>
+                <a:latin typeface="Pretendard" pitchFamily="34" charset="0"/>
+                <a:ea typeface="Pretendard" pitchFamily="34" charset="-127"/>
+                <a:cs typeface="Pretendard" pitchFamily="34" charset="-120"/>
               </a:rPr>
               <a:t>④</a:t>
             </a:r>
@@ -8439,9 +8439,9 @@
                 <a:solidFill>
                   <a:srgbClr val="1F3B5C"/>
                 </a:solidFill>
-                <a:latin typeface="S-Core Dream 5 Medium" pitchFamily="34" charset="0"/>
-                <a:ea typeface="S-Core Dream 5 Medium" pitchFamily="34" charset="-127"/>
-                <a:cs typeface="S-Core Dream 5 Medium" pitchFamily="34" charset="-120"/>
+                <a:latin typeface="Pretendard SemiBold" pitchFamily="34" charset="0"/>
+                <a:ea typeface="Pretendard SemiBold" pitchFamily="34" charset="-127"/>
+                <a:cs typeface="Pretendard SemiBold" pitchFamily="34" charset="-120"/>
               </a:rPr>
               <a:t>① 순서 줄</a:t>
             </a:r>
@@ -8459,9 +8459,9 @@
                 <a:solidFill>
                   <a:srgbClr val="1E2A36"/>
                 </a:solidFill>
-                <a:latin typeface="S-Core Dream 4 Regular" pitchFamily="34" charset="0"/>
-                <a:ea typeface="S-Core Dream 4 Regular" pitchFamily="34" charset="-127"/>
-                <a:cs typeface="S-Core Dream 4 Regular" pitchFamily="34" charset="-120"/>
+                <a:latin typeface="Pretendard" pitchFamily="34" charset="0"/>
+                <a:ea typeface="Pretendard" pitchFamily="34" charset="-127"/>
+                <a:cs typeface="Pretendard" pitchFamily="34" charset="-120"/>
               </a:rPr>
               <a:t>[선택 항목 맨 위로] · [▲ 위로] · [▼ 아래로]</a:t>
             </a:r>
@@ -8479,9 +8479,9 @@
                 <a:solidFill>
                   <a:srgbClr val="1F3B5C"/>
                 </a:solidFill>
-                <a:latin typeface="S-Core Dream 5 Medium" pitchFamily="34" charset="0"/>
-                <a:ea typeface="S-Core Dream 5 Medium" pitchFamily="34" charset="-127"/>
-                <a:cs typeface="S-Core Dream 5 Medium" pitchFamily="34" charset="-120"/>
+                <a:latin typeface="Pretendard SemiBold" pitchFamily="34" charset="0"/>
+                <a:ea typeface="Pretendard SemiBold" pitchFamily="34" charset="-127"/>
+                <a:cs typeface="Pretendard SemiBold" pitchFamily="34" charset="-120"/>
               </a:rPr>
               <a:t>② 순번</a:t>
             </a:r>
@@ -8499,9 +8499,9 @@
                 <a:solidFill>
                   <a:srgbClr val="1E2A36"/>
                 </a:solidFill>
-                <a:latin typeface="S-Core Dream 4 Regular" pitchFamily="34" charset="0"/>
-                <a:ea typeface="S-Core Dream 4 Regular" pitchFamily="34" charset="-127"/>
-                <a:cs typeface="S-Core Dream 4 Regular" pitchFamily="34" charset="-120"/>
+                <a:latin typeface="Pretendard" pitchFamily="34" charset="0"/>
+                <a:ea typeface="Pretendard" pitchFamily="34" charset="-127"/>
+                <a:cs typeface="Pretendard" pitchFamily="34" charset="-120"/>
               </a:rPr>
               <a:t>AI가 말한 번호와 같은 번호</a:t>
             </a:r>
@@ -8519,9 +8519,9 @@
                 <a:solidFill>
                   <a:srgbClr val="1F3B5C"/>
                 </a:solidFill>
-                <a:latin typeface="S-Core Dream 5 Medium" pitchFamily="34" charset="0"/>
-                <a:ea typeface="S-Core Dream 5 Medium" pitchFamily="34" charset="-127"/>
-                <a:cs typeface="S-Core Dream 5 Medium" pitchFamily="34" charset="-120"/>
+                <a:latin typeface="Pretendard SemiBold" pitchFamily="34" charset="0"/>
+                <a:ea typeface="Pretendard SemiBold" pitchFamily="34" charset="-127"/>
+                <a:cs typeface="Pretendard SemiBold" pitchFamily="34" charset="-120"/>
               </a:rPr>
               <a:t>③ 선택한 기사</a:t>
             </a:r>
@@ -8539,9 +8539,9 @@
                 <a:solidFill>
                   <a:srgbClr val="1E2A36"/>
                 </a:solidFill>
-                <a:latin typeface="S-Core Dream 4 Regular" pitchFamily="34" charset="0"/>
-                <a:ea typeface="S-Core Dream 4 Regular" pitchFamily="34" charset="-127"/>
-                <a:cs typeface="S-Core Dream 4 Regular" pitchFamily="34" charset="-120"/>
+                <a:latin typeface="Pretendard" pitchFamily="34" charset="0"/>
+                <a:ea typeface="Pretendard" pitchFamily="34" charset="-127"/>
+                <a:cs typeface="Pretendard" pitchFamily="34" charset="-120"/>
               </a:rPr>
               <a:t>끌어 놓아 중요한 순서로</a:t>
             </a:r>
@@ -8559,9 +8559,9 @@
                 <a:solidFill>
                   <a:srgbClr val="1F3B5C"/>
                 </a:solidFill>
-                <a:latin typeface="S-Core Dream 5 Medium" pitchFamily="34" charset="0"/>
-                <a:ea typeface="S-Core Dream 5 Medium" pitchFamily="34" charset="-127"/>
-                <a:cs typeface="S-Core Dream 5 Medium" pitchFamily="34" charset="-120"/>
+                <a:latin typeface="Pretendard SemiBold" pitchFamily="34" charset="0"/>
+                <a:ea typeface="Pretendard SemiBold" pitchFamily="34" charset="-127"/>
+                <a:cs typeface="Pretendard SemiBold" pitchFamily="34" charset="-120"/>
               </a:rPr>
               <a:t>④ [HTML 보고서 열기]</a:t>
             </a:r>
@@ -8579,9 +8579,9 @@
                 <a:solidFill>
                   <a:srgbClr val="1E2A36"/>
                 </a:solidFill>
-                <a:latin typeface="S-Core Dream 4 Regular" pitchFamily="34" charset="0"/>
-                <a:ea typeface="S-Core Dream 4 Regular" pitchFamily="34" charset="-127"/>
-                <a:cs typeface="S-Core Dream 4 Regular" pitchFamily="34" charset="-120"/>
+                <a:latin typeface="Pretendard" pitchFamily="34" charset="0"/>
+                <a:ea typeface="Pretendard" pitchFamily="34" charset="-127"/>
+                <a:cs typeface="Pretendard" pitchFamily="34" charset="-120"/>
               </a:rPr>
               <a:t>본문 ①은 표 순서 그대로, ②는 분류 묶음을 처음 나오는 순서로</a:t>
             </a:r>
@@ -8666,13 +8666,13 @@
               <a:buNone/>
             </a:pPr>
             <a:r>
-              <a:rPr lang="ko-KR" altLang="en-US" sz="2000" dirty="0">
+              <a:rPr lang="ko-KR" altLang="en-US" sz="2000" b="1" dirty="0">
                 <a:solidFill>
                   <a:srgbClr val="FFFFFF"/>
                 </a:solidFill>
-                <a:latin typeface="S-Core Dream 7 ExtraBold" pitchFamily="34" charset="0"/>
-                <a:ea typeface="S-Core Dream 7 ExtraBold" pitchFamily="34" charset="-127"/>
-                <a:cs typeface="S-Core Dream 7 ExtraBold" pitchFamily="34" charset="-120"/>
+                <a:latin typeface="Pretendard" pitchFamily="34" charset="0"/>
+                <a:ea typeface="Pretendard" pitchFamily="34" charset="-127"/>
+                <a:cs typeface="Pretendard" pitchFamily="34" charset="-120"/>
               </a:rPr>
               <a:t>03</a:t>
             </a:r>
@@ -8709,9 +8709,9 @@
                 <a:solidFill>
                   <a:srgbClr val="2E7D8C"/>
                 </a:solidFill>
-                <a:latin typeface="S-Core Dream 5 Medium" pitchFamily="34" charset="0"/>
-                <a:ea typeface="S-Core Dream 5 Medium" pitchFamily="34" charset="-127"/>
-                <a:cs typeface="S-Core Dream 5 Medium" pitchFamily="34" charset="-120"/>
+                <a:latin typeface="Pretendard SemiBold" pitchFamily="34" charset="0"/>
+                <a:ea typeface="Pretendard SemiBold" pitchFamily="34" charset="-127"/>
+                <a:cs typeface="Pretendard SemiBold" pitchFamily="34" charset="-120"/>
               </a:rPr>
               <a:t>프로 · 결과 엑셀</a:t>
             </a:r>
@@ -8744,13 +8744,13 @@
               <a:buNone/>
             </a:pPr>
             <a:r>
-              <a:rPr lang="ko-KR" altLang="en-US" sz="2600" dirty="0">
+              <a:rPr lang="ko-KR" altLang="en-US" sz="2600" b="1" dirty="0">
                 <a:solidFill>
                   <a:srgbClr val="1F3B5C"/>
                 </a:solidFill>
-                <a:latin typeface="S-Core Dream 7 ExtraBold" pitchFamily="34" charset="0"/>
-                <a:ea typeface="S-Core Dream 7 ExtraBold" pitchFamily="34" charset="-127"/>
-                <a:cs typeface="S-Core Dream 7 ExtraBold" pitchFamily="34" charset="-120"/>
+                <a:latin typeface="Pretendard" pitchFamily="34" charset="0"/>
+                <a:ea typeface="Pretendard" pitchFamily="34" charset="-127"/>
+                <a:cs typeface="Pretendard" pitchFamily="34" charset="-120"/>
               </a:rPr>
               <a:t>결과 엑셀: 앱 판단과 내 판단을 나란히</a:t>
             </a:r>
@@ -8787,9 +8787,9 @@
                 <a:solidFill>
                   <a:srgbClr val="667385"/>
                 </a:solidFill>
-                <a:latin typeface="S-Core Dream 4 Regular" pitchFamily="34" charset="0"/>
-                <a:ea typeface="S-Core Dream 4 Regular" pitchFamily="34" charset="-127"/>
-                <a:cs typeface="S-Core Dream 4 Regular" pitchFamily="34" charset="-120"/>
+                <a:latin typeface="Pretendard" pitchFamily="34" charset="0"/>
+                <a:ea typeface="Pretendard" pitchFamily="34" charset="-127"/>
+                <a:cs typeface="Pretendard" pitchFamily="34" charset="-120"/>
               </a:rPr>
               <a:t>프로 탭 왼쪽 아래 [⤓ 결과 엑셀로 내려받기] — 규칙 개선(환류)의 재료입니다</a:t>
             </a:r>
@@ -8838,16 +8838,16 @@
                           <a:solidFill>
                             <a:srgbClr val="FFFFFF"/>
                           </a:solidFill>
-                          <a:latin typeface="S-Core Dream 5 Medium" pitchFamily="34" charset="0"/>
-                          <a:ea typeface="S-Core Dream 5 Medium" pitchFamily="34" charset="-127"/>
-                          <a:cs typeface="S-Core Dream 5 Medium" pitchFamily="34" charset="-120"/>
+                          <a:latin typeface="Pretendard SemiBold" pitchFamily="34" charset="0"/>
+                          <a:ea typeface="Pretendard SemiBold" pitchFamily="34" charset="-127"/>
+                          <a:cs typeface="Pretendard SemiBold" pitchFamily="34" charset="-120"/>
                         </a:rPr>
                         <a:t>시트</a:t>
                       </a:r>
                       <a:endParaRPr lang="ko-KR" altLang="en-US" sz="1300" dirty="0">
-                        <a:latin typeface="S-Core Dream 5 Medium" charset="0"/>
-                        <a:ea typeface="S-Core Dream 5 Medium" charset="0"/>
-                        <a:cs typeface="S-Core Dream 5 Medium" charset="0"/>
+                        <a:latin typeface="Pretendard SemiBold" charset="0"/>
+                        <a:ea typeface="Pretendard SemiBold" charset="0"/>
+                        <a:cs typeface="Pretendard SemiBold" charset="0"/>
                       </a:endParaRPr>
                     </a:p>
                   </a:txBody>
@@ -8906,16 +8906,16 @@
                           <a:solidFill>
                             <a:srgbClr val="FFFFFF"/>
                           </a:solidFill>
-                          <a:latin typeface="S-Core Dream 5 Medium" pitchFamily="34" charset="0"/>
-                          <a:ea typeface="S-Core Dream 5 Medium" pitchFamily="34" charset="-127"/>
-                          <a:cs typeface="S-Core Dream 5 Medium" pitchFamily="34" charset="-120"/>
+                          <a:latin typeface="Pretendard SemiBold" pitchFamily="34" charset="0"/>
+                          <a:ea typeface="Pretendard SemiBold" pitchFamily="34" charset="-127"/>
+                          <a:cs typeface="Pretendard SemiBold" pitchFamily="34" charset="-120"/>
                         </a:rPr>
                         <a:t>담긴 것</a:t>
                       </a:r>
                       <a:endParaRPr lang="ko-KR" altLang="en-US" sz="1300" dirty="0">
-                        <a:latin typeface="S-Core Dream 5 Medium" charset="0"/>
-                        <a:ea typeface="S-Core Dream 5 Medium" charset="0"/>
-                        <a:cs typeface="S-Core Dream 5 Medium" charset="0"/>
+                        <a:latin typeface="Pretendard SemiBold" charset="0"/>
+                        <a:ea typeface="Pretendard SemiBold" charset="0"/>
+                        <a:cs typeface="Pretendard SemiBold" charset="0"/>
                       </a:endParaRPr>
                     </a:p>
                   </a:txBody>
@@ -8974,16 +8974,16 @@
                           <a:solidFill>
                             <a:srgbClr val="FFFFFF"/>
                           </a:solidFill>
-                          <a:latin typeface="S-Core Dream 5 Medium" pitchFamily="34" charset="0"/>
-                          <a:ea typeface="S-Core Dream 5 Medium" pitchFamily="34" charset="-127"/>
-                          <a:cs typeface="S-Core Dream 5 Medium" pitchFamily="34" charset="-120"/>
+                          <a:latin typeface="Pretendard SemiBold" pitchFamily="34" charset="0"/>
+                          <a:ea typeface="Pretendard SemiBold" pitchFamily="34" charset="-127"/>
+                          <a:cs typeface="Pretendard SemiBold" pitchFamily="34" charset="-120"/>
                         </a:rPr>
                         <a:t>쓰는 곳</a:t>
                       </a:r>
                       <a:endParaRPr lang="ko-KR" altLang="en-US" sz="1300" dirty="0">
-                        <a:latin typeface="S-Core Dream 5 Medium" charset="0"/>
-                        <a:ea typeface="S-Core Dream 5 Medium" charset="0"/>
-                        <a:cs typeface="S-Core Dream 5 Medium" charset="0"/>
+                        <a:latin typeface="Pretendard SemiBold" charset="0"/>
+                        <a:ea typeface="Pretendard SemiBold" charset="0"/>
+                        <a:cs typeface="Pretendard SemiBold" charset="0"/>
                       </a:endParaRPr>
                     </a:p>
                   </a:txBody>
@@ -9044,16 +9044,16 @@
                           <a:solidFill>
                             <a:srgbClr val="1E2A36"/>
                           </a:solidFill>
-                          <a:latin typeface="S-Core Dream 4 Regular" pitchFamily="34" charset="0"/>
-                          <a:ea typeface="S-Core Dream 4 Regular" pitchFamily="34" charset="-127"/>
-                          <a:cs typeface="S-Core Dream 4 Regular" pitchFamily="34" charset="-120"/>
+                          <a:latin typeface="Pretendard" pitchFamily="34" charset="0"/>
+                          <a:ea typeface="Pretendard" pitchFamily="34" charset="-127"/>
+                          <a:cs typeface="Pretendard" pitchFamily="34" charset="-120"/>
                         </a:rPr>
                         <a:t>조회결과</a:t>
                       </a:r>
                       <a:endParaRPr lang="ko-KR" altLang="en-US" sz="1300" dirty="0">
-                        <a:latin typeface="S-Core Dream 4 Regular" charset="0"/>
-                        <a:ea typeface="S-Core Dream 4 Regular" charset="0"/>
-                        <a:cs typeface="S-Core Dream 4 Regular" charset="0"/>
+                        <a:latin typeface="Pretendard" charset="0"/>
+                        <a:ea typeface="Pretendard" charset="0"/>
+                        <a:cs typeface="Pretendard" charset="0"/>
                       </a:endParaRPr>
                     </a:p>
                   </a:txBody>
@@ -9112,16 +9112,16 @@
                           <a:solidFill>
                             <a:srgbClr val="1E2A36"/>
                           </a:solidFill>
-                          <a:latin typeface="S-Core Dream 4 Regular" pitchFamily="34" charset="0"/>
-                          <a:ea typeface="S-Core Dream 4 Regular" pitchFamily="34" charset="-127"/>
-                          <a:cs typeface="S-Core Dream 4 Regular" pitchFamily="34" charset="-120"/>
+                          <a:latin typeface="Pretendard" pitchFamily="34" charset="0"/>
+                          <a:ea typeface="Pretendard" pitchFamily="34" charset="-127"/>
+                          <a:cs typeface="Pretendard" pitchFamily="34" charset="-120"/>
                         </a:rPr>
                         <a:t>표의 기사 전부, 프로·베이직 최종 선택, ★추천, 등급·점수·항목별 점수, 점수 근거, 분류</a:t>
                       </a:r>
                       <a:endParaRPr lang="ko-KR" altLang="en-US" sz="1300" dirty="0">
-                        <a:latin typeface="S-Core Dream 4 Regular" charset="0"/>
-                        <a:ea typeface="S-Core Dream 4 Regular" charset="0"/>
-                        <a:cs typeface="S-Core Dream 4 Regular" charset="0"/>
+                        <a:latin typeface="Pretendard" charset="0"/>
+                        <a:ea typeface="Pretendard" charset="0"/>
+                        <a:cs typeface="Pretendard" charset="0"/>
                       </a:endParaRPr>
                     </a:p>
                   </a:txBody>
@@ -9180,16 +9180,16 @@
                           <a:solidFill>
                             <a:srgbClr val="1E2A36"/>
                           </a:solidFill>
-                          <a:latin typeface="S-Core Dream 4 Regular" pitchFamily="34" charset="0"/>
-                          <a:ea typeface="S-Core Dream 4 Regular" pitchFamily="34" charset="-127"/>
-                          <a:cs typeface="S-Core Dream 4 Regular" pitchFamily="34" charset="-120"/>
+                          <a:latin typeface="Pretendard" pitchFamily="34" charset="0"/>
+                          <a:ea typeface="Pretendard" pitchFamily="34" charset="-127"/>
+                          <a:cs typeface="Pretendard" pitchFamily="34" charset="-120"/>
                         </a:rPr>
                         <a:t>앱 판단 vs 사람 판단 비교</a:t>
                       </a:r>
                       <a:endParaRPr lang="ko-KR" altLang="en-US" sz="1300" dirty="0">
-                        <a:latin typeface="S-Core Dream 4 Regular" charset="0"/>
-                        <a:ea typeface="S-Core Dream 4 Regular" charset="0"/>
-                        <a:cs typeface="S-Core Dream 4 Regular" charset="0"/>
+                        <a:latin typeface="Pretendard" charset="0"/>
+                        <a:ea typeface="Pretendard" charset="0"/>
+                        <a:cs typeface="Pretendard" charset="0"/>
                       </a:endParaRPr>
                     </a:p>
                   </a:txBody>
@@ -9250,16 +9250,16 @@
                           <a:solidFill>
                             <a:srgbClr val="1E2A36"/>
                           </a:solidFill>
-                          <a:latin typeface="S-Core Dream 4 Regular" pitchFamily="34" charset="0"/>
-                          <a:ea typeface="S-Core Dream 4 Regular" pitchFamily="34" charset="-127"/>
-                          <a:cs typeface="S-Core Dream 4 Regular" pitchFamily="34" charset="-120"/>
+                          <a:latin typeface="Pretendard" pitchFamily="34" charset="0"/>
+                          <a:ea typeface="Pretendard" pitchFamily="34" charset="-127"/>
+                          <a:cs typeface="Pretendard" pitchFamily="34" charset="-120"/>
                         </a:rPr>
                         <a:t>빠진 기사</a:t>
                       </a:r>
                       <a:endParaRPr lang="ko-KR" altLang="en-US" sz="1300" dirty="0">
-                        <a:latin typeface="S-Core Dream 4 Regular" charset="0"/>
-                        <a:ea typeface="S-Core Dream 4 Regular" charset="0"/>
-                        <a:cs typeface="S-Core Dream 4 Regular" charset="0"/>
+                        <a:latin typeface="Pretendard" charset="0"/>
+                        <a:ea typeface="Pretendard" charset="0"/>
+                        <a:cs typeface="Pretendard" charset="0"/>
                       </a:endParaRPr>
                     </a:p>
                   </a:txBody>
@@ -9318,16 +9318,16 @@
                           <a:solidFill>
                             <a:srgbClr val="1E2A36"/>
                           </a:solidFill>
-                          <a:latin typeface="S-Core Dream 4 Regular" pitchFamily="34" charset="0"/>
-                          <a:ea typeface="S-Core Dream 4 Regular" pitchFamily="34" charset="-127"/>
-                          <a:cs typeface="S-Core Dream 4 Regular" pitchFamily="34" charset="-120"/>
+                          <a:latin typeface="Pretendard" pitchFamily="34" charset="0"/>
+                          <a:ea typeface="Pretendard" pitchFamily="34" charset="-127"/>
+                          <a:cs typeface="Pretendard" pitchFamily="34" charset="-120"/>
                         </a:rPr>
                         <a:t>제외 매체·제목 검증 실패·제외어·행사·이미 보고·같은 사안 묶음과 그 이유</a:t>
                       </a:r>
                       <a:endParaRPr lang="ko-KR" altLang="en-US" sz="1300" dirty="0">
-                        <a:latin typeface="S-Core Dream 4 Regular" charset="0"/>
-                        <a:ea typeface="S-Core Dream 4 Regular" charset="0"/>
-                        <a:cs typeface="S-Core Dream 4 Regular" charset="0"/>
+                        <a:latin typeface="Pretendard" charset="0"/>
+                        <a:ea typeface="Pretendard" charset="0"/>
+                        <a:cs typeface="Pretendard" charset="0"/>
                       </a:endParaRPr>
                     </a:p>
                   </a:txBody>
@@ -9386,16 +9386,16 @@
                           <a:solidFill>
                             <a:srgbClr val="1E2A36"/>
                           </a:solidFill>
-                          <a:latin typeface="S-Core Dream 4 Regular" pitchFamily="34" charset="0"/>
-                          <a:ea typeface="S-Core Dream 4 Regular" pitchFamily="34" charset="-127"/>
-                          <a:cs typeface="S-Core Dream 4 Regular" pitchFamily="34" charset="-120"/>
+                          <a:latin typeface="Pretendard" pitchFamily="34" charset="0"/>
+                          <a:ea typeface="Pretendard" pitchFamily="34" charset="-127"/>
+                          <a:cs typeface="Pretendard" pitchFamily="34" charset="-120"/>
                         </a:rPr>
                         <a:t>놓친 기사 찾기</a:t>
                       </a:r>
                       <a:endParaRPr lang="ko-KR" altLang="en-US" sz="1300" dirty="0">
-                        <a:latin typeface="S-Core Dream 4 Regular" charset="0"/>
-                        <a:ea typeface="S-Core Dream 4 Regular" charset="0"/>
-                        <a:cs typeface="S-Core Dream 4 Regular" charset="0"/>
+                        <a:latin typeface="Pretendard" charset="0"/>
+                        <a:ea typeface="Pretendard" charset="0"/>
+                        <a:cs typeface="Pretendard" charset="0"/>
                       </a:endParaRPr>
                     </a:p>
                   </a:txBody>
@@ -9456,16 +9456,16 @@
                           <a:solidFill>
                             <a:srgbClr val="1E2A36"/>
                           </a:solidFill>
-                          <a:latin typeface="S-Core Dream 4 Regular" pitchFamily="34" charset="0"/>
-                          <a:ea typeface="S-Core Dream 4 Regular" pitchFamily="34" charset="-127"/>
-                          <a:cs typeface="S-Core Dream 4 Regular" pitchFamily="34" charset="-120"/>
+                          <a:latin typeface="Pretendard" pitchFamily="34" charset="0"/>
+                          <a:ea typeface="Pretendard" pitchFamily="34" charset="-127"/>
+                          <a:cs typeface="Pretendard" pitchFamily="34" charset="-120"/>
                         </a:rPr>
                         <a:t>조회 조건</a:t>
                       </a:r>
                       <a:endParaRPr lang="ko-KR" altLang="en-US" sz="1300" dirty="0">
-                        <a:latin typeface="S-Core Dream 4 Regular" charset="0"/>
-                        <a:ea typeface="S-Core Dream 4 Regular" charset="0"/>
-                        <a:cs typeface="S-Core Dream 4 Regular" charset="0"/>
+                        <a:latin typeface="Pretendard" charset="0"/>
+                        <a:ea typeface="Pretendard" charset="0"/>
+                        <a:cs typeface="Pretendard" charset="0"/>
                       </a:endParaRPr>
                     </a:p>
                   </a:txBody>
@@ -9524,16 +9524,16 @@
                           <a:solidFill>
                             <a:srgbClr val="1E2A36"/>
                           </a:solidFill>
-                          <a:latin typeface="S-Core Dream 4 Regular" pitchFamily="34" charset="0"/>
-                          <a:ea typeface="S-Core Dream 4 Regular" pitchFamily="34" charset="-127"/>
-                          <a:cs typeface="S-Core Dream 4 Regular" pitchFamily="34" charset="-120"/>
+                          <a:latin typeface="Pretendard" pitchFamily="34" charset="0"/>
+                          <a:ea typeface="Pretendard" pitchFamily="34" charset="-127"/>
+                          <a:cs typeface="Pretendard" pitchFamily="34" charset="-120"/>
                         </a:rPr>
                         <a:t>기간·검색 방식·전문지·옵션·건수 흐름</a:t>
                       </a:r>
                       <a:endParaRPr lang="ko-KR" altLang="en-US" sz="1300" dirty="0">
-                        <a:latin typeface="S-Core Dream 4 Regular" charset="0"/>
-                        <a:ea typeface="S-Core Dream 4 Regular" charset="0"/>
-                        <a:cs typeface="S-Core Dream 4 Regular" charset="0"/>
+                        <a:latin typeface="Pretendard" charset="0"/>
+                        <a:ea typeface="Pretendard" charset="0"/>
+                        <a:cs typeface="Pretendard" charset="0"/>
                       </a:endParaRPr>
                     </a:p>
                   </a:txBody>
@@ -9592,16 +9592,16 @@
                           <a:solidFill>
                             <a:srgbClr val="1E2A36"/>
                           </a:solidFill>
-                          <a:latin typeface="S-Core Dream 4 Regular" pitchFamily="34" charset="0"/>
-                          <a:ea typeface="S-Core Dream 4 Regular" pitchFamily="34" charset="-127"/>
-                          <a:cs typeface="S-Core Dream 4 Regular" pitchFamily="34" charset="-120"/>
+                          <a:latin typeface="Pretendard" pitchFamily="34" charset="0"/>
+                          <a:ea typeface="Pretendard" pitchFamily="34" charset="-127"/>
+                          <a:cs typeface="Pretendard" pitchFamily="34" charset="-120"/>
                         </a:rPr>
                         <a:t>그날 조건 확인</a:t>
                       </a:r>
                       <a:endParaRPr lang="ko-KR" altLang="en-US" sz="1300" dirty="0">
-                        <a:latin typeface="S-Core Dream 4 Regular" charset="0"/>
-                        <a:ea typeface="S-Core Dream 4 Regular" charset="0"/>
-                        <a:cs typeface="S-Core Dream 4 Regular" charset="0"/>
+                        <a:latin typeface="Pretendard" charset="0"/>
+                        <a:ea typeface="Pretendard" charset="0"/>
+                        <a:cs typeface="Pretendard" charset="0"/>
                       </a:endParaRPr>
                     </a:p>
                   </a:txBody>
@@ -9662,16 +9662,16 @@
                           <a:solidFill>
                             <a:srgbClr val="1E2A36"/>
                           </a:solidFill>
-                          <a:latin typeface="S-Core Dream 4 Regular" pitchFamily="34" charset="0"/>
-                          <a:ea typeface="S-Core Dream 4 Regular" pitchFamily="34" charset="-127"/>
-                          <a:cs typeface="S-Core Dream 4 Regular" pitchFamily="34" charset="-120"/>
+                          <a:latin typeface="Pretendard" pitchFamily="34" charset="0"/>
+                          <a:ea typeface="Pretendard" pitchFamily="34" charset="-127"/>
+                          <a:cs typeface="Pretendard" pitchFamily="34" charset="-120"/>
                         </a:rPr>
                         <a:t>선정 규칙</a:t>
                       </a:r>
                       <a:endParaRPr lang="ko-KR" altLang="en-US" sz="1300" dirty="0">
-                        <a:latin typeface="S-Core Dream 4 Regular" charset="0"/>
-                        <a:ea typeface="S-Core Dream 4 Regular" charset="0"/>
-                        <a:cs typeface="S-Core Dream 4 Regular" charset="0"/>
+                        <a:latin typeface="Pretendard" charset="0"/>
+                        <a:ea typeface="Pretendard" charset="0"/>
+                        <a:cs typeface="Pretendard" charset="0"/>
                       </a:endParaRPr>
                     </a:p>
                   </a:txBody>
@@ -9730,16 +9730,16 @@
                           <a:solidFill>
                             <a:srgbClr val="1E2A36"/>
                           </a:solidFill>
-                          <a:latin typeface="S-Core Dream 4 Regular" pitchFamily="34" charset="0"/>
-                          <a:ea typeface="S-Core Dream 4 Regular" pitchFamily="34" charset="-127"/>
-                          <a:cs typeface="S-Core Dream 4 Regular" pitchFamily="34" charset="-120"/>
+                          <a:latin typeface="Pretendard" pitchFamily="34" charset="0"/>
+                          <a:ea typeface="Pretendard" pitchFamily="34" charset="-127"/>
+                          <a:cs typeface="Pretendard" pitchFamily="34" charset="-120"/>
                         </a:rPr>
                         <a:t>조회한 그때의 규칙 전체(규칙 JSON 포함)</a:t>
                       </a:r>
                       <a:endParaRPr lang="ko-KR" altLang="en-US" sz="1300" dirty="0">
-                        <a:latin typeface="S-Core Dream 4 Regular" charset="0"/>
-                        <a:ea typeface="S-Core Dream 4 Regular" charset="0"/>
-                        <a:cs typeface="S-Core Dream 4 Regular" charset="0"/>
+                        <a:latin typeface="Pretendard" charset="0"/>
+                        <a:ea typeface="Pretendard" charset="0"/>
+                        <a:cs typeface="Pretendard" charset="0"/>
                       </a:endParaRPr>
                     </a:p>
                   </a:txBody>
@@ -9798,16 +9798,16 @@
                           <a:solidFill>
                             <a:srgbClr val="1E2A36"/>
                           </a:solidFill>
-                          <a:latin typeface="S-Core Dream 4 Regular" pitchFamily="34" charset="0"/>
-                          <a:ea typeface="S-Core Dream 4 Regular" pitchFamily="34" charset="-127"/>
-                          <a:cs typeface="S-Core Dream 4 Regular" pitchFamily="34" charset="-120"/>
+                          <a:latin typeface="Pretendard" pitchFamily="34" charset="0"/>
+                          <a:ea typeface="Pretendard" pitchFamily="34" charset="-127"/>
+                          <a:cs typeface="Pretendard" pitchFamily="34" charset="-120"/>
                         </a:rPr>
                         <a:t>Claude가 고칠 원본</a:t>
                       </a:r>
                       <a:endParaRPr lang="ko-KR" altLang="en-US" sz="1300" dirty="0">
-                        <a:latin typeface="S-Core Dream 4 Regular" charset="0"/>
-                        <a:ea typeface="S-Core Dream 4 Regular" charset="0"/>
-                        <a:cs typeface="S-Core Dream 4 Regular" charset="0"/>
+                        <a:latin typeface="Pretendard" charset="0"/>
+                        <a:ea typeface="Pretendard" charset="0"/>
+                        <a:cs typeface="Pretendard" charset="0"/>
                       </a:endParaRPr>
                     </a:p>
                   </a:txBody>
@@ -9938,9 +9938,9 @@
                 <a:solidFill>
                   <a:srgbClr val="1F3B5C"/>
                 </a:solidFill>
-                <a:latin typeface="S-Core Dream 5 Medium" pitchFamily="34" charset="0"/>
-                <a:ea typeface="S-Core Dream 5 Medium" pitchFamily="34" charset="-127"/>
-                <a:cs typeface="S-Core Dream 5 Medium" pitchFamily="34" charset="-120"/>
+                <a:latin typeface="Pretendard SemiBold" pitchFamily="34" charset="0"/>
+                <a:ea typeface="Pretendard SemiBold" pitchFamily="34" charset="-127"/>
+                <a:cs typeface="Pretendard SemiBold" pitchFamily="34" charset="-120"/>
               </a:rPr>
               <a:t>파일 이름: KOHOM뉴스룸_조회결과_날짜_시분.xlsx — 네이버 키 같은 비밀값은 넣지 않습니다</a:t>
             </a:r>
@@ -10025,13 +10025,13 @@
               <a:buNone/>
             </a:pPr>
             <a:r>
-              <a:rPr lang="ko-KR" altLang="en-US" sz="2000" dirty="0">
+              <a:rPr lang="ko-KR" altLang="en-US" sz="2000" b="1" dirty="0">
                 <a:solidFill>
                   <a:srgbClr val="FFFFFF"/>
                 </a:solidFill>
-                <a:latin typeface="S-Core Dream 7 ExtraBold" pitchFamily="34" charset="0"/>
-                <a:ea typeface="S-Core Dream 7 ExtraBold" pitchFamily="34" charset="-127"/>
-                <a:cs typeface="S-Core Dream 7 ExtraBold" pitchFamily="34" charset="-120"/>
+                <a:latin typeface="Pretendard" pitchFamily="34" charset="0"/>
+                <a:ea typeface="Pretendard" pitchFamily="34" charset="-127"/>
+                <a:cs typeface="Pretendard" pitchFamily="34" charset="-120"/>
               </a:rPr>
               <a:t>04</a:t>
             </a:r>
@@ -10068,9 +10068,9 @@
                 <a:solidFill>
                   <a:srgbClr val="2E7D8C"/>
                 </a:solidFill>
-                <a:latin typeface="S-Core Dream 5 Medium" pitchFamily="34" charset="0"/>
-                <a:ea typeface="S-Core Dream 5 Medium" pitchFamily="34" charset="-127"/>
-                <a:cs typeface="S-Core Dream 5 Medium" pitchFamily="34" charset="-120"/>
+                <a:latin typeface="Pretendard SemiBold" pitchFamily="34" charset="0"/>
+                <a:ea typeface="Pretendard SemiBold" pitchFamily="34" charset="-127"/>
+                <a:cs typeface="Pretendard SemiBold" pitchFamily="34" charset="-120"/>
               </a:rPr>
               <a:t>선정 규칙 · 화면</a:t>
             </a:r>
@@ -10103,13 +10103,13 @@
               <a:buNone/>
             </a:pPr>
             <a:r>
-              <a:rPr lang="ko-KR" altLang="en-US" sz="2600" dirty="0">
+              <a:rPr lang="ko-KR" altLang="en-US" sz="2600" b="1" dirty="0">
                 <a:solidFill>
                   <a:srgbClr val="1F3B5C"/>
                 </a:solidFill>
-                <a:latin typeface="S-Core Dream 7 ExtraBold" pitchFamily="34" charset="0"/>
-                <a:ea typeface="S-Core Dream 7 ExtraBold" pitchFamily="34" charset="-127"/>
-                <a:cs typeface="S-Core Dream 7 ExtraBold" pitchFamily="34" charset="-120"/>
+                <a:latin typeface="Pretendard" pitchFamily="34" charset="0"/>
+                <a:ea typeface="Pretendard" pitchFamily="34" charset="-127"/>
+                <a:cs typeface="Pretendard" pitchFamily="34" charset="-120"/>
               </a:rPr>
               <a:t>선정 규칙 탭: 키워드·점수·추천 기준</a:t>
             </a:r>
@@ -10146,9 +10146,9 @@
                 <a:solidFill>
                   <a:srgbClr val="667385"/>
                 </a:solidFill>
-                <a:latin typeface="S-Core Dream 4 Regular" pitchFamily="34" charset="0"/>
-                <a:ea typeface="S-Core Dream 4 Regular" pitchFamily="34" charset="-127"/>
-                <a:cs typeface="S-Core Dream 4 Regular" pitchFamily="34" charset="-120"/>
+                <a:latin typeface="Pretendard" pitchFamily="34" charset="0"/>
+                <a:ea typeface="Pretendard" pitchFamily="34" charset="-127"/>
+                <a:cs typeface="Pretendard" pitchFamily="34" charset="-120"/>
               </a:rPr>
               <a:t>고치고 [규칙 저장]을 누르면 다음 조회부터 적용됩니다. 앱 업데이트가 필요 없습니다</a:t>
             </a:r>
@@ -10249,13 +10249,13 @@
               <a:buNone/>
             </a:pPr>
             <a:r>
-              <a:rPr lang="ko-KR" altLang="en-US" sz="1700" dirty="0">
+              <a:rPr lang="ko-KR" altLang="en-US" sz="1700" b="1" dirty="0">
                 <a:solidFill>
                   <a:srgbClr val="E8A33D"/>
                 </a:solidFill>
-                <a:latin typeface="S-Core Dream 7 ExtraBold" pitchFamily="34" charset="0"/>
-                <a:ea typeface="S-Core Dream 7 ExtraBold" pitchFamily="34" charset="-127"/>
-                <a:cs typeface="S-Core Dream 7 ExtraBold" pitchFamily="34" charset="-120"/>
+                <a:latin typeface="Pretendard" pitchFamily="34" charset="0"/>
+                <a:ea typeface="Pretendard" pitchFamily="34" charset="-127"/>
+                <a:cs typeface="Pretendard" pitchFamily="34" charset="-120"/>
               </a:rPr>
               <a:t>①</a:t>
             </a:r>
@@ -10310,13 +10310,13 @@
               <a:buNone/>
             </a:pPr>
             <a:r>
-              <a:rPr lang="ko-KR" altLang="en-US" sz="1700" dirty="0">
+              <a:rPr lang="ko-KR" altLang="en-US" sz="1700" b="1" dirty="0">
                 <a:solidFill>
                   <a:srgbClr val="E8A33D"/>
                 </a:solidFill>
-                <a:latin typeface="S-Core Dream 7 ExtraBold" pitchFamily="34" charset="0"/>
-                <a:ea typeface="S-Core Dream 7 ExtraBold" pitchFamily="34" charset="-127"/>
-                <a:cs typeface="S-Core Dream 7 ExtraBold" pitchFamily="34" charset="-120"/>
+                <a:latin typeface="Pretendard" pitchFamily="34" charset="0"/>
+                <a:ea typeface="Pretendard" pitchFamily="34" charset="-127"/>
+                <a:cs typeface="Pretendard" pitchFamily="34" charset="-120"/>
               </a:rPr>
               <a:t>②</a:t>
             </a:r>
@@ -10371,13 +10371,13 @@
               <a:buNone/>
             </a:pPr>
             <a:r>
-              <a:rPr lang="ko-KR" altLang="en-US" sz="1700" dirty="0">
+              <a:rPr lang="ko-KR" altLang="en-US" sz="1700" b="1" dirty="0">
                 <a:solidFill>
                   <a:srgbClr val="E8A33D"/>
                 </a:solidFill>
-                <a:latin typeface="S-Core Dream 7 ExtraBold" pitchFamily="34" charset="0"/>
-                <a:ea typeface="S-Core Dream 7 ExtraBold" pitchFamily="34" charset="-127"/>
-                <a:cs typeface="S-Core Dream 7 ExtraBold" pitchFamily="34" charset="-120"/>
+                <a:latin typeface="Pretendard" pitchFamily="34" charset="0"/>
+                <a:ea typeface="Pretendard" pitchFamily="34" charset="-127"/>
+                <a:cs typeface="Pretendard" pitchFamily="34" charset="-120"/>
               </a:rPr>
               <a:t>③</a:t>
             </a:r>
@@ -10432,13 +10432,13 @@
               <a:buNone/>
             </a:pPr>
             <a:r>
-              <a:rPr lang="ko-KR" altLang="en-US" sz="1700" dirty="0">
+              <a:rPr lang="ko-KR" altLang="en-US" sz="1700" b="1" dirty="0">
                 <a:solidFill>
                   <a:srgbClr val="E8A33D"/>
                 </a:solidFill>
-                <a:latin typeface="S-Core Dream 7 ExtraBold" pitchFamily="34" charset="0"/>
-                <a:ea typeface="S-Core Dream 7 ExtraBold" pitchFamily="34" charset="-127"/>
-                <a:cs typeface="S-Core Dream 7 ExtraBold" pitchFamily="34" charset="-120"/>
+                <a:latin typeface="Pretendard" pitchFamily="34" charset="0"/>
+                <a:ea typeface="Pretendard" pitchFamily="34" charset="-127"/>
+                <a:cs typeface="Pretendard" pitchFamily="34" charset="-120"/>
               </a:rPr>
               <a:t>④</a:t>
             </a:r>
@@ -10493,13 +10493,13 @@
               <a:buNone/>
             </a:pPr>
             <a:r>
-              <a:rPr lang="ko-KR" altLang="en-US" sz="1700" dirty="0">
+              <a:rPr lang="ko-KR" altLang="en-US" sz="1700" b="1" dirty="0">
                 <a:solidFill>
                   <a:srgbClr val="E8A33D"/>
                 </a:solidFill>
-                <a:latin typeface="S-Core Dream 7 ExtraBold" pitchFamily="34" charset="0"/>
-                <a:ea typeface="S-Core Dream 7 ExtraBold" pitchFamily="34" charset="-127"/>
-                <a:cs typeface="S-Core Dream 7 ExtraBold" pitchFamily="34" charset="-120"/>
+                <a:latin typeface="Pretendard" pitchFamily="34" charset="0"/>
+                <a:ea typeface="Pretendard" pitchFamily="34" charset="-127"/>
+                <a:cs typeface="Pretendard" pitchFamily="34" charset="-120"/>
               </a:rPr>
               <a:t>⑤</a:t>
             </a:r>
@@ -10554,13 +10554,13 @@
               <a:buNone/>
             </a:pPr>
             <a:r>
-              <a:rPr lang="ko-KR" altLang="en-US" sz="1700" dirty="0">
+              <a:rPr lang="ko-KR" altLang="en-US" sz="1700" b="1" dirty="0">
                 <a:solidFill>
                   <a:srgbClr val="E8A33D"/>
                 </a:solidFill>
-                <a:latin typeface="S-Core Dream 7 ExtraBold" pitchFamily="34" charset="0"/>
-                <a:ea typeface="S-Core Dream 7 ExtraBold" pitchFamily="34" charset="-127"/>
-                <a:cs typeface="S-Core Dream 7 ExtraBold" pitchFamily="34" charset="-120"/>
+                <a:latin typeface="Pretendard" pitchFamily="34" charset="0"/>
+                <a:ea typeface="Pretendard" pitchFamily="34" charset="-127"/>
+                <a:cs typeface="Pretendard" pitchFamily="34" charset="-120"/>
               </a:rPr>
               <a:t>⑥</a:t>
             </a:r>
@@ -10597,9 +10597,9 @@
                 <a:solidFill>
                   <a:srgbClr val="1F3B5C"/>
                 </a:solidFill>
-                <a:latin typeface="S-Core Dream 5 Medium" pitchFamily="34" charset="0"/>
-                <a:ea typeface="S-Core Dream 5 Medium" pitchFamily="34" charset="-127"/>
-                <a:cs typeface="S-Core Dream 5 Medium" pitchFamily="34" charset="-120"/>
+                <a:latin typeface="Pretendard SemiBold" pitchFamily="34" charset="0"/>
+                <a:ea typeface="Pretendard SemiBold" pitchFamily="34" charset="-127"/>
+                <a:cs typeface="Pretendard SemiBold" pitchFamily="34" charset="-120"/>
               </a:rPr>
               <a:t>① A 기관 직접</a:t>
             </a:r>
@@ -10617,9 +10617,9 @@
                 <a:solidFill>
                   <a:srgbClr val="1E2A36"/>
                 </a:solidFill>
-                <a:latin typeface="S-Core Dream 4 Regular" pitchFamily="34" charset="0"/>
-                <a:ea typeface="S-Core Dream 4 Regular" pitchFamily="34" charset="-127"/>
-                <a:cs typeface="S-Core Dream 4 Regular" pitchFamily="34" charset="-120"/>
+                <a:latin typeface="Pretendard" pitchFamily="34" charset="0"/>
+                <a:ea typeface="Pretendard" pitchFamily="34" charset="-127"/>
+                <a:cs typeface="Pretendard" pitchFamily="34" charset="-120"/>
               </a:rPr>
               <a:t>제목에 있으면 무조건 후보</a:t>
             </a:r>
@@ -10637,9 +10637,9 @@
                 <a:solidFill>
                   <a:srgbClr val="1F3B5C"/>
                 </a:solidFill>
-                <a:latin typeface="S-Core Dream 5 Medium" pitchFamily="34" charset="0"/>
-                <a:ea typeface="S-Core Dream 5 Medium" pitchFamily="34" charset="-127"/>
-                <a:cs typeface="S-Core Dream 5 Medium" pitchFamily="34" charset="-120"/>
+                <a:latin typeface="Pretendard SemiBold" pitchFamily="34" charset="0"/>
+                <a:ea typeface="Pretendard SemiBold" pitchFamily="34" charset="-127"/>
+                <a:cs typeface="Pretendard SemiBold" pitchFamily="34" charset="-120"/>
               </a:rPr>
               <a:t>② S 사업어</a:t>
             </a:r>
@@ -10657,9 +10657,9 @@
                 <a:solidFill>
                   <a:srgbClr val="1E2A36"/>
                 </a:solidFill>
-                <a:latin typeface="S-Core Dream 4 Regular" pitchFamily="34" charset="0"/>
-                <a:ea typeface="S-Core Dream 4 Regular" pitchFamily="34" charset="-127"/>
-                <a:cs typeface="S-Core Dream 4 Regular" pitchFamily="34" charset="-120"/>
+                <a:latin typeface="Pretendard" pitchFamily="34" charset="0"/>
+                <a:ea typeface="Pretendard" pitchFamily="34" charset="-127"/>
+                <a:cs typeface="Pretendard" pitchFamily="34" charset="-120"/>
               </a:rPr>
               <a:t>공단 업무를 가리키는 말</a:t>
             </a:r>
@@ -10677,9 +10677,9 @@
                 <a:solidFill>
                   <a:srgbClr val="1F3B5C"/>
                 </a:solidFill>
-                <a:latin typeface="S-Core Dream 5 Medium" pitchFamily="34" charset="0"/>
-                <a:ea typeface="S-Core Dream 5 Medium" pitchFamily="34" charset="-127"/>
-                <a:cs typeface="S-Core Dream 5 Medium" pitchFamily="34" charset="-120"/>
+                <a:latin typeface="Pretendard SemiBold" pitchFamily="34" charset="0"/>
+                <a:ea typeface="Pretendard SemiBold" pitchFamily="34" charset="-127"/>
+                <a:cs typeface="Pretendard SemiBold" pitchFamily="34" charset="-120"/>
               </a:rPr>
               <a:t>③ B 환경</a:t>
             </a:r>
@@ -10697,9 +10697,9 @@
                 <a:solidFill>
                   <a:srgbClr val="1E2A36"/>
                 </a:solidFill>
-                <a:latin typeface="S-Core Dream 4 Regular" pitchFamily="34" charset="0"/>
-                <a:ea typeface="S-Core Dream 4 Regular" pitchFamily="34" charset="-127"/>
-                <a:cs typeface="S-Core Dream 4 Regular" pitchFamily="34" charset="-120"/>
+                <a:latin typeface="Pretendard" pitchFamily="34" charset="0"/>
+                <a:ea typeface="Pretendard" pitchFamily="34" charset="-127"/>
+                <a:cs typeface="Pretendard" pitchFamily="34" charset="-120"/>
               </a:rPr>
               <a:t>주거·공동주택 정책 환경</a:t>
             </a:r>
@@ -10717,9 +10717,9 @@
                 <a:solidFill>
                   <a:srgbClr val="1F3B5C"/>
                 </a:solidFill>
-                <a:latin typeface="S-Core Dream 5 Medium" pitchFamily="34" charset="0"/>
-                <a:ea typeface="S-Core Dream 5 Medium" pitchFamily="34" charset="-127"/>
-                <a:cs typeface="S-Core Dream 5 Medium" pitchFamily="34" charset="-120"/>
+                <a:latin typeface="Pretendard SemiBold" pitchFamily="34" charset="0"/>
+                <a:ea typeface="Pretendard SemiBold" pitchFamily="34" charset="-127"/>
+                <a:cs typeface="Pretendard SemiBold" pitchFamily="34" charset="-120"/>
               </a:rPr>
               <a:t>④ 환류 버튼</a:t>
             </a:r>
@@ -10737,9 +10737,9 @@
                 <a:solidFill>
                   <a:srgbClr val="1E2A36"/>
                 </a:solidFill>
-                <a:latin typeface="S-Core Dream 4 Regular" pitchFamily="34" charset="0"/>
-                <a:ea typeface="S-Core Dream 4 Regular" pitchFamily="34" charset="-127"/>
-                <a:cs typeface="S-Core Dream 4 Regular" pitchFamily="34" charset="-120"/>
+                <a:latin typeface="Pretendard" pitchFamily="34" charset="0"/>
+                <a:ea typeface="Pretendard" pitchFamily="34" charset="-127"/>
+                <a:cs typeface="Pretendard" pitchFamily="34" charset="-120"/>
               </a:rPr>
               <a:t>개선 요청문 복사 · Claude 답변 붙여넣기</a:t>
             </a:r>
@@ -10757,9 +10757,9 @@
                 <a:solidFill>
                   <a:srgbClr val="1F3B5C"/>
                 </a:solidFill>
-                <a:latin typeface="S-Core Dream 5 Medium" pitchFamily="34" charset="0"/>
-                <a:ea typeface="S-Core Dream 5 Medium" pitchFamily="34" charset="-127"/>
-                <a:cs typeface="S-Core Dream 5 Medium" pitchFamily="34" charset="-120"/>
+                <a:latin typeface="Pretendard SemiBold" pitchFamily="34" charset="0"/>
+                <a:ea typeface="Pretendard SemiBold" pitchFamily="34" charset="-127"/>
+                <a:cs typeface="Pretendard SemiBold" pitchFamily="34" charset="-120"/>
               </a:rPr>
               <a:t>⑤ 규칙 파일</a:t>
             </a:r>
@@ -10777,9 +10777,9 @@
                 <a:solidFill>
                   <a:srgbClr val="1E2A36"/>
                 </a:solidFill>
-                <a:latin typeface="S-Core Dream 4 Regular" pitchFamily="34" charset="0"/>
-                <a:ea typeface="S-Core Dream 4 Regular" pitchFamily="34" charset="-127"/>
-                <a:cs typeface="S-Core Dream 4 Regular" pitchFamily="34" charset="-120"/>
+                <a:latin typeface="Pretendard" pitchFamily="34" charset="0"/>
+                <a:ea typeface="Pretendard" pitchFamily="34" charset="-127"/>
+                <a:cs typeface="Pretendard" pitchFamily="34" charset="-120"/>
               </a:rPr>
               <a:t>내보내기·불러오기(다른 PC와 공유)·기본값으로</a:t>
             </a:r>
@@ -10797,9 +10797,9 @@
                 <a:solidFill>
                   <a:srgbClr val="1F3B5C"/>
                 </a:solidFill>
-                <a:latin typeface="S-Core Dream 5 Medium" pitchFamily="34" charset="0"/>
-                <a:ea typeface="S-Core Dream 5 Medium" pitchFamily="34" charset="-127"/>
-                <a:cs typeface="S-Core Dream 5 Medium" pitchFamily="34" charset="-120"/>
+                <a:latin typeface="Pretendard SemiBold" pitchFamily="34" charset="0"/>
+                <a:ea typeface="Pretendard SemiBold" pitchFamily="34" charset="-127"/>
+                <a:cs typeface="Pretendard SemiBold" pitchFamily="34" charset="-120"/>
               </a:rPr>
               <a:t>⑥ 규칙 저장</a:t>
             </a:r>
@@ -10817,9 +10817,9 @@
                 <a:solidFill>
                   <a:srgbClr val="1E2A36"/>
                 </a:solidFill>
-                <a:latin typeface="S-Core Dream 4 Regular" pitchFamily="34" charset="0"/>
-                <a:ea typeface="S-Core Dream 4 Regular" pitchFamily="34" charset="-127"/>
-                <a:cs typeface="S-Core Dream 4 Regular" pitchFamily="34" charset="-120"/>
+                <a:latin typeface="Pretendard" pitchFamily="34" charset="0"/>
+                <a:ea typeface="Pretendard" pitchFamily="34" charset="-127"/>
+                <a:cs typeface="Pretendard" pitchFamily="34" charset="-120"/>
               </a:rPr>
               <a:t>저장하면 변경 이력에 남음</a:t>
             </a:r>
@@ -10904,13 +10904,13 @@
               <a:buNone/>
             </a:pPr>
             <a:r>
-              <a:rPr lang="ko-KR" altLang="en-US" sz="2000" dirty="0">
+              <a:rPr lang="ko-KR" altLang="en-US" sz="2000" b="1" dirty="0">
                 <a:solidFill>
                   <a:srgbClr val="FFFFFF"/>
                 </a:solidFill>
-                <a:latin typeface="S-Core Dream 7 ExtraBold" pitchFamily="34" charset="0"/>
-                <a:ea typeface="S-Core Dream 7 ExtraBold" pitchFamily="34" charset="-127"/>
-                <a:cs typeface="S-Core Dream 7 ExtraBold" pitchFamily="34" charset="-120"/>
+                <a:latin typeface="Pretendard" pitchFamily="34" charset="0"/>
+                <a:ea typeface="Pretendard" pitchFamily="34" charset="-127"/>
+                <a:cs typeface="Pretendard" pitchFamily="34" charset="-120"/>
               </a:rPr>
               <a:t>04</a:t>
             </a:r>
@@ -10947,9 +10947,9 @@
                 <a:solidFill>
                   <a:srgbClr val="2E7D8C"/>
                 </a:solidFill>
-                <a:latin typeface="S-Core Dream 5 Medium" pitchFamily="34" charset="0"/>
-                <a:ea typeface="S-Core Dream 5 Medium" pitchFamily="34" charset="-127"/>
-                <a:cs typeface="S-Core Dream 5 Medium" pitchFamily="34" charset="-120"/>
+                <a:latin typeface="Pretendard SemiBold" pitchFamily="34" charset="0"/>
+                <a:ea typeface="Pretendard SemiBold" pitchFamily="34" charset="-127"/>
+                <a:cs typeface="Pretendard SemiBold" pitchFamily="34" charset="-120"/>
               </a:rPr>
               <a:t>선정 규칙 · 점수와 추천</a:t>
             </a:r>
@@ -10982,13 +10982,13 @@
               <a:buNone/>
             </a:pPr>
             <a:r>
-              <a:rPr lang="ko-KR" altLang="en-US" sz="2600" dirty="0">
+              <a:rPr lang="ko-KR" altLang="en-US" sz="2600" b="1" dirty="0">
                 <a:solidFill>
                   <a:srgbClr val="1F3B5C"/>
                 </a:solidFill>
-                <a:latin typeface="S-Core Dream 7 ExtraBold" pitchFamily="34" charset="0"/>
-                <a:ea typeface="S-Core Dream 7 ExtraBold" pitchFamily="34" charset="-127"/>
-                <a:cs typeface="S-Core Dream 7 ExtraBold" pitchFamily="34" charset="-120"/>
+                <a:latin typeface="Pretendard" pitchFamily="34" charset="0"/>
+                <a:ea typeface="Pretendard" pitchFamily="34" charset="-127"/>
+                <a:cs typeface="Pretendard" pitchFamily="34" charset="-120"/>
               </a:rPr>
               <a:t>점수와 추천 기준도 숫자 칸에서</a:t>
             </a:r>
@@ -11025,9 +11025,9 @@
                 <a:solidFill>
                   <a:srgbClr val="667385"/>
                 </a:solidFill>
-                <a:latin typeface="S-Core Dream 4 Regular" pitchFamily="34" charset="0"/>
-                <a:ea typeface="S-Core Dream 4 Regular" pitchFamily="34" charset="-127"/>
-                <a:cs typeface="S-Core Dream 4 Regular" pitchFamily="34" charset="-120"/>
+                <a:latin typeface="Pretendard" pitchFamily="34" charset="0"/>
+                <a:ea typeface="Pretendard" pitchFamily="34" charset="-127"/>
+                <a:cs typeface="Pretendard" pitchFamily="34" charset="-120"/>
               </a:rPr>
               <a:t>가중치 숫자와 단어 목록을 고치면 점수·분류·★추천이 바로 다시 계산됩니다</a:t>
             </a:r>
@@ -11128,13 +11128,13 @@
               <a:buNone/>
             </a:pPr>
             <a:r>
-              <a:rPr lang="ko-KR" altLang="en-US" sz="1700" dirty="0">
+              <a:rPr lang="ko-KR" altLang="en-US" sz="1700" b="1" dirty="0">
                 <a:solidFill>
                   <a:srgbClr val="E8A33D"/>
                 </a:solidFill>
-                <a:latin typeface="S-Core Dream 7 ExtraBold" pitchFamily="34" charset="0"/>
-                <a:ea typeface="S-Core Dream 7 ExtraBold" pitchFamily="34" charset="-127"/>
-                <a:cs typeface="S-Core Dream 7 ExtraBold" pitchFamily="34" charset="-120"/>
+                <a:latin typeface="Pretendard" pitchFamily="34" charset="0"/>
+                <a:ea typeface="Pretendard" pitchFamily="34" charset="-127"/>
+                <a:cs typeface="Pretendard" pitchFamily="34" charset="-120"/>
               </a:rPr>
               <a:t>①</a:t>
             </a:r>
@@ -11189,13 +11189,13 @@
               <a:buNone/>
             </a:pPr>
             <a:r>
-              <a:rPr lang="ko-KR" altLang="en-US" sz="1700" dirty="0">
+              <a:rPr lang="ko-KR" altLang="en-US" sz="1700" b="1" dirty="0">
                 <a:solidFill>
                   <a:srgbClr val="E8A33D"/>
                 </a:solidFill>
-                <a:latin typeface="S-Core Dream 7 ExtraBold" pitchFamily="34" charset="0"/>
-                <a:ea typeface="S-Core Dream 7 ExtraBold" pitchFamily="34" charset="-127"/>
-                <a:cs typeface="S-Core Dream 7 ExtraBold" pitchFamily="34" charset="-120"/>
+                <a:latin typeface="Pretendard" pitchFamily="34" charset="0"/>
+                <a:ea typeface="Pretendard" pitchFamily="34" charset="-127"/>
+                <a:cs typeface="Pretendard" pitchFamily="34" charset="-120"/>
               </a:rPr>
               <a:t>②</a:t>
             </a:r>
@@ -11232,9 +11232,9 @@
                 <a:solidFill>
                   <a:srgbClr val="1F3B5C"/>
                 </a:solidFill>
-                <a:latin typeface="S-Core Dream 5 Medium" pitchFamily="34" charset="0"/>
-                <a:ea typeface="S-Core Dream 5 Medium" pitchFamily="34" charset="-127"/>
-                <a:cs typeface="S-Core Dream 5 Medium" pitchFamily="34" charset="-120"/>
+                <a:latin typeface="Pretendard SemiBold" pitchFamily="34" charset="0"/>
+                <a:ea typeface="Pretendard SemiBold" pitchFamily="34" charset="-127"/>
+                <a:cs typeface="Pretendard SemiBold" pitchFamily="34" charset="-120"/>
               </a:rPr>
               <a:t>① 가중치</a:t>
             </a:r>
@@ -11252,9 +11252,9 @@
                 <a:solidFill>
                   <a:srgbClr val="1E2A36"/>
                 </a:solidFill>
-                <a:latin typeface="S-Core Dream 4 Regular" pitchFamily="34" charset="0"/>
-                <a:ea typeface="S-Core Dream 4 Regular" pitchFamily="34" charset="-127"/>
-                <a:cs typeface="S-Core Dream 4 Regular" pitchFamily="34" charset="-120"/>
+                <a:latin typeface="Pretendard" pitchFamily="34" charset="0"/>
+                <a:ea typeface="Pretendard" pitchFamily="34" charset="-127"/>
+                <a:cs typeface="Pretendard" pitchFamily="34" charset="-120"/>
               </a:rPr>
               <a:t>A 50 · S 30 · 모회사 20 · B 10 · 리스크 20 · 정책 10 · 공고 −25 등</a:t>
             </a:r>
@@ -11272,9 +11272,9 @@
                 <a:solidFill>
                   <a:srgbClr val="1F3B5C"/>
                 </a:solidFill>
-                <a:latin typeface="S-Core Dream 5 Medium" pitchFamily="34" charset="0"/>
-                <a:ea typeface="S-Core Dream 5 Medium" pitchFamily="34" charset="-127"/>
-                <a:cs typeface="S-Core Dream 5 Medium" pitchFamily="34" charset="-120"/>
+                <a:latin typeface="Pretendard SemiBold" pitchFamily="34" charset="0"/>
+                <a:ea typeface="Pretendard SemiBold" pitchFamily="34" charset="-127"/>
+                <a:cs typeface="Pretendard SemiBold" pitchFamily="34" charset="-120"/>
               </a:rPr>
               <a:t>② 단어 목록</a:t>
             </a:r>
@@ -11292,9 +11292,9 @@
                 <a:solidFill>
                   <a:srgbClr val="1E2A36"/>
                 </a:solidFill>
-                <a:latin typeface="S-Core Dream 4 Regular" pitchFamily="34" charset="0"/>
-                <a:ea typeface="S-Core Dream 4 Regular" pitchFamily="34" charset="-127"/>
-                <a:cs typeface="S-Core Dream 4 Regular" pitchFamily="34" charset="-120"/>
+                <a:latin typeface="Pretendard" pitchFamily="34" charset="0"/>
+                <a:ea typeface="Pretendard" pitchFamily="34" charset="-127"/>
+                <a:cs typeface="Pretendard" pitchFamily="34" charset="-120"/>
               </a:rPr>
               <a:t>리스크어는 공단 관련 주제와 함께일 때만 점수</a:t>
             </a:r>
@@ -11312,9 +11312,9 @@
                 <a:solidFill>
                   <a:srgbClr val="1F3B5C"/>
                 </a:solidFill>
-                <a:latin typeface="S-Core Dream 5 Medium" pitchFamily="34" charset="0"/>
-                <a:ea typeface="S-Core Dream 5 Medium" pitchFamily="34" charset="-127"/>
-                <a:cs typeface="S-Core Dream 5 Medium" pitchFamily="34" charset="-120"/>
+                <a:latin typeface="Pretendard SemiBold" pitchFamily="34" charset="0"/>
+                <a:ea typeface="Pretendard SemiBold" pitchFamily="34" charset="-127"/>
+                <a:cs typeface="Pretendard SemiBold" pitchFamily="34" charset="-120"/>
               </a:rPr>
               <a:t>추천 기준(화면 아래쪽)</a:t>
             </a:r>
@@ -11332,9 +11332,9 @@
                 <a:solidFill>
                   <a:srgbClr val="1E2A36"/>
                 </a:solidFill>
-                <a:latin typeface="S-Core Dream 4 Regular" pitchFamily="34" charset="0"/>
-                <a:ea typeface="S-Core Dream 4 Regular" pitchFamily="34" charset="-127"/>
-                <a:cs typeface="S-Core Dream 4 Regular" pitchFamily="34" charset="-120"/>
+                <a:latin typeface="Pretendard" pitchFamily="34" charset="0"/>
+                <a:ea typeface="Pretendard" pitchFamily="34" charset="-127"/>
+                <a:cs typeface="Pretendard" pitchFamily="34" charset="-120"/>
               </a:rPr>
               <a:t>추천 5건 · 최소 30점 · 리스크 먼저 2건 · 공단 최소 1건 · 같은 분류 2건(업계·환경 1건)</a:t>
             </a:r>
@@ -11419,13 +11419,13 @@
               <a:buNone/>
             </a:pPr>
             <a:r>
-              <a:rPr lang="ko-KR" altLang="en-US" sz="2000" dirty="0">
+              <a:rPr lang="ko-KR" altLang="en-US" sz="2000" b="1" dirty="0">
                 <a:solidFill>
                   <a:srgbClr val="FFFFFF"/>
                 </a:solidFill>
-                <a:latin typeface="S-Core Dream 7 ExtraBold" pitchFamily="34" charset="0"/>
-                <a:ea typeface="S-Core Dream 7 ExtraBold" pitchFamily="34" charset="-127"/>
-                <a:cs typeface="S-Core Dream 7 ExtraBold" pitchFamily="34" charset="-120"/>
+                <a:latin typeface="Pretendard" pitchFamily="34" charset="0"/>
+                <a:ea typeface="Pretendard" pitchFamily="34" charset="-127"/>
+                <a:cs typeface="Pretendard" pitchFamily="34" charset="-120"/>
               </a:rPr>
               <a:t>04</a:t>
             </a:r>
@@ -11462,9 +11462,9 @@
                 <a:solidFill>
                   <a:srgbClr val="2E7D8C"/>
                 </a:solidFill>
-                <a:latin typeface="S-Core Dream 5 Medium" pitchFamily="34" charset="0"/>
-                <a:ea typeface="S-Core Dream 5 Medium" pitchFamily="34" charset="-127"/>
-                <a:cs typeface="S-Core Dream 5 Medium" pitchFamily="34" charset="-120"/>
+                <a:latin typeface="Pretendard SemiBold" pitchFamily="34" charset="0"/>
+                <a:ea typeface="Pretendard SemiBold" pitchFamily="34" charset="-127"/>
+                <a:cs typeface="Pretendard SemiBold" pitchFamily="34" charset="-120"/>
               </a:rPr>
               <a:t>선정 규칙 · 환류</a:t>
             </a:r>
@@ -11497,13 +11497,13 @@
               <a:buNone/>
             </a:pPr>
             <a:r>
-              <a:rPr lang="ko-KR" altLang="en-US" sz="2600" dirty="0">
+              <a:rPr lang="ko-KR" altLang="en-US" sz="2600" b="1" dirty="0">
                 <a:solidFill>
                   <a:srgbClr val="1F3B5C"/>
                 </a:solidFill>
-                <a:latin typeface="S-Core Dream 7 ExtraBold" pitchFamily="34" charset="0"/>
-                <a:ea typeface="S-Core Dream 7 ExtraBold" pitchFamily="34" charset="-127"/>
-                <a:cs typeface="S-Core Dream 7 ExtraBold" pitchFamily="34" charset="-120"/>
+                <a:latin typeface="Pretendard" pitchFamily="34" charset="0"/>
+                <a:ea typeface="Pretendard" pitchFamily="34" charset="-127"/>
+                <a:cs typeface="Pretendard" pitchFamily="34" charset="-120"/>
               </a:rPr>
               <a:t>환류: 결과 엑셀 → Claude → 규칙 붙여넣기</a:t>
             </a:r>
@@ -11540,9 +11540,9 @@
                 <a:solidFill>
                   <a:srgbClr val="667385"/>
                 </a:solidFill>
-                <a:latin typeface="S-Core Dream 4 Regular" pitchFamily="34" charset="0"/>
-                <a:ea typeface="S-Core Dream 4 Regular" pitchFamily="34" charset="-127"/>
-                <a:cs typeface="S-Core Dream 4 Regular" pitchFamily="34" charset="-120"/>
+                <a:latin typeface="Pretendard" pitchFamily="34" charset="0"/>
+                <a:ea typeface="Pretendard" pitchFamily="34" charset="-127"/>
+                <a:cs typeface="Pretendard" pitchFamily="34" charset="-120"/>
               </a:rPr>
               <a:t>앱의 판단과 담당자의 판단이 어긋난 곳이 곧 규칙을 고칠 곳입니다</a:t>
             </a:r>
@@ -11643,13 +11643,13 @@
               <a:buNone/>
             </a:pPr>
             <a:r>
-              <a:rPr lang="ko-KR" altLang="en-US" sz="1700" dirty="0">
+              <a:rPr lang="ko-KR" altLang="en-US" sz="1700" b="1" dirty="0">
                 <a:solidFill>
                   <a:srgbClr val="E8A33D"/>
                 </a:solidFill>
-                <a:latin typeface="S-Core Dream 7 ExtraBold" pitchFamily="34" charset="0"/>
-                <a:ea typeface="S-Core Dream 7 ExtraBold" pitchFamily="34" charset="-127"/>
-                <a:cs typeface="S-Core Dream 7 ExtraBold" pitchFamily="34" charset="-120"/>
+                <a:latin typeface="Pretendard" pitchFamily="34" charset="0"/>
+                <a:ea typeface="Pretendard" pitchFamily="34" charset="-127"/>
+                <a:cs typeface="Pretendard" pitchFamily="34" charset="-120"/>
               </a:rPr>
               <a:t>⑤</a:t>
             </a:r>
@@ -11686,9 +11686,9 @@
                 <a:solidFill>
                   <a:srgbClr val="1F3B5C"/>
                 </a:solidFill>
-                <a:latin typeface="S-Core Dream 5 Medium" pitchFamily="34" charset="0"/>
-                <a:ea typeface="S-Core Dream 5 Medium" pitchFamily="34" charset="-127"/>
-                <a:cs typeface="S-Core Dream 5 Medium" pitchFamily="34" charset="-120"/>
+                <a:latin typeface="Pretendard SemiBold" pitchFamily="34" charset="0"/>
+                <a:ea typeface="Pretendard SemiBold" pitchFamily="34" charset="-127"/>
+                <a:cs typeface="Pretendard SemiBold" pitchFamily="34" charset="-120"/>
               </a:rPr>
               <a:t>① 프로 탭 [⤓ 결과 엑셀로 내려받기]</a:t>
             </a:r>
@@ -11725,9 +11725,9 @@
                 <a:solidFill>
                   <a:srgbClr val="667385"/>
                 </a:solidFill>
-                <a:latin typeface="S-Core Dream 4 Regular" pitchFamily="34" charset="0"/>
-                <a:ea typeface="S-Core Dream 4 Regular" pitchFamily="34" charset="-127"/>
-                <a:cs typeface="S-Core Dream 4 Regular" pitchFamily="34" charset="-120"/>
+                <a:latin typeface="Pretendard" pitchFamily="34" charset="0"/>
+                <a:ea typeface="Pretendard" pitchFamily="34" charset="-127"/>
+                <a:cs typeface="Pretendard" pitchFamily="34" charset="-120"/>
               </a:rPr>
               <a:t>며칠 치를 모으면 더 정확</a:t>
             </a:r>
@@ -11764,9 +11764,9 @@
                 <a:solidFill>
                   <a:srgbClr val="1F3B5C"/>
                 </a:solidFill>
-                <a:latin typeface="S-Core Dream 5 Medium" pitchFamily="34" charset="0"/>
-                <a:ea typeface="S-Core Dream 5 Medium" pitchFamily="34" charset="-127"/>
-                <a:cs typeface="S-Core Dream 5 Medium" pitchFamily="34" charset="-120"/>
+                <a:latin typeface="Pretendard SemiBold" pitchFamily="34" charset="0"/>
+                <a:ea typeface="Pretendard SemiBold" pitchFamily="34" charset="-127"/>
+                <a:cs typeface="Pretendard SemiBold" pitchFamily="34" charset="-120"/>
               </a:rPr>
               <a:t>② 선정 규칙 [개선 요청문 복사]</a:t>
             </a:r>
@@ -11803,9 +11803,9 @@
                 <a:solidFill>
                   <a:srgbClr val="667385"/>
                 </a:solidFill>
-                <a:latin typeface="S-Core Dream 4 Regular" pitchFamily="34" charset="0"/>
-                <a:ea typeface="S-Core Dream 4 Regular" pitchFamily="34" charset="-127"/>
-                <a:cs typeface="S-Core Dream 4 Regular" pitchFamily="34" charset="-120"/>
+                <a:latin typeface="Pretendard" pitchFamily="34" charset="0"/>
+                <a:ea typeface="Pretendard" pitchFamily="34" charset="-127"/>
+                <a:cs typeface="Pretendard" pitchFamily="34" charset="-120"/>
               </a:rPr>
               <a:t>지금 규칙(JSON)이 함께 복사됨</a:t>
             </a:r>
@@ -11842,9 +11842,9 @@
                 <a:solidFill>
                   <a:srgbClr val="1F3B5C"/>
                 </a:solidFill>
-                <a:latin typeface="S-Core Dream 5 Medium" pitchFamily="34" charset="0"/>
-                <a:ea typeface="S-Core Dream 5 Medium" pitchFamily="34" charset="-127"/>
-                <a:cs typeface="S-Core Dream 5 Medium" pitchFamily="34" charset="-120"/>
+                <a:latin typeface="Pretendard SemiBold" pitchFamily="34" charset="0"/>
+                <a:ea typeface="Pretendard SemiBold" pitchFamily="34" charset="-127"/>
+                <a:cs typeface="Pretendard SemiBold" pitchFamily="34" charset="-120"/>
               </a:rPr>
               <a:t>③ Claude 대화창에 붙여넣기 + 엑셀 첨부</a:t>
             </a:r>
@@ -11881,9 +11881,9 @@
                 <a:solidFill>
                   <a:srgbClr val="667385"/>
                 </a:solidFill>
-                <a:latin typeface="S-Core Dream 4 Regular" pitchFamily="34" charset="0"/>
-                <a:ea typeface="S-Core Dream 4 Regular" pitchFamily="34" charset="-127"/>
-                <a:cs typeface="S-Core Dream 4 Regular" pitchFamily="34" charset="-120"/>
+                <a:latin typeface="Pretendard" pitchFamily="34" charset="0"/>
+                <a:ea typeface="Pretendard" pitchFamily="34" charset="-127"/>
+                <a:cs typeface="Pretendard" pitchFamily="34" charset="-120"/>
               </a:rPr>
               <a:t>개선 요청문이 답변 형식을 알려 줌</a:t>
             </a:r>
@@ -11920,9 +11920,9 @@
                 <a:solidFill>
                   <a:srgbClr val="1F3B5C"/>
                 </a:solidFill>
-                <a:latin typeface="S-Core Dream 5 Medium" pitchFamily="34" charset="0"/>
-                <a:ea typeface="S-Core Dream 5 Medium" pitchFamily="34" charset="-127"/>
-                <a:cs typeface="S-Core Dream 5 Medium" pitchFamily="34" charset="-120"/>
+                <a:latin typeface="Pretendard SemiBold" pitchFamily="34" charset="0"/>
+                <a:ea typeface="Pretendard SemiBold" pitchFamily="34" charset="-127"/>
+                <a:cs typeface="Pretendard SemiBold" pitchFamily="34" charset="-120"/>
               </a:rPr>
               <a:t>④ [Claude 답변 붙여넣기] → [다음]</a:t>
             </a:r>
@@ -11959,9 +11959,9 @@
                 <a:solidFill>
                   <a:srgbClr val="667385"/>
                 </a:solidFill>
-                <a:latin typeface="S-Core Dream 4 Regular" pitchFamily="34" charset="0"/>
-                <a:ea typeface="S-Core Dream 4 Regular" pitchFamily="34" charset="-127"/>
-                <a:cs typeface="S-Core Dream 4 Regular" pitchFamily="34" charset="-120"/>
+                <a:latin typeface="Pretendard" pitchFamily="34" charset="0"/>
+                <a:ea typeface="Pretendard" pitchFamily="34" charset="-127"/>
+                <a:cs typeface="Pretendard" pitchFamily="34" charset="-120"/>
               </a:rPr>
               <a:t>바뀔 항목을 먼저 보여 줌</a:t>
             </a:r>
@@ -11998,9 +11998,9 @@
                 <a:solidFill>
                   <a:srgbClr val="1F3B5C"/>
                 </a:solidFill>
-                <a:latin typeface="S-Core Dream 5 Medium" pitchFamily="34" charset="0"/>
-                <a:ea typeface="S-Core Dream 5 Medium" pitchFamily="34" charset="-127"/>
-                <a:cs typeface="S-Core Dream 5 Medium" pitchFamily="34" charset="-120"/>
+                <a:latin typeface="Pretendard SemiBold" pitchFamily="34" charset="0"/>
+                <a:ea typeface="Pretendard SemiBold" pitchFamily="34" charset="-127"/>
+                <a:cs typeface="Pretendard SemiBold" pitchFamily="34" charset="-120"/>
               </a:rPr>
               <a:t>⑤ [적용]</a:t>
             </a:r>
@@ -12037,9 +12037,9 @@
                 <a:solidFill>
                   <a:srgbClr val="667385"/>
                 </a:solidFill>
-                <a:latin typeface="S-Core Dream 4 Regular" pitchFamily="34" charset="0"/>
-                <a:ea typeface="S-Core Dream 4 Regular" pitchFamily="34" charset="-127"/>
-                <a:cs typeface="S-Core Dream 4 Regular" pitchFamily="34" charset="-120"/>
+                <a:latin typeface="Pretendard" pitchFamily="34" charset="0"/>
+                <a:ea typeface="Pretendard" pitchFamily="34" charset="-127"/>
+                <a:cs typeface="Pretendard" pitchFamily="34" charset="-120"/>
               </a:rPr>
               <a:t>저장 + 변경 이력에 '언제·무엇을' 남김</a:t>
             </a:r>
@@ -12124,13 +12124,13 @@
               <a:buNone/>
             </a:pPr>
             <a:r>
-              <a:rPr lang="ko-KR" altLang="en-US" sz="2000" dirty="0">
+              <a:rPr lang="ko-KR" altLang="en-US" sz="2000" b="1" dirty="0">
                 <a:solidFill>
                   <a:srgbClr val="FFFFFF"/>
                 </a:solidFill>
-                <a:latin typeface="S-Core Dream 7 ExtraBold" pitchFamily="34" charset="0"/>
-                <a:ea typeface="S-Core Dream 7 ExtraBold" pitchFamily="34" charset="-127"/>
-                <a:cs typeface="S-Core Dream 7 ExtraBold" pitchFamily="34" charset="-120"/>
+                <a:latin typeface="Pretendard" pitchFamily="34" charset="0"/>
+                <a:ea typeface="Pretendard" pitchFamily="34" charset="-127"/>
+                <a:cs typeface="Pretendard" pitchFamily="34" charset="-120"/>
               </a:rPr>
               <a:t>05</a:t>
             </a:r>
@@ -12167,9 +12167,9 @@
                 <a:solidFill>
                   <a:srgbClr val="2E7D8C"/>
                 </a:solidFill>
-                <a:latin typeface="S-Core Dream 5 Medium" pitchFamily="34" charset="0"/>
-                <a:ea typeface="S-Core Dream 5 Medium" pitchFamily="34" charset="-127"/>
-                <a:cs typeface="S-Core Dream 5 Medium" pitchFamily="34" charset="-120"/>
+                <a:latin typeface="Pretendard SemiBold" pitchFamily="34" charset="0"/>
+                <a:ea typeface="Pretendard SemiBold" pitchFamily="34" charset="-127"/>
+                <a:cs typeface="Pretendard SemiBold" pitchFamily="34" charset="-120"/>
               </a:rPr>
               <a:t>설정</a:t>
             </a:r>
@@ -12202,13 +12202,13 @@
               <a:buNone/>
             </a:pPr>
             <a:r>
-              <a:rPr lang="ko-KR" altLang="en-US" sz="2600" dirty="0">
+              <a:rPr lang="ko-KR" altLang="en-US" sz="2600" b="1" dirty="0">
                 <a:solidFill>
                   <a:srgbClr val="1F3B5C"/>
                 </a:solidFill>
-                <a:latin typeface="S-Core Dream 7 ExtraBold" pitchFamily="34" charset="0"/>
-                <a:ea typeface="S-Core Dream 7 ExtraBold" pitchFamily="34" charset="-127"/>
-                <a:cs typeface="S-Core Dream 7 ExtraBold" pitchFamily="34" charset="-120"/>
+                <a:latin typeface="Pretendard" pitchFamily="34" charset="0"/>
+                <a:ea typeface="Pretendard" pitchFamily="34" charset="-127"/>
+                <a:cs typeface="Pretendard" pitchFamily="34" charset="-120"/>
               </a:rPr>
               <a:t>설정: 기사 출처·보고서·공휴일</a:t>
             </a:r>
@@ -12245,9 +12245,9 @@
                 <a:solidFill>
                   <a:srgbClr val="667385"/>
                 </a:solidFill>
-                <a:latin typeface="S-Core Dream 4 Regular" pitchFamily="34" charset="0"/>
-                <a:ea typeface="S-Core Dream 4 Regular" pitchFamily="34" charset="-127"/>
-                <a:cs typeface="S-Core Dream 4 Regular" pitchFamily="34" charset="-120"/>
+                <a:latin typeface="Pretendard" pitchFamily="34" charset="0"/>
+                <a:ea typeface="Pretendard" pitchFamily="34" charset="-127"/>
+                <a:cs typeface="Pretendard" pitchFamily="34" charset="-120"/>
               </a:rPr>
               <a:t>바꾼 값은 [설정 저장]을 눌러야 적용됩니다</a:t>
             </a:r>
@@ -12348,13 +12348,13 @@
               <a:buNone/>
             </a:pPr>
             <a:r>
-              <a:rPr lang="ko-KR" altLang="en-US" sz="1700" dirty="0">
+              <a:rPr lang="ko-KR" altLang="en-US" sz="1700" b="1" dirty="0">
                 <a:solidFill>
                   <a:srgbClr val="E8A33D"/>
                 </a:solidFill>
-                <a:latin typeface="S-Core Dream 7 ExtraBold" pitchFamily="34" charset="0"/>
-                <a:ea typeface="S-Core Dream 7 ExtraBold" pitchFamily="34" charset="-127"/>
-                <a:cs typeface="S-Core Dream 7 ExtraBold" pitchFamily="34" charset="-120"/>
+                <a:latin typeface="Pretendard" pitchFamily="34" charset="0"/>
+                <a:ea typeface="Pretendard" pitchFamily="34" charset="-127"/>
+                <a:cs typeface="Pretendard" pitchFamily="34" charset="-120"/>
               </a:rPr>
               <a:t>①</a:t>
             </a:r>
@@ -12409,13 +12409,13 @@
               <a:buNone/>
             </a:pPr>
             <a:r>
-              <a:rPr lang="ko-KR" altLang="en-US" sz="1700" dirty="0">
+              <a:rPr lang="ko-KR" altLang="en-US" sz="1700" b="1" dirty="0">
                 <a:solidFill>
                   <a:srgbClr val="E8A33D"/>
                 </a:solidFill>
-                <a:latin typeface="S-Core Dream 7 ExtraBold" pitchFamily="34" charset="0"/>
-                <a:ea typeface="S-Core Dream 7 ExtraBold" pitchFamily="34" charset="-127"/>
-                <a:cs typeface="S-Core Dream 7 ExtraBold" pitchFamily="34" charset="-120"/>
+                <a:latin typeface="Pretendard" pitchFamily="34" charset="0"/>
+                <a:ea typeface="Pretendard" pitchFamily="34" charset="-127"/>
+                <a:cs typeface="Pretendard" pitchFamily="34" charset="-120"/>
               </a:rPr>
               <a:t>②</a:t>
             </a:r>
@@ -12470,13 +12470,13 @@
               <a:buNone/>
             </a:pPr>
             <a:r>
-              <a:rPr lang="ko-KR" altLang="en-US" sz="1700" dirty="0">
+              <a:rPr lang="ko-KR" altLang="en-US" sz="1700" b="1" dirty="0">
                 <a:solidFill>
                   <a:srgbClr val="E8A33D"/>
                 </a:solidFill>
-                <a:latin typeface="S-Core Dream 7 ExtraBold" pitchFamily="34" charset="0"/>
-                <a:ea typeface="S-Core Dream 7 ExtraBold" pitchFamily="34" charset="-127"/>
-                <a:cs typeface="S-Core Dream 7 ExtraBold" pitchFamily="34" charset="-120"/>
+                <a:latin typeface="Pretendard" pitchFamily="34" charset="0"/>
+                <a:ea typeface="Pretendard" pitchFamily="34" charset="-127"/>
+                <a:cs typeface="Pretendard" pitchFamily="34" charset="-120"/>
               </a:rPr>
               <a:t>③</a:t>
             </a:r>
@@ -12531,13 +12531,13 @@
               <a:buNone/>
             </a:pPr>
             <a:r>
-              <a:rPr lang="ko-KR" altLang="en-US" sz="1700" dirty="0">
+              <a:rPr lang="ko-KR" altLang="en-US" sz="1700" b="1" dirty="0">
                 <a:solidFill>
                   <a:srgbClr val="E8A33D"/>
                 </a:solidFill>
-                <a:latin typeface="S-Core Dream 7 ExtraBold" pitchFamily="34" charset="0"/>
-                <a:ea typeface="S-Core Dream 7 ExtraBold" pitchFamily="34" charset="-127"/>
-                <a:cs typeface="S-Core Dream 7 ExtraBold" pitchFamily="34" charset="-120"/>
+                <a:latin typeface="Pretendard" pitchFamily="34" charset="0"/>
+                <a:ea typeface="Pretendard" pitchFamily="34" charset="-127"/>
+                <a:cs typeface="Pretendard" pitchFamily="34" charset="-120"/>
               </a:rPr>
               <a:t>④</a:t>
             </a:r>
@@ -12592,13 +12592,13 @@
               <a:buNone/>
             </a:pPr>
             <a:r>
-              <a:rPr lang="ko-KR" altLang="en-US" sz="1700" dirty="0">
+              <a:rPr lang="ko-KR" altLang="en-US" sz="1700" b="1" dirty="0">
                 <a:solidFill>
                   <a:srgbClr val="E8A33D"/>
                 </a:solidFill>
-                <a:latin typeface="S-Core Dream 7 ExtraBold" pitchFamily="34" charset="0"/>
-                <a:ea typeface="S-Core Dream 7 ExtraBold" pitchFamily="34" charset="-127"/>
-                <a:cs typeface="S-Core Dream 7 ExtraBold" pitchFamily="34" charset="-120"/>
+                <a:latin typeface="Pretendard" pitchFamily="34" charset="0"/>
+                <a:ea typeface="Pretendard" pitchFamily="34" charset="-127"/>
+                <a:cs typeface="Pretendard" pitchFamily="34" charset="-120"/>
               </a:rPr>
               <a:t>⑤</a:t>
             </a:r>
@@ -12635,9 +12635,9 @@
                 <a:solidFill>
                   <a:srgbClr val="1F3B5C"/>
                 </a:solidFill>
-                <a:latin typeface="S-Core Dream 5 Medium" pitchFamily="34" charset="0"/>
-                <a:ea typeface="S-Core Dream 5 Medium" pitchFamily="34" charset="-127"/>
-                <a:cs typeface="S-Core Dream 5 Medium" pitchFamily="34" charset="-120"/>
+                <a:latin typeface="Pretendard SemiBold" pitchFamily="34" charset="0"/>
+                <a:ea typeface="Pretendard SemiBold" pitchFamily="34" charset="-127"/>
+                <a:cs typeface="Pretendard SemiBold" pitchFamily="34" charset="-120"/>
               </a:rPr>
               <a:t>① 기사 출처</a:t>
             </a:r>
@@ -12655,9 +12655,9 @@
                 <a:solidFill>
                   <a:srgbClr val="1E2A36"/>
                 </a:solidFill>
-                <a:latin typeface="S-Core Dream 4 Regular" pitchFamily="34" charset="0"/>
-                <a:ea typeface="S-Core Dream 4 Regular" pitchFamily="34" charset="-127"/>
-                <a:cs typeface="S-Core Dream 4 Regular" pitchFamily="34" charset="-120"/>
+                <a:latin typeface="Pretendard" pitchFamily="34" charset="0"/>
+                <a:ea typeface="Pretendard" pitchFamily="34" charset="-127"/>
+                <a:cs typeface="Pretendard" pitchFamily="34" charset="-120"/>
               </a:rPr>
               <a:t>구글 뉴스(키 불필요)가 기본. 전문지 RSS 함께 조회</a:t>
             </a:r>
@@ -12675,9 +12675,9 @@
                 <a:solidFill>
                   <a:srgbClr val="1F3B5C"/>
                 </a:solidFill>
-                <a:latin typeface="S-Core Dream 5 Medium" pitchFamily="34" charset="0"/>
-                <a:ea typeface="S-Core Dream 5 Medium" pitchFamily="34" charset="-127"/>
-                <a:cs typeface="S-Core Dream 5 Medium" pitchFamily="34" charset="-120"/>
+                <a:latin typeface="Pretendard SemiBold" pitchFamily="34" charset="0"/>
+                <a:ea typeface="Pretendard SemiBold" pitchFamily="34" charset="-127"/>
+                <a:cs typeface="Pretendard SemiBold" pitchFamily="34" charset="-120"/>
               </a:rPr>
               <a:t>② 보고서</a:t>
             </a:r>
@@ -12695,9 +12695,9 @@
                 <a:solidFill>
                   <a:srgbClr val="1E2A36"/>
                 </a:solidFill>
-                <a:latin typeface="S-Core Dream 4 Regular" pitchFamily="34" charset="0"/>
-                <a:ea typeface="S-Core Dream 4 Regular" pitchFamily="34" charset="-127"/>
-                <a:cs typeface="S-Core Dream 4 Regular" pitchFamily="34" charset="-120"/>
+                <a:latin typeface="Pretendard" pitchFamily="34" charset="0"/>
+                <a:ea typeface="Pretendard" pitchFamily="34" charset="-127"/>
+                <a:cs typeface="Pretendard" pitchFamily="34" charset="-120"/>
               </a:rPr>
               <a:t>메일 제목 {날짜} → 261026 · 보고서 제목</a:t>
             </a:r>
@@ -12715,9 +12715,9 @@
                 <a:solidFill>
                   <a:srgbClr val="1F3B5C"/>
                 </a:solidFill>
-                <a:latin typeface="S-Core Dream 5 Medium" pitchFamily="34" charset="0"/>
-                <a:ea typeface="S-Core Dream 5 Medium" pitchFamily="34" charset="-127"/>
-                <a:cs typeface="S-Core Dream 5 Medium" pitchFamily="34" charset="-120"/>
+                <a:latin typeface="Pretendard SemiBold" pitchFamily="34" charset="0"/>
+                <a:ea typeface="Pretendard SemiBold" pitchFamily="34" charset="-127"/>
+                <a:cs typeface="Pretendard SemiBold" pitchFamily="34" charset="-120"/>
               </a:rPr>
               <a:t>③ 선정 규칙</a:t>
             </a:r>
@@ -12735,9 +12735,9 @@
                 <a:solidFill>
                   <a:srgbClr val="1E2A36"/>
                 </a:solidFill>
-                <a:latin typeface="S-Core Dream 4 Regular" pitchFamily="34" charset="0"/>
-                <a:ea typeface="S-Core Dream 4 Regular" pitchFamily="34" charset="-127"/>
-                <a:cs typeface="S-Core Dream 4 Regular" pitchFamily="34" charset="-120"/>
+                <a:latin typeface="Pretendard" pitchFamily="34" charset="0"/>
+                <a:ea typeface="Pretendard" pitchFamily="34" charset="-127"/>
+                <a:cs typeface="Pretendard" pitchFamily="34" charset="-120"/>
               </a:rPr>
               <a:t>키워드·점수는 선정 규칙 탭에서</a:t>
             </a:r>
@@ -12755,9 +12755,9 @@
                 <a:solidFill>
                   <a:srgbClr val="1F3B5C"/>
                 </a:solidFill>
-                <a:latin typeface="S-Core Dream 5 Medium" pitchFamily="34" charset="0"/>
-                <a:ea typeface="S-Core Dream 5 Medium" pitchFamily="34" charset="-127"/>
-                <a:cs typeface="S-Core Dream 5 Medium" pitchFamily="34" charset="-120"/>
+                <a:latin typeface="Pretendard SemiBold" pitchFamily="34" charset="0"/>
+                <a:ea typeface="Pretendard SemiBold" pitchFamily="34" charset="-127"/>
+                <a:cs typeface="Pretendard SemiBold" pitchFamily="34" charset="-120"/>
               </a:rPr>
               <a:t>④ 공휴일</a:t>
             </a:r>
@@ -12775,9 +12775,9 @@
                 <a:solidFill>
                   <a:srgbClr val="1E2A36"/>
                 </a:solidFill>
-                <a:latin typeface="S-Core Dream 4 Regular" pitchFamily="34" charset="0"/>
-                <a:ea typeface="S-Core Dream 4 Regular" pitchFamily="34" charset="-127"/>
-                <a:cs typeface="S-Core Dream 4 Regular" pitchFamily="34" charset="-120"/>
+                <a:latin typeface="Pretendard" pitchFamily="34" charset="0"/>
+                <a:ea typeface="Pretendard" pitchFamily="34" charset="-127"/>
+                <a:cs typeface="Pretendard" pitchFamily="34" charset="-120"/>
               </a:rPr>
               <a:t>자동 기간 계산용. 임시공휴일은 한 줄 추가</a:t>
             </a:r>
@@ -12795,9 +12795,9 @@
                 <a:solidFill>
                   <a:srgbClr val="1F3B5C"/>
                 </a:solidFill>
-                <a:latin typeface="S-Core Dream 5 Medium" pitchFamily="34" charset="0"/>
-                <a:ea typeface="S-Core Dream 5 Medium" pitchFamily="34" charset="-127"/>
-                <a:cs typeface="S-Core Dream 5 Medium" pitchFamily="34" charset="-120"/>
+                <a:latin typeface="Pretendard SemiBold" pitchFamily="34" charset="0"/>
+                <a:ea typeface="Pretendard SemiBold" pitchFamily="34" charset="-127"/>
+                <a:cs typeface="Pretendard SemiBold" pitchFamily="34" charset="-120"/>
               </a:rPr>
               <a:t>⑤ 설정 저장</a:t>
             </a:r>
@@ -12815,9 +12815,9 @@
                 <a:solidFill>
                   <a:srgbClr val="1E2A36"/>
                 </a:solidFill>
-                <a:latin typeface="S-Core Dream 4 Regular" pitchFamily="34" charset="0"/>
-                <a:ea typeface="S-Core Dream 4 Regular" pitchFamily="34" charset="-127"/>
-                <a:cs typeface="S-Core Dream 4 Regular" pitchFamily="34" charset="-120"/>
+                <a:latin typeface="Pretendard" pitchFamily="34" charset="0"/>
+                <a:ea typeface="Pretendard" pitchFamily="34" charset="-127"/>
+                <a:cs typeface="Pretendard" pitchFamily="34" charset="-120"/>
               </a:rPr>
               <a:t>이 PC의 config.json에만 저장</a:t>
             </a:r>
@@ -12902,13 +12902,13 @@
               <a:buNone/>
             </a:pPr>
             <a:r>
-              <a:rPr lang="ko-KR" altLang="en-US" sz="2000" dirty="0">
+              <a:rPr lang="ko-KR" altLang="en-US" sz="2000" b="1" dirty="0">
                 <a:solidFill>
                   <a:srgbClr val="FFFFFF"/>
                 </a:solidFill>
-                <a:latin typeface="S-Core Dream 7 ExtraBold" pitchFamily="34" charset="0"/>
-                <a:ea typeface="S-Core Dream 7 ExtraBold" pitchFamily="34" charset="-127"/>
-                <a:cs typeface="S-Core Dream 7 ExtraBold" pitchFamily="34" charset="-120"/>
+                <a:latin typeface="Pretendard" pitchFamily="34" charset="0"/>
+                <a:ea typeface="Pretendard" pitchFamily="34" charset="-127"/>
+                <a:cs typeface="Pretendard" pitchFamily="34" charset="-120"/>
               </a:rPr>
               <a:t>00</a:t>
             </a:r>
@@ -12945,9 +12945,9 @@
                 <a:solidFill>
                   <a:srgbClr val="2E7D8C"/>
                 </a:solidFill>
-                <a:latin typeface="S-Core Dream 5 Medium" pitchFamily="34" charset="0"/>
-                <a:ea typeface="S-Core Dream 5 Medium" pitchFamily="34" charset="-127"/>
-                <a:cs typeface="S-Core Dream 5 Medium" pitchFamily="34" charset="-120"/>
+                <a:latin typeface="Pretendard SemiBold" pitchFamily="34" charset="0"/>
+                <a:ea typeface="Pretendard SemiBold" pitchFamily="34" charset="-127"/>
+                <a:cs typeface="Pretendard SemiBold" pitchFamily="34" charset="-120"/>
               </a:rPr>
               <a:t>목차</a:t>
             </a:r>
@@ -12980,13 +12980,13 @@
               <a:buNone/>
             </a:pPr>
             <a:r>
-              <a:rPr lang="ko-KR" altLang="en-US" sz="2600" dirty="0">
+              <a:rPr lang="ko-KR" altLang="en-US" sz="2600" b="1" dirty="0">
                 <a:solidFill>
                   <a:srgbClr val="1F3B5C"/>
                 </a:solidFill>
-                <a:latin typeface="S-Core Dream 7 ExtraBold" pitchFamily="34" charset="0"/>
-                <a:ea typeface="S-Core Dream 7 ExtraBold" pitchFamily="34" charset="-127"/>
-                <a:cs typeface="S-Core Dream 7 ExtraBold" pitchFamily="34" charset="-120"/>
+                <a:latin typeface="Pretendard" pitchFamily="34" charset="0"/>
+                <a:ea typeface="Pretendard" pitchFamily="34" charset="-127"/>
+                <a:cs typeface="Pretendard" pitchFamily="34" charset="-120"/>
               </a:rPr>
               <a:t>이 매뉴얼의 순서</a:t>
             </a:r>
@@ -13023,9 +13023,9 @@
                 <a:solidFill>
                   <a:srgbClr val="667385"/>
                 </a:solidFill>
-                <a:latin typeface="S-Core Dream 4 Regular" pitchFamily="34" charset="0"/>
-                <a:ea typeface="S-Core Dream 4 Regular" pitchFamily="34" charset="-127"/>
-                <a:cs typeface="S-Core Dream 4 Regular" pitchFamily="34" charset="-120"/>
+                <a:latin typeface="Pretendard" pitchFamily="34" charset="0"/>
+                <a:ea typeface="Pretendard" pitchFamily="34" charset="-127"/>
+                <a:cs typeface="Pretendard" pitchFamily="34" charset="-120"/>
               </a:rPr>
               <a:t>처음 쓰는 직원은 01·02만 읽어도 매일 보고를 할 수 있습니다</a:t>
             </a:r>
@@ -13113,9 +13113,9 @@
                 <a:solidFill>
                   <a:srgbClr val="1F3B5C"/>
                 </a:solidFill>
-                <a:latin typeface="S-Core Dream 5 Medium" pitchFamily="34" charset="0"/>
-                <a:ea typeface="S-Core Dream 5 Medium" pitchFamily="34" charset="-127"/>
-                <a:cs typeface="S-Core Dream 5 Medium" pitchFamily="34" charset="-120"/>
+                <a:latin typeface="Pretendard SemiBold" pitchFamily="34" charset="0"/>
+                <a:ea typeface="Pretendard SemiBold" pitchFamily="34" charset="-127"/>
+                <a:cs typeface="Pretendard SemiBold" pitchFamily="34" charset="-120"/>
               </a:rPr>
               <a:t>01 시작하기</a:t>
             </a:r>
@@ -13152,9 +13152,9 @@
                 <a:solidFill>
                   <a:srgbClr val="1E2A36"/>
                 </a:solidFill>
-                <a:latin typeface="S-Core Dream 4 Regular" pitchFamily="34" charset="0"/>
-                <a:ea typeface="S-Core Dream 4 Regular" pitchFamily="34" charset="-127"/>
-                <a:cs typeface="S-Core Dream 4 Regular" pitchFamily="34" charset="-120"/>
+                <a:latin typeface="Pretendard" pitchFamily="34" charset="0"/>
+                <a:ea typeface="Pretendard" pitchFamily="34" charset="-127"/>
+                <a:cs typeface="Pretendard" pitchFamily="34" charset="-120"/>
               </a:rPr>
               <a:t>설치·첫 실행·화면 구성</a:t>
             </a:r>
@@ -13242,9 +13242,9 @@
                 <a:solidFill>
                   <a:srgbClr val="1F3B5C"/>
                 </a:solidFill>
-                <a:latin typeface="S-Core Dream 5 Medium" pitchFamily="34" charset="0"/>
-                <a:ea typeface="S-Core Dream 5 Medium" pitchFamily="34" charset="-127"/>
-                <a:cs typeface="S-Core Dream 5 Medium" pitchFamily="34" charset="-120"/>
+                <a:latin typeface="Pretendard SemiBold" pitchFamily="34" charset="0"/>
+                <a:ea typeface="Pretendard SemiBold" pitchFamily="34" charset="-127"/>
+                <a:cs typeface="Pretendard SemiBold" pitchFamily="34" charset="-120"/>
               </a:rPr>
               <a:t>02 베이직</a:t>
             </a:r>
@@ -13281,9 +13281,9 @@
                 <a:solidFill>
                   <a:srgbClr val="1E2A36"/>
                 </a:solidFill>
-                <a:latin typeface="S-Core Dream 4 Regular" pitchFamily="34" charset="0"/>
-                <a:ea typeface="S-Core Dream 4 Regular" pitchFamily="34" charset="-127"/>
-                <a:cs typeface="S-Core Dream 4 Regular" pitchFamily="34" charset="-120"/>
+                <a:latin typeface="Pretendard" pitchFamily="34" charset="0"/>
+                <a:ea typeface="Pretendard" pitchFamily="34" charset="-127"/>
+                <a:cs typeface="Pretendard" pitchFamily="34" charset="-120"/>
               </a:rPr>
               <a:t>조회 → 추천 확인 → 보고서 → 기록</a:t>
             </a:r>
@@ -13371,9 +13371,9 @@
                 <a:solidFill>
                   <a:srgbClr val="1F3B5C"/>
                 </a:solidFill>
-                <a:latin typeface="S-Core Dream 5 Medium" pitchFamily="34" charset="0"/>
-                <a:ea typeface="S-Core Dream 5 Medium" pitchFamily="34" charset="-127"/>
-                <a:cs typeface="S-Core Dream 5 Medium" pitchFamily="34" charset="-120"/>
+                <a:latin typeface="Pretendard SemiBold" pitchFamily="34" charset="0"/>
+                <a:ea typeface="Pretendard SemiBold" pitchFamily="34" charset="-127"/>
+                <a:cs typeface="Pretendard SemiBold" pitchFamily="34" charset="-120"/>
               </a:rPr>
               <a:t>03 프로</a:t>
             </a:r>
@@ -13410,9 +13410,9 @@
                 <a:solidFill>
                   <a:srgbClr val="1E2A36"/>
                 </a:solidFill>
-                <a:latin typeface="S-Core Dream 4 Regular" pitchFamily="34" charset="0"/>
-                <a:ea typeface="S-Core Dream 4 Regular" pitchFamily="34" charset="-127"/>
-                <a:cs typeface="S-Core Dream 4 Regular" pitchFamily="34" charset="-120"/>
+                <a:latin typeface="Pretendard" pitchFamily="34" charset="0"/>
+                <a:ea typeface="Pretendard" pitchFamily="34" charset="-127"/>
+                <a:cs typeface="Pretendard" pitchFamily="34" charset="-120"/>
               </a:rPr>
               <a:t>AI 선별·순서 정하기·결과 엑셀</a:t>
             </a:r>
@@ -13500,9 +13500,9 @@
                 <a:solidFill>
                   <a:srgbClr val="1F3B5C"/>
                 </a:solidFill>
-                <a:latin typeface="S-Core Dream 5 Medium" pitchFamily="34" charset="0"/>
-                <a:ea typeface="S-Core Dream 5 Medium" pitchFamily="34" charset="-127"/>
-                <a:cs typeface="S-Core Dream 5 Medium" pitchFamily="34" charset="-120"/>
+                <a:latin typeface="Pretendard SemiBold" pitchFamily="34" charset="0"/>
+                <a:ea typeface="Pretendard SemiBold" pitchFamily="34" charset="-127"/>
+                <a:cs typeface="Pretendard SemiBold" pitchFamily="34" charset="-120"/>
               </a:rPr>
               <a:t>04 선정 규칙</a:t>
             </a:r>
@@ -13539,9 +13539,9 @@
                 <a:solidFill>
                   <a:srgbClr val="1E2A36"/>
                 </a:solidFill>
-                <a:latin typeface="S-Core Dream 4 Regular" pitchFamily="34" charset="0"/>
-                <a:ea typeface="S-Core Dream 4 Regular" pitchFamily="34" charset="-127"/>
-                <a:cs typeface="S-Core Dream 4 Regular" pitchFamily="34" charset="-120"/>
+                <a:latin typeface="Pretendard" pitchFamily="34" charset="0"/>
+                <a:ea typeface="Pretendard" pitchFamily="34" charset="-127"/>
+                <a:cs typeface="Pretendard" pitchFamily="34" charset="-120"/>
               </a:rPr>
               <a:t>키워드·점수·추천 기준과 환류</a:t>
             </a:r>
@@ -13629,9 +13629,9 @@
                 <a:solidFill>
                   <a:srgbClr val="1F3B5C"/>
                 </a:solidFill>
-                <a:latin typeface="S-Core Dream 5 Medium" pitchFamily="34" charset="0"/>
-                <a:ea typeface="S-Core Dream 5 Medium" pitchFamily="34" charset="-127"/>
-                <a:cs typeface="S-Core Dream 5 Medium" pitchFamily="34" charset="-120"/>
+                <a:latin typeface="Pretendard SemiBold" pitchFamily="34" charset="0"/>
+                <a:ea typeface="Pretendard SemiBold" pitchFamily="34" charset="-127"/>
+                <a:cs typeface="Pretendard SemiBold" pitchFamily="34" charset="-120"/>
               </a:rPr>
               <a:t>05 설정</a:t>
             </a:r>
@@ -13668,9 +13668,9 @@
                 <a:solidFill>
                   <a:srgbClr val="1E2A36"/>
                 </a:solidFill>
-                <a:latin typeface="S-Core Dream 4 Regular" pitchFamily="34" charset="0"/>
-                <a:ea typeface="S-Core Dream 4 Regular" pitchFamily="34" charset="-127"/>
-                <a:cs typeface="S-Core Dream 4 Regular" pitchFamily="34" charset="-120"/>
+                <a:latin typeface="Pretendard" pitchFamily="34" charset="0"/>
+                <a:ea typeface="Pretendard" pitchFamily="34" charset="-127"/>
+                <a:cs typeface="Pretendard" pitchFamily="34" charset="-120"/>
               </a:rPr>
               <a:t>기사 출처·전문지·보고서·공휴일</a:t>
             </a:r>
@@ -13758,9 +13758,9 @@
                 <a:solidFill>
                   <a:srgbClr val="1F3B5C"/>
                 </a:solidFill>
-                <a:latin typeface="S-Core Dream 5 Medium" pitchFamily="34" charset="0"/>
-                <a:ea typeface="S-Core Dream 5 Medium" pitchFamily="34" charset="-127"/>
-                <a:cs typeface="S-Core Dream 5 Medium" pitchFamily="34" charset="-120"/>
+                <a:latin typeface="Pretendard SemiBold" pitchFamily="34" charset="0"/>
+                <a:ea typeface="Pretendard SemiBold" pitchFamily="34" charset="-127"/>
+                <a:cs typeface="Pretendard SemiBold" pitchFamily="34" charset="-120"/>
               </a:rPr>
               <a:t>06 문제 해결</a:t>
             </a:r>
@@ -13797,9 +13797,9 @@
                 <a:solidFill>
                   <a:srgbClr val="1E2A36"/>
                 </a:solidFill>
-                <a:latin typeface="S-Core Dream 4 Regular" pitchFamily="34" charset="0"/>
-                <a:ea typeface="S-Core Dream 4 Regular" pitchFamily="34" charset="-127"/>
-                <a:cs typeface="S-Core Dream 4 Regular" pitchFamily="34" charset="-120"/>
+                <a:latin typeface="Pretendard" pitchFamily="34" charset="0"/>
+                <a:ea typeface="Pretendard" pitchFamily="34" charset="-127"/>
+                <a:cs typeface="Pretendard" pitchFamily="34" charset="-120"/>
               </a:rPr>
               <a:t>자주 묻는 것·확인 필요 사항</a:t>
             </a:r>
@@ -13884,13 +13884,13 @@
               <a:buNone/>
             </a:pPr>
             <a:r>
-              <a:rPr lang="ko-KR" altLang="en-US" sz="2000" dirty="0">
+              <a:rPr lang="ko-KR" altLang="en-US" sz="2000" b="1" dirty="0">
                 <a:solidFill>
                   <a:srgbClr val="FFFFFF"/>
                 </a:solidFill>
-                <a:latin typeface="S-Core Dream 7 ExtraBold" pitchFamily="34" charset="0"/>
-                <a:ea typeface="S-Core Dream 7 ExtraBold" pitchFamily="34" charset="-127"/>
-                <a:cs typeface="S-Core Dream 7 ExtraBold" pitchFamily="34" charset="-120"/>
+                <a:latin typeface="Pretendard" pitchFamily="34" charset="0"/>
+                <a:ea typeface="Pretendard" pitchFamily="34" charset="-127"/>
+                <a:cs typeface="Pretendard" pitchFamily="34" charset="-120"/>
               </a:rPr>
               <a:t>05</a:t>
             </a:r>
@@ -13927,9 +13927,9 @@
                 <a:solidFill>
                   <a:srgbClr val="2E7D8C"/>
                 </a:solidFill>
-                <a:latin typeface="S-Core Dream 5 Medium" pitchFamily="34" charset="0"/>
-                <a:ea typeface="S-Core Dream 5 Medium" pitchFamily="34" charset="-127"/>
-                <a:cs typeface="S-Core Dream 5 Medium" pitchFamily="34" charset="-120"/>
+                <a:latin typeface="Pretendard SemiBold" pitchFamily="34" charset="0"/>
+                <a:ea typeface="Pretendard SemiBold" pitchFamily="34" charset="-127"/>
+                <a:cs typeface="Pretendard SemiBold" pitchFamily="34" charset="-120"/>
               </a:rPr>
               <a:t>설정 · 전문지 고르기</a:t>
             </a:r>
@@ -13962,13 +13962,13 @@
               <a:buNone/>
             </a:pPr>
             <a:r>
-              <a:rPr lang="ko-KR" altLang="en-US" sz="2600" dirty="0">
+              <a:rPr lang="ko-KR" altLang="en-US" sz="2600" b="1" dirty="0">
                 <a:solidFill>
                   <a:srgbClr val="1F3B5C"/>
                 </a:solidFill>
-                <a:latin typeface="S-Core Dream 7 ExtraBold" pitchFamily="34" charset="0"/>
-                <a:ea typeface="S-Core Dream 7 ExtraBold" pitchFamily="34" charset="-127"/>
-                <a:cs typeface="S-Core Dream 7 ExtraBold" pitchFamily="34" charset="-120"/>
+                <a:latin typeface="Pretendard" pitchFamily="34" charset="0"/>
+                <a:ea typeface="Pretendard" pitchFamily="34" charset="-127"/>
+                <a:cs typeface="Pretendard" pitchFamily="34" charset="-120"/>
               </a:rPr>
               <a:t>전문지 고르기: 홈페이지 주소만 넣으면</a:t>
             </a:r>
@@ -14005,9 +14005,9 @@
                 <a:solidFill>
                   <a:srgbClr val="667385"/>
                 </a:solidFill>
-                <a:latin typeface="S-Core Dream 4 Regular" pitchFamily="34" charset="0"/>
-                <a:ea typeface="S-Core Dream 4 Regular" pitchFamily="34" charset="-127"/>
-                <a:cs typeface="S-Core Dream 4 Regular" pitchFamily="34" charset="-120"/>
+                <a:latin typeface="Pretendard" pitchFamily="34" charset="0"/>
+                <a:ea typeface="Pretendard" pitchFamily="34" charset="-127"/>
+                <a:cs typeface="Pretendard" pitchFamily="34" charset="-120"/>
               </a:rPr>
               <a:t>[설정] → [전문지 고르기 ›]. RSS 주소를 몰라도 홈페이지 주소로 찾아 연결까지 확인합니다</a:t>
             </a:r>
@@ -14108,13 +14108,13 @@
               <a:buNone/>
             </a:pPr>
             <a:r>
-              <a:rPr lang="ko-KR" altLang="en-US" sz="1700" dirty="0">
+              <a:rPr lang="ko-KR" altLang="en-US" sz="1700" b="1" dirty="0">
                 <a:solidFill>
                   <a:srgbClr val="E8A33D"/>
                 </a:solidFill>
-                <a:latin typeface="S-Core Dream 7 ExtraBold" pitchFamily="34" charset="0"/>
-                <a:ea typeface="S-Core Dream 7 ExtraBold" pitchFamily="34" charset="-127"/>
-                <a:cs typeface="S-Core Dream 7 ExtraBold" pitchFamily="34" charset="-120"/>
+                <a:latin typeface="Pretendard" pitchFamily="34" charset="0"/>
+                <a:ea typeface="Pretendard" pitchFamily="34" charset="-127"/>
+                <a:cs typeface="Pretendard" pitchFamily="34" charset="-120"/>
               </a:rPr>
               <a:t>①</a:t>
             </a:r>
@@ -14169,13 +14169,13 @@
               <a:buNone/>
             </a:pPr>
             <a:r>
-              <a:rPr lang="ko-KR" altLang="en-US" sz="1700" dirty="0">
+              <a:rPr lang="ko-KR" altLang="en-US" sz="1700" b="1" dirty="0">
                 <a:solidFill>
                   <a:srgbClr val="E8A33D"/>
                 </a:solidFill>
-                <a:latin typeface="S-Core Dream 7 ExtraBold" pitchFamily="34" charset="0"/>
-                <a:ea typeface="S-Core Dream 7 ExtraBold" pitchFamily="34" charset="-127"/>
-                <a:cs typeface="S-Core Dream 7 ExtraBold" pitchFamily="34" charset="-120"/>
+                <a:latin typeface="Pretendard" pitchFamily="34" charset="0"/>
+                <a:ea typeface="Pretendard" pitchFamily="34" charset="-127"/>
+                <a:cs typeface="Pretendard" pitchFamily="34" charset="-120"/>
               </a:rPr>
               <a:t>②</a:t>
             </a:r>
@@ -14230,13 +14230,13 @@
               <a:buNone/>
             </a:pPr>
             <a:r>
-              <a:rPr lang="ko-KR" altLang="en-US" sz="1700" dirty="0">
+              <a:rPr lang="ko-KR" altLang="en-US" sz="1700" b="1" dirty="0">
                 <a:solidFill>
                   <a:srgbClr val="E8A33D"/>
                 </a:solidFill>
-                <a:latin typeface="S-Core Dream 7 ExtraBold" pitchFamily="34" charset="0"/>
-                <a:ea typeface="S-Core Dream 7 ExtraBold" pitchFamily="34" charset="-127"/>
-                <a:cs typeface="S-Core Dream 7 ExtraBold" pitchFamily="34" charset="-120"/>
+                <a:latin typeface="Pretendard" pitchFamily="34" charset="0"/>
+                <a:ea typeface="Pretendard" pitchFamily="34" charset="-127"/>
+                <a:cs typeface="Pretendard" pitchFamily="34" charset="-120"/>
               </a:rPr>
               <a:t>③</a:t>
             </a:r>
@@ -14291,13 +14291,13 @@
               <a:buNone/>
             </a:pPr>
             <a:r>
-              <a:rPr lang="ko-KR" altLang="en-US" sz="1700" dirty="0">
+              <a:rPr lang="ko-KR" altLang="en-US" sz="1700" b="1" dirty="0">
                 <a:solidFill>
                   <a:srgbClr val="E8A33D"/>
                 </a:solidFill>
-                <a:latin typeface="S-Core Dream 7 ExtraBold" pitchFamily="34" charset="0"/>
-                <a:ea typeface="S-Core Dream 7 ExtraBold" pitchFamily="34" charset="-127"/>
-                <a:cs typeface="S-Core Dream 7 ExtraBold" pitchFamily="34" charset="-120"/>
+                <a:latin typeface="Pretendard" pitchFamily="34" charset="0"/>
+                <a:ea typeface="Pretendard" pitchFamily="34" charset="-127"/>
+                <a:cs typeface="Pretendard" pitchFamily="34" charset="-120"/>
               </a:rPr>
               <a:t>④</a:t>
             </a:r>
@@ -14334,9 +14334,9 @@
                 <a:solidFill>
                   <a:srgbClr val="1F3B5C"/>
                 </a:solidFill>
-                <a:latin typeface="S-Core Dream 5 Medium" pitchFamily="34" charset="0"/>
-                <a:ea typeface="S-Core Dream 5 Medium" pitchFamily="34" charset="-127"/>
-                <a:cs typeface="S-Core Dream 5 Medium" pitchFamily="34" charset="-120"/>
+                <a:latin typeface="Pretendard SemiBold" pitchFamily="34" charset="0"/>
+                <a:ea typeface="Pretendard SemiBold" pitchFamily="34" charset="-127"/>
+                <a:cs typeface="Pretendard SemiBold" pitchFamily="34" charset="-120"/>
               </a:rPr>
               <a:t>① 매체 목록</a:t>
             </a:r>
@@ -14354,9 +14354,9 @@
                 <a:solidFill>
                   <a:srgbClr val="1E2A36"/>
                 </a:solidFill>
-                <a:latin typeface="S-Core Dream 4 Regular" pitchFamily="34" charset="0"/>
-                <a:ea typeface="S-Core Dream 4 Regular" pitchFamily="34" charset="-127"/>
-                <a:cs typeface="S-Core Dream 4 Regular" pitchFamily="34" charset="-120"/>
+                <a:latin typeface="Pretendard" pitchFamily="34" charset="0"/>
+                <a:ea typeface="Pretendard" pitchFamily="34" charset="-127"/>
+                <a:cs typeface="Pretendard" pitchFamily="34" charset="-120"/>
               </a:rPr>
               <a:t>첫 칸을 눌러 켜고 끄기</a:t>
             </a:r>
@@ -14374,9 +14374,9 @@
                 <a:solidFill>
                   <a:srgbClr val="1F3B5C"/>
                 </a:solidFill>
-                <a:latin typeface="S-Core Dream 5 Medium" pitchFamily="34" charset="0"/>
-                <a:ea typeface="S-Core Dream 5 Medium" pitchFamily="34" charset="-127"/>
-                <a:cs typeface="S-Core Dream 5 Medium" pitchFamily="34" charset="-120"/>
+                <a:latin typeface="Pretendard SemiBold" pitchFamily="34" charset="0"/>
+                <a:ea typeface="Pretendard SemiBold" pitchFamily="34" charset="-127"/>
+                <a:cs typeface="Pretendard SemiBold" pitchFamily="34" charset="-120"/>
               </a:rPr>
               <a:t>② 매체·주소 칸</a:t>
             </a:r>
@@ -14394,9 +14394,9 @@
                 <a:solidFill>
                   <a:srgbClr val="1E2A36"/>
                 </a:solidFill>
-                <a:latin typeface="S-Core Dream 4 Regular" pitchFamily="34" charset="0"/>
-                <a:ea typeface="S-Core Dream 4 Regular" pitchFamily="34" charset="-127"/>
-                <a:cs typeface="S-Core Dream 4 Regular" pitchFamily="34" charset="-120"/>
+                <a:latin typeface="Pretendard" pitchFamily="34" charset="0"/>
+                <a:ea typeface="Pretendard" pitchFamily="34" charset="-127"/>
+                <a:cs typeface="Pretendard" pitchFamily="34" charset="-120"/>
               </a:rPr>
               <a:t>예: www.aptn.co.kr (매체 칸은 비워도 됨)</a:t>
             </a:r>
@@ -14414,9 +14414,9 @@
                 <a:solidFill>
                   <a:srgbClr val="1F3B5C"/>
                 </a:solidFill>
-                <a:latin typeface="S-Core Dream 5 Medium" pitchFamily="34" charset="0"/>
-                <a:ea typeface="S-Core Dream 5 Medium" pitchFamily="34" charset="-127"/>
-                <a:cs typeface="S-Core Dream 5 Medium" pitchFamily="34" charset="-120"/>
+                <a:latin typeface="Pretendard SemiBold" pitchFamily="34" charset="0"/>
+                <a:ea typeface="Pretendard SemiBold" pitchFamily="34" charset="-127"/>
+                <a:cs typeface="Pretendard SemiBold" pitchFamily="34" charset="-120"/>
               </a:rPr>
               <a:t>③ ＋ 추가</a:t>
             </a:r>
@@ -14434,9 +14434,9 @@
                 <a:solidFill>
                   <a:srgbClr val="1E2A36"/>
                 </a:solidFill>
-                <a:latin typeface="S-Core Dream 4 Regular" pitchFamily="34" charset="0"/>
-                <a:ea typeface="S-Core Dream 4 Regular" pitchFamily="34" charset="-127"/>
-                <a:cs typeface="S-Core Dream 4 Regular" pitchFamily="34" charset="-120"/>
+                <a:latin typeface="Pretendard" pitchFamily="34" charset="0"/>
+                <a:ea typeface="Pretendard" pitchFamily="34" charset="-127"/>
+                <a:cs typeface="Pretendard" pitchFamily="34" charset="-120"/>
               </a:rPr>
               <a:t>/rss/allArticle.xml을 붙여 찾아 줌</a:t>
             </a:r>
@@ -14454,9 +14454,9 @@
                 <a:solidFill>
                   <a:srgbClr val="1F3B5C"/>
                 </a:solidFill>
-                <a:latin typeface="S-Core Dream 5 Medium" pitchFamily="34" charset="0"/>
-                <a:ea typeface="S-Core Dream 5 Medium" pitchFamily="34" charset="-127"/>
-                <a:cs typeface="S-Core Dream 5 Medium" pitchFamily="34" charset="-120"/>
+                <a:latin typeface="Pretendard SemiBold" pitchFamily="34" charset="0"/>
+                <a:ea typeface="Pretendard SemiBold" pitchFamily="34" charset="-127"/>
+                <a:cs typeface="Pretendard SemiBold" pitchFamily="34" charset="-120"/>
               </a:rPr>
               <a:t>④ 연결 확인</a:t>
             </a:r>
@@ -14474,9 +14474,9 @@
                 <a:solidFill>
                   <a:srgbClr val="1E2A36"/>
                 </a:solidFill>
-                <a:latin typeface="S-Core Dream 4 Regular" pitchFamily="34" charset="0"/>
-                <a:ea typeface="S-Core Dream 4 Regular" pitchFamily="34" charset="-127"/>
-                <a:cs typeface="S-Core Dream 4 Regular" pitchFamily="34" charset="-120"/>
+                <a:latin typeface="Pretendard" pitchFamily="34" charset="0"/>
+                <a:ea typeface="Pretendard" pitchFamily="34" charset="-127"/>
+                <a:cs typeface="Pretendard" pitchFamily="34" charset="-120"/>
               </a:rPr>
               <a:t>RSS가 받아지는지 바로 확인</a:t>
             </a:r>
@@ -14561,13 +14561,13 @@
               <a:buNone/>
             </a:pPr>
             <a:r>
-              <a:rPr lang="ko-KR" altLang="en-US" sz="2000" dirty="0">
+              <a:rPr lang="ko-KR" altLang="en-US" sz="2000" b="1" dirty="0">
                 <a:solidFill>
                   <a:srgbClr val="FFFFFF"/>
                 </a:solidFill>
-                <a:latin typeface="S-Core Dream 7 ExtraBold" pitchFamily="34" charset="0"/>
-                <a:ea typeface="S-Core Dream 7 ExtraBold" pitchFamily="34" charset="-127"/>
-                <a:cs typeface="S-Core Dream 7 ExtraBold" pitchFamily="34" charset="-120"/>
+                <a:latin typeface="Pretendard" pitchFamily="34" charset="0"/>
+                <a:ea typeface="Pretendard" pitchFamily="34" charset="-127"/>
+                <a:cs typeface="Pretendard" pitchFamily="34" charset="-120"/>
               </a:rPr>
               <a:t>06</a:t>
             </a:r>
@@ -14604,9 +14604,9 @@
                 <a:solidFill>
                   <a:srgbClr val="2E7D8C"/>
                 </a:solidFill>
-                <a:latin typeface="S-Core Dream 5 Medium" pitchFamily="34" charset="0"/>
-                <a:ea typeface="S-Core Dream 5 Medium" pitchFamily="34" charset="-127"/>
-                <a:cs typeface="S-Core Dream 5 Medium" pitchFamily="34" charset="-120"/>
+                <a:latin typeface="Pretendard SemiBold" pitchFamily="34" charset="0"/>
+                <a:ea typeface="Pretendard SemiBold" pitchFamily="34" charset="-127"/>
+                <a:cs typeface="Pretendard SemiBold" pitchFamily="34" charset="-120"/>
               </a:rPr>
               <a:t>문제 해결</a:t>
             </a:r>
@@ -14639,13 +14639,13 @@
               <a:buNone/>
             </a:pPr>
             <a:r>
-              <a:rPr lang="ko-KR" altLang="en-US" sz="2600" dirty="0">
+              <a:rPr lang="ko-KR" altLang="en-US" sz="2600" b="1" dirty="0">
                 <a:solidFill>
                   <a:srgbClr val="1F3B5C"/>
                 </a:solidFill>
-                <a:latin typeface="S-Core Dream 7 ExtraBold" pitchFamily="34" charset="0"/>
-                <a:ea typeface="S-Core Dream 7 ExtraBold" pitchFamily="34" charset="-127"/>
-                <a:cs typeface="S-Core Dream 7 ExtraBold" pitchFamily="34" charset="-120"/>
+                <a:latin typeface="Pretendard" pitchFamily="34" charset="0"/>
+                <a:ea typeface="Pretendard" pitchFamily="34" charset="-127"/>
+                <a:cs typeface="Pretendard" pitchFamily="34" charset="-120"/>
               </a:rPr>
               <a:t>이럴 때는 이렇게</a:t>
             </a:r>
@@ -14682,9 +14682,9 @@
                 <a:solidFill>
                   <a:srgbClr val="667385"/>
                 </a:solidFill>
-                <a:latin typeface="S-Core Dream 4 Regular" pitchFamily="34" charset="0"/>
-                <a:ea typeface="S-Core Dream 4 Regular" pitchFamily="34" charset="-127"/>
-                <a:cs typeface="S-Core Dream 4 Regular" pitchFamily="34" charset="-120"/>
+                <a:latin typeface="Pretendard" pitchFamily="34" charset="0"/>
+                <a:ea typeface="Pretendard" pitchFamily="34" charset="-127"/>
+                <a:cs typeface="Pretendard" pitchFamily="34" charset="-120"/>
               </a:rPr>
               <a:t>상태줄이 빨갛게 바뀌면 오류입니다. 아래에서 찾아보세요</a:t>
             </a:r>
@@ -14733,16 +14733,16 @@
                           <a:solidFill>
                             <a:srgbClr val="FFFFFF"/>
                           </a:solidFill>
-                          <a:latin typeface="S-Core Dream 5 Medium" pitchFamily="34" charset="0"/>
-                          <a:ea typeface="S-Core Dream 5 Medium" pitchFamily="34" charset="-127"/>
-                          <a:cs typeface="S-Core Dream 5 Medium" pitchFamily="34" charset="-120"/>
+                          <a:latin typeface="Pretendard SemiBold" pitchFamily="34" charset="0"/>
+                          <a:ea typeface="Pretendard SemiBold" pitchFamily="34" charset="-127"/>
+                          <a:cs typeface="Pretendard SemiBold" pitchFamily="34" charset="-120"/>
                         </a:rPr>
                         <a:t>증상</a:t>
                       </a:r>
                       <a:endParaRPr lang="ko-KR" altLang="en-US" sz="1300" dirty="0">
-                        <a:latin typeface="S-Core Dream 5 Medium" charset="0"/>
-                        <a:ea typeface="S-Core Dream 5 Medium" charset="0"/>
-                        <a:cs typeface="S-Core Dream 5 Medium" charset="0"/>
+                        <a:latin typeface="Pretendard SemiBold" charset="0"/>
+                        <a:ea typeface="Pretendard SemiBold" charset="0"/>
+                        <a:cs typeface="Pretendard SemiBold" charset="0"/>
                       </a:endParaRPr>
                     </a:p>
                   </a:txBody>
@@ -14801,16 +14801,16 @@
                           <a:solidFill>
                             <a:srgbClr val="FFFFFF"/>
                           </a:solidFill>
-                          <a:latin typeface="S-Core Dream 5 Medium" pitchFamily="34" charset="0"/>
-                          <a:ea typeface="S-Core Dream 5 Medium" pitchFamily="34" charset="-127"/>
-                          <a:cs typeface="S-Core Dream 5 Medium" pitchFamily="34" charset="-120"/>
+                          <a:latin typeface="Pretendard SemiBold" pitchFamily="34" charset="0"/>
+                          <a:ea typeface="Pretendard SemiBold" pitchFamily="34" charset="-127"/>
+                          <a:cs typeface="Pretendard SemiBold" pitchFamily="34" charset="-120"/>
                         </a:rPr>
                         <a:t>원인</a:t>
                       </a:r>
                       <a:endParaRPr lang="ko-KR" altLang="en-US" sz="1300" dirty="0">
-                        <a:latin typeface="S-Core Dream 5 Medium" charset="0"/>
-                        <a:ea typeface="S-Core Dream 5 Medium" charset="0"/>
-                        <a:cs typeface="S-Core Dream 5 Medium" charset="0"/>
+                        <a:latin typeface="Pretendard SemiBold" charset="0"/>
+                        <a:ea typeface="Pretendard SemiBold" charset="0"/>
+                        <a:cs typeface="Pretendard SemiBold" charset="0"/>
                       </a:endParaRPr>
                     </a:p>
                   </a:txBody>
@@ -14869,16 +14869,16 @@
                           <a:solidFill>
                             <a:srgbClr val="FFFFFF"/>
                           </a:solidFill>
-                          <a:latin typeface="S-Core Dream 5 Medium" pitchFamily="34" charset="0"/>
-                          <a:ea typeface="S-Core Dream 5 Medium" pitchFamily="34" charset="-127"/>
-                          <a:cs typeface="S-Core Dream 5 Medium" pitchFamily="34" charset="-120"/>
+                          <a:latin typeface="Pretendard SemiBold" pitchFamily="34" charset="0"/>
+                          <a:ea typeface="Pretendard SemiBold" pitchFamily="34" charset="-127"/>
+                          <a:cs typeface="Pretendard SemiBold" pitchFamily="34" charset="-120"/>
                         </a:rPr>
                         <a:t>조치</a:t>
                       </a:r>
                       <a:endParaRPr lang="ko-KR" altLang="en-US" sz="1300" dirty="0">
-                        <a:latin typeface="S-Core Dream 5 Medium" charset="0"/>
-                        <a:ea typeface="S-Core Dream 5 Medium" charset="0"/>
-                        <a:cs typeface="S-Core Dream 5 Medium" charset="0"/>
+                        <a:latin typeface="Pretendard SemiBold" charset="0"/>
+                        <a:ea typeface="Pretendard SemiBold" charset="0"/>
+                        <a:cs typeface="Pretendard SemiBold" charset="0"/>
                       </a:endParaRPr>
                     </a:p>
                   </a:txBody>
@@ -14939,16 +14939,16 @@
                           <a:solidFill>
                             <a:srgbClr val="1E2A36"/>
                           </a:solidFill>
-                          <a:latin typeface="S-Core Dream 4 Regular" pitchFamily="34" charset="0"/>
-                          <a:ea typeface="S-Core Dream 4 Regular" pitchFamily="34" charset="-127"/>
-                          <a:cs typeface="S-Core Dream 4 Regular" pitchFamily="34" charset="-120"/>
+                          <a:latin typeface="Pretendard" pitchFamily="34" charset="0"/>
+                          <a:ea typeface="Pretendard" pitchFamily="34" charset="-127"/>
+                          <a:cs typeface="Pretendard" pitchFamily="34" charset="-120"/>
                         </a:rPr>
                         <a:t>처음 실행 때 윈도우 경고</a:t>
                       </a:r>
                       <a:endParaRPr lang="ko-KR" altLang="en-US" sz="1300" dirty="0">
-                        <a:latin typeface="S-Core Dream 4 Regular" charset="0"/>
-                        <a:ea typeface="S-Core Dream 4 Regular" charset="0"/>
-                        <a:cs typeface="S-Core Dream 4 Regular" charset="0"/>
+                        <a:latin typeface="Pretendard" charset="0"/>
+                        <a:ea typeface="Pretendard" charset="0"/>
+                        <a:cs typeface="Pretendard" charset="0"/>
                       </a:endParaRPr>
                     </a:p>
                   </a:txBody>
@@ -15007,16 +15007,16 @@
                           <a:solidFill>
                             <a:srgbClr val="1E2A36"/>
                           </a:solidFill>
-                          <a:latin typeface="S-Core Dream 4 Regular" pitchFamily="34" charset="0"/>
-                          <a:ea typeface="S-Core Dream 4 Regular" pitchFamily="34" charset="-127"/>
-                          <a:cs typeface="S-Core Dream 4 Regular" pitchFamily="34" charset="-120"/>
+                          <a:latin typeface="Pretendard" pitchFamily="34" charset="0"/>
+                          <a:ea typeface="Pretendard" pitchFamily="34" charset="-127"/>
+                          <a:cs typeface="Pretendard" pitchFamily="34" charset="-120"/>
                         </a:rPr>
                         <a:t>코드 서명이 없는 프로그램</a:t>
                       </a:r>
                       <a:endParaRPr lang="ko-KR" altLang="en-US" sz="1300" dirty="0">
-                        <a:latin typeface="S-Core Dream 4 Regular" charset="0"/>
-                        <a:ea typeface="S-Core Dream 4 Regular" charset="0"/>
-                        <a:cs typeface="S-Core Dream 4 Regular" charset="0"/>
+                        <a:latin typeface="Pretendard" charset="0"/>
+                        <a:ea typeface="Pretendard" charset="0"/>
+                        <a:cs typeface="Pretendard" charset="0"/>
                       </a:endParaRPr>
                     </a:p>
                   </a:txBody>
@@ -15075,16 +15075,16 @@
                           <a:solidFill>
                             <a:srgbClr val="1E2A36"/>
                           </a:solidFill>
-                          <a:latin typeface="S-Core Dream 4 Regular" pitchFamily="34" charset="0"/>
-                          <a:ea typeface="S-Core Dream 4 Regular" pitchFamily="34" charset="-127"/>
-                          <a:cs typeface="S-Core Dream 4 Regular" pitchFamily="34" charset="-120"/>
+                          <a:latin typeface="Pretendard" pitchFamily="34" charset="0"/>
+                          <a:ea typeface="Pretendard" pitchFamily="34" charset="-127"/>
+                          <a:cs typeface="Pretendard" pitchFamily="34" charset="-120"/>
                         </a:rPr>
                         <a:t>[추가 정보] → [실행], 또는 속성 → 차단 해제</a:t>
                       </a:r>
                       <a:endParaRPr lang="ko-KR" altLang="en-US" sz="1300" dirty="0">
-                        <a:latin typeface="S-Core Dream 4 Regular" charset="0"/>
-                        <a:ea typeface="S-Core Dream 4 Regular" charset="0"/>
-                        <a:cs typeface="S-Core Dream 4 Regular" charset="0"/>
+                        <a:latin typeface="Pretendard" charset="0"/>
+                        <a:ea typeface="Pretendard" charset="0"/>
+                        <a:cs typeface="Pretendard" charset="0"/>
                       </a:endParaRPr>
                     </a:p>
                   </a:txBody>
@@ -15145,16 +15145,16 @@
                           <a:solidFill>
                             <a:srgbClr val="1E2A36"/>
                           </a:solidFill>
-                          <a:latin typeface="S-Core Dream 4 Regular" pitchFamily="34" charset="0"/>
-                          <a:ea typeface="S-Core Dream 4 Regular" pitchFamily="34" charset="-127"/>
-                          <a:cs typeface="S-Core Dream 4 Regular" pitchFamily="34" charset="-120"/>
+                          <a:latin typeface="Pretendard" pitchFamily="34" charset="0"/>
+                          <a:ea typeface="Pretendard" pitchFamily="34" charset="-127"/>
+                          <a:cs typeface="Pretendard" pitchFamily="34" charset="-120"/>
                         </a:rPr>
                         <a:t>업데이트 확인 실패 안내</a:t>
                       </a:r>
                       <a:endParaRPr lang="ko-KR" altLang="en-US" sz="1300" dirty="0">
-                        <a:latin typeface="S-Core Dream 4 Regular" charset="0"/>
-                        <a:ea typeface="S-Core Dream 4 Regular" charset="0"/>
-                        <a:cs typeface="S-Core Dream 4 Regular" charset="0"/>
+                        <a:latin typeface="Pretendard" charset="0"/>
+                        <a:ea typeface="Pretendard" charset="0"/>
+                        <a:cs typeface="Pretendard" charset="0"/>
                       </a:endParaRPr>
                     </a:p>
                   </a:txBody>
@@ -15213,16 +15213,16 @@
                           <a:solidFill>
                             <a:srgbClr val="1E2A36"/>
                           </a:solidFill>
-                          <a:latin typeface="S-Core Dream 4 Regular" pitchFamily="34" charset="0"/>
-                          <a:ea typeface="S-Core Dream 4 Regular" pitchFamily="34" charset="-127"/>
-                          <a:cs typeface="S-Core Dream 4 Regular" pitchFamily="34" charset="-120"/>
+                          <a:latin typeface="Pretendard" pitchFamily="34" charset="0"/>
+                          <a:ea typeface="Pretendard" pitchFamily="34" charset="-127"/>
+                          <a:cs typeface="Pretendard" pitchFamily="34" charset="-120"/>
                         </a:rPr>
                         <a:t>GitHub 접속이 막힌 PC</a:t>
                       </a:r>
                       <a:endParaRPr lang="ko-KR" altLang="en-US" sz="1300" dirty="0">
-                        <a:latin typeface="S-Core Dream 4 Regular" charset="0"/>
-                        <a:ea typeface="S-Core Dream 4 Regular" charset="0"/>
-                        <a:cs typeface="S-Core Dream 4 Regular" charset="0"/>
+                        <a:latin typeface="Pretendard" charset="0"/>
+                        <a:ea typeface="Pretendard" charset="0"/>
+                        <a:cs typeface="Pretendard" charset="0"/>
                       </a:endParaRPr>
                     </a:p>
                   </a:txBody>
@@ -15281,16 +15281,16 @@
                           <a:solidFill>
                             <a:srgbClr val="1E2A36"/>
                           </a:solidFill>
-                          <a:latin typeface="S-Core Dream 4 Regular" pitchFamily="34" charset="0"/>
-                          <a:ea typeface="S-Core Dream 4 Regular" pitchFamily="34" charset="-127"/>
-                          <a:cs typeface="S-Core Dream 4 Regular" pitchFamily="34" charset="-120"/>
+                          <a:latin typeface="Pretendard" pitchFamily="34" charset="0"/>
+                          <a:ea typeface="Pretendard" pitchFamily="34" charset="-127"/>
+                          <a:cs typeface="Pretendard" pitchFamily="34" charset="-120"/>
                         </a:rPr>
                         <a:t>공문 경로에서 새 exe를 받아 바꾸기(설정·기록 유지)</a:t>
                       </a:r>
                       <a:endParaRPr lang="ko-KR" altLang="en-US" sz="1300" dirty="0">
-                        <a:latin typeface="S-Core Dream 4 Regular" charset="0"/>
-                        <a:ea typeface="S-Core Dream 4 Regular" charset="0"/>
-                        <a:cs typeface="S-Core Dream 4 Regular" charset="0"/>
+                        <a:latin typeface="Pretendard" charset="0"/>
+                        <a:ea typeface="Pretendard" charset="0"/>
+                        <a:cs typeface="Pretendard" charset="0"/>
                       </a:endParaRPr>
                     </a:p>
                   </a:txBody>
@@ -15351,16 +15351,16 @@
                           <a:solidFill>
                             <a:srgbClr val="1E2A36"/>
                           </a:solidFill>
-                          <a:latin typeface="S-Core Dream 4 Regular" pitchFamily="34" charset="0"/>
-                          <a:ea typeface="S-Core Dream 4 Regular" pitchFamily="34" charset="-127"/>
-                          <a:cs typeface="S-Core Dream 4 Regular" pitchFamily="34" charset="-120"/>
+                          <a:latin typeface="Pretendard" pitchFamily="34" charset="0"/>
+                          <a:ea typeface="Pretendard" pitchFamily="34" charset="-127"/>
+                          <a:cs typeface="Pretendard" pitchFamily="34" charset="-120"/>
                         </a:rPr>
                         <a:t>'호출이 너무 많습니다(429)'</a:t>
                       </a:r>
                       <a:endParaRPr lang="ko-KR" altLang="en-US" sz="1300" dirty="0">
-                        <a:latin typeface="S-Core Dream 4 Regular" charset="0"/>
-                        <a:ea typeface="S-Core Dream 4 Regular" charset="0"/>
-                        <a:cs typeface="S-Core Dream 4 Regular" charset="0"/>
+                        <a:latin typeface="Pretendard" charset="0"/>
+                        <a:ea typeface="Pretendard" charset="0"/>
+                        <a:cs typeface="Pretendard" charset="0"/>
                       </a:endParaRPr>
                     </a:p>
                   </a:txBody>
@@ -15419,16 +15419,16 @@
                           <a:solidFill>
                             <a:srgbClr val="1E2A36"/>
                           </a:solidFill>
-                          <a:latin typeface="S-Core Dream 4 Regular" pitchFamily="34" charset="0"/>
-                          <a:ea typeface="S-Core Dream 4 Regular" pitchFamily="34" charset="-127"/>
-                          <a:cs typeface="S-Core Dream 4 Regular" pitchFamily="34" charset="-120"/>
+                          <a:latin typeface="Pretendard" pitchFamily="34" charset="0"/>
+                          <a:ea typeface="Pretendard" pitchFamily="34" charset="-127"/>
+                          <a:cs typeface="Pretendard" pitchFamily="34" charset="-120"/>
                         </a:rPr>
                         <a:t>짧은 시간에 구글에 많이 물음</a:t>
                       </a:r>
                       <a:endParaRPr lang="ko-KR" altLang="en-US" sz="1300" dirty="0">
-                        <a:latin typeface="S-Core Dream 4 Regular" charset="0"/>
-                        <a:ea typeface="S-Core Dream 4 Regular" charset="0"/>
-                        <a:cs typeface="S-Core Dream 4 Regular" charset="0"/>
+                        <a:latin typeface="Pretendard" charset="0"/>
+                        <a:ea typeface="Pretendard" charset="0"/>
+                        <a:cs typeface="Pretendard" charset="0"/>
                       </a:endParaRPr>
                     </a:p>
                   </a:txBody>
@@ -15487,16 +15487,16 @@
                           <a:solidFill>
                             <a:srgbClr val="1E2A36"/>
                           </a:solidFill>
-                          <a:latin typeface="S-Core Dream 4 Regular" pitchFamily="34" charset="0"/>
-                          <a:ea typeface="S-Core Dream 4 Regular" pitchFamily="34" charset="-127"/>
-                          <a:cs typeface="S-Core Dream 4 Regular" pitchFamily="34" charset="-120"/>
+                          <a:latin typeface="Pretendard" pitchFamily="34" charset="0"/>
+                          <a:ea typeface="Pretendard" pitchFamily="34" charset="-127"/>
+                          <a:cs typeface="Pretendard" pitchFamily="34" charset="-120"/>
                         </a:rPr>
                         <a:t>잠시 뒤 다시 조회. 계속되면 키워드 줄이기</a:t>
                       </a:r>
                       <a:endParaRPr lang="ko-KR" altLang="en-US" sz="1300" dirty="0">
-                        <a:latin typeface="S-Core Dream 4 Regular" charset="0"/>
-                        <a:ea typeface="S-Core Dream 4 Regular" charset="0"/>
-                        <a:cs typeface="S-Core Dream 4 Regular" charset="0"/>
+                        <a:latin typeface="Pretendard" charset="0"/>
+                        <a:ea typeface="Pretendard" charset="0"/>
+                        <a:cs typeface="Pretendard" charset="0"/>
                       </a:endParaRPr>
                     </a:p>
                   </a:txBody>
@@ -15557,16 +15557,16 @@
                           <a:solidFill>
                             <a:srgbClr val="1E2A36"/>
                           </a:solidFill>
-                          <a:latin typeface="S-Core Dream 4 Regular" pitchFamily="34" charset="0"/>
-                          <a:ea typeface="S-Core Dream 4 Regular" pitchFamily="34" charset="-127"/>
-                          <a:cs typeface="S-Core Dream 4 Regular" pitchFamily="34" charset="-120"/>
+                          <a:latin typeface="Pretendard" pitchFamily="34" charset="0"/>
+                          <a:ea typeface="Pretendard" pitchFamily="34" charset="-127"/>
+                          <a:cs typeface="Pretendard" pitchFamily="34" charset="-120"/>
                         </a:rPr>
                         <a:t>조회가 오래 걸림</a:t>
                       </a:r>
                       <a:endParaRPr lang="ko-KR" altLang="en-US" sz="1300" dirty="0">
-                        <a:latin typeface="S-Core Dream 4 Regular" charset="0"/>
-                        <a:ea typeface="S-Core Dream 4 Regular" charset="0"/>
-                        <a:cs typeface="S-Core Dream 4 Regular" charset="0"/>
+                        <a:latin typeface="Pretendard" charset="0"/>
+                        <a:ea typeface="Pretendard" charset="0"/>
+                        <a:cs typeface="Pretendard" charset="0"/>
                       </a:endParaRPr>
                     </a:p>
                   </a:txBody>
@@ -15625,16 +15625,16 @@
                           <a:solidFill>
                             <a:srgbClr val="1E2A36"/>
                           </a:solidFill>
-                          <a:latin typeface="S-Core Dream 4 Regular" pitchFamily="34" charset="0"/>
-                          <a:ea typeface="S-Core Dream 4 Regular" pitchFamily="34" charset="-127"/>
-                          <a:cs typeface="S-Core Dream 4 Regular" pitchFamily="34" charset="-120"/>
+                          <a:latin typeface="Pretendard" pitchFamily="34" charset="0"/>
+                          <a:ea typeface="Pretendard" pitchFamily="34" charset="-127"/>
+                          <a:cs typeface="Pretendard" pitchFamily="34" charset="-120"/>
                         </a:rPr>
                         <a:t>키워드가 많음(지금 67개)</a:t>
                       </a:r>
                       <a:endParaRPr lang="ko-KR" altLang="en-US" sz="1300" dirty="0">
-                        <a:latin typeface="S-Core Dream 4 Regular" charset="0"/>
-                        <a:ea typeface="S-Core Dream 4 Regular" charset="0"/>
-                        <a:cs typeface="S-Core Dream 4 Regular" charset="0"/>
+                        <a:latin typeface="Pretendard" charset="0"/>
+                        <a:ea typeface="Pretendard" charset="0"/>
+                        <a:cs typeface="Pretendard" charset="0"/>
                       </a:endParaRPr>
                     </a:p>
                   </a:txBody>
@@ -15693,16 +15693,16 @@
                           <a:solidFill>
                             <a:srgbClr val="1E2A36"/>
                           </a:solidFill>
-                          <a:latin typeface="S-Core Dream 4 Regular" pitchFamily="34" charset="0"/>
-                          <a:ea typeface="S-Core Dream 4 Regular" pitchFamily="34" charset="-127"/>
-                          <a:cs typeface="S-Core Dream 4 Regular" pitchFamily="34" charset="-120"/>
+                          <a:latin typeface="Pretendard" pitchFamily="34" charset="0"/>
+                          <a:ea typeface="Pretendard" pitchFamily="34" charset="-127"/>
+                          <a:cs typeface="Pretendard" pitchFamily="34" charset="-120"/>
                         </a:rPr>
                         <a:t>■ 정지 후 기간 줄이기, 효과 없는 키워드 빼기</a:t>
                       </a:r>
                       <a:endParaRPr lang="ko-KR" altLang="en-US" sz="1300" dirty="0">
-                        <a:latin typeface="S-Core Dream 4 Regular" charset="0"/>
-                        <a:ea typeface="S-Core Dream 4 Regular" charset="0"/>
-                        <a:cs typeface="S-Core Dream 4 Regular" charset="0"/>
+                        <a:latin typeface="Pretendard" charset="0"/>
+                        <a:ea typeface="Pretendard" charset="0"/>
+                        <a:cs typeface="Pretendard" charset="0"/>
                       </a:endParaRPr>
                     </a:p>
                   </a:txBody>
@@ -15763,16 +15763,16 @@
                           <a:solidFill>
                             <a:srgbClr val="1E2A36"/>
                           </a:solidFill>
-                          <a:latin typeface="S-Core Dream 4 Regular" pitchFamily="34" charset="0"/>
-                          <a:ea typeface="S-Core Dream 4 Regular" pitchFamily="34" charset="-127"/>
-                          <a:cs typeface="S-Core Dream 4 Regular" pitchFamily="34" charset="-120"/>
+                          <a:latin typeface="Pretendard" pitchFamily="34" charset="0"/>
+                          <a:ea typeface="Pretendard" pitchFamily="34" charset="-127"/>
+                          <a:cs typeface="Pretendard" pitchFamily="34" charset="-120"/>
                         </a:rPr>
                         <a:t>'전문지 조회 실패: ○○'</a:t>
                       </a:r>
                       <a:endParaRPr lang="ko-KR" altLang="en-US" sz="1300" dirty="0">
-                        <a:latin typeface="S-Core Dream 4 Regular" charset="0"/>
-                        <a:ea typeface="S-Core Dream 4 Regular" charset="0"/>
-                        <a:cs typeface="S-Core Dream 4 Regular" charset="0"/>
+                        <a:latin typeface="Pretendard" charset="0"/>
+                        <a:ea typeface="Pretendard" charset="0"/>
+                        <a:cs typeface="Pretendard" charset="0"/>
                       </a:endParaRPr>
                     </a:p>
                   </a:txBody>
@@ -15831,16 +15831,16 @@
                           <a:solidFill>
                             <a:srgbClr val="1E2A36"/>
                           </a:solidFill>
-                          <a:latin typeface="S-Core Dream 4 Regular" pitchFamily="34" charset="0"/>
-                          <a:ea typeface="S-Core Dream 4 Regular" pitchFamily="34" charset="-127"/>
-                          <a:cs typeface="S-Core Dream 4 Regular" pitchFamily="34" charset="-120"/>
+                          <a:latin typeface="Pretendard" pitchFamily="34" charset="0"/>
+                          <a:ea typeface="Pretendard" pitchFamily="34" charset="-127"/>
+                          <a:cs typeface="Pretendard" pitchFamily="34" charset="-120"/>
                         </a:rPr>
                         <a:t>RSS 주소가 바뀜·막힘</a:t>
                       </a:r>
                       <a:endParaRPr lang="ko-KR" altLang="en-US" sz="1300" dirty="0">
-                        <a:latin typeface="S-Core Dream 4 Regular" charset="0"/>
-                        <a:ea typeface="S-Core Dream 4 Regular" charset="0"/>
-                        <a:cs typeface="S-Core Dream 4 Regular" charset="0"/>
+                        <a:latin typeface="Pretendard" charset="0"/>
+                        <a:ea typeface="Pretendard" charset="0"/>
+                        <a:cs typeface="Pretendard" charset="0"/>
                       </a:endParaRPr>
                     </a:p>
                   </a:txBody>
@@ -15899,16 +15899,16 @@
                           <a:solidFill>
                             <a:srgbClr val="1E2A36"/>
                           </a:solidFill>
-                          <a:latin typeface="S-Core Dream 4 Regular" pitchFamily="34" charset="0"/>
-                          <a:ea typeface="S-Core Dream 4 Regular" pitchFamily="34" charset="-127"/>
-                          <a:cs typeface="S-Core Dream 4 Regular" pitchFamily="34" charset="-120"/>
+                          <a:latin typeface="Pretendard" pitchFamily="34" charset="0"/>
+                          <a:ea typeface="Pretendard" pitchFamily="34" charset="-127"/>
+                          <a:cs typeface="Pretendard" pitchFamily="34" charset="-120"/>
                         </a:rPr>
                         <a:t>전문지 고르기에서 [연결 확인] → 주소 다시 찾기</a:t>
                       </a:r>
                       <a:endParaRPr lang="ko-KR" altLang="en-US" sz="1300" dirty="0">
-                        <a:latin typeface="S-Core Dream 4 Regular" charset="0"/>
-                        <a:ea typeface="S-Core Dream 4 Regular" charset="0"/>
-                        <a:cs typeface="S-Core Dream 4 Regular" charset="0"/>
+                        <a:latin typeface="Pretendard" charset="0"/>
+                        <a:ea typeface="Pretendard" charset="0"/>
+                        <a:cs typeface="Pretendard" charset="0"/>
                       </a:endParaRPr>
                     </a:p>
                   </a:txBody>
@@ -15969,16 +15969,16 @@
                           <a:solidFill>
                             <a:srgbClr val="1E2A36"/>
                           </a:solidFill>
-                          <a:latin typeface="S-Core Dream 4 Regular" pitchFamily="34" charset="0"/>
-                          <a:ea typeface="S-Core Dream 4 Regular" pitchFamily="34" charset="-127"/>
-                          <a:cs typeface="S-Core Dream 4 Regular" pitchFamily="34" charset="-120"/>
+                          <a:latin typeface="Pretendard" pitchFamily="34" charset="0"/>
+                          <a:ea typeface="Pretendard" pitchFamily="34" charset="-127"/>
+                          <a:cs typeface="Pretendard" pitchFamily="34" charset="-120"/>
                         </a:rPr>
                         <a:t>엉뚱한 기사가 추천됨</a:t>
                       </a:r>
                       <a:endParaRPr lang="ko-KR" altLang="en-US" sz="1300" dirty="0">
-                        <a:latin typeface="S-Core Dream 4 Regular" charset="0"/>
-                        <a:ea typeface="S-Core Dream 4 Regular" charset="0"/>
-                        <a:cs typeface="S-Core Dream 4 Regular" charset="0"/>
+                        <a:latin typeface="Pretendard" charset="0"/>
+                        <a:ea typeface="Pretendard" charset="0"/>
+                        <a:cs typeface="Pretendard" charset="0"/>
                       </a:endParaRPr>
                     </a:p>
                   </a:txBody>
@@ -16037,16 +16037,16 @@
                           <a:solidFill>
                             <a:srgbClr val="1E2A36"/>
                           </a:solidFill>
-                          <a:latin typeface="S-Core Dream 4 Regular" pitchFamily="34" charset="0"/>
-                          <a:ea typeface="S-Core Dream 4 Regular" pitchFamily="34" charset="-127"/>
-                          <a:cs typeface="S-Core Dream 4 Regular" pitchFamily="34" charset="-120"/>
+                          <a:latin typeface="Pretendard" pitchFamily="34" charset="0"/>
+                          <a:ea typeface="Pretendard" pitchFamily="34" charset="-127"/>
+                          <a:cs typeface="Pretendard" pitchFamily="34" charset="-120"/>
                         </a:rPr>
                         <a:t>규칙이 그날 기사와 안 맞음</a:t>
                       </a:r>
                       <a:endParaRPr lang="ko-KR" altLang="en-US" sz="1300" dirty="0">
-                        <a:latin typeface="S-Core Dream 4 Regular" charset="0"/>
-                        <a:ea typeface="S-Core Dream 4 Regular" charset="0"/>
-                        <a:cs typeface="S-Core Dream 4 Regular" charset="0"/>
+                        <a:latin typeface="Pretendard" charset="0"/>
+                        <a:ea typeface="Pretendard" charset="0"/>
+                        <a:cs typeface="Pretendard" charset="0"/>
                       </a:endParaRPr>
                     </a:p>
                   </a:txBody>
@@ -16105,16 +16105,16 @@
                           <a:solidFill>
                             <a:srgbClr val="1E2A36"/>
                           </a:solidFill>
-                          <a:latin typeface="S-Core Dream 4 Regular" pitchFamily="34" charset="0"/>
-                          <a:ea typeface="S-Core Dream 4 Regular" pitchFamily="34" charset="-127"/>
-                          <a:cs typeface="S-Core Dream 4 Regular" pitchFamily="34" charset="-120"/>
+                          <a:latin typeface="Pretendard" pitchFamily="34" charset="0"/>
+                          <a:ea typeface="Pretendard" pitchFamily="34" charset="-127"/>
+                          <a:cs typeface="Pretendard" pitchFamily="34" charset="-120"/>
                         </a:rPr>
                         <a:t>결과 엑셀 → Claude 환류로 빼는 말(-○○) 추가</a:t>
                       </a:r>
                       <a:endParaRPr lang="ko-KR" altLang="en-US" sz="1300" dirty="0">
-                        <a:latin typeface="S-Core Dream 4 Regular" charset="0"/>
-                        <a:ea typeface="S-Core Dream 4 Regular" charset="0"/>
-                        <a:cs typeface="S-Core Dream 4 Regular" charset="0"/>
+                        <a:latin typeface="Pretendard" charset="0"/>
+                        <a:ea typeface="Pretendard" charset="0"/>
+                        <a:cs typeface="Pretendard" charset="0"/>
                       </a:endParaRPr>
                     </a:p>
                   </a:txBody>
@@ -16175,16 +16175,16 @@
                           <a:solidFill>
                             <a:srgbClr val="1E2A36"/>
                           </a:solidFill>
-                          <a:latin typeface="S-Core Dream 4 Regular" pitchFamily="34" charset="0"/>
-                          <a:ea typeface="S-Core Dream 4 Regular" pitchFamily="34" charset="-127"/>
-                          <a:cs typeface="S-Core Dream 4 Regular" pitchFamily="34" charset="-120"/>
+                          <a:latin typeface="Pretendard" pitchFamily="34" charset="0"/>
+                          <a:ea typeface="Pretendard" pitchFamily="34" charset="-127"/>
+                          <a:cs typeface="Pretendard" pitchFamily="34" charset="-120"/>
                         </a:rPr>
                         <a:t>보고한 기사가 또 나옴</a:t>
                       </a:r>
                       <a:endParaRPr lang="ko-KR" altLang="en-US" sz="1300" dirty="0">
-                        <a:latin typeface="S-Core Dream 4 Regular" charset="0"/>
-                        <a:ea typeface="S-Core Dream 4 Regular" charset="0"/>
-                        <a:cs typeface="S-Core Dream 4 Regular" charset="0"/>
+                        <a:latin typeface="Pretendard" charset="0"/>
+                        <a:ea typeface="Pretendard" charset="0"/>
+                        <a:cs typeface="Pretendard" charset="0"/>
                       </a:endParaRPr>
                     </a:p>
                   </a:txBody>
@@ -16243,16 +16243,16 @@
                           <a:solidFill>
                             <a:srgbClr val="1E2A36"/>
                           </a:solidFill>
-                          <a:latin typeface="S-Core Dream 4 Regular" pitchFamily="34" charset="0"/>
-                          <a:ea typeface="S-Core Dream 4 Regular" pitchFamily="34" charset="-127"/>
-                          <a:cs typeface="S-Core Dream 4 Regular" pitchFamily="34" charset="-120"/>
+                          <a:latin typeface="Pretendard" pitchFamily="34" charset="0"/>
+                          <a:ea typeface="Pretendard" pitchFamily="34" charset="-127"/>
+                          <a:cs typeface="Pretendard" pitchFamily="34" charset="-120"/>
                         </a:rPr>
                         <a:t>④ 보고 완료로 기록을 안 함</a:t>
                       </a:r>
                       <a:endParaRPr lang="ko-KR" altLang="en-US" sz="1300" dirty="0">
-                        <a:latin typeface="S-Core Dream 4 Regular" charset="0"/>
-                        <a:ea typeface="S-Core Dream 4 Regular" charset="0"/>
-                        <a:cs typeface="S-Core Dream 4 Regular" charset="0"/>
+                        <a:latin typeface="Pretendard" charset="0"/>
+                        <a:ea typeface="Pretendard" charset="0"/>
+                        <a:cs typeface="Pretendard" charset="0"/>
                       </a:endParaRPr>
                     </a:p>
                   </a:txBody>
@@ -16311,16 +16311,16 @@
                           <a:solidFill>
                             <a:srgbClr val="1E2A36"/>
                           </a:solidFill>
-                          <a:latin typeface="S-Core Dream 4 Regular" pitchFamily="34" charset="0"/>
-                          <a:ea typeface="S-Core Dream 4 Regular" pitchFamily="34" charset="-127"/>
-                          <a:cs typeface="S-Core Dream 4 Regular" pitchFamily="34" charset="-120"/>
+                          <a:latin typeface="Pretendard" pitchFamily="34" charset="0"/>
+                          <a:ea typeface="Pretendard" pitchFamily="34" charset="-127"/>
+                          <a:cs typeface="Pretendard" pitchFamily="34" charset="-120"/>
                         </a:rPr>
                         <a:t>보낸 뒤 꼭 기록. 지난 메일은 불러오기로</a:t>
                       </a:r>
                       <a:endParaRPr lang="ko-KR" altLang="en-US" sz="1300" dirty="0">
-                        <a:latin typeface="S-Core Dream 4 Regular" charset="0"/>
-                        <a:ea typeface="S-Core Dream 4 Regular" charset="0"/>
-                        <a:cs typeface="S-Core Dream 4 Regular" charset="0"/>
+                        <a:latin typeface="Pretendard" charset="0"/>
+                        <a:ea typeface="Pretendard" charset="0"/>
+                        <a:cs typeface="Pretendard" charset="0"/>
                       </a:endParaRPr>
                     </a:p>
                   </a:txBody>
@@ -16448,13 +16448,13 @@
               <a:buNone/>
             </a:pPr>
             <a:r>
-              <a:rPr lang="ko-KR" altLang="en-US" sz="2000" dirty="0">
+              <a:rPr lang="ko-KR" altLang="en-US" sz="2000" b="1" dirty="0">
                 <a:solidFill>
                   <a:srgbClr val="FFFFFF"/>
                 </a:solidFill>
-                <a:latin typeface="S-Core Dream 7 ExtraBold" pitchFamily="34" charset="0"/>
-                <a:ea typeface="S-Core Dream 7 ExtraBold" pitchFamily="34" charset="-127"/>
-                <a:cs typeface="S-Core Dream 7 ExtraBold" pitchFamily="34" charset="-120"/>
+                <a:latin typeface="Pretendard" pitchFamily="34" charset="0"/>
+                <a:ea typeface="Pretendard" pitchFamily="34" charset="-127"/>
+                <a:cs typeface="Pretendard" pitchFamily="34" charset="-120"/>
               </a:rPr>
               <a:t>06</a:t>
             </a:r>
@@ -16491,9 +16491,9 @@
                 <a:solidFill>
                   <a:srgbClr val="2E7D8C"/>
                 </a:solidFill>
-                <a:latin typeface="S-Core Dream 5 Medium" pitchFamily="34" charset="0"/>
-                <a:ea typeface="S-Core Dream 5 Medium" pitchFamily="34" charset="-127"/>
-                <a:cs typeface="S-Core Dream 5 Medium" pitchFamily="34" charset="-120"/>
+                <a:latin typeface="Pretendard SemiBold" pitchFamily="34" charset="0"/>
+                <a:ea typeface="Pretendard SemiBold" pitchFamily="34" charset="-127"/>
+                <a:cs typeface="Pretendard SemiBold" pitchFamily="34" charset="-120"/>
               </a:rPr>
               <a:t>확인 필요 사항</a:t>
             </a:r>
@@ -16526,13 +16526,13 @@
               <a:buNone/>
             </a:pPr>
             <a:r>
-              <a:rPr lang="ko-KR" altLang="en-US" sz="2600" dirty="0">
+              <a:rPr lang="ko-KR" altLang="en-US" sz="2600" b="1" dirty="0">
                 <a:solidFill>
                   <a:srgbClr val="1F3B5C"/>
                 </a:solidFill>
-                <a:latin typeface="S-Core Dream 7 ExtraBold" pitchFamily="34" charset="0"/>
-                <a:ea typeface="S-Core Dream 7 ExtraBold" pitchFamily="34" charset="-127"/>
-                <a:cs typeface="S-Core Dream 7 ExtraBold" pitchFamily="34" charset="-120"/>
+                <a:latin typeface="Pretendard" pitchFamily="34" charset="0"/>
+                <a:ea typeface="Pretendard" pitchFamily="34" charset="-127"/>
+                <a:cs typeface="Pretendard" pitchFamily="34" charset="-120"/>
               </a:rPr>
               <a:t>확인 필요 사항</a:t>
             </a:r>
@@ -16569,9 +16569,9 @@
                 <a:solidFill>
                   <a:srgbClr val="667385"/>
                 </a:solidFill>
-                <a:latin typeface="S-Core Dream 4 Regular" pitchFamily="34" charset="0"/>
-                <a:ea typeface="S-Core Dream 4 Regular" pitchFamily="34" charset="-127"/>
-                <a:cs typeface="S-Core Dream 4 Regular" pitchFamily="34" charset="-120"/>
+                <a:latin typeface="Pretendard" pitchFamily="34" charset="0"/>
+                <a:ea typeface="Pretendard" pitchFamily="34" charset="-127"/>
+                <a:cs typeface="Pretendard" pitchFamily="34" charset="-120"/>
               </a:rPr>
               <a:t>이 매뉴얼에서 확인하지 못했거나 추정한 내용입니다</a:t>
             </a:r>
@@ -16659,9 +16659,9 @@
                 <a:solidFill>
                   <a:srgbClr val="1F3B5C"/>
                 </a:solidFill>
-                <a:latin typeface="S-Core Dream 5 Medium" pitchFamily="34" charset="0"/>
-                <a:ea typeface="S-Core Dream 5 Medium" pitchFamily="34" charset="-127"/>
-                <a:cs typeface="S-Core Dream 5 Medium" pitchFamily="34" charset="-120"/>
+                <a:latin typeface="Pretendard SemiBold" pitchFamily="34" charset="0"/>
+                <a:ea typeface="Pretendard SemiBold" pitchFamily="34" charset="-127"/>
+                <a:cs typeface="Pretendard SemiBold" pitchFamily="34" charset="-120"/>
               </a:rPr>
               <a:t>미확인 — 화면</a:t>
             </a:r>
@@ -16702,9 +16702,9 @@
                 <a:solidFill>
                   <a:srgbClr val="1E2A36"/>
                 </a:solidFill>
-                <a:latin typeface="S-Core Dream 4 Regular" pitchFamily="34" charset="0"/>
-                <a:ea typeface="S-Core Dream 4 Regular" pitchFamily="34" charset="-127"/>
-                <a:cs typeface="S-Core Dream 4 Regular" pitchFamily="34" charset="-120"/>
+                <a:latin typeface="Pretendard" pitchFamily="34" charset="0"/>
+                <a:ea typeface="Pretendard" pitchFamily="34" charset="-127"/>
+                <a:cs typeface="Pretendard" pitchFamily="34" charset="-120"/>
               </a:rPr>
               <a:t>윈도우 경고 창(설치 장), 그룹웨어 편지쓰기(메일 보내기 장)는 자동 촬영이 안 돼 자리표시자로 둠 — 담당자 PC에서 찍어 넣고 자리표시자 삭제</a:t>
             </a:r>
@@ -16723,9 +16723,9 @@
                 <a:solidFill>
                   <a:srgbClr val="1E2A36"/>
                 </a:solidFill>
-                <a:latin typeface="S-Core Dream 4 Regular" pitchFamily="34" charset="0"/>
-                <a:ea typeface="S-Core Dream 4 Regular" pitchFamily="34" charset="-127"/>
-                <a:cs typeface="S-Core Dream 4 Regular" pitchFamily="34" charset="-120"/>
+                <a:latin typeface="Pretendard" pitchFamily="34" charset="0"/>
+                <a:ea typeface="Pretendard" pitchFamily="34" charset="-127"/>
+                <a:cs typeface="Pretendard" pitchFamily="34" charset="-120"/>
               </a:rPr>
               <a:t>결과 엑셀 화면은 표로 대신함</a:t>
             </a:r>
@@ -16813,9 +16813,9 @@
                 <a:solidFill>
                   <a:srgbClr val="1F3B5C"/>
                 </a:solidFill>
-                <a:latin typeface="S-Core Dream 5 Medium" pitchFamily="34" charset="0"/>
-                <a:ea typeface="S-Core Dream 5 Medium" pitchFamily="34" charset="-127"/>
-                <a:cs typeface="S-Core Dream 5 Medium" pitchFamily="34" charset="-120"/>
+                <a:latin typeface="Pretendard SemiBold" pitchFamily="34" charset="0"/>
+                <a:ea typeface="Pretendard SemiBold" pitchFamily="34" charset="-127"/>
+                <a:cs typeface="Pretendard SemiBold" pitchFamily="34" charset="-120"/>
               </a:rPr>
               <a:t>(추정) — 시간·글꼴</a:t>
             </a:r>
@@ -16856,9 +16856,9 @@
                 <a:solidFill>
                   <a:srgbClr val="1E2A36"/>
                 </a:solidFill>
-                <a:latin typeface="S-Core Dream 4 Regular" pitchFamily="34" charset="0"/>
-                <a:ea typeface="S-Core Dream 4 Regular" pitchFamily="34" charset="-127"/>
-                <a:cs typeface="S-Core Dream 4 Regular" pitchFamily="34" charset="-120"/>
+                <a:latin typeface="Pretendard" pitchFamily="34" charset="0"/>
+                <a:ea typeface="Pretendard" pitchFamily="34" charset="-127"/>
+                <a:cs typeface="Pretendard" pitchFamily="34" charset="-120"/>
               </a:rPr>
               <a:t>조회 시간 1~2분은 키워드 67개 기준 추정</a:t>
             </a:r>
@@ -16877,11 +16877,11 @@
                 <a:solidFill>
                   <a:srgbClr val="1E2A36"/>
                 </a:solidFill>
-                <a:latin typeface="S-Core Dream 4 Regular" pitchFamily="34" charset="0"/>
-                <a:ea typeface="S-Core Dream 4 Regular" pitchFamily="34" charset="-127"/>
-                <a:cs typeface="S-Core Dream 4 Regular" pitchFamily="34" charset="-120"/>
-              </a:rPr>
-              <a:t>이 PPT는 에스코어 드림 글꼴로 지정 — 글꼴이 없는 PC에서는 대체 글꼴로 보여 줄바꿈이 다를 수 있음</a:t>
+                <a:latin typeface="Pretendard" pitchFamily="34" charset="0"/>
+                <a:ea typeface="Pretendard" pitchFamily="34" charset="-127"/>
+                <a:cs typeface="Pretendard" pitchFamily="34" charset="-120"/>
+              </a:rPr>
+              <a:t>이 PPT는 Pretendard 글꼴로 지정 — 글꼴이 없는 PC에서는 대체 글꼴로 보여 줄바꿈이 다를 수 있음(앱 저장소 assets/fonts 3종 설치)</a:t>
             </a:r>
             <a:endParaRPr lang="ko-KR" altLang="en-US" sz="1400" dirty="0"/>
           </a:p>
@@ -16967,9 +16967,9 @@
                 <a:solidFill>
                   <a:srgbClr val="1F3B5C"/>
                 </a:solidFill>
-                <a:latin typeface="S-Core Dream 5 Medium" pitchFamily="34" charset="0"/>
-                <a:ea typeface="S-Core Dream 5 Medium" pitchFamily="34" charset="-127"/>
-                <a:cs typeface="S-Core Dream 5 Medium" pitchFamily="34" charset="-120"/>
+                <a:latin typeface="Pretendard SemiBold" pitchFamily="34" charset="0"/>
+                <a:ea typeface="Pretendard SemiBold" pitchFamily="34" charset="-127"/>
+                <a:cs typeface="Pretendard SemiBold" pitchFamily="34" charset="-120"/>
               </a:rPr>
               <a:t>시연 자료</a:t>
             </a:r>
@@ -17010,9 +17010,9 @@
                 <a:solidFill>
                   <a:srgbClr val="1E2A36"/>
                 </a:solidFill>
-                <a:latin typeface="S-Core Dream 4 Regular" pitchFamily="34" charset="0"/>
-                <a:ea typeface="S-Core Dream 4 Regular" pitchFamily="34" charset="-127"/>
-                <a:cs typeface="S-Core Dream 4 Regular" pitchFamily="34" charset="-120"/>
+                <a:latin typeface="Pretendard" pitchFamily="34" charset="0"/>
+                <a:ea typeface="Pretendard" pitchFamily="34" charset="-127"/>
+                <a:cs typeface="Pretendard" pitchFamily="34" charset="-120"/>
               </a:rPr>
               <a:t>화면 속 기사·건수·날짜는 설명용 시연 자료(실제 기사 아님)</a:t>
             </a:r>
@@ -17031,9 +17031,9 @@
                 <a:solidFill>
                   <a:srgbClr val="1E2A36"/>
                 </a:solidFill>
-                <a:latin typeface="S-Core Dream 4 Regular" pitchFamily="34" charset="0"/>
-                <a:ea typeface="S-Core Dream 4 Regular" pitchFamily="34" charset="-127"/>
-                <a:cs typeface="S-Core Dream 4 Regular" pitchFamily="34" charset="-120"/>
+                <a:latin typeface="Pretendard" pitchFamily="34" charset="0"/>
+                <a:ea typeface="Pretendard" pitchFamily="34" charset="-127"/>
+                <a:cs typeface="Pretendard" pitchFamily="34" charset="-120"/>
               </a:rPr>
               <a:t>앱 v1.0.8 기준 — 앱이 바뀌면 Actions 'manual'로 화면을 다시 찍어 갱신</a:t>
             </a:r>
@@ -17121,9 +17121,9 @@
                 <a:solidFill>
                   <a:srgbClr val="1F3B5C"/>
                 </a:solidFill>
-                <a:latin typeface="S-Core Dream 5 Medium" pitchFamily="34" charset="0"/>
-                <a:ea typeface="S-Core Dream 5 Medium" pitchFamily="34" charset="-127"/>
-                <a:cs typeface="S-Core Dream 5 Medium" pitchFamily="34" charset="-120"/>
+                <a:latin typeface="Pretendard SemiBold" pitchFamily="34" charset="0"/>
+                <a:ea typeface="Pretendard SemiBold" pitchFamily="34" charset="-127"/>
+                <a:cs typeface="Pretendard SemiBold" pitchFamily="34" charset="-120"/>
               </a:rPr>
               <a:t>전문지</a:t>
             </a:r>
@@ -17164,9 +17164,9 @@
                 <a:solidFill>
                   <a:srgbClr val="1E2A36"/>
                 </a:solidFill>
-                <a:latin typeface="S-Core Dream 4 Regular" pitchFamily="34" charset="0"/>
-                <a:ea typeface="S-Core Dream 4 Regular" pitchFamily="34" charset="-127"/>
-                <a:cs typeface="S-Core Dream 4 Regular" pitchFamily="34" charset="-120"/>
+                <a:latin typeface="Pretendard" pitchFamily="34" charset="0"/>
+                <a:ea typeface="Pretendard" pitchFamily="34" charset="-127"/>
+                <a:cs typeface="Pretendard" pitchFamily="34" charset="-120"/>
               </a:rPr>
               <a:t>대한경제·한국주택경제신문 RSS 주소 미확인</a:t>
             </a:r>
@@ -17185,9 +17185,9 @@
                 <a:solidFill>
                   <a:srgbClr val="1E2A36"/>
                 </a:solidFill>
-                <a:latin typeface="S-Core Dream 4 Regular" pitchFamily="34" charset="0"/>
-                <a:ea typeface="S-Core Dream 4 Regular" pitchFamily="34" charset="-127"/>
-                <a:cs typeface="S-Core Dream 4 Regular" pitchFamily="34" charset="-120"/>
+                <a:latin typeface="Pretendard" pitchFamily="34" charset="0"/>
+                <a:ea typeface="Pretendard" pitchFamily="34" charset="-127"/>
+                <a:cs typeface="Pretendard" pitchFamily="34" charset="-120"/>
               </a:rPr>
               <a:t>전기신문 RSS는 꺼 둠(전문지 고르기에서 켤 수 있음)</a:t>
             </a:r>
@@ -17272,13 +17272,13 @@
               <a:buNone/>
             </a:pPr>
             <a:r>
-              <a:rPr lang="ko-KR" altLang="en-US" sz="2000" dirty="0">
+              <a:rPr lang="ko-KR" altLang="en-US" sz="2000" b="1" dirty="0">
                 <a:solidFill>
                   <a:srgbClr val="FFFFFF"/>
                 </a:solidFill>
-                <a:latin typeface="S-Core Dream 7 ExtraBold" pitchFamily="34" charset="0"/>
-                <a:ea typeface="S-Core Dream 7 ExtraBold" pitchFamily="34" charset="-127"/>
-                <a:cs typeface="S-Core Dream 7 ExtraBold" pitchFamily="34" charset="-120"/>
+                <a:latin typeface="Pretendard" pitchFamily="34" charset="0"/>
+                <a:ea typeface="Pretendard" pitchFamily="34" charset="-127"/>
+                <a:cs typeface="Pretendard" pitchFamily="34" charset="-120"/>
               </a:rPr>
               <a:t>01</a:t>
             </a:r>
@@ -17315,9 +17315,9 @@
                 <a:solidFill>
                   <a:srgbClr val="2E7D8C"/>
                 </a:solidFill>
-                <a:latin typeface="S-Core Dream 5 Medium" pitchFamily="34" charset="0"/>
-                <a:ea typeface="S-Core Dream 5 Medium" pitchFamily="34" charset="-127"/>
-                <a:cs typeface="S-Core Dream 5 Medium" pitchFamily="34" charset="-120"/>
+                <a:latin typeface="Pretendard SemiBold" pitchFamily="34" charset="0"/>
+                <a:ea typeface="Pretendard SemiBold" pitchFamily="34" charset="-127"/>
+                <a:cs typeface="Pretendard SemiBold" pitchFamily="34" charset="-120"/>
               </a:rPr>
               <a:t>시작하기 · 한눈에 보기</a:t>
             </a:r>
@@ -17350,13 +17350,13 @@
               <a:buNone/>
             </a:pPr>
             <a:r>
-              <a:rPr lang="ko-KR" altLang="en-US" sz="2600" dirty="0">
+              <a:rPr lang="ko-KR" altLang="en-US" sz="2600" b="1" dirty="0">
                 <a:solidFill>
                   <a:srgbClr val="1F3B5C"/>
                 </a:solidFill>
-                <a:latin typeface="S-Core Dream 7 ExtraBold" pitchFamily="34" charset="0"/>
-                <a:ea typeface="S-Core Dream 7 ExtraBold" pitchFamily="34" charset="-127"/>
-                <a:cs typeface="S-Core Dream 7 ExtraBold" pitchFamily="34" charset="-120"/>
+                <a:latin typeface="Pretendard" pitchFamily="34" charset="0"/>
+                <a:ea typeface="Pretendard" pitchFamily="34" charset="-127"/>
+                <a:cs typeface="Pretendard" pitchFamily="34" charset="-120"/>
               </a:rPr>
               <a:t>앱이 하는 일: 모으고, 거르고, 골라서, 보고서로</a:t>
             </a:r>
@@ -17393,9 +17393,9 @@
                 <a:solidFill>
                   <a:srgbClr val="667385"/>
                 </a:solidFill>
-                <a:latin typeface="S-Core Dream 4 Regular" pitchFamily="34" charset="0"/>
-                <a:ea typeface="S-Core Dream 4 Regular" pitchFamily="34" charset="-127"/>
-                <a:cs typeface="S-Core Dream 4 Regular" pitchFamily="34" charset="-120"/>
+                <a:latin typeface="Pretendard" pitchFamily="34" charset="0"/>
+                <a:ea typeface="Pretendard" pitchFamily="34" charset="-127"/>
+                <a:cs typeface="Pretendard" pitchFamily="34" charset="-120"/>
               </a:rPr>
               <a:t>구글 뉴스·전문지에서 기사를 모아 선정 규칙으로 점수를 매기고, 추천 5건을 메일 보고서로 만듭니다</a:t>
             </a:r>
@@ -17483,9 +17483,9 @@
                 <a:solidFill>
                   <a:srgbClr val="1F3B5C"/>
                 </a:solidFill>
-                <a:latin typeface="S-Core Dream 5 Medium" pitchFamily="34" charset="0"/>
-                <a:ea typeface="S-Core Dream 5 Medium" pitchFamily="34" charset="-127"/>
-                <a:cs typeface="S-Core Dream 5 Medium" pitchFamily="34" charset="-120"/>
+                <a:latin typeface="Pretendard SemiBold" pitchFamily="34" charset="0"/>
+                <a:ea typeface="Pretendard SemiBold" pitchFamily="34" charset="-127"/>
+                <a:cs typeface="Pretendard SemiBold" pitchFamily="34" charset="-120"/>
               </a:rPr>
               <a:t>모으기</a:t>
             </a:r>
@@ -17522,9 +17522,9 @@
                 <a:solidFill>
                   <a:srgbClr val="1E2A36"/>
                 </a:solidFill>
-                <a:latin typeface="S-Core Dream 4 Regular" pitchFamily="34" charset="0"/>
-                <a:ea typeface="S-Core Dream 4 Regular" pitchFamily="34" charset="-127"/>
-                <a:cs typeface="S-Core Dream 4 Regular" pitchFamily="34" charset="-120"/>
+                <a:latin typeface="Pretendard" pitchFamily="34" charset="0"/>
+                <a:ea typeface="Pretendard" pitchFamily="34" charset="-127"/>
+                <a:cs typeface="Pretendard" pitchFamily="34" charset="-120"/>
               </a:rPr>
               <a:t>구글 뉴스·전문지 RSS에서 키워드로</a:t>
             </a:r>
@@ -17636,9 +17636,9 @@
                 <a:solidFill>
                   <a:srgbClr val="1F3B5C"/>
                 </a:solidFill>
-                <a:latin typeface="S-Core Dream 5 Medium" pitchFamily="34" charset="0"/>
-                <a:ea typeface="S-Core Dream 5 Medium" pitchFamily="34" charset="-127"/>
-                <a:cs typeface="S-Core Dream 5 Medium" pitchFamily="34" charset="-120"/>
+                <a:latin typeface="Pretendard SemiBold" pitchFamily="34" charset="0"/>
+                <a:ea typeface="Pretendard SemiBold" pitchFamily="34" charset="-127"/>
+                <a:cs typeface="Pretendard SemiBold" pitchFamily="34" charset="-120"/>
               </a:rPr>
               <a:t>거르기</a:t>
             </a:r>
@@ -17675,9 +17675,9 @@
                 <a:solidFill>
                   <a:srgbClr val="1E2A36"/>
                 </a:solidFill>
-                <a:latin typeface="S-Core Dream 4 Regular" pitchFamily="34" charset="0"/>
-                <a:ea typeface="S-Core Dream 4 Regular" pitchFamily="34" charset="-127"/>
-                <a:cs typeface="S-Core Dream 4 Regular" pitchFamily="34" charset="-120"/>
+                <a:latin typeface="Pretendard" pitchFamily="34" charset="0"/>
+                <a:ea typeface="Pretendard" pitchFamily="34" charset="-127"/>
+                <a:cs typeface="Pretendard" pitchFamily="34" charset="-120"/>
               </a:rPr>
               <a:t>제목 확인·제외 매체·행사·이미 보고</a:t>
             </a:r>
@@ -17789,9 +17789,9 @@
                 <a:solidFill>
                   <a:srgbClr val="1F3B5C"/>
                 </a:solidFill>
-                <a:latin typeface="S-Core Dream 5 Medium" pitchFamily="34" charset="0"/>
-                <a:ea typeface="S-Core Dream 5 Medium" pitchFamily="34" charset="-127"/>
-                <a:cs typeface="S-Core Dream 5 Medium" pitchFamily="34" charset="-120"/>
+                <a:latin typeface="Pretendard SemiBold" pitchFamily="34" charset="0"/>
+                <a:ea typeface="Pretendard SemiBold" pitchFamily="34" charset="-127"/>
+                <a:cs typeface="Pretendard SemiBold" pitchFamily="34" charset="-120"/>
               </a:rPr>
               <a:t>점수</a:t>
             </a:r>
@@ -17828,9 +17828,9 @@
                 <a:solidFill>
                   <a:srgbClr val="1E2A36"/>
                 </a:solidFill>
-                <a:latin typeface="S-Core Dream 4 Regular" pitchFamily="34" charset="0"/>
-                <a:ea typeface="S-Core Dream 4 Regular" pitchFamily="34" charset="-127"/>
-                <a:cs typeface="S-Core Dream 4 Regular" pitchFamily="34" charset="-120"/>
+                <a:latin typeface="Pretendard" pitchFamily="34" charset="0"/>
+                <a:ea typeface="Pretendard" pitchFamily="34" charset="-127"/>
+                <a:cs typeface="Pretendard" pitchFamily="34" charset="-120"/>
               </a:rPr>
               <a:t>공단·사업어·리스크로 점수, 분류 추정</a:t>
             </a:r>
@@ -17942,9 +17942,9 @@
                 <a:solidFill>
                   <a:srgbClr val="1F3B5C"/>
                 </a:solidFill>
-                <a:latin typeface="S-Core Dream 5 Medium" pitchFamily="34" charset="0"/>
-                <a:ea typeface="S-Core Dream 5 Medium" pitchFamily="34" charset="-127"/>
-                <a:cs typeface="S-Core Dream 5 Medium" pitchFamily="34" charset="-120"/>
+                <a:latin typeface="Pretendard SemiBold" pitchFamily="34" charset="0"/>
+                <a:ea typeface="Pretendard SemiBold" pitchFamily="34" charset="-127"/>
+                <a:cs typeface="Pretendard SemiBold" pitchFamily="34" charset="-120"/>
               </a:rPr>
               <a:t>추천 ★</a:t>
             </a:r>
@@ -17981,9 +17981,9 @@
                 <a:solidFill>
                   <a:srgbClr val="1E2A36"/>
                 </a:solidFill>
-                <a:latin typeface="S-Core Dream 4 Regular" pitchFamily="34" charset="0"/>
-                <a:ea typeface="S-Core Dream 4 Regular" pitchFamily="34" charset="-127"/>
-                <a:cs typeface="S-Core Dream 4 Regular" pitchFamily="34" charset="-120"/>
+                <a:latin typeface="Pretendard" pitchFamily="34" charset="0"/>
+                <a:ea typeface="Pretendard" pitchFamily="34" charset="-127"/>
+                <a:cs typeface="Pretendard" pitchFamily="34" charset="-120"/>
               </a:rPr>
               <a:t>리스크 먼저, 분류 고루 5건</a:t>
             </a:r>
@@ -18095,9 +18095,9 @@
                 <a:solidFill>
                   <a:srgbClr val="1F3B5C"/>
                 </a:solidFill>
-                <a:latin typeface="S-Core Dream 5 Medium" pitchFamily="34" charset="0"/>
-                <a:ea typeface="S-Core Dream 5 Medium" pitchFamily="34" charset="-127"/>
-                <a:cs typeface="S-Core Dream 5 Medium" pitchFamily="34" charset="-120"/>
+                <a:latin typeface="Pretendard SemiBold" pitchFamily="34" charset="0"/>
+                <a:ea typeface="Pretendard SemiBold" pitchFamily="34" charset="-127"/>
+                <a:cs typeface="Pretendard SemiBold" pitchFamily="34" charset="-120"/>
               </a:rPr>
               <a:t>보고서</a:t>
             </a:r>
@@ -18134,9 +18134,9 @@
                 <a:solidFill>
                   <a:srgbClr val="1E2A36"/>
                 </a:solidFill>
-                <a:latin typeface="S-Core Dream 4 Regular" pitchFamily="34" charset="0"/>
-                <a:ea typeface="S-Core Dream 4 Regular" pitchFamily="34" charset="-127"/>
-                <a:cs typeface="S-Core Dream 4 Regular" pitchFamily="34" charset="-120"/>
+                <a:latin typeface="Pretendard" pitchFamily="34" charset="0"/>
+                <a:ea typeface="Pretendard" pitchFamily="34" charset="-127"/>
+                <a:cs typeface="Pretendard" pitchFamily="34" charset="-120"/>
               </a:rPr>
               <a:t>메일에 붙일 제목·본문 복사</a:t>
             </a:r>
@@ -18248,9 +18248,9 @@
                 <a:solidFill>
                   <a:srgbClr val="1F3B5C"/>
                 </a:solidFill>
-                <a:latin typeface="S-Core Dream 5 Medium" pitchFamily="34" charset="0"/>
-                <a:ea typeface="S-Core Dream 5 Medium" pitchFamily="34" charset="-127"/>
-                <a:cs typeface="S-Core Dream 5 Medium" pitchFamily="34" charset="-120"/>
+                <a:latin typeface="Pretendard SemiBold" pitchFamily="34" charset="0"/>
+                <a:ea typeface="Pretendard SemiBold" pitchFamily="34" charset="-127"/>
+                <a:cs typeface="Pretendard SemiBold" pitchFamily="34" charset="-120"/>
               </a:rPr>
               <a:t>기록</a:t>
             </a:r>
@@ -18287,9 +18287,9 @@
                 <a:solidFill>
                   <a:srgbClr val="1E2A36"/>
                 </a:solidFill>
-                <a:latin typeface="S-Core Dream 4 Regular" pitchFamily="34" charset="0"/>
-                <a:ea typeface="S-Core Dream 4 Regular" pitchFamily="34" charset="-127"/>
-                <a:cs typeface="S-Core Dream 4 Regular" pitchFamily="34" charset="-120"/>
+                <a:latin typeface="Pretendard" pitchFamily="34" charset="0"/>
+                <a:ea typeface="Pretendard" pitchFamily="34" charset="-127"/>
+                <a:cs typeface="Pretendard" pitchFamily="34" charset="-120"/>
               </a:rPr>
               <a:t>보낸 기사는 다음 조회에서 빠짐</a:t>
             </a:r>
@@ -18377,9 +18377,9 @@
                 <a:solidFill>
                   <a:srgbClr val="1F3B5C"/>
                 </a:solidFill>
-                <a:latin typeface="S-Core Dream 5 Medium" pitchFamily="34" charset="0"/>
-                <a:ea typeface="S-Core Dream 5 Medium" pitchFamily="34" charset="-127"/>
-                <a:cs typeface="S-Core Dream 5 Medium" pitchFamily="34" charset="-120"/>
+                <a:latin typeface="Pretendard SemiBold" pitchFamily="34" charset="0"/>
+                <a:ea typeface="Pretendard SemiBold" pitchFamily="34" charset="-127"/>
+                <a:cs typeface="Pretendard SemiBold" pitchFamily="34" charset="-120"/>
               </a:rPr>
               <a:t>환류: 규칙은 앱이 아니라 담당자가 고칩니다</a:t>
             </a:r>
@@ -18419,9 +18419,9 @@
                 <a:solidFill>
                   <a:srgbClr val="1E2A36"/>
                 </a:solidFill>
-                <a:latin typeface="S-Core Dream 4 Regular" pitchFamily="34" charset="0"/>
-                <a:ea typeface="S-Core Dream 4 Regular" pitchFamily="34" charset="-127"/>
-                <a:cs typeface="S-Core Dream 4 Regular" pitchFamily="34" charset="-120"/>
+                <a:latin typeface="Pretendard" pitchFamily="34" charset="0"/>
+                <a:ea typeface="Pretendard" pitchFamily="34" charset="-127"/>
+                <a:cs typeface="Pretendard" pitchFamily="34" charset="-120"/>
               </a:rPr>
               <a:t>결과 엑셀을 내려받아 Claude에 보내면 규칙 개선안(JSON)이 돌아옵니다. [선정 규칙] 탭에 붙여 넣으면 바뀔 항목을 보여 준 뒤 적용하고, 변경 이력에 남습니다. 앱을 업데이트하지 않아도 다음 조회부터 바로 반영됩니다.</a:t>
             </a:r>
@@ -18506,13 +18506,13 @@
               <a:buNone/>
             </a:pPr>
             <a:r>
-              <a:rPr lang="ko-KR" altLang="en-US" sz="2000" dirty="0">
+              <a:rPr lang="ko-KR" altLang="en-US" sz="2000" b="1" dirty="0">
                 <a:solidFill>
                   <a:srgbClr val="FFFFFF"/>
                 </a:solidFill>
-                <a:latin typeface="S-Core Dream 7 ExtraBold" pitchFamily="34" charset="0"/>
-                <a:ea typeface="S-Core Dream 7 ExtraBold" pitchFamily="34" charset="-127"/>
-                <a:cs typeface="S-Core Dream 7 ExtraBold" pitchFamily="34" charset="-120"/>
+                <a:latin typeface="Pretendard" pitchFamily="34" charset="0"/>
+                <a:ea typeface="Pretendard" pitchFamily="34" charset="-127"/>
+                <a:cs typeface="Pretendard" pitchFamily="34" charset="-120"/>
               </a:rPr>
               <a:t>01</a:t>
             </a:r>
@@ -18549,9 +18549,9 @@
                 <a:solidFill>
                   <a:srgbClr val="2E7D8C"/>
                 </a:solidFill>
-                <a:latin typeface="S-Core Dream 5 Medium" pitchFamily="34" charset="0"/>
-                <a:ea typeface="S-Core Dream 5 Medium" pitchFamily="34" charset="-127"/>
-                <a:cs typeface="S-Core Dream 5 Medium" pitchFamily="34" charset="-120"/>
+                <a:latin typeface="Pretendard SemiBold" pitchFamily="34" charset="0"/>
+                <a:ea typeface="Pretendard SemiBold" pitchFamily="34" charset="-127"/>
+                <a:cs typeface="Pretendard SemiBold" pitchFamily="34" charset="-120"/>
               </a:rPr>
               <a:t>시작하기 · 설치</a:t>
             </a:r>
@@ -18584,13 +18584,13 @@
               <a:buNone/>
             </a:pPr>
             <a:r>
-              <a:rPr lang="ko-KR" altLang="en-US" sz="2600" dirty="0">
+              <a:rPr lang="ko-KR" altLang="en-US" sz="2600" b="1" dirty="0">
                 <a:solidFill>
                   <a:srgbClr val="1F3B5C"/>
                 </a:solidFill>
-                <a:latin typeface="S-Core Dream 7 ExtraBold" pitchFamily="34" charset="0"/>
-                <a:ea typeface="S-Core Dream 7 ExtraBold" pitchFamily="34" charset="-127"/>
-                <a:cs typeface="S-Core Dream 7 ExtraBold" pitchFamily="34" charset="-120"/>
+                <a:latin typeface="Pretendard" pitchFamily="34" charset="0"/>
+                <a:ea typeface="Pretendard" pitchFamily="34" charset="-127"/>
+                <a:cs typeface="Pretendard" pitchFamily="34" charset="-120"/>
               </a:rPr>
               <a:t>설치와 첫 실행</a:t>
             </a:r>
@@ -18627,9 +18627,9 @@
                 <a:solidFill>
                   <a:srgbClr val="667385"/>
                 </a:solidFill>
-                <a:latin typeface="S-Core Dream 4 Regular" pitchFamily="34" charset="0"/>
-                <a:ea typeface="S-Core Dream 4 Regular" pitchFamily="34" charset="-127"/>
-                <a:cs typeface="S-Core Dream 4 Regular" pitchFamily="34" charset="-120"/>
+                <a:latin typeface="Pretendard" pitchFamily="34" charset="0"/>
+                <a:ea typeface="Pretendard" pitchFamily="34" charset="-127"/>
+                <a:cs typeface="Pretendard" pitchFamily="34" charset="-120"/>
               </a:rPr>
               <a:t>설치 프로그램이 없는 exe 파일 하나입니다. 폴더에 넣고 실행하면 됩니다</a:t>
             </a:r>
@@ -18717,9 +18717,9 @@
                 <a:solidFill>
                   <a:srgbClr val="1F3B5C"/>
                 </a:solidFill>
-                <a:latin typeface="S-Core Dream 5 Medium" pitchFamily="34" charset="0"/>
-                <a:ea typeface="S-Core Dream 5 Medium" pitchFamily="34" charset="-127"/>
-                <a:cs typeface="S-Core Dream 5 Medium" pitchFamily="34" charset="-120"/>
+                <a:latin typeface="Pretendard SemiBold" pitchFamily="34" charset="0"/>
+                <a:ea typeface="Pretendard SemiBold" pitchFamily="34" charset="-127"/>
+                <a:cs typeface="Pretendard SemiBold" pitchFamily="34" charset="-120"/>
               </a:rPr>
               <a:t>내려받기</a:t>
             </a:r>
@@ -18760,9 +18760,9 @@
                 <a:solidFill>
                   <a:srgbClr val="1E2A36"/>
                 </a:solidFill>
-                <a:latin typeface="S-Core Dream 4 Regular" pitchFamily="34" charset="0"/>
-                <a:ea typeface="S-Core Dream 4 Regular" pitchFamily="34" charset="-127"/>
-                <a:cs typeface="S-Core Dream 4 Regular" pitchFamily="34" charset="-120"/>
+                <a:latin typeface="Pretendard" pitchFamily="34" charset="0"/>
+                <a:ea typeface="Pretendard" pitchFamily="34" charset="-127"/>
+                <a:cs typeface="Pretendard" pitchFamily="34" charset="-120"/>
               </a:rPr>
               <a:t>GitHub Releases 또는 공문 안내 경로</a:t>
             </a:r>
@@ -18781,9 +18781,9 @@
                 <a:solidFill>
                   <a:srgbClr val="1E2A36"/>
                 </a:solidFill>
-                <a:latin typeface="S-Core Dream 4 Regular" pitchFamily="34" charset="0"/>
-                <a:ea typeface="S-Core Dream 4 Regular" pitchFamily="34" charset="-127"/>
-                <a:cs typeface="S-Core Dream 4 Regular" pitchFamily="34" charset="-120"/>
+                <a:latin typeface="Pretendard" pitchFamily="34" charset="0"/>
+                <a:ea typeface="Pretendard" pitchFamily="34" charset="-127"/>
+                <a:cs typeface="Pretendard" pitchFamily="34" charset="-120"/>
               </a:rPr>
               <a:t>파일: NewsMonitor_v버전.exe</a:t>
             </a:r>
@@ -18802,9 +18802,9 @@
                 <a:solidFill>
                   <a:srgbClr val="1E2A36"/>
                 </a:solidFill>
-                <a:latin typeface="S-Core Dream 4 Regular" pitchFamily="34" charset="0"/>
-                <a:ea typeface="S-Core Dream 4 Regular" pitchFamily="34" charset="-127"/>
-                <a:cs typeface="S-Core Dream 4 Regular" pitchFamily="34" charset="-120"/>
+                <a:latin typeface="Pretendard" pitchFamily="34" charset="0"/>
+                <a:ea typeface="Pretendard" pitchFamily="34" charset="-127"/>
+                <a:cs typeface="Pretendard" pitchFamily="34" charset="-120"/>
               </a:rPr>
               <a:t>C:\NewsMonitor 같은 폴더에 넣기</a:t>
             </a:r>
@@ -18892,9 +18892,9 @@
                 <a:solidFill>
                   <a:srgbClr val="1F3B5C"/>
                 </a:solidFill>
-                <a:latin typeface="S-Core Dream 5 Medium" pitchFamily="34" charset="0"/>
-                <a:ea typeface="S-Core Dream 5 Medium" pitchFamily="34" charset="-127"/>
-                <a:cs typeface="S-Core Dream 5 Medium" pitchFamily="34" charset="-120"/>
+                <a:latin typeface="Pretendard SemiBold" pitchFamily="34" charset="0"/>
+                <a:ea typeface="Pretendard SemiBold" pitchFamily="34" charset="-127"/>
+                <a:cs typeface="Pretendard SemiBold" pitchFamily="34" charset="-120"/>
               </a:rPr>
               <a:t>윈도우 경고가 뜰 때</a:t>
             </a:r>
@@ -18935,9 +18935,9 @@
                 <a:solidFill>
                   <a:srgbClr val="1E2A36"/>
                 </a:solidFill>
-                <a:latin typeface="S-Core Dream 4 Regular" pitchFamily="34" charset="0"/>
-                <a:ea typeface="S-Core Dream 4 Regular" pitchFamily="34" charset="-127"/>
-                <a:cs typeface="S-Core Dream 4 Regular" pitchFamily="34" charset="-120"/>
+                <a:latin typeface="Pretendard" pitchFamily="34" charset="0"/>
+                <a:ea typeface="Pretendard" pitchFamily="34" charset="-127"/>
+                <a:cs typeface="Pretendard" pitchFamily="34" charset="-120"/>
               </a:rPr>
               <a:t>경고 창에서 [추가 정보] → [실행]</a:t>
             </a:r>
@@ -18956,9 +18956,9 @@
                 <a:solidFill>
                   <a:srgbClr val="1E2A36"/>
                 </a:solidFill>
-                <a:latin typeface="S-Core Dream 4 Regular" pitchFamily="34" charset="0"/>
-                <a:ea typeface="S-Core Dream 4 Regular" pitchFamily="34" charset="-127"/>
-                <a:cs typeface="S-Core Dream 4 Regular" pitchFamily="34" charset="-120"/>
+                <a:latin typeface="Pretendard" pitchFamily="34" charset="0"/>
+                <a:ea typeface="Pretendard" pitchFamily="34" charset="-127"/>
+                <a:cs typeface="Pretendard" pitchFamily="34" charset="-120"/>
               </a:rPr>
               <a:t>또는 파일 오른쪽 클릭 → 속성 → '차단 해제' 체크</a:t>
             </a:r>
@@ -18977,9 +18977,9 @@
                 <a:solidFill>
                   <a:srgbClr val="1E2A36"/>
                 </a:solidFill>
-                <a:latin typeface="S-Core Dream 4 Regular" pitchFamily="34" charset="0"/>
-                <a:ea typeface="S-Core Dream 4 Regular" pitchFamily="34" charset="-127"/>
-                <a:cs typeface="S-Core Dream 4 Regular" pitchFamily="34" charset="-120"/>
+                <a:latin typeface="Pretendard" pitchFamily="34" charset="0"/>
+                <a:ea typeface="Pretendard" pitchFamily="34" charset="-127"/>
+                <a:cs typeface="Pretendard" pitchFamily="34" charset="-120"/>
               </a:rPr>
               <a:t>코드 서명이 없어 뜨는 안내입니다</a:t>
             </a:r>
@@ -19067,9 +19067,9 @@
                 <a:solidFill>
                   <a:srgbClr val="1F3B5C"/>
                 </a:solidFill>
-                <a:latin typeface="S-Core Dream 5 Medium" pitchFamily="34" charset="0"/>
-                <a:ea typeface="S-Core Dream 5 Medium" pitchFamily="34" charset="-127"/>
-                <a:cs typeface="S-Core Dream 5 Medium" pitchFamily="34" charset="-120"/>
+                <a:latin typeface="Pretendard SemiBold" pitchFamily="34" charset="0"/>
+                <a:ea typeface="Pretendard SemiBold" pitchFamily="34" charset="-127"/>
+                <a:cs typeface="Pretendard SemiBold" pitchFamily="34" charset="-120"/>
               </a:rPr>
               <a:t>설정·기록 저장 위치</a:t>
             </a:r>
@@ -19110,9 +19110,9 @@
                 <a:solidFill>
                   <a:srgbClr val="1E2A36"/>
                 </a:solidFill>
-                <a:latin typeface="S-Core Dream 4 Regular" pitchFamily="34" charset="0"/>
-                <a:ea typeface="S-Core Dream 4 Regular" pitchFamily="34" charset="-127"/>
-                <a:cs typeface="S-Core Dream 4 Regular" pitchFamily="34" charset="-120"/>
+                <a:latin typeface="Pretendard" pitchFamily="34" charset="0"/>
+                <a:ea typeface="Pretendard" pitchFamily="34" charset="-127"/>
+                <a:cs typeface="Pretendard" pitchFamily="34" charset="-120"/>
               </a:rPr>
               <a:t>exe 옆에 config.json(설정·규칙)</a:t>
             </a:r>
@@ -19131,9 +19131,9 @@
                 <a:solidFill>
                   <a:srgbClr val="1E2A36"/>
                 </a:solidFill>
-                <a:latin typeface="S-Core Dream 4 Regular" pitchFamily="34" charset="0"/>
-                <a:ea typeface="S-Core Dream 4 Regular" pitchFamily="34" charset="-127"/>
-                <a:cs typeface="S-Core Dream 4 Regular" pitchFamily="34" charset="-120"/>
+                <a:latin typeface="Pretendard" pitchFamily="34" charset="0"/>
+                <a:ea typeface="Pretendard" pitchFamily="34" charset="-127"/>
+                <a:cs typeface="Pretendard" pitchFamily="34" charset="-120"/>
               </a:rPr>
               <a:t>sent_history.json(보고 기록)</a:t>
             </a:r>
@@ -19152,9 +19152,9 @@
                 <a:solidFill>
                   <a:srgbClr val="1E2A36"/>
                 </a:solidFill>
-                <a:latin typeface="S-Core Dream 4 Regular" pitchFamily="34" charset="0"/>
-                <a:ea typeface="S-Core Dream 4 Regular" pitchFamily="34" charset="-127"/>
-                <a:cs typeface="S-Core Dream 4 Regular" pitchFamily="34" charset="-120"/>
+                <a:latin typeface="Pretendard" pitchFamily="34" charset="0"/>
+                <a:ea typeface="Pretendard" pitchFamily="34" charset="-127"/>
+                <a:cs typeface="Pretendard" pitchFamily="34" charset="-120"/>
               </a:rPr>
               <a:t>reports\ (보고서) — 내 PC에만 저장</a:t>
             </a:r>
@@ -19242,9 +19242,9 @@
                 <a:solidFill>
                   <a:srgbClr val="1F3B5C"/>
                 </a:solidFill>
-                <a:latin typeface="S-Core Dream 5 Medium" pitchFamily="34" charset="0"/>
-                <a:ea typeface="S-Core Dream 5 Medium" pitchFamily="34" charset="-127"/>
-                <a:cs typeface="S-Core Dream 5 Medium" pitchFamily="34" charset="-120"/>
+                <a:latin typeface="Pretendard SemiBold" pitchFamily="34" charset="0"/>
+                <a:ea typeface="Pretendard SemiBold" pitchFamily="34" charset="-127"/>
+                <a:cs typeface="Pretendard SemiBold" pitchFamily="34" charset="-120"/>
               </a:rPr>
               <a:t>업데이트</a:t>
             </a:r>
@@ -19285,9 +19285,9 @@
                 <a:solidFill>
                   <a:srgbClr val="1E2A36"/>
                 </a:solidFill>
-                <a:latin typeface="S-Core Dream 4 Regular" pitchFamily="34" charset="0"/>
-                <a:ea typeface="S-Core Dream 4 Regular" pitchFamily="34" charset="-127"/>
-                <a:cs typeface="S-Core Dream 4 Regular" pitchFamily="34" charset="-120"/>
+                <a:latin typeface="Pretendard" pitchFamily="34" charset="0"/>
+                <a:ea typeface="Pretendard" pitchFamily="34" charset="-127"/>
+                <a:cs typeface="Pretendard" pitchFamily="34" charset="-120"/>
               </a:rPr>
               <a:t>켤 때 새 버전을 알려 줌 → [예]</a:t>
             </a:r>
@@ -19306,9 +19306,9 @@
                 <a:solidFill>
                   <a:srgbClr val="1E2A36"/>
                 </a:solidFill>
-                <a:latin typeface="S-Core Dream 4 Regular" pitchFamily="34" charset="0"/>
-                <a:ea typeface="S-Core Dream 4 Regular" pitchFamily="34" charset="-127"/>
-                <a:cs typeface="S-Core Dream 4 Regular" pitchFamily="34" charset="-120"/>
+                <a:latin typeface="Pretendard" pitchFamily="34" charset="0"/>
+                <a:ea typeface="Pretendard" pitchFamily="34" charset="-127"/>
+                <a:cs typeface="Pretendard" pitchFamily="34" charset="-120"/>
               </a:rPr>
               <a:t>GitHub이 막힌 PC: 안내 창이 뜸</a:t>
             </a:r>
@@ -19327,9 +19327,9 @@
                 <a:solidFill>
                   <a:srgbClr val="1E2A36"/>
                 </a:solidFill>
-                <a:latin typeface="S-Core Dream 4 Regular" pitchFamily="34" charset="0"/>
-                <a:ea typeface="S-Core Dream 4 Regular" pitchFamily="34" charset="-127"/>
-                <a:cs typeface="S-Core Dream 4 Regular" pitchFamily="34" charset="-120"/>
+                <a:latin typeface="Pretendard" pitchFamily="34" charset="0"/>
+                <a:ea typeface="Pretendard" pitchFamily="34" charset="-127"/>
+                <a:cs typeface="Pretendard" pitchFamily="34" charset="-120"/>
               </a:rPr>
               <a:t>→ 공문 경로에서 새 파일로 바꾸기</a:t>
             </a:r>
@@ -19391,9 +19391,9 @@
                 <a:solidFill>
                   <a:srgbClr val="667385"/>
                 </a:solidFill>
-                <a:latin typeface="S-Core Dream 4 Regular" pitchFamily="34" charset="0"/>
-                <a:ea typeface="S-Core Dream 4 Regular" pitchFamily="34" charset="-127"/>
-                <a:cs typeface="S-Core Dream 4 Regular" pitchFamily="34" charset="-120"/>
+                <a:latin typeface="Pretendard" pitchFamily="34" charset="0"/>
+                <a:ea typeface="Pretendard" pitchFamily="34" charset="-127"/>
+                <a:cs typeface="Pretendard" pitchFamily="34" charset="-120"/>
               </a:rPr>
               <a:t>[화면 넣을 자리]</a:t>
             </a:r>
@@ -19408,9 +19408,9 @@
                 <a:solidFill>
                   <a:srgbClr val="667385"/>
                 </a:solidFill>
-                <a:latin typeface="S-Core Dream 4 Regular" pitchFamily="34" charset="0"/>
-                <a:ea typeface="S-Core Dream 4 Regular" pitchFamily="34" charset="-127"/>
-                <a:cs typeface="S-Core Dream 4 Regular" pitchFamily="34" charset="-120"/>
+                <a:latin typeface="Pretendard" pitchFamily="34" charset="0"/>
+                <a:ea typeface="Pretendard" pitchFamily="34" charset="-127"/>
+                <a:cs typeface="Pretendard" pitchFamily="34" charset="-120"/>
               </a:rPr>
               <a:t>윈도우 'PC 보호' 경고 창</a:t>
             </a:r>
@@ -19425,9 +19425,9 @@
                 <a:solidFill>
                   <a:srgbClr val="667385"/>
                 </a:solidFill>
-                <a:latin typeface="S-Core Dream 4 Regular" pitchFamily="34" charset="0"/>
-                <a:ea typeface="S-Core Dream 4 Regular" pitchFamily="34" charset="-127"/>
-                <a:cs typeface="S-Core Dream 4 Regular" pitchFamily="34" charset="-120"/>
+                <a:latin typeface="Pretendard" pitchFamily="34" charset="0"/>
+                <a:ea typeface="Pretendard" pitchFamily="34" charset="-127"/>
+                <a:cs typeface="Pretendard" pitchFamily="34" charset="-120"/>
               </a:rPr>
               <a:t>(추가 정보 → 실행)</a:t>
             </a:r>
@@ -19448,9 +19448,9 @@
                 <a:solidFill>
                   <a:srgbClr val="667385"/>
                 </a:solidFill>
-                <a:latin typeface="S-Core Dream 4 Regular" pitchFamily="34" charset="0"/>
-                <a:ea typeface="S-Core Dream 4 Regular" pitchFamily="34" charset="-127"/>
-                <a:cs typeface="S-Core Dream 4 Regular" pitchFamily="34" charset="-120"/>
+                <a:latin typeface="Pretendard" pitchFamily="34" charset="0"/>
+                <a:ea typeface="Pretendard" pitchFamily="34" charset="-127"/>
+                <a:cs typeface="Pretendard" pitchFamily="34" charset="-120"/>
               </a:rPr>
               <a:t>담당자 PC에서 처음 실행할 때 찍어 넣기</a:t>
             </a:r>
@@ -19465,9 +19465,9 @@
                 <a:solidFill>
                   <a:srgbClr val="667385"/>
                 </a:solidFill>
-                <a:latin typeface="S-Core Dream 4 Regular" pitchFamily="34" charset="0"/>
-                <a:ea typeface="S-Core Dream 4 Regular" pitchFamily="34" charset="-127"/>
-                <a:cs typeface="S-Core Dream 4 Regular" pitchFamily="34" charset="-120"/>
+                <a:latin typeface="Pretendard" pitchFamily="34" charset="0"/>
+                <a:ea typeface="Pretendard" pitchFamily="34" charset="-127"/>
+                <a:cs typeface="Pretendard" pitchFamily="34" charset="-120"/>
               </a:rPr>
               <a:t>권장 크기 4.3 × 5.0in</a:t>
             </a:r>
@@ -19552,13 +19552,13 @@
               <a:buNone/>
             </a:pPr>
             <a:r>
-              <a:rPr lang="ko-KR" altLang="en-US" sz="2000" dirty="0">
+              <a:rPr lang="ko-KR" altLang="en-US" sz="2000" b="1" dirty="0">
                 <a:solidFill>
                   <a:srgbClr val="FFFFFF"/>
                 </a:solidFill>
-                <a:latin typeface="S-Core Dream 7 ExtraBold" pitchFamily="34" charset="0"/>
-                <a:ea typeface="S-Core Dream 7 ExtraBold" pitchFamily="34" charset="-127"/>
-                <a:cs typeface="S-Core Dream 7 ExtraBold" pitchFamily="34" charset="-120"/>
+                <a:latin typeface="Pretendard" pitchFamily="34" charset="0"/>
+                <a:ea typeface="Pretendard" pitchFamily="34" charset="-127"/>
+                <a:cs typeface="Pretendard" pitchFamily="34" charset="-120"/>
               </a:rPr>
               <a:t>01</a:t>
             </a:r>
@@ -19595,9 +19595,9 @@
                 <a:solidFill>
                   <a:srgbClr val="2E7D8C"/>
                 </a:solidFill>
-                <a:latin typeface="S-Core Dream 5 Medium" pitchFamily="34" charset="0"/>
-                <a:ea typeface="S-Core Dream 5 Medium" pitchFamily="34" charset="-127"/>
-                <a:cs typeface="S-Core Dream 5 Medium" pitchFamily="34" charset="-120"/>
+                <a:latin typeface="Pretendard SemiBold" pitchFamily="34" charset="0"/>
+                <a:ea typeface="Pretendard SemiBold" pitchFamily="34" charset="-127"/>
+                <a:cs typeface="Pretendard SemiBold" pitchFamily="34" charset="-120"/>
               </a:rPr>
               <a:t>시작하기 · 화면 구성</a:t>
             </a:r>
@@ -19630,13 +19630,13 @@
               <a:buNone/>
             </a:pPr>
             <a:r>
-              <a:rPr lang="ko-KR" altLang="en-US" sz="2600" dirty="0">
+              <a:rPr lang="ko-KR" altLang="en-US" sz="2600" b="1" dirty="0">
                 <a:solidFill>
                   <a:srgbClr val="1F3B5C"/>
                 </a:solidFill>
-                <a:latin typeface="S-Core Dream 7 ExtraBold" pitchFamily="34" charset="0"/>
-                <a:ea typeface="S-Core Dream 7 ExtraBold" pitchFamily="34" charset="-127"/>
-                <a:cs typeface="S-Core Dream 7 ExtraBold" pitchFamily="34" charset="-120"/>
+                <a:latin typeface="Pretendard" pitchFamily="34" charset="0"/>
+                <a:ea typeface="Pretendard" pitchFamily="34" charset="-127"/>
+                <a:cs typeface="Pretendard" pitchFamily="34" charset="-120"/>
               </a:rPr>
               <a:t>화면 구성: 탭 5개와 상태줄</a:t>
             </a:r>
@@ -19673,9 +19673,9 @@
                 <a:solidFill>
                   <a:srgbClr val="667385"/>
                 </a:solidFill>
-                <a:latin typeface="S-Core Dream 4 Regular" pitchFamily="34" charset="0"/>
-                <a:ea typeface="S-Core Dream 4 Regular" pitchFamily="34" charset="-127"/>
-                <a:cs typeface="S-Core Dream 4 Regular" pitchFamily="34" charset="-120"/>
+                <a:latin typeface="Pretendard" pitchFamily="34" charset="0"/>
+                <a:ea typeface="Pretendard" pitchFamily="34" charset="-127"/>
+                <a:cs typeface="Pretendard" pitchFamily="34" charset="-120"/>
               </a:rPr>
               <a:t>위쪽 탭으로 일을 고르고, 아래 상태줄에서 진행 상황을 봅니다</a:t>
             </a:r>
@@ -19776,13 +19776,13 @@
               <a:buNone/>
             </a:pPr>
             <a:r>
-              <a:rPr lang="ko-KR" altLang="en-US" sz="1700" dirty="0">
+              <a:rPr lang="ko-KR" altLang="en-US" sz="1700" b="1" dirty="0">
                 <a:solidFill>
                   <a:srgbClr val="E8A33D"/>
                 </a:solidFill>
-                <a:latin typeface="S-Core Dream 7 ExtraBold" pitchFamily="34" charset="0"/>
-                <a:ea typeface="S-Core Dream 7 ExtraBold" pitchFamily="34" charset="-127"/>
-                <a:cs typeface="S-Core Dream 7 ExtraBold" pitchFamily="34" charset="-120"/>
+                <a:latin typeface="Pretendard" pitchFamily="34" charset="0"/>
+                <a:ea typeface="Pretendard" pitchFamily="34" charset="-127"/>
+                <a:cs typeface="Pretendard" pitchFamily="34" charset="-120"/>
               </a:rPr>
               <a:t>①</a:t>
             </a:r>
@@ -19837,13 +19837,13 @@
               <a:buNone/>
             </a:pPr>
             <a:r>
-              <a:rPr lang="ko-KR" altLang="en-US" sz="1700" dirty="0">
+              <a:rPr lang="ko-KR" altLang="en-US" sz="1700" b="1" dirty="0">
                 <a:solidFill>
                   <a:srgbClr val="E8A33D"/>
                 </a:solidFill>
-                <a:latin typeface="S-Core Dream 7 ExtraBold" pitchFamily="34" charset="0"/>
-                <a:ea typeface="S-Core Dream 7 ExtraBold" pitchFamily="34" charset="-127"/>
-                <a:cs typeface="S-Core Dream 7 ExtraBold" pitchFamily="34" charset="-120"/>
+                <a:latin typeface="Pretendard" pitchFamily="34" charset="0"/>
+                <a:ea typeface="Pretendard" pitchFamily="34" charset="-127"/>
+                <a:cs typeface="Pretendard" pitchFamily="34" charset="-120"/>
               </a:rPr>
               <a:t>②</a:t>
             </a:r>
@@ -19898,13 +19898,13 @@
               <a:buNone/>
             </a:pPr>
             <a:r>
-              <a:rPr lang="ko-KR" altLang="en-US" sz="1700" dirty="0">
+              <a:rPr lang="ko-KR" altLang="en-US" sz="1700" b="1" dirty="0">
                 <a:solidFill>
                   <a:srgbClr val="E8A33D"/>
                 </a:solidFill>
-                <a:latin typeface="S-Core Dream 7 ExtraBold" pitchFamily="34" charset="0"/>
-                <a:ea typeface="S-Core Dream 7 ExtraBold" pitchFamily="34" charset="-127"/>
-                <a:cs typeface="S-Core Dream 7 ExtraBold" pitchFamily="34" charset="-120"/>
+                <a:latin typeface="Pretendard" pitchFamily="34" charset="0"/>
+                <a:ea typeface="Pretendard" pitchFamily="34" charset="-127"/>
+                <a:cs typeface="Pretendard" pitchFamily="34" charset="-120"/>
               </a:rPr>
               <a:t>③</a:t>
             </a:r>
@@ -19959,13 +19959,13 @@
               <a:buNone/>
             </a:pPr>
             <a:r>
-              <a:rPr lang="ko-KR" altLang="en-US" sz="1700" dirty="0">
+              <a:rPr lang="ko-KR" altLang="en-US" sz="1700" b="1" dirty="0">
                 <a:solidFill>
                   <a:srgbClr val="E8A33D"/>
                 </a:solidFill>
-                <a:latin typeface="S-Core Dream 7 ExtraBold" pitchFamily="34" charset="0"/>
-                <a:ea typeface="S-Core Dream 7 ExtraBold" pitchFamily="34" charset="-127"/>
-                <a:cs typeface="S-Core Dream 7 ExtraBold" pitchFamily="34" charset="-120"/>
+                <a:latin typeface="Pretendard" pitchFamily="34" charset="0"/>
+                <a:ea typeface="Pretendard" pitchFamily="34" charset="-127"/>
+                <a:cs typeface="Pretendard" pitchFamily="34" charset="-120"/>
               </a:rPr>
               <a:t>④</a:t>
             </a:r>
@@ -20020,13 +20020,13 @@
               <a:buNone/>
             </a:pPr>
             <a:r>
-              <a:rPr lang="ko-KR" altLang="en-US" sz="1700" dirty="0">
+              <a:rPr lang="ko-KR" altLang="en-US" sz="1700" b="1" dirty="0">
                 <a:solidFill>
                   <a:srgbClr val="E8A33D"/>
                 </a:solidFill>
-                <a:latin typeface="S-Core Dream 7 ExtraBold" pitchFamily="34" charset="0"/>
-                <a:ea typeface="S-Core Dream 7 ExtraBold" pitchFamily="34" charset="-127"/>
-                <a:cs typeface="S-Core Dream 7 ExtraBold" pitchFamily="34" charset="-120"/>
+                <a:latin typeface="Pretendard" pitchFamily="34" charset="0"/>
+                <a:ea typeface="Pretendard" pitchFamily="34" charset="-127"/>
+                <a:cs typeface="Pretendard" pitchFamily="34" charset="-120"/>
               </a:rPr>
               <a:t>⑤</a:t>
             </a:r>
@@ -20063,9 +20063,9 @@
                 <a:solidFill>
                   <a:srgbClr val="1F3B5C"/>
                 </a:solidFill>
-                <a:latin typeface="S-Core Dream 5 Medium" pitchFamily="34" charset="0"/>
-                <a:ea typeface="S-Core Dream 5 Medium" pitchFamily="34" charset="-127"/>
-                <a:cs typeface="S-Core Dream 5 Medium" pitchFamily="34" charset="-120"/>
+                <a:latin typeface="Pretendard SemiBold" pitchFamily="34" charset="0"/>
+                <a:ea typeface="Pretendard SemiBold" pitchFamily="34" charset="-127"/>
+                <a:cs typeface="Pretendard SemiBold" pitchFamily="34" charset="-120"/>
               </a:rPr>
               <a:t>① 탭</a:t>
             </a:r>
@@ -20083,9 +20083,9 @@
                 <a:solidFill>
                   <a:srgbClr val="1E2A36"/>
                 </a:solidFill>
-                <a:latin typeface="S-Core Dream 4 Regular" pitchFamily="34" charset="0"/>
-                <a:ea typeface="S-Core Dream 4 Regular" pitchFamily="34" charset="-127"/>
-                <a:cs typeface="S-Core Dream 4 Regular" pitchFamily="34" charset="-120"/>
+                <a:latin typeface="Pretendard" pitchFamily="34" charset="0"/>
+                <a:ea typeface="Pretendard" pitchFamily="34" charset="-127"/>
+                <a:cs typeface="Pretendard" pitchFamily="34" charset="-120"/>
               </a:rPr>
               <a:t>베이직(매일 보고) · 프로(AI 선별) · 보고 기록 · 선정 규칙 · 설정</a:t>
             </a:r>
@@ -20103,9 +20103,9 @@
                 <a:solidFill>
                   <a:srgbClr val="1F3B5C"/>
                 </a:solidFill>
-                <a:latin typeface="S-Core Dream 5 Medium" pitchFamily="34" charset="0"/>
-                <a:ea typeface="S-Core Dream 5 Medium" pitchFamily="34" charset="-127"/>
-                <a:cs typeface="S-Core Dream 5 Medium" pitchFamily="34" charset="-120"/>
+                <a:latin typeface="Pretendard SemiBold" pitchFamily="34" charset="0"/>
+                <a:ea typeface="Pretendard SemiBold" pitchFamily="34" charset="-127"/>
+                <a:cs typeface="Pretendard SemiBold" pitchFamily="34" charset="-120"/>
               </a:rPr>
               <a:t>② 업데이트 확인</a:t>
             </a:r>
@@ -20123,9 +20123,9 @@
                 <a:solidFill>
                   <a:srgbClr val="1E2A36"/>
                 </a:solidFill>
-                <a:latin typeface="S-Core Dream 4 Regular" pitchFamily="34" charset="0"/>
-                <a:ea typeface="S-Core Dream 4 Regular" pitchFamily="34" charset="-127"/>
-                <a:cs typeface="S-Core Dream 4 Regular" pitchFamily="34" charset="-120"/>
+                <a:latin typeface="Pretendard" pitchFamily="34" charset="0"/>
+                <a:ea typeface="Pretendard" pitchFamily="34" charset="-127"/>
+                <a:cs typeface="Pretendard" pitchFamily="34" charset="-120"/>
               </a:rPr>
               <a:t>새 버전이 있으면 받아서 스스로 바꿉니다</a:t>
             </a:r>
@@ -20143,9 +20143,9 @@
                 <a:solidFill>
                   <a:srgbClr val="1F3B5C"/>
                 </a:solidFill>
-                <a:latin typeface="S-Core Dream 5 Medium" pitchFamily="34" charset="0"/>
-                <a:ea typeface="S-Core Dream 5 Medium" pitchFamily="34" charset="-127"/>
-                <a:cs typeface="S-Core Dream 5 Medium" pitchFamily="34" charset="-120"/>
+                <a:latin typeface="Pretendard SemiBold" pitchFamily="34" charset="0"/>
+                <a:ea typeface="Pretendard SemiBold" pitchFamily="34" charset="-127"/>
+                <a:cs typeface="Pretendard SemiBold" pitchFamily="34" charset="-120"/>
               </a:rPr>
               <a:t>③ 단계 표시</a:t>
             </a:r>
@@ -20163,9 +20163,9 @@
                 <a:solidFill>
                   <a:srgbClr val="1E2A36"/>
                 </a:solidFill>
-                <a:latin typeface="S-Core Dream 4 Regular" pitchFamily="34" charset="0"/>
-                <a:ea typeface="S-Core Dream 4 Regular" pitchFamily="34" charset="-127"/>
-                <a:cs typeface="S-Core Dream 4 Regular" pitchFamily="34" charset="-120"/>
+                <a:latin typeface="Pretendard" pitchFamily="34" charset="0"/>
+                <a:ea typeface="Pretendard" pitchFamily="34" charset="-127"/>
+                <a:cs typeface="Pretendard" pitchFamily="34" charset="-120"/>
               </a:rPr>
               <a:t>베이직의 ①~④ 중 지금 할 일이 진하게</a:t>
             </a:r>
@@ -20183,9 +20183,9 @@
                 <a:solidFill>
                   <a:srgbClr val="1F3B5C"/>
                 </a:solidFill>
-                <a:latin typeface="S-Core Dream 5 Medium" pitchFamily="34" charset="0"/>
-                <a:ea typeface="S-Core Dream 5 Medium" pitchFamily="34" charset="-127"/>
-                <a:cs typeface="S-Core Dream 5 Medium" pitchFamily="34" charset="-120"/>
+                <a:latin typeface="Pretendard SemiBold" pitchFamily="34" charset="0"/>
+                <a:ea typeface="Pretendard SemiBold" pitchFamily="34" charset="-127"/>
+                <a:cs typeface="Pretendard SemiBold" pitchFamily="34" charset="-120"/>
               </a:rPr>
               <a:t>④ 조회</a:t>
             </a:r>
@@ -20203,9 +20203,9 @@
                 <a:solidFill>
                   <a:srgbClr val="1E2A36"/>
                 </a:solidFill>
-                <a:latin typeface="S-Core Dream 4 Regular" pitchFamily="34" charset="0"/>
-                <a:ea typeface="S-Core Dream 4 Regular" pitchFamily="34" charset="-127"/>
-                <a:cs typeface="S-Core Dream 4 Regular" pitchFamily="34" charset="-120"/>
+                <a:latin typeface="Pretendard" pitchFamily="34" charset="0"/>
+                <a:ea typeface="Pretendard" pitchFamily="34" charset="-127"/>
+                <a:cs typeface="Pretendard" pitchFamily="34" charset="-120"/>
               </a:rPr>
               <a:t>다음에 누를 버튼 하나만 진한 색</a:t>
             </a:r>
@@ -20223,9 +20223,9 @@
                 <a:solidFill>
                   <a:srgbClr val="1F3B5C"/>
                 </a:solidFill>
-                <a:latin typeface="S-Core Dream 5 Medium" pitchFamily="34" charset="0"/>
-                <a:ea typeface="S-Core Dream 5 Medium" pitchFamily="34" charset="-127"/>
-                <a:cs typeface="S-Core Dream 5 Medium" pitchFamily="34" charset="-120"/>
+                <a:latin typeface="Pretendard SemiBold" pitchFamily="34" charset="0"/>
+                <a:ea typeface="Pretendard SemiBold" pitchFamily="34" charset="-127"/>
+                <a:cs typeface="Pretendard SemiBold" pitchFamily="34" charset="-120"/>
               </a:rPr>
               <a:t>⑤ 상태줄</a:t>
             </a:r>
@@ -20243,9 +20243,9 @@
                 <a:solidFill>
                   <a:srgbClr val="1E2A36"/>
                 </a:solidFill>
-                <a:latin typeface="S-Core Dream 4 Regular" pitchFamily="34" charset="0"/>
-                <a:ea typeface="S-Core Dream 4 Regular" pitchFamily="34" charset="-127"/>
-                <a:cs typeface="S-Core Dream 4 Regular" pitchFamily="34" charset="-120"/>
+                <a:latin typeface="Pretendard" pitchFamily="34" charset="0"/>
+                <a:ea typeface="Pretendard" pitchFamily="34" charset="-127"/>
+                <a:cs typeface="Pretendard" pitchFamily="34" charset="-120"/>
               </a:rPr>
               <a:t>진행 중·완료·오류(빨강)를 한 줄로 알려 줌</a:t>
             </a:r>
@@ -20330,13 +20330,13 @@
               <a:buNone/>
             </a:pPr>
             <a:r>
-              <a:rPr lang="ko-KR" altLang="en-US" sz="2000" dirty="0">
+              <a:rPr lang="ko-KR" altLang="en-US" sz="2000" b="1" dirty="0">
                 <a:solidFill>
                   <a:srgbClr val="FFFFFF"/>
                 </a:solidFill>
-                <a:latin typeface="S-Core Dream 7 ExtraBold" pitchFamily="34" charset="0"/>
-                <a:ea typeface="S-Core Dream 7 ExtraBold" pitchFamily="34" charset="-127"/>
-                <a:cs typeface="S-Core Dream 7 ExtraBold" pitchFamily="34" charset="-120"/>
+                <a:latin typeface="Pretendard" pitchFamily="34" charset="0"/>
+                <a:ea typeface="Pretendard" pitchFamily="34" charset="-127"/>
+                <a:cs typeface="Pretendard" pitchFamily="34" charset="-120"/>
               </a:rPr>
               <a:t>02</a:t>
             </a:r>
@@ -20373,9 +20373,9 @@
                 <a:solidFill>
                   <a:srgbClr val="2E7D8C"/>
                 </a:solidFill>
-                <a:latin typeface="S-Core Dream 5 Medium" pitchFamily="34" charset="0"/>
-                <a:ea typeface="S-Core Dream 5 Medium" pitchFamily="34" charset="-127"/>
-                <a:cs typeface="S-Core Dream 5 Medium" pitchFamily="34" charset="-120"/>
+                <a:latin typeface="Pretendard SemiBold" pitchFamily="34" charset="0"/>
+                <a:ea typeface="Pretendard SemiBold" pitchFamily="34" charset="-127"/>
+                <a:cs typeface="Pretendard SemiBold" pitchFamily="34" charset="-120"/>
               </a:rPr>
               <a:t>베이직 · ① 조회</a:t>
             </a:r>
@@ -20408,13 +20408,13 @@
               <a:buNone/>
             </a:pPr>
             <a:r>
-              <a:rPr lang="ko-KR" altLang="en-US" sz="2600" dirty="0">
+              <a:rPr lang="ko-KR" altLang="en-US" sz="2600" b="1" dirty="0">
                 <a:solidFill>
                   <a:srgbClr val="1F3B5C"/>
                 </a:solidFill>
-                <a:latin typeface="S-Core Dream 7 ExtraBold" pitchFamily="34" charset="0"/>
-                <a:ea typeface="S-Core Dream 7 ExtraBold" pitchFamily="34" charset="-127"/>
-                <a:cs typeface="S-Core Dream 7 ExtraBold" pitchFamily="34" charset="-120"/>
+                <a:latin typeface="Pretendard" pitchFamily="34" charset="0"/>
+                <a:ea typeface="Pretendard" pitchFamily="34" charset="-127"/>
+                <a:cs typeface="Pretendard" pitchFamily="34" charset="-120"/>
               </a:rPr>
               <a:t>① 조회: 기간은 자동, [조회]만 누르기</a:t>
             </a:r>
@@ -20451,9 +20451,9 @@
                 <a:solidFill>
                   <a:srgbClr val="667385"/>
                 </a:solidFill>
-                <a:latin typeface="S-Core Dream 4 Regular" pitchFamily="34" charset="0"/>
-                <a:ea typeface="S-Core Dream 4 Regular" pitchFamily="34" charset="-127"/>
-                <a:cs typeface="S-Core Dream 4 Regular" pitchFamily="34" charset="-120"/>
+                <a:latin typeface="Pretendard" pitchFamily="34" charset="0"/>
+                <a:ea typeface="Pretendard" pitchFamily="34" charset="-127"/>
+                <a:cs typeface="Pretendard" pitchFamily="34" charset="-120"/>
               </a:rPr>
               <a:t>기간은 직전 영업일 오전 9시부터 지금까지로 자동 설정됩니다(공휴일 반영)</a:t>
             </a:r>
@@ -20554,13 +20554,13 @@
               <a:buNone/>
             </a:pPr>
             <a:r>
-              <a:rPr lang="ko-KR" altLang="en-US" sz="1700" dirty="0">
+              <a:rPr lang="ko-KR" altLang="en-US" sz="1700" b="1" dirty="0">
                 <a:solidFill>
                   <a:srgbClr val="E8A33D"/>
                 </a:solidFill>
-                <a:latin typeface="S-Core Dream 7 ExtraBold" pitchFamily="34" charset="0"/>
-                <a:ea typeface="S-Core Dream 7 ExtraBold" pitchFamily="34" charset="-127"/>
-                <a:cs typeface="S-Core Dream 7 ExtraBold" pitchFamily="34" charset="-120"/>
+                <a:latin typeface="Pretendard" pitchFamily="34" charset="0"/>
+                <a:ea typeface="Pretendard" pitchFamily="34" charset="-127"/>
+                <a:cs typeface="Pretendard" pitchFamily="34" charset="-120"/>
               </a:rPr>
               <a:t>①</a:t>
             </a:r>
@@ -20615,13 +20615,13 @@
               <a:buNone/>
             </a:pPr>
             <a:r>
-              <a:rPr lang="ko-KR" altLang="en-US" sz="1700" dirty="0">
+              <a:rPr lang="ko-KR" altLang="en-US" sz="1700" b="1" dirty="0">
                 <a:solidFill>
                   <a:srgbClr val="E8A33D"/>
                 </a:solidFill>
-                <a:latin typeface="S-Core Dream 7 ExtraBold" pitchFamily="34" charset="0"/>
-                <a:ea typeface="S-Core Dream 7 ExtraBold" pitchFamily="34" charset="-127"/>
-                <a:cs typeface="S-Core Dream 7 ExtraBold" pitchFamily="34" charset="-120"/>
+                <a:latin typeface="Pretendard" pitchFamily="34" charset="0"/>
+                <a:ea typeface="Pretendard" pitchFamily="34" charset="-127"/>
+                <a:cs typeface="Pretendard" pitchFamily="34" charset="-120"/>
               </a:rPr>
               <a:t>②</a:t>
             </a:r>
@@ -20658,9 +20658,9 @@
                 <a:solidFill>
                   <a:srgbClr val="1F3B5C"/>
                 </a:solidFill>
-                <a:latin typeface="S-Core Dream 5 Medium" pitchFamily="34" charset="0"/>
-                <a:ea typeface="S-Core Dream 5 Medium" pitchFamily="34" charset="-127"/>
-                <a:cs typeface="S-Core Dream 5 Medium" pitchFamily="34" charset="-120"/>
+                <a:latin typeface="Pretendard SemiBold" pitchFamily="34" charset="0"/>
+                <a:ea typeface="Pretendard SemiBold" pitchFamily="34" charset="-127"/>
+                <a:cs typeface="Pretendard SemiBold" pitchFamily="34" charset="-120"/>
               </a:rPr>
               <a:t>기간</a:t>
             </a:r>
@@ -20678,9 +20678,9 @@
                 <a:solidFill>
                   <a:srgbClr val="1E2A36"/>
                 </a:solidFill>
-                <a:latin typeface="S-Core Dream 4 Regular" pitchFamily="34" charset="0"/>
-                <a:ea typeface="S-Core Dream 4 Regular" pitchFamily="34" charset="-127"/>
-                <a:cs typeface="S-Core Dream 4 Regular" pitchFamily="34" charset="-120"/>
+                <a:latin typeface="Pretendard" pitchFamily="34" charset="0"/>
+                <a:ea typeface="Pretendard" pitchFamily="34" charset="-127"/>
+                <a:cs typeface="Pretendard" pitchFamily="34" charset="-120"/>
               </a:rPr>
               <a:t>[자동]이 기본. 필요하면 [오늘]·[최근 3일]이나 날짜를 직접 고칩니다</a:t>
             </a:r>
@@ -20698,9 +20698,9 @@
                 <a:solidFill>
                   <a:srgbClr val="1F3B5C"/>
                 </a:solidFill>
-                <a:latin typeface="S-Core Dream 5 Medium" pitchFamily="34" charset="0"/>
-                <a:ea typeface="S-Core Dream 5 Medium" pitchFamily="34" charset="-127"/>
-                <a:cs typeface="S-Core Dream 5 Medium" pitchFamily="34" charset="-120"/>
+                <a:latin typeface="Pretendard SemiBold" pitchFamily="34" charset="0"/>
+                <a:ea typeface="Pretendard SemiBold" pitchFamily="34" charset="-127"/>
+                <a:cs typeface="Pretendard SemiBold" pitchFamily="34" charset="-120"/>
               </a:rPr>
               <a:t>[① 조회]</a:t>
             </a:r>
@@ -20718,9 +20718,9 @@
                 <a:solidFill>
                   <a:srgbClr val="1E2A36"/>
                 </a:solidFill>
-                <a:latin typeface="S-Core Dream 4 Regular" pitchFamily="34" charset="0"/>
-                <a:ea typeface="S-Core Dream 4 Regular" pitchFamily="34" charset="-127"/>
-                <a:cs typeface="S-Core Dream 4 Regular" pitchFamily="34" charset="-120"/>
+                <a:latin typeface="Pretendard" pitchFamily="34" charset="0"/>
+                <a:ea typeface="Pretendard" pitchFamily="34" charset="-127"/>
+                <a:cs typeface="Pretendard" pitchFamily="34" charset="-120"/>
               </a:rPr>
               <a:t>구글 뉴스와 전문지에서 키워드별로 기사를 모읍니다(1~2분)</a:t>
             </a:r>
@@ -20738,9 +20738,9 @@
                 <a:solidFill>
                   <a:srgbClr val="1F3B5C"/>
                 </a:solidFill>
-                <a:latin typeface="S-Core Dream 5 Medium" pitchFamily="34" charset="0"/>
-                <a:ea typeface="S-Core Dream 5 Medium" pitchFamily="34" charset="-127"/>
-                <a:cs typeface="S-Core Dream 5 Medium" pitchFamily="34" charset="-120"/>
+                <a:latin typeface="Pretendard SemiBold" pitchFamily="34" charset="0"/>
+                <a:ea typeface="Pretendard SemiBold" pitchFamily="34" charset="-127"/>
+                <a:cs typeface="Pretendard SemiBold" pitchFamily="34" charset="-120"/>
               </a:rPr>
               <a:t>① ■ 정지</a:t>
             </a:r>
@@ -20758,9 +20758,9 @@
                 <a:solidFill>
                   <a:srgbClr val="1E2A36"/>
                 </a:solidFill>
-                <a:latin typeface="S-Core Dream 4 Regular" pitchFamily="34" charset="0"/>
-                <a:ea typeface="S-Core Dream 4 Regular" pitchFamily="34" charset="-127"/>
-                <a:cs typeface="S-Core Dream 4 Regular" pitchFamily="34" charset="-120"/>
+                <a:latin typeface="Pretendard" pitchFamily="34" charset="0"/>
+                <a:ea typeface="Pretendard" pitchFamily="34" charset="-127"/>
+                <a:cs typeface="Pretendard" pitchFamily="34" charset="-120"/>
               </a:rPr>
               <a:t>설정을 빠뜨렸다면 누르세요. 지금 묻는 키워드 하나가 끝나면 멈춥니다</a:t>
             </a:r>
@@ -20778,9 +20778,9 @@
                 <a:solidFill>
                   <a:srgbClr val="1F3B5C"/>
                 </a:solidFill>
-                <a:latin typeface="S-Core Dream 5 Medium" pitchFamily="34" charset="0"/>
-                <a:ea typeface="S-Core Dream 5 Medium" pitchFamily="34" charset="-127"/>
-                <a:cs typeface="S-Core Dream 5 Medium" pitchFamily="34" charset="-120"/>
+                <a:latin typeface="Pretendard SemiBold" pitchFamily="34" charset="0"/>
+                <a:ea typeface="Pretendard SemiBold" pitchFamily="34" charset="-127"/>
+                <a:cs typeface="Pretendard SemiBold" pitchFamily="34" charset="-120"/>
               </a:rPr>
               <a:t>② 상태줄</a:t>
             </a:r>
@@ -20798,9 +20798,9 @@
                 <a:solidFill>
                   <a:srgbClr val="1E2A36"/>
                 </a:solidFill>
-                <a:latin typeface="S-Core Dream 4 Regular" pitchFamily="34" charset="0"/>
-                <a:ea typeface="S-Core Dream 4 Regular" pitchFamily="34" charset="-127"/>
-                <a:cs typeface="S-Core Dream 4 Regular" pitchFamily="34" charset="-120"/>
+                <a:latin typeface="Pretendard" pitchFamily="34" charset="0"/>
+                <a:ea typeface="Pretendard" pitchFamily="34" charset="-127"/>
+                <a:cs typeface="Pretendard" pitchFamily="34" charset="-120"/>
               </a:rPr>
               <a:t>몇 번째 키워드인지, 지금까지 몇 건 모았는지 보여 줍니다</a:t>
             </a:r>
@@ -20885,13 +20885,13 @@
               <a:buNone/>
             </a:pPr>
             <a:r>
-              <a:rPr lang="ko-KR" altLang="en-US" sz="2000" dirty="0">
+              <a:rPr lang="ko-KR" altLang="en-US" sz="2000" b="1" dirty="0">
                 <a:solidFill>
                   <a:srgbClr val="FFFFFF"/>
                 </a:solidFill>
-                <a:latin typeface="S-Core Dream 7 ExtraBold" pitchFamily="34" charset="0"/>
-                <a:ea typeface="S-Core Dream 7 ExtraBold" pitchFamily="34" charset="-127"/>
-                <a:cs typeface="S-Core Dream 7 ExtraBold" pitchFamily="34" charset="-120"/>
+                <a:latin typeface="Pretendard" pitchFamily="34" charset="0"/>
+                <a:ea typeface="Pretendard" pitchFamily="34" charset="-127"/>
+                <a:cs typeface="Pretendard" pitchFamily="34" charset="-120"/>
               </a:rPr>
               <a:t>02</a:t>
             </a:r>
@@ -20928,9 +20928,9 @@
                 <a:solidFill>
                   <a:srgbClr val="2E7D8C"/>
                 </a:solidFill>
-                <a:latin typeface="S-Core Dream 5 Medium" pitchFamily="34" charset="0"/>
-                <a:ea typeface="S-Core Dream 5 Medium" pitchFamily="34" charset="-127"/>
-                <a:cs typeface="S-Core Dream 5 Medium" pitchFamily="34" charset="-120"/>
+                <a:latin typeface="Pretendard SemiBold" pitchFamily="34" charset="0"/>
+                <a:ea typeface="Pretendard SemiBold" pitchFamily="34" charset="-127"/>
+                <a:cs typeface="Pretendard SemiBold" pitchFamily="34" charset="-120"/>
               </a:rPr>
               <a:t>베이직 · ② 추천 확인</a:t>
             </a:r>
@@ -20963,13 +20963,13 @@
               <a:buNone/>
             </a:pPr>
             <a:r>
-              <a:rPr lang="ko-KR" altLang="en-US" sz="2600" dirty="0">
+              <a:rPr lang="ko-KR" altLang="en-US" sz="2600" b="1" dirty="0">
                 <a:solidFill>
                   <a:srgbClr val="1F3B5C"/>
                 </a:solidFill>
-                <a:latin typeface="S-Core Dream 7 ExtraBold" pitchFamily="34" charset="0"/>
-                <a:ea typeface="S-Core Dream 7 ExtraBold" pitchFamily="34" charset="-127"/>
-                <a:cs typeface="S-Core Dream 7 ExtraBold" pitchFamily="34" charset="-120"/>
+                <a:latin typeface="Pretendard" pitchFamily="34" charset="0"/>
+                <a:ea typeface="Pretendard" pitchFamily="34" charset="-127"/>
+                <a:cs typeface="Pretendard" pitchFamily="34" charset="-120"/>
               </a:rPr>
               <a:t>② ★추천 확인하고 순서 정하기</a:t>
             </a:r>
@@ -21006,9 +21006,9 @@
                 <a:solidFill>
                   <a:srgbClr val="667385"/>
                 </a:solidFill>
-                <a:latin typeface="S-Core Dream 4 Regular" pitchFamily="34" charset="0"/>
-                <a:ea typeface="S-Core Dream 4 Regular" pitchFamily="34" charset="-127"/>
-                <a:cs typeface="S-Core Dream 4 Regular" pitchFamily="34" charset="-120"/>
+                <a:latin typeface="Pretendard" pitchFamily="34" charset="0"/>
+                <a:ea typeface="Pretendard" pitchFamily="34" charset="-127"/>
+                <a:cs typeface="Pretendard" pitchFamily="34" charset="-120"/>
               </a:rPr>
               <a:t>추천 5건이 미리 선택됩니다. 더하고 빼고, 끌어서 순서를 정하면 그 순서대로 보고서에 실립니다</a:t>
             </a:r>
@@ -21109,13 +21109,13 @@
               <a:buNone/>
             </a:pPr>
             <a:r>
-              <a:rPr lang="ko-KR" altLang="en-US" sz="1700" dirty="0">
+              <a:rPr lang="ko-KR" altLang="en-US" sz="1700" b="1" dirty="0">
                 <a:solidFill>
                   <a:srgbClr val="E8A33D"/>
                 </a:solidFill>
-                <a:latin typeface="S-Core Dream 7 ExtraBold" pitchFamily="34" charset="0"/>
-                <a:ea typeface="S-Core Dream 7 ExtraBold" pitchFamily="34" charset="-127"/>
-                <a:cs typeface="S-Core Dream 7 ExtraBold" pitchFamily="34" charset="-120"/>
+                <a:latin typeface="Pretendard" pitchFamily="34" charset="0"/>
+                <a:ea typeface="Pretendard" pitchFamily="34" charset="-127"/>
+                <a:cs typeface="Pretendard" pitchFamily="34" charset="-120"/>
               </a:rPr>
               <a:t>①</a:t>
             </a:r>
@@ -21170,13 +21170,13 @@
               <a:buNone/>
             </a:pPr>
             <a:r>
-              <a:rPr lang="ko-KR" altLang="en-US" sz="1700" dirty="0">
+              <a:rPr lang="ko-KR" altLang="en-US" sz="1700" b="1" dirty="0">
                 <a:solidFill>
                   <a:srgbClr val="E8A33D"/>
                 </a:solidFill>
-                <a:latin typeface="S-Core Dream 7 ExtraBold" pitchFamily="34" charset="0"/>
-                <a:ea typeface="S-Core Dream 7 ExtraBold" pitchFamily="34" charset="-127"/>
-                <a:cs typeface="S-Core Dream 7 ExtraBold" pitchFamily="34" charset="-120"/>
+                <a:latin typeface="Pretendard" pitchFamily="34" charset="0"/>
+                <a:ea typeface="Pretendard" pitchFamily="34" charset="-127"/>
+                <a:cs typeface="Pretendard" pitchFamily="34" charset="-120"/>
               </a:rPr>
               <a:t>②</a:t>
             </a:r>
@@ -21231,13 +21231,13 @@
               <a:buNone/>
             </a:pPr>
             <a:r>
-              <a:rPr lang="ko-KR" altLang="en-US" sz="1700" dirty="0">
+              <a:rPr lang="ko-KR" altLang="en-US" sz="1700" b="1" dirty="0">
                 <a:solidFill>
                   <a:srgbClr val="E8A33D"/>
                 </a:solidFill>
-                <a:latin typeface="S-Core Dream 7 ExtraBold" pitchFamily="34" charset="0"/>
-                <a:ea typeface="S-Core Dream 7 ExtraBold" pitchFamily="34" charset="-127"/>
-                <a:cs typeface="S-Core Dream 7 ExtraBold" pitchFamily="34" charset="-120"/>
+                <a:latin typeface="Pretendard" pitchFamily="34" charset="0"/>
+                <a:ea typeface="Pretendard" pitchFamily="34" charset="-127"/>
+                <a:cs typeface="Pretendard" pitchFamily="34" charset="-120"/>
               </a:rPr>
               <a:t>③</a:t>
             </a:r>
@@ -21292,13 +21292,13 @@
               <a:buNone/>
             </a:pPr>
             <a:r>
-              <a:rPr lang="ko-KR" altLang="en-US" sz="1700" dirty="0">
+              <a:rPr lang="ko-KR" altLang="en-US" sz="1700" b="1" dirty="0">
                 <a:solidFill>
                   <a:srgbClr val="E8A33D"/>
                 </a:solidFill>
-                <a:latin typeface="S-Core Dream 7 ExtraBold" pitchFamily="34" charset="0"/>
-                <a:ea typeface="S-Core Dream 7 ExtraBold" pitchFamily="34" charset="-127"/>
-                <a:cs typeface="S-Core Dream 7 ExtraBold" pitchFamily="34" charset="-120"/>
+                <a:latin typeface="Pretendard" pitchFamily="34" charset="0"/>
+                <a:ea typeface="Pretendard" pitchFamily="34" charset="-127"/>
+                <a:cs typeface="Pretendard" pitchFamily="34" charset="-120"/>
               </a:rPr>
               <a:t>④</a:t>
             </a:r>
@@ -21353,13 +21353,13 @@
               <a:buNone/>
             </a:pPr>
             <a:r>
-              <a:rPr lang="ko-KR" altLang="en-US" sz="1700" dirty="0">
+              <a:rPr lang="ko-KR" altLang="en-US" sz="1700" b="1" dirty="0">
                 <a:solidFill>
                   <a:srgbClr val="E8A33D"/>
                 </a:solidFill>
-                <a:latin typeface="S-Core Dream 7 ExtraBold" pitchFamily="34" charset="0"/>
-                <a:ea typeface="S-Core Dream 7 ExtraBold" pitchFamily="34" charset="-127"/>
-                <a:cs typeface="S-Core Dream 7 ExtraBold" pitchFamily="34" charset="-120"/>
+                <a:latin typeface="Pretendard" pitchFamily="34" charset="0"/>
+                <a:ea typeface="Pretendard" pitchFamily="34" charset="-127"/>
+                <a:cs typeface="Pretendard" pitchFamily="34" charset="-120"/>
               </a:rPr>
               <a:t>⑤</a:t>
             </a:r>
@@ -21414,13 +21414,13 @@
               <a:buNone/>
             </a:pPr>
             <a:r>
-              <a:rPr lang="ko-KR" altLang="en-US" sz="1700" dirty="0">
+              <a:rPr lang="ko-KR" altLang="en-US" sz="1700" b="1" dirty="0">
                 <a:solidFill>
                   <a:srgbClr val="E8A33D"/>
                 </a:solidFill>
-                <a:latin typeface="S-Core Dream 7 ExtraBold" pitchFamily="34" charset="0"/>
-                <a:ea typeface="S-Core Dream 7 ExtraBold" pitchFamily="34" charset="-127"/>
-                <a:cs typeface="S-Core Dream 7 ExtraBold" pitchFamily="34" charset="-120"/>
+                <a:latin typeface="Pretendard" pitchFamily="34" charset="0"/>
+                <a:ea typeface="Pretendard" pitchFamily="34" charset="-127"/>
+                <a:cs typeface="Pretendard" pitchFamily="34" charset="-120"/>
               </a:rPr>
               <a:t>⑥</a:t>
             </a:r>
@@ -21457,9 +21457,9 @@
                 <a:solidFill>
                   <a:srgbClr val="1F3B5C"/>
                 </a:solidFill>
-                <a:latin typeface="S-Core Dream 5 Medium" pitchFamily="34" charset="0"/>
-                <a:ea typeface="S-Core Dream 5 Medium" pitchFamily="34" charset="-127"/>
-                <a:cs typeface="S-Core Dream 5 Medium" pitchFamily="34" charset="-120"/>
+                <a:latin typeface="Pretendard SemiBold" pitchFamily="34" charset="0"/>
+                <a:ea typeface="Pretendard SemiBold" pitchFamily="34" charset="-127"/>
+                <a:cs typeface="Pretendard SemiBold" pitchFamily="34" charset="-120"/>
               </a:rPr>
               <a:t>① 선택 칸</a:t>
             </a:r>
@@ -21477,9 +21477,9 @@
                 <a:solidFill>
                   <a:srgbClr val="1E2A36"/>
                 </a:solidFill>
-                <a:latin typeface="S-Core Dream 4 Regular" pitchFamily="34" charset="0"/>
-                <a:ea typeface="S-Core Dream 4 Regular" pitchFamily="34" charset="-127"/>
-                <a:cs typeface="S-Core Dream 4 Regular" pitchFamily="34" charset="-120"/>
+                <a:latin typeface="Pretendard" pitchFamily="34" charset="0"/>
+                <a:ea typeface="Pretendard" pitchFamily="34" charset="-127"/>
+                <a:cs typeface="Pretendard" pitchFamily="34" charset="-120"/>
               </a:rPr>
               <a:t>누르면 넣고 빼기. ★는 앱 추천</a:t>
             </a:r>
@@ -21497,9 +21497,9 @@
                 <a:solidFill>
                   <a:srgbClr val="1F3B5C"/>
                 </a:solidFill>
-                <a:latin typeface="S-Core Dream 5 Medium" pitchFamily="34" charset="0"/>
-                <a:ea typeface="S-Core Dream 5 Medium" pitchFamily="34" charset="-127"/>
-                <a:cs typeface="S-Core Dream 5 Medium" pitchFamily="34" charset="-120"/>
+                <a:latin typeface="Pretendard SemiBold" pitchFamily="34" charset="0"/>
+                <a:ea typeface="Pretendard SemiBold" pitchFamily="34" charset="-127"/>
+                <a:cs typeface="Pretendard SemiBold" pitchFamily="34" charset="-120"/>
               </a:rPr>
               <a:t>② 순번</a:t>
             </a:r>
@@ -21517,9 +21517,9 @@
                 <a:solidFill>
                   <a:srgbClr val="1E2A36"/>
                 </a:solidFill>
-                <a:latin typeface="S-Core Dream 4 Regular" pitchFamily="34" charset="0"/>
-                <a:ea typeface="S-Core Dream 4 Regular" pitchFamily="34" charset="-127"/>
-                <a:cs typeface="S-Core Dream 4 Regular" pitchFamily="34" charset="-120"/>
+                <a:latin typeface="Pretendard" pitchFamily="34" charset="0"/>
+                <a:ea typeface="Pretendard" pitchFamily="34" charset="-127"/>
+                <a:cs typeface="Pretendard" pitchFamily="34" charset="-120"/>
               </a:rPr>
               <a:t>조회 때 매긴 고정 번호(정렬해도 그대로)</a:t>
             </a:r>
@@ -21537,9 +21537,9 @@
                 <a:solidFill>
                   <a:srgbClr val="1F3B5C"/>
                 </a:solidFill>
-                <a:latin typeface="S-Core Dream 5 Medium" pitchFamily="34" charset="0"/>
-                <a:ea typeface="S-Core Dream 5 Medium" pitchFamily="34" charset="-127"/>
-                <a:cs typeface="S-Core Dream 5 Medium" pitchFamily="34" charset="-120"/>
+                <a:latin typeface="Pretendard SemiBold" pitchFamily="34" charset="0"/>
+                <a:ea typeface="Pretendard SemiBold" pitchFamily="34" charset="-127"/>
+                <a:cs typeface="Pretendard SemiBold" pitchFamily="34" charset="-120"/>
               </a:rPr>
               <a:t>③ 끌어 놓기</a:t>
             </a:r>
@@ -21557,9 +21557,9 @@
                 <a:solidFill>
                   <a:srgbClr val="1E2A36"/>
                 </a:solidFill>
-                <a:latin typeface="S-Core Dream 4 Regular" pitchFamily="34" charset="0"/>
-                <a:ea typeface="S-Core Dream 4 Regular" pitchFamily="34" charset="-127"/>
-                <a:cs typeface="S-Core Dream 4 Regular" pitchFamily="34" charset="-120"/>
+                <a:latin typeface="Pretendard" pitchFamily="34" charset="0"/>
+                <a:ea typeface="Pretendard" pitchFamily="34" charset="-127"/>
+                <a:cs typeface="Pretendard" pitchFamily="34" charset="-120"/>
               </a:rPr>
               <a:t>제목 칸을 누른 채 위아래로 끌어 순서 변경</a:t>
             </a:r>
@@ -21577,9 +21577,9 @@
                 <a:solidFill>
                   <a:srgbClr val="1F3B5C"/>
                 </a:solidFill>
-                <a:latin typeface="S-Core Dream 5 Medium" pitchFamily="34" charset="0"/>
-                <a:ea typeface="S-Core Dream 5 Medium" pitchFamily="34" charset="-127"/>
-                <a:cs typeface="S-Core Dream 5 Medium" pitchFamily="34" charset="-120"/>
+                <a:latin typeface="Pretendard SemiBold" pitchFamily="34" charset="0"/>
+                <a:ea typeface="Pretendard SemiBold" pitchFamily="34" charset="-127"/>
+                <a:cs typeface="Pretendard SemiBold" pitchFamily="34" charset="-120"/>
               </a:rPr>
               <a:t>④ ▲ ▼</a:t>
             </a:r>
@@ -21597,9 +21597,9 @@
                 <a:solidFill>
                   <a:srgbClr val="1E2A36"/>
                 </a:solidFill>
-                <a:latin typeface="S-Core Dream 4 Regular" pitchFamily="34" charset="0"/>
-                <a:ea typeface="S-Core Dream 4 Regular" pitchFamily="34" charset="-127"/>
-                <a:cs typeface="S-Core Dream 4 Regular" pitchFamily="34" charset="-120"/>
+                <a:latin typeface="Pretendard" pitchFamily="34" charset="0"/>
+                <a:ea typeface="Pretendard" pitchFamily="34" charset="-127"/>
+                <a:cs typeface="Pretendard" pitchFamily="34" charset="-120"/>
               </a:rPr>
               <a:t>줄을 누른 뒤 한 칸씩 이동(Ctrl+↑↓)</a:t>
             </a:r>
@@ -21617,9 +21617,9 @@
                 <a:solidFill>
                   <a:srgbClr val="1F3B5C"/>
                 </a:solidFill>
-                <a:latin typeface="S-Core Dream 5 Medium" pitchFamily="34" charset="0"/>
-                <a:ea typeface="S-Core Dream 5 Medium" pitchFamily="34" charset="-127"/>
-                <a:cs typeface="S-Core Dream 5 Medium" pitchFamily="34" charset="-120"/>
+                <a:latin typeface="Pretendard SemiBold" pitchFamily="34" charset="0"/>
+                <a:ea typeface="Pretendard SemiBold" pitchFamily="34" charset="-127"/>
+                <a:cs typeface="Pretendard SemiBold" pitchFamily="34" charset="-120"/>
               </a:rPr>
               <a:t>⑤ 추천으로 되돌리기</a:t>
             </a:r>
@@ -21637,9 +21637,9 @@
                 <a:solidFill>
                   <a:srgbClr val="1E2A36"/>
                 </a:solidFill>
-                <a:latin typeface="S-Core Dream 4 Regular" pitchFamily="34" charset="0"/>
-                <a:ea typeface="S-Core Dream 4 Regular" pitchFamily="34" charset="-127"/>
-                <a:cs typeface="S-Core Dream 4 Regular" pitchFamily="34" charset="-120"/>
+                <a:latin typeface="Pretendard" pitchFamily="34" charset="0"/>
+                <a:ea typeface="Pretendard" pitchFamily="34" charset="-127"/>
+                <a:cs typeface="Pretendard" pitchFamily="34" charset="-120"/>
               </a:rPr>
               <a:t>고친 선택을 처음 추천대로</a:t>
             </a:r>
@@ -21657,9 +21657,9 @@
                 <a:solidFill>
                   <a:srgbClr val="1F3B5C"/>
                 </a:solidFill>
-                <a:latin typeface="S-Core Dream 5 Medium" pitchFamily="34" charset="0"/>
-                <a:ea typeface="S-Core Dream 5 Medium" pitchFamily="34" charset="-127"/>
-                <a:cs typeface="S-Core Dream 5 Medium" pitchFamily="34" charset="-120"/>
+                <a:latin typeface="Pretendard SemiBold" pitchFamily="34" charset="0"/>
+                <a:ea typeface="Pretendard SemiBold" pitchFamily="34" charset="-127"/>
+                <a:cs typeface="Pretendard SemiBold" pitchFamily="34" charset="-120"/>
               </a:rPr>
               <a:t>⑥ 기사 링크로 추가</a:t>
             </a:r>
@@ -21677,9 +21677,9 @@
                 <a:solidFill>
                   <a:srgbClr val="1E2A36"/>
                 </a:solidFill>
-                <a:latin typeface="S-Core Dream 4 Regular" pitchFamily="34" charset="0"/>
-                <a:ea typeface="S-Core Dream 4 Regular" pitchFamily="34" charset="-127"/>
-                <a:cs typeface="S-Core Dream 4 Regular" pitchFamily="34" charset="-120"/>
+                <a:latin typeface="Pretendard" pitchFamily="34" charset="0"/>
+                <a:ea typeface="Pretendard" pitchFamily="34" charset="-127"/>
+                <a:cs typeface="Pretendard" pitchFamily="34" charset="-120"/>
               </a:rPr>
               <a:t>검색에 없는 기사를 주소로 넣기</a:t>
             </a:r>
@@ -21764,13 +21764,13 @@
               <a:buNone/>
             </a:pPr>
             <a:r>
-              <a:rPr lang="ko-KR" altLang="en-US" sz="2000" dirty="0">
+              <a:rPr lang="ko-KR" altLang="en-US" sz="2000" b="1" dirty="0">
                 <a:solidFill>
                   <a:srgbClr val="FFFFFF"/>
                 </a:solidFill>
-                <a:latin typeface="S-Core Dream 7 ExtraBold" pitchFamily="34" charset="0"/>
-                <a:ea typeface="S-Core Dream 7 ExtraBold" pitchFamily="34" charset="-127"/>
-                <a:cs typeface="S-Core Dream 7 ExtraBold" pitchFamily="34" charset="-120"/>
+                <a:latin typeface="Pretendard" pitchFamily="34" charset="0"/>
+                <a:ea typeface="Pretendard" pitchFamily="34" charset="-127"/>
+                <a:cs typeface="Pretendard" pitchFamily="34" charset="-120"/>
               </a:rPr>
               <a:t>02</a:t>
             </a:r>
@@ -21807,9 +21807,9 @@
                 <a:solidFill>
                   <a:srgbClr val="2E7D8C"/>
                 </a:solidFill>
-                <a:latin typeface="S-Core Dream 5 Medium" pitchFamily="34" charset="0"/>
-                <a:ea typeface="S-Core Dream 5 Medium" pitchFamily="34" charset="-127"/>
-                <a:cs typeface="S-Core Dream 5 Medium" pitchFamily="34" charset="-120"/>
+                <a:latin typeface="Pretendard SemiBold" pitchFamily="34" charset="0"/>
+                <a:ea typeface="Pretendard SemiBold" pitchFamily="34" charset="-127"/>
+                <a:cs typeface="Pretendard SemiBold" pitchFamily="34" charset="-120"/>
               </a:rPr>
               <a:t>베이직 · ③ 보고서</a:t>
             </a:r>
@@ -21842,13 +21842,13 @@
               <a:buNone/>
             </a:pPr>
             <a:r>
-              <a:rPr lang="ko-KR" altLang="en-US" sz="2600" dirty="0">
+              <a:rPr lang="ko-KR" altLang="en-US" sz="2600" b="1" dirty="0">
                 <a:solidFill>
                   <a:srgbClr val="1F3B5C"/>
                 </a:solidFill>
-                <a:latin typeface="S-Core Dream 7 ExtraBold" pitchFamily="34" charset="0"/>
-                <a:ea typeface="S-Core Dream 7 ExtraBold" pitchFamily="34" charset="-127"/>
-                <a:cs typeface="S-Core Dream 7 ExtraBold" pitchFamily="34" charset="-120"/>
+                <a:latin typeface="Pretendard" pitchFamily="34" charset="0"/>
+                <a:ea typeface="Pretendard" pitchFamily="34" charset="-127"/>
+                <a:cs typeface="Pretendard" pitchFamily="34" charset="-120"/>
               </a:rPr>
               <a:t>③ HTML 보고서 열고 복사하기</a:t>
             </a:r>
@@ -21885,9 +21885,9 @@
                 <a:solidFill>
                   <a:srgbClr val="667385"/>
                 </a:solidFill>
-                <a:latin typeface="S-Core Dream 4 Regular" pitchFamily="34" charset="0"/>
-                <a:ea typeface="S-Core Dream 4 Regular" pitchFamily="34" charset="-127"/>
-                <a:cs typeface="S-Core Dream 4 Regular" pitchFamily="34" charset="-120"/>
+                <a:latin typeface="Pretendard" pitchFamily="34" charset="0"/>
+                <a:ea typeface="Pretendard" pitchFamily="34" charset="-127"/>
+                <a:cs typeface="Pretendard" pitchFamily="34" charset="-120"/>
               </a:rPr>
               <a:t>[③ HTML 보고서 열기]를 누르면 브라우저에 메일용 보고서가 열립니다</a:t>
             </a:r>
@@ -21988,13 +21988,13 @@
               <a:buNone/>
             </a:pPr>
             <a:r>
-              <a:rPr lang="ko-KR" altLang="en-US" sz="1700" dirty="0">
+              <a:rPr lang="ko-KR" altLang="en-US" sz="1700" b="1" dirty="0">
                 <a:solidFill>
                   <a:srgbClr val="E8A33D"/>
                 </a:solidFill>
-                <a:latin typeface="S-Core Dream 7 ExtraBold" pitchFamily="34" charset="0"/>
-                <a:ea typeface="S-Core Dream 7 ExtraBold" pitchFamily="34" charset="-127"/>
-                <a:cs typeface="S-Core Dream 7 ExtraBold" pitchFamily="34" charset="-120"/>
+                <a:latin typeface="Pretendard" pitchFamily="34" charset="0"/>
+                <a:ea typeface="Pretendard" pitchFamily="34" charset="-127"/>
+                <a:cs typeface="Pretendard" pitchFamily="34" charset="-120"/>
               </a:rPr>
               <a:t>①</a:t>
             </a:r>
@@ -22049,13 +22049,13 @@
               <a:buNone/>
             </a:pPr>
             <a:r>
-              <a:rPr lang="ko-KR" altLang="en-US" sz="1700" dirty="0">
+              <a:rPr lang="ko-KR" altLang="en-US" sz="1700" b="1" dirty="0">
                 <a:solidFill>
                   <a:srgbClr val="E8A33D"/>
                 </a:solidFill>
-                <a:latin typeface="S-Core Dream 7 ExtraBold" pitchFamily="34" charset="0"/>
-                <a:ea typeface="S-Core Dream 7 ExtraBold" pitchFamily="34" charset="-127"/>
-                <a:cs typeface="S-Core Dream 7 ExtraBold" pitchFamily="34" charset="-120"/>
+                <a:latin typeface="Pretendard" pitchFamily="34" charset="0"/>
+                <a:ea typeface="Pretendard" pitchFamily="34" charset="-127"/>
+                <a:cs typeface="Pretendard" pitchFamily="34" charset="-120"/>
               </a:rPr>
               <a:t>②</a:t>
             </a:r>
@@ -22110,13 +22110,13 @@
               <a:buNone/>
             </a:pPr>
             <a:r>
-              <a:rPr lang="ko-KR" altLang="en-US" sz="1700" dirty="0">
+              <a:rPr lang="ko-KR" altLang="en-US" sz="1700" b="1" dirty="0">
                 <a:solidFill>
                   <a:srgbClr val="E8A33D"/>
                 </a:solidFill>
-                <a:latin typeface="S-Core Dream 7 ExtraBold" pitchFamily="34" charset="0"/>
-                <a:ea typeface="S-Core Dream 7 ExtraBold" pitchFamily="34" charset="-127"/>
-                <a:cs typeface="S-Core Dream 7 ExtraBold" pitchFamily="34" charset="-120"/>
+                <a:latin typeface="Pretendard" pitchFamily="34" charset="0"/>
+                <a:ea typeface="Pretendard" pitchFamily="34" charset="-127"/>
+                <a:cs typeface="Pretendard" pitchFamily="34" charset="-120"/>
               </a:rPr>
               <a:t>③</a:t>
             </a:r>
@@ -22171,13 +22171,13 @@
               <a:buNone/>
             </a:pPr>
             <a:r>
-              <a:rPr lang="ko-KR" altLang="en-US" sz="1700" dirty="0">
+              <a:rPr lang="ko-KR" altLang="en-US" sz="1700" b="1" dirty="0">
                 <a:solidFill>
                   <a:srgbClr val="E8A33D"/>
                 </a:solidFill>
-                <a:latin typeface="S-Core Dream 7 ExtraBold" pitchFamily="34" charset="0"/>
-                <a:ea typeface="S-Core Dream 7 ExtraBold" pitchFamily="34" charset="-127"/>
-                <a:cs typeface="S-Core Dream 7 ExtraBold" pitchFamily="34" charset="-120"/>
+                <a:latin typeface="Pretendard" pitchFamily="34" charset="0"/>
+                <a:ea typeface="Pretendard" pitchFamily="34" charset="-127"/>
+                <a:cs typeface="Pretendard" pitchFamily="34" charset="-120"/>
               </a:rPr>
               <a:t>④</a:t>
             </a:r>
@@ -22214,9 +22214,9 @@
                 <a:solidFill>
                   <a:srgbClr val="1F3B5C"/>
                 </a:solidFill>
-                <a:latin typeface="S-Core Dream 5 Medium" pitchFamily="34" charset="0"/>
-                <a:ea typeface="S-Core Dream 5 Medium" pitchFamily="34" charset="-127"/>
-                <a:cs typeface="S-Core Dream 5 Medium" pitchFamily="34" charset="-120"/>
+                <a:latin typeface="Pretendard SemiBold" pitchFamily="34" charset="0"/>
+                <a:ea typeface="Pretendard SemiBold" pitchFamily="34" charset="-127"/>
+                <a:cs typeface="Pretendard SemiBold" pitchFamily="34" charset="-120"/>
               </a:rPr>
               <a:t>① 제목 복사</a:t>
             </a:r>
@@ -22234,9 +22234,9 @@
                 <a:solidFill>
                   <a:srgbClr val="1E2A36"/>
                 </a:solidFill>
-                <a:latin typeface="S-Core Dream 4 Regular" pitchFamily="34" charset="0"/>
-                <a:ea typeface="S-Core Dream 4 Regular" pitchFamily="34" charset="-127"/>
-                <a:cs typeface="S-Core Dream 4 Regular" pitchFamily="34" charset="-120"/>
+                <a:latin typeface="Pretendard" pitchFamily="34" charset="0"/>
+                <a:ea typeface="Pretendard" pitchFamily="34" charset="-127"/>
+                <a:cs typeface="Pretendard" pitchFamily="34" charset="-120"/>
               </a:rPr>
               <a:t>편지쓰기 '제목' 칸에 붙여넣기. 예: (261026)언론보도</a:t>
             </a:r>
@@ -22254,9 +22254,9 @@
                 <a:solidFill>
                   <a:srgbClr val="1F3B5C"/>
                 </a:solidFill>
-                <a:latin typeface="S-Core Dream 5 Medium" pitchFamily="34" charset="0"/>
-                <a:ea typeface="S-Core Dream 5 Medium" pitchFamily="34" charset="-127"/>
-                <a:cs typeface="S-Core Dream 5 Medium" pitchFamily="34" charset="-120"/>
+                <a:latin typeface="Pretendard SemiBold" pitchFamily="34" charset="0"/>
+                <a:ea typeface="Pretendard SemiBold" pitchFamily="34" charset="-127"/>
+                <a:cs typeface="Pretendard SemiBold" pitchFamily="34" charset="-120"/>
               </a:rPr>
               <a:t>② 본문 복사</a:t>
             </a:r>
@@ -22274,9 +22274,9 @@
                 <a:solidFill>
                   <a:srgbClr val="1E2A36"/>
                 </a:solidFill>
-                <a:latin typeface="S-Core Dream 4 Regular" pitchFamily="34" charset="0"/>
-                <a:ea typeface="S-Core Dream 4 Regular" pitchFamily="34" charset="-127"/>
-                <a:cs typeface="S-Core Dream 4 Regular" pitchFamily="34" charset="-120"/>
+                <a:latin typeface="Pretendard" pitchFamily="34" charset="0"/>
+                <a:ea typeface="Pretendard" pitchFamily="34" charset="-127"/>
+                <a:cs typeface="Pretendard" pitchFamily="34" charset="-120"/>
               </a:rPr>
               <a:t>본문 ①·② 중 하나를 골라 복사</a:t>
             </a:r>
@@ -22294,9 +22294,9 @@
                 <a:solidFill>
                   <a:srgbClr val="1F3B5C"/>
                 </a:solidFill>
-                <a:latin typeface="S-Core Dream 5 Medium" pitchFamily="34" charset="0"/>
-                <a:ea typeface="S-Core Dream 5 Medium" pitchFamily="34" charset="-127"/>
-                <a:cs typeface="S-Core Dream 5 Medium" pitchFamily="34" charset="-120"/>
+                <a:latin typeface="Pretendard SemiBold" pitchFamily="34" charset="0"/>
+                <a:ea typeface="Pretendard SemiBold" pitchFamily="34" charset="-127"/>
+                <a:cs typeface="Pretendard SemiBold" pitchFamily="34" charset="-120"/>
               </a:rPr>
               <a:t>③ 본문 ① 기존 양식</a:t>
             </a:r>
@@ -22314,9 +22314,9 @@
                 <a:solidFill>
                   <a:srgbClr val="1E2A36"/>
                 </a:solidFill>
-                <a:latin typeface="S-Core Dream 4 Regular" pitchFamily="34" charset="0"/>
-                <a:ea typeface="S-Core Dream 4 Regular" pitchFamily="34" charset="-127"/>
-                <a:cs typeface="S-Core Dream 4 Regular" pitchFamily="34" charset="-120"/>
+                <a:latin typeface="Pretendard" pitchFamily="34" charset="0"/>
+                <a:ea typeface="Pretendard" pitchFamily="34" charset="-127"/>
+                <a:cs typeface="Pretendard" pitchFamily="34" charset="-120"/>
               </a:rPr>
               <a:t>링크 걸린 기사 제목만, 표 순서대로</a:t>
             </a:r>
@@ -22334,9 +22334,9 @@
                 <a:solidFill>
                   <a:srgbClr val="1F3B5C"/>
                 </a:solidFill>
-                <a:latin typeface="S-Core Dream 5 Medium" pitchFamily="34" charset="0"/>
-                <a:ea typeface="S-Core Dream 5 Medium" pitchFamily="34" charset="-127"/>
-                <a:cs typeface="S-Core Dream 5 Medium" pitchFamily="34" charset="-120"/>
+                <a:latin typeface="Pretendard SemiBold" pitchFamily="34" charset="0"/>
+                <a:ea typeface="Pretendard SemiBold" pitchFamily="34" charset="-127"/>
+                <a:cs typeface="Pretendard SemiBold" pitchFamily="34" charset="-120"/>
               </a:rPr>
               <a:t>④ 본문 ② 분류 포함</a:t>
             </a:r>
@@ -22354,9 +22354,9 @@
                 <a:solidFill>
                   <a:srgbClr val="1E2A36"/>
                 </a:solidFill>
-                <a:latin typeface="S-Core Dream 4 Regular" pitchFamily="34" charset="0"/>
-                <a:ea typeface="S-Core Dream 4 Regular" pitchFamily="34" charset="-127"/>
-                <a:cs typeface="S-Core Dream 4 Regular" pitchFamily="34" charset="-120"/>
+                <a:latin typeface="Pretendard" pitchFamily="34" charset="0"/>
+                <a:ea typeface="Pretendard" pitchFamily="34" charset="-127"/>
+                <a:cs typeface="Pretendard" pitchFamily="34" charset="-120"/>
               </a:rPr>
               <a:t>분류·키워드별 묶음과 매체·날짜, AI 인사이트</a:t>
             </a:r>
@@ -22441,13 +22441,13 @@
               <a:buNone/>
             </a:pPr>
             <a:r>
-              <a:rPr lang="ko-KR" altLang="en-US" sz="2000" dirty="0">
+              <a:rPr lang="ko-KR" altLang="en-US" sz="2000" b="1" dirty="0">
                 <a:solidFill>
                   <a:srgbClr val="FFFFFF"/>
                 </a:solidFill>
-                <a:latin typeface="S-Core Dream 7 ExtraBold" pitchFamily="34" charset="0"/>
-                <a:ea typeface="S-Core Dream 7 ExtraBold" pitchFamily="34" charset="-127"/>
-                <a:cs typeface="S-Core Dream 7 ExtraBold" pitchFamily="34" charset="-120"/>
+                <a:latin typeface="Pretendard" pitchFamily="34" charset="0"/>
+                <a:ea typeface="Pretendard" pitchFamily="34" charset="-127"/>
+                <a:cs typeface="Pretendard" pitchFamily="34" charset="-120"/>
               </a:rPr>
               <a:t>02</a:t>
             </a:r>
@@ -22484,9 +22484,9 @@
                 <a:solidFill>
                   <a:srgbClr val="2E7D8C"/>
                 </a:solidFill>
-                <a:latin typeface="S-Core Dream 5 Medium" pitchFamily="34" charset="0"/>
-                <a:ea typeface="S-Core Dream 5 Medium" pitchFamily="34" charset="-127"/>
-                <a:cs typeface="S-Core Dream 5 Medium" pitchFamily="34" charset="-120"/>
+                <a:latin typeface="Pretendard SemiBold" pitchFamily="34" charset="0"/>
+                <a:ea typeface="Pretendard SemiBold" pitchFamily="34" charset="-127"/>
+                <a:cs typeface="Pretendard SemiBold" pitchFamily="34" charset="-120"/>
               </a:rPr>
               <a:t>베이직 · ③ 메일 보내기</a:t>
             </a:r>
@@ -22519,13 +22519,13 @@
               <a:buNone/>
             </a:pPr>
             <a:r>
-              <a:rPr lang="ko-KR" altLang="en-US" sz="2600" dirty="0">
+              <a:rPr lang="ko-KR" altLang="en-US" sz="2600" b="1" dirty="0">
                 <a:solidFill>
                   <a:srgbClr val="1F3B5C"/>
                 </a:solidFill>
-                <a:latin typeface="S-Core Dream 7 ExtraBold" pitchFamily="34" charset="0"/>
-                <a:ea typeface="S-Core Dream 7 ExtraBold" pitchFamily="34" charset="-127"/>
-                <a:cs typeface="S-Core Dream 7 ExtraBold" pitchFamily="34" charset="-120"/>
+                <a:latin typeface="Pretendard" pitchFamily="34" charset="0"/>
+                <a:ea typeface="Pretendard" pitchFamily="34" charset="-127"/>
+                <a:cs typeface="Pretendard" pitchFamily="34" charset="-120"/>
               </a:rPr>
               <a:t>그룹웨어 편지쓰기에 붙여넣기</a:t>
             </a:r>
@@ -22562,9 +22562,9 @@
                 <a:solidFill>
                   <a:srgbClr val="667385"/>
                 </a:solidFill>
-                <a:latin typeface="S-Core Dream 4 Regular" pitchFamily="34" charset="0"/>
-                <a:ea typeface="S-Core Dream 4 Regular" pitchFamily="34" charset="-127"/>
-                <a:cs typeface="S-Core Dream 4 Regular" pitchFamily="34" charset="-120"/>
+                <a:latin typeface="Pretendard" pitchFamily="34" charset="0"/>
+                <a:ea typeface="Pretendard" pitchFamily="34" charset="-127"/>
+                <a:cs typeface="Pretendard" pitchFamily="34" charset="-120"/>
               </a:rPr>
               <a:t>제목과 본문을 붙여 넣고 받는 사람을 지정해 보냅니다</a:t>
             </a:r>
@@ -22626,9 +22626,9 @@
                 <a:solidFill>
                   <a:srgbClr val="667385"/>
                 </a:solidFill>
-                <a:latin typeface="S-Core Dream 4 Regular" pitchFamily="34" charset="0"/>
-                <a:ea typeface="S-Core Dream 4 Regular" pitchFamily="34" charset="-127"/>
-                <a:cs typeface="S-Core Dream 4 Regular" pitchFamily="34" charset="-120"/>
+                <a:latin typeface="Pretendard" pitchFamily="34" charset="0"/>
+                <a:ea typeface="Pretendard" pitchFamily="34" charset="-127"/>
+                <a:cs typeface="Pretendard" pitchFamily="34" charset="-120"/>
               </a:rPr>
               <a:t>[화면 넣을 자리]</a:t>
             </a:r>
@@ -22643,9 +22643,9 @@
                 <a:solidFill>
                   <a:srgbClr val="667385"/>
                 </a:solidFill>
-                <a:latin typeface="S-Core Dream 4 Regular" pitchFamily="34" charset="0"/>
-                <a:ea typeface="S-Core Dream 4 Regular" pitchFamily="34" charset="-127"/>
-                <a:cs typeface="S-Core Dream 4 Regular" pitchFamily="34" charset="-120"/>
+                <a:latin typeface="Pretendard" pitchFamily="34" charset="0"/>
+                <a:ea typeface="Pretendard" pitchFamily="34" charset="-127"/>
+                <a:cs typeface="Pretendard" pitchFamily="34" charset="-120"/>
               </a:rPr>
               <a:t>그룹웨어 편지쓰기 화면</a:t>
             </a:r>
@@ -22660,9 +22660,9 @@
                 <a:solidFill>
                   <a:srgbClr val="667385"/>
                 </a:solidFill>
-                <a:latin typeface="S-Core Dream 4 Regular" pitchFamily="34" charset="0"/>
-                <a:ea typeface="S-Core Dream 4 Regular" pitchFamily="34" charset="-127"/>
-                <a:cs typeface="S-Core Dream 4 Regular" pitchFamily="34" charset="-120"/>
+                <a:latin typeface="Pretendard" pitchFamily="34" charset="0"/>
+                <a:ea typeface="Pretendard" pitchFamily="34" charset="-127"/>
+                <a:cs typeface="Pretendard" pitchFamily="34" charset="-120"/>
               </a:rPr>
               <a:t>(제목·본문에 붙여 넣은 모습)</a:t>
             </a:r>
@@ -22683,9 +22683,9 @@
                 <a:solidFill>
                   <a:srgbClr val="667385"/>
                 </a:solidFill>
-                <a:latin typeface="S-Core Dream 4 Regular" pitchFamily="34" charset="0"/>
-                <a:ea typeface="S-Core Dream 4 Regular" pitchFamily="34" charset="-127"/>
-                <a:cs typeface="S-Core Dream 4 Regular" pitchFamily="34" charset="-120"/>
+                <a:latin typeface="Pretendard" pitchFamily="34" charset="0"/>
+                <a:ea typeface="Pretendard" pitchFamily="34" charset="-127"/>
+                <a:cs typeface="Pretendard" pitchFamily="34" charset="-120"/>
               </a:rPr>
               <a:t>권장 크기 7.5 × 5.0in</a:t>
             </a:r>
@@ -22773,9 +22773,9 @@
                 <a:solidFill>
                   <a:srgbClr val="1F3B5C"/>
                 </a:solidFill>
-                <a:latin typeface="S-Core Dream 5 Medium" pitchFamily="34" charset="0"/>
-                <a:ea typeface="S-Core Dream 5 Medium" pitchFamily="34" charset="-127"/>
-                <a:cs typeface="S-Core Dream 5 Medium" pitchFamily="34" charset="-120"/>
+                <a:latin typeface="Pretendard SemiBold" pitchFamily="34" charset="0"/>
+                <a:ea typeface="Pretendard SemiBold" pitchFamily="34" charset="-127"/>
+                <a:cs typeface="Pretendard SemiBold" pitchFamily="34" charset="-120"/>
               </a:rPr>
               <a:t>붙여넣기 순서</a:t>
             </a:r>
@@ -22816,9 +22816,9 @@
                 <a:solidFill>
                   <a:srgbClr val="1E2A36"/>
                 </a:solidFill>
-                <a:latin typeface="S-Core Dream 4 Regular" pitchFamily="34" charset="0"/>
-                <a:ea typeface="S-Core Dream 4 Regular" pitchFamily="34" charset="-127"/>
-                <a:cs typeface="S-Core Dream 4 Regular" pitchFamily="34" charset="-120"/>
+                <a:latin typeface="Pretendard" pitchFamily="34" charset="0"/>
+                <a:ea typeface="Pretendard" pitchFamily="34" charset="-127"/>
+                <a:cs typeface="Pretendard" pitchFamily="34" charset="-120"/>
               </a:rPr>
               <a:t>보고서 [제목 복사] → 제목 칸 Ctrl+V</a:t>
             </a:r>
@@ -22837,9 +22837,9 @@
                 <a:solidFill>
                   <a:srgbClr val="1E2A36"/>
                 </a:solidFill>
-                <a:latin typeface="S-Core Dream 4 Regular" pitchFamily="34" charset="0"/>
-                <a:ea typeface="S-Core Dream 4 Regular" pitchFamily="34" charset="-127"/>
-                <a:cs typeface="S-Core Dream 4 Regular" pitchFamily="34" charset="-120"/>
+                <a:latin typeface="Pretendard" pitchFamily="34" charset="0"/>
+                <a:ea typeface="Pretendard" pitchFamily="34" charset="-127"/>
+                <a:cs typeface="Pretendard" pitchFamily="34" charset="-120"/>
               </a:rPr>
               <a:t>[본문 복사] → 본문 칸 Ctrl+V</a:t>
             </a:r>
@@ -22858,9 +22858,9 @@
                 <a:solidFill>
                   <a:srgbClr val="1E2A36"/>
                 </a:solidFill>
-                <a:latin typeface="S-Core Dream 4 Regular" pitchFamily="34" charset="0"/>
-                <a:ea typeface="S-Core Dream 4 Regular" pitchFamily="34" charset="-127"/>
-                <a:cs typeface="S-Core Dream 4 Regular" pitchFamily="34" charset="-120"/>
+                <a:latin typeface="Pretendard" pitchFamily="34" charset="0"/>
+                <a:ea typeface="Pretendard" pitchFamily="34" charset="-127"/>
+                <a:cs typeface="Pretendard" pitchFamily="34" charset="-120"/>
               </a:rPr>
               <a:t>받는 사람 지정 → 보내기</a:t>
             </a:r>
@@ -22948,9 +22948,9 @@
                 <a:solidFill>
                   <a:srgbClr val="1F3B5C"/>
                 </a:solidFill>
-                <a:latin typeface="S-Core Dream 5 Medium" pitchFamily="34" charset="0"/>
-                <a:ea typeface="S-Core Dream 5 Medium" pitchFamily="34" charset="-127"/>
-                <a:cs typeface="S-Core Dream 5 Medium" pitchFamily="34" charset="-120"/>
+                <a:latin typeface="Pretendard SemiBold" pitchFamily="34" charset="0"/>
+                <a:ea typeface="Pretendard SemiBold" pitchFamily="34" charset="-127"/>
+                <a:cs typeface="Pretendard SemiBold" pitchFamily="34" charset="-120"/>
               </a:rPr>
               <a:t>보낸 뒤 꼭</a:t>
             </a:r>
@@ -22991,9 +22991,9 @@
                 <a:solidFill>
                   <a:srgbClr val="1E2A36"/>
                 </a:solidFill>
-                <a:latin typeface="S-Core Dream 4 Regular" pitchFamily="34" charset="0"/>
-                <a:ea typeface="S-Core Dream 4 Regular" pitchFamily="34" charset="-127"/>
-                <a:cs typeface="S-Core Dream 4 Regular" pitchFamily="34" charset="-120"/>
+                <a:latin typeface="Pretendard" pitchFamily="34" charset="0"/>
+                <a:ea typeface="Pretendard" pitchFamily="34" charset="-127"/>
+                <a:cs typeface="Pretendard" pitchFamily="34" charset="-120"/>
               </a:rPr>
               <a:t>앱으로 돌아와 [④ 보고 완료로 기록]</a:t>
             </a:r>
@@ -23012,9 +23012,9 @@
                 <a:solidFill>
                   <a:srgbClr val="1E2A36"/>
                 </a:solidFill>
-                <a:latin typeface="S-Core Dream 4 Regular" pitchFamily="34" charset="0"/>
-                <a:ea typeface="S-Core Dream 4 Regular" pitchFamily="34" charset="-127"/>
-                <a:cs typeface="S-Core Dream 4 Regular" pitchFamily="34" charset="-120"/>
+                <a:latin typeface="Pretendard" pitchFamily="34" charset="0"/>
+                <a:ea typeface="Pretendard" pitchFamily="34" charset="-127"/>
+                <a:cs typeface="Pretendard" pitchFamily="34" charset="-120"/>
               </a:rPr>
               <a:t>기록해야 다음 조회에서 빠집니다</a:t>
             </a:r>
@@ -23073,7 +23073,7 @@
     </a:clrScheme>
     <a:fontScheme name="Office">
       <a:majorFont>
-        <a:latin typeface="S-Core Dream 7 ExtraBold"/>
+        <a:latin typeface="Pretendard"/>
         <a:ea typeface=""/>
         <a:cs typeface=""/>
         <a:font script="Jpan" typeface="游ゴシック Light"/>
@@ -23125,7 +23125,7 @@
         <a:font script="Tfng" typeface="Ebrima"/>
       </a:majorFont>
       <a:minorFont>
-        <a:latin typeface="S-Core Dream 4 Regular"/>
+        <a:latin typeface="Pretendard"/>
         <a:ea typeface=""/>
         <a:cs typeface=""/>
         <a:font script="Jpan" typeface="游ゴシック"/>
